--- a/video/slide-video-ai.pptx
+++ b/video/slide-video-ai.pptx
@@ -12,9 +12,15 @@
     <p:sldId id="260" r:id="rId6"/>
     <p:sldId id="261" r:id="rId7"/>
     <p:sldId id="262" r:id="rId8"/>
+    <p:sldId id="263" r:id="rId9"/>
+    <p:sldId id="264" r:id="rId10"/>
+    <p:sldId id="265" r:id="rId11"/>
+    <p:sldId id="266" r:id="rId12"/>
+    <p:sldId id="267" r:id="rId13"/>
+    <p:sldId id="268" r:id="rId14"/>
   </p:sldIdLst>
   <p:notesMasterIdLst>
-    <p:notesMasterId r:id="rId9"/>
+    <p:notesMasterId r:id="rId15"/>
   </p:notesMasterIdLst>
   <p:sldSz cx="9144000" cy="5143500"/>
   <p:notesSz cx="5143500" cy="9144000"/>
@@ -550,6 +556,358 @@
 </p:notes>
 </file>
 
+<file path=ppt/notesSlides/notesSlide10.xml><?xml version="1.0" encoding="utf-8"?>
+<p:notes xmlns:a="http://schemas.openxmlformats.org/drawingml/2006/main" xmlns:r="http://schemas.openxmlformats.org/officeDocument/2006/relationships" xmlns:p="http://schemas.openxmlformats.org/presentationml/2006/main">
+  <p:cSld>
+    <p:spTree>
+      <p:nvGrpSpPr>
+        <p:cNvPr id="1" name=""/>
+        <p:cNvGrpSpPr/>
+        <p:nvPr/>
+      </p:nvGrpSpPr>
+      <p:grpSpPr>
+        <a:xfrm>
+          <a:off x="0" y="0"/>
+          <a:ext cx="0" cy="0"/>
+          <a:chOff x="0" y="0"/>
+          <a:chExt cx="0" cy="0"/>
+        </a:xfrm>
+      </p:grpSpPr>
+      <p:sp>
+        <p:nvSpPr>
+          <p:cNvPr id="2" name="Slide Image Placeholder 1"/>
+          <p:cNvSpPr>
+            <a:spLocks noGrp="1" noRot="1" noChangeAspect="1"/>
+          </p:cNvSpPr>
+          <p:nvPr>
+            <p:ph type="sldImg"/>
+          </p:nvPr>
+        </p:nvSpPr>
+        <p:spPr/>
+      </p:sp>
+      <p:sp>
+        <p:nvSpPr>
+          <p:cNvPr id="3" name="Notes Placeholder 2"/>
+          <p:cNvSpPr>
+            <a:spLocks noGrp="1"/>
+          </p:cNvSpPr>
+          <p:nvPr>
+            <p:ph type="body" idx="1"/>
+          </p:nvPr>
+        </p:nvSpPr>
+        <p:spPr/>
+        <p:txBody>
+          <a:bodyPr/>
+          <a:lstStyle/>
+          <a:p>
+            <a:r>
+              <a:rPr lang="en-US" dirty="0"/>
+              <a:t/>
+            </a:r>
+            <a:endParaRPr lang="en-US" dirty="0"/>
+          </a:p>
+        </p:txBody>
+      </p:sp>
+      <p:sp>
+        <p:nvSpPr>
+          <p:cNvPr id="4" name="Slide Number Placeholder 3"/>
+          <p:cNvSpPr>
+            <a:spLocks noGrp="1"/>
+          </p:cNvSpPr>
+          <p:nvPr>
+            <p:ph type="sldNum" sz="quarter" idx="10"/>
+          </p:nvPr>
+        </p:nvSpPr>
+        <p:spPr/>
+        <p:txBody>
+          <a:bodyPr/>
+          <a:lstStyle/>
+          <a:p>
+            <a:fld id="{F7021451-1387-4CA6-816F-3879F97B5CBC}" type="slidenum">
+              <a:rPr lang="en-US"/>
+              <a:t>10</a:t>
+            </a:fld>
+            <a:endParaRPr lang="en-US"/>
+          </a:p>
+        </p:txBody>
+      </p:sp>
+    </p:spTree>
+    <p:extLst>
+      <p:ext uri="{BB962C8B-B14F-4D97-AF65-F5344CB8AC3E}">
+        <p14:creationId xmlns:p14="http://schemas.microsoft.com/office/powerpoint/2010/main" val="1024086991"/>
+      </p:ext>
+    </p:extLst>
+  </p:cSld>
+  <p:clrMapOvr>
+    <a:masterClrMapping/>
+  </p:clrMapOvr>
+</p:notes>
+</file>
+
+<file path=ppt/notesSlides/notesSlide11.xml><?xml version="1.0" encoding="utf-8"?>
+<p:notes xmlns:a="http://schemas.openxmlformats.org/drawingml/2006/main" xmlns:r="http://schemas.openxmlformats.org/officeDocument/2006/relationships" xmlns:p="http://schemas.openxmlformats.org/presentationml/2006/main">
+  <p:cSld>
+    <p:spTree>
+      <p:nvGrpSpPr>
+        <p:cNvPr id="1" name=""/>
+        <p:cNvGrpSpPr/>
+        <p:nvPr/>
+      </p:nvGrpSpPr>
+      <p:grpSpPr>
+        <a:xfrm>
+          <a:off x="0" y="0"/>
+          <a:ext cx="0" cy="0"/>
+          <a:chOff x="0" y="0"/>
+          <a:chExt cx="0" cy="0"/>
+        </a:xfrm>
+      </p:grpSpPr>
+      <p:sp>
+        <p:nvSpPr>
+          <p:cNvPr id="2" name="Slide Image Placeholder 1"/>
+          <p:cNvSpPr>
+            <a:spLocks noGrp="1" noRot="1" noChangeAspect="1"/>
+          </p:cNvSpPr>
+          <p:nvPr>
+            <p:ph type="sldImg"/>
+          </p:nvPr>
+        </p:nvSpPr>
+        <p:spPr/>
+      </p:sp>
+      <p:sp>
+        <p:nvSpPr>
+          <p:cNvPr id="3" name="Notes Placeholder 2"/>
+          <p:cNvSpPr>
+            <a:spLocks noGrp="1"/>
+          </p:cNvSpPr>
+          <p:nvPr>
+            <p:ph type="body" idx="1"/>
+          </p:nvPr>
+        </p:nvSpPr>
+        <p:spPr/>
+        <p:txBody>
+          <a:bodyPr/>
+          <a:lstStyle/>
+          <a:p>
+            <a:r>
+              <a:rPr lang="en-US" dirty="0"/>
+              <a:t/>
+            </a:r>
+            <a:endParaRPr lang="en-US" dirty="0"/>
+          </a:p>
+        </p:txBody>
+      </p:sp>
+      <p:sp>
+        <p:nvSpPr>
+          <p:cNvPr id="4" name="Slide Number Placeholder 3"/>
+          <p:cNvSpPr>
+            <a:spLocks noGrp="1"/>
+          </p:cNvSpPr>
+          <p:nvPr>
+            <p:ph type="sldNum" sz="quarter" idx="10"/>
+          </p:nvPr>
+        </p:nvSpPr>
+        <p:spPr/>
+        <p:txBody>
+          <a:bodyPr/>
+          <a:lstStyle/>
+          <a:p>
+            <a:fld id="{F7021451-1387-4CA6-816F-3879F97B5CBC}" type="slidenum">
+              <a:rPr lang="en-US"/>
+              <a:t>11</a:t>
+            </a:fld>
+            <a:endParaRPr lang="en-US"/>
+          </a:p>
+        </p:txBody>
+      </p:sp>
+    </p:spTree>
+    <p:extLst>
+      <p:ext uri="{BB962C8B-B14F-4D97-AF65-F5344CB8AC3E}">
+        <p14:creationId xmlns:p14="http://schemas.microsoft.com/office/powerpoint/2010/main" val="1024086991"/>
+      </p:ext>
+    </p:extLst>
+  </p:cSld>
+  <p:clrMapOvr>
+    <a:masterClrMapping/>
+  </p:clrMapOvr>
+</p:notes>
+</file>
+
+<file path=ppt/notesSlides/notesSlide12.xml><?xml version="1.0" encoding="utf-8"?>
+<p:notes xmlns:a="http://schemas.openxmlformats.org/drawingml/2006/main" xmlns:r="http://schemas.openxmlformats.org/officeDocument/2006/relationships" xmlns:p="http://schemas.openxmlformats.org/presentationml/2006/main">
+  <p:cSld>
+    <p:spTree>
+      <p:nvGrpSpPr>
+        <p:cNvPr id="1" name=""/>
+        <p:cNvGrpSpPr/>
+        <p:nvPr/>
+      </p:nvGrpSpPr>
+      <p:grpSpPr>
+        <a:xfrm>
+          <a:off x="0" y="0"/>
+          <a:ext cx="0" cy="0"/>
+          <a:chOff x="0" y="0"/>
+          <a:chExt cx="0" cy="0"/>
+        </a:xfrm>
+      </p:grpSpPr>
+      <p:sp>
+        <p:nvSpPr>
+          <p:cNvPr id="2" name="Slide Image Placeholder 1"/>
+          <p:cNvSpPr>
+            <a:spLocks noGrp="1" noRot="1" noChangeAspect="1"/>
+          </p:cNvSpPr>
+          <p:nvPr>
+            <p:ph type="sldImg"/>
+          </p:nvPr>
+        </p:nvSpPr>
+        <p:spPr/>
+      </p:sp>
+      <p:sp>
+        <p:nvSpPr>
+          <p:cNvPr id="3" name="Notes Placeholder 2"/>
+          <p:cNvSpPr>
+            <a:spLocks noGrp="1"/>
+          </p:cNvSpPr>
+          <p:nvPr>
+            <p:ph type="body" idx="1"/>
+          </p:nvPr>
+        </p:nvSpPr>
+        <p:spPr/>
+        <p:txBody>
+          <a:bodyPr/>
+          <a:lstStyle/>
+          <a:p>
+            <a:r>
+              <a:rPr lang="en-US" dirty="0"/>
+              <a:t/>
+            </a:r>
+            <a:endParaRPr lang="en-US" dirty="0"/>
+          </a:p>
+        </p:txBody>
+      </p:sp>
+      <p:sp>
+        <p:nvSpPr>
+          <p:cNvPr id="4" name="Slide Number Placeholder 3"/>
+          <p:cNvSpPr>
+            <a:spLocks noGrp="1"/>
+          </p:cNvSpPr>
+          <p:nvPr>
+            <p:ph type="sldNum" sz="quarter" idx="10"/>
+          </p:nvPr>
+        </p:nvSpPr>
+        <p:spPr/>
+        <p:txBody>
+          <a:bodyPr/>
+          <a:lstStyle/>
+          <a:p>
+            <a:fld id="{F7021451-1387-4CA6-816F-3879F97B5CBC}" type="slidenum">
+              <a:rPr lang="en-US"/>
+              <a:t>12</a:t>
+            </a:fld>
+            <a:endParaRPr lang="en-US"/>
+          </a:p>
+        </p:txBody>
+      </p:sp>
+    </p:spTree>
+    <p:extLst>
+      <p:ext uri="{BB962C8B-B14F-4D97-AF65-F5344CB8AC3E}">
+        <p14:creationId xmlns:p14="http://schemas.microsoft.com/office/powerpoint/2010/main" val="1024086991"/>
+      </p:ext>
+    </p:extLst>
+  </p:cSld>
+  <p:clrMapOvr>
+    <a:masterClrMapping/>
+  </p:clrMapOvr>
+</p:notes>
+</file>
+
+<file path=ppt/notesSlides/notesSlide13.xml><?xml version="1.0" encoding="utf-8"?>
+<p:notes xmlns:a="http://schemas.openxmlformats.org/drawingml/2006/main" xmlns:r="http://schemas.openxmlformats.org/officeDocument/2006/relationships" xmlns:p="http://schemas.openxmlformats.org/presentationml/2006/main">
+  <p:cSld>
+    <p:spTree>
+      <p:nvGrpSpPr>
+        <p:cNvPr id="1" name=""/>
+        <p:cNvGrpSpPr/>
+        <p:nvPr/>
+      </p:nvGrpSpPr>
+      <p:grpSpPr>
+        <a:xfrm>
+          <a:off x="0" y="0"/>
+          <a:ext cx="0" cy="0"/>
+          <a:chOff x="0" y="0"/>
+          <a:chExt cx="0" cy="0"/>
+        </a:xfrm>
+      </p:grpSpPr>
+      <p:sp>
+        <p:nvSpPr>
+          <p:cNvPr id="2" name="Slide Image Placeholder 1"/>
+          <p:cNvSpPr>
+            <a:spLocks noGrp="1" noRot="1" noChangeAspect="1"/>
+          </p:cNvSpPr>
+          <p:nvPr>
+            <p:ph type="sldImg"/>
+          </p:nvPr>
+        </p:nvSpPr>
+        <p:spPr/>
+      </p:sp>
+      <p:sp>
+        <p:nvSpPr>
+          <p:cNvPr id="3" name="Notes Placeholder 2"/>
+          <p:cNvSpPr>
+            <a:spLocks noGrp="1"/>
+          </p:cNvSpPr>
+          <p:nvPr>
+            <p:ph type="body" idx="1"/>
+          </p:nvPr>
+        </p:nvSpPr>
+        <p:spPr/>
+        <p:txBody>
+          <a:bodyPr/>
+          <a:lstStyle/>
+          <a:p>
+            <a:r>
+              <a:rPr lang="en-US" dirty="0"/>
+              <a:t/>
+            </a:r>
+            <a:endParaRPr lang="en-US" dirty="0"/>
+          </a:p>
+        </p:txBody>
+      </p:sp>
+      <p:sp>
+        <p:nvSpPr>
+          <p:cNvPr id="4" name="Slide Number Placeholder 3"/>
+          <p:cNvSpPr>
+            <a:spLocks noGrp="1"/>
+          </p:cNvSpPr>
+          <p:nvPr>
+            <p:ph type="sldNum" sz="quarter" idx="10"/>
+          </p:nvPr>
+        </p:nvSpPr>
+        <p:spPr/>
+        <p:txBody>
+          <a:bodyPr/>
+          <a:lstStyle/>
+          <a:p>
+            <a:fld id="{F7021451-1387-4CA6-816F-3879F97B5CBC}" type="slidenum">
+              <a:rPr lang="en-US"/>
+              <a:t>13</a:t>
+            </a:fld>
+            <a:endParaRPr lang="en-US"/>
+          </a:p>
+        </p:txBody>
+      </p:sp>
+    </p:spTree>
+    <p:extLst>
+      <p:ext uri="{BB962C8B-B14F-4D97-AF65-F5344CB8AC3E}">
+        <p14:creationId xmlns:p14="http://schemas.microsoft.com/office/powerpoint/2010/main" val="1024086991"/>
+      </p:ext>
+    </p:extLst>
+  </p:cSld>
+  <p:clrMapOvr>
+    <a:masterClrMapping/>
+  </p:clrMapOvr>
+</p:notes>
+</file>
+
 <file path=ppt/notesSlides/notesSlide2.xml><?xml version="1.0" encoding="utf-8"?>
 <p:notes xmlns:a="http://schemas.openxmlformats.org/drawingml/2006/main" xmlns:r="http://schemas.openxmlformats.org/officeDocument/2006/relationships" xmlns:p="http://schemas.openxmlformats.org/presentationml/2006/main">
   <p:cSld>
@@ -1060,6 +1418,182 @@
             <a:fld id="{F7021451-1387-4CA6-816F-3879F97B5CBC}" type="slidenum">
               <a:rPr lang="en-US"/>
               <a:t>7</a:t>
+            </a:fld>
+            <a:endParaRPr lang="en-US"/>
+          </a:p>
+        </p:txBody>
+      </p:sp>
+    </p:spTree>
+    <p:extLst>
+      <p:ext uri="{BB962C8B-B14F-4D97-AF65-F5344CB8AC3E}">
+        <p14:creationId xmlns:p14="http://schemas.microsoft.com/office/powerpoint/2010/main" val="1024086991"/>
+      </p:ext>
+    </p:extLst>
+  </p:cSld>
+  <p:clrMapOvr>
+    <a:masterClrMapping/>
+  </p:clrMapOvr>
+</p:notes>
+</file>
+
+<file path=ppt/notesSlides/notesSlide8.xml><?xml version="1.0" encoding="utf-8"?>
+<p:notes xmlns:a="http://schemas.openxmlformats.org/drawingml/2006/main" xmlns:r="http://schemas.openxmlformats.org/officeDocument/2006/relationships" xmlns:p="http://schemas.openxmlformats.org/presentationml/2006/main">
+  <p:cSld>
+    <p:spTree>
+      <p:nvGrpSpPr>
+        <p:cNvPr id="1" name=""/>
+        <p:cNvGrpSpPr/>
+        <p:nvPr/>
+      </p:nvGrpSpPr>
+      <p:grpSpPr>
+        <a:xfrm>
+          <a:off x="0" y="0"/>
+          <a:ext cx="0" cy="0"/>
+          <a:chOff x="0" y="0"/>
+          <a:chExt cx="0" cy="0"/>
+        </a:xfrm>
+      </p:grpSpPr>
+      <p:sp>
+        <p:nvSpPr>
+          <p:cNvPr id="2" name="Slide Image Placeholder 1"/>
+          <p:cNvSpPr>
+            <a:spLocks noGrp="1" noRot="1" noChangeAspect="1"/>
+          </p:cNvSpPr>
+          <p:nvPr>
+            <p:ph type="sldImg"/>
+          </p:nvPr>
+        </p:nvSpPr>
+        <p:spPr/>
+      </p:sp>
+      <p:sp>
+        <p:nvSpPr>
+          <p:cNvPr id="3" name="Notes Placeholder 2"/>
+          <p:cNvSpPr>
+            <a:spLocks noGrp="1"/>
+          </p:cNvSpPr>
+          <p:nvPr>
+            <p:ph type="body" idx="1"/>
+          </p:nvPr>
+        </p:nvSpPr>
+        <p:spPr/>
+        <p:txBody>
+          <a:bodyPr/>
+          <a:lstStyle/>
+          <a:p>
+            <a:r>
+              <a:rPr lang="en-US" dirty="0"/>
+              <a:t/>
+            </a:r>
+            <a:endParaRPr lang="en-US" dirty="0"/>
+          </a:p>
+        </p:txBody>
+      </p:sp>
+      <p:sp>
+        <p:nvSpPr>
+          <p:cNvPr id="4" name="Slide Number Placeholder 3"/>
+          <p:cNvSpPr>
+            <a:spLocks noGrp="1"/>
+          </p:cNvSpPr>
+          <p:nvPr>
+            <p:ph type="sldNum" sz="quarter" idx="10"/>
+          </p:nvPr>
+        </p:nvSpPr>
+        <p:spPr/>
+        <p:txBody>
+          <a:bodyPr/>
+          <a:lstStyle/>
+          <a:p>
+            <a:fld id="{F7021451-1387-4CA6-816F-3879F97B5CBC}" type="slidenum">
+              <a:rPr lang="en-US"/>
+              <a:t>8</a:t>
+            </a:fld>
+            <a:endParaRPr lang="en-US"/>
+          </a:p>
+        </p:txBody>
+      </p:sp>
+    </p:spTree>
+    <p:extLst>
+      <p:ext uri="{BB962C8B-B14F-4D97-AF65-F5344CB8AC3E}">
+        <p14:creationId xmlns:p14="http://schemas.microsoft.com/office/powerpoint/2010/main" val="1024086991"/>
+      </p:ext>
+    </p:extLst>
+  </p:cSld>
+  <p:clrMapOvr>
+    <a:masterClrMapping/>
+  </p:clrMapOvr>
+</p:notes>
+</file>
+
+<file path=ppt/notesSlides/notesSlide9.xml><?xml version="1.0" encoding="utf-8"?>
+<p:notes xmlns:a="http://schemas.openxmlformats.org/drawingml/2006/main" xmlns:r="http://schemas.openxmlformats.org/officeDocument/2006/relationships" xmlns:p="http://schemas.openxmlformats.org/presentationml/2006/main">
+  <p:cSld>
+    <p:spTree>
+      <p:nvGrpSpPr>
+        <p:cNvPr id="1" name=""/>
+        <p:cNvGrpSpPr/>
+        <p:nvPr/>
+      </p:nvGrpSpPr>
+      <p:grpSpPr>
+        <a:xfrm>
+          <a:off x="0" y="0"/>
+          <a:ext cx="0" cy="0"/>
+          <a:chOff x="0" y="0"/>
+          <a:chExt cx="0" cy="0"/>
+        </a:xfrm>
+      </p:grpSpPr>
+      <p:sp>
+        <p:nvSpPr>
+          <p:cNvPr id="2" name="Slide Image Placeholder 1"/>
+          <p:cNvSpPr>
+            <a:spLocks noGrp="1" noRot="1" noChangeAspect="1"/>
+          </p:cNvSpPr>
+          <p:nvPr>
+            <p:ph type="sldImg"/>
+          </p:nvPr>
+        </p:nvSpPr>
+        <p:spPr/>
+      </p:sp>
+      <p:sp>
+        <p:nvSpPr>
+          <p:cNvPr id="3" name="Notes Placeholder 2"/>
+          <p:cNvSpPr>
+            <a:spLocks noGrp="1"/>
+          </p:cNvSpPr>
+          <p:nvPr>
+            <p:ph type="body" idx="1"/>
+          </p:nvPr>
+        </p:nvSpPr>
+        <p:spPr/>
+        <p:txBody>
+          <a:bodyPr/>
+          <a:lstStyle/>
+          <a:p>
+            <a:r>
+              <a:rPr lang="en-US" dirty="0"/>
+              <a:t/>
+            </a:r>
+            <a:endParaRPr lang="en-US" dirty="0"/>
+          </a:p>
+        </p:txBody>
+      </p:sp>
+      <p:sp>
+        <p:nvSpPr>
+          <p:cNvPr id="4" name="Slide Number Placeholder 3"/>
+          <p:cNvSpPr>
+            <a:spLocks noGrp="1"/>
+          </p:cNvSpPr>
+          <p:nvPr>
+            <p:ph type="sldNum" sz="quarter" idx="10"/>
+          </p:nvPr>
+        </p:nvSpPr>
+        <p:spPr/>
+        <p:txBody>
+          <a:bodyPr/>
+          <a:lstStyle/>
+          <a:p>
+            <a:fld id="{F7021451-1387-4CA6-816F-3879F97B5CBC}" type="slidenum">
+              <a:rPr lang="en-US"/>
+              <a:t>9</a:t>
             </a:fld>
             <a:endParaRPr lang="en-US"/>
           </a:p>
@@ -1898,6 +2432,2470 @@
 </p:sld>
 </file>
 
+<file path=ppt/slides/slide10.xml><?xml version="1.0" encoding="utf-8"?>
+<p:sld xmlns:a="http://schemas.openxmlformats.org/drawingml/2006/main" xmlns:r="http://schemas.openxmlformats.org/officeDocument/2006/relationships" xmlns:p="http://schemas.openxmlformats.org/presentationml/2006/main">
+  <p:cSld name="Slide 10">
+    <p:bg>
+      <p:bgPr>
+        <a:solidFill>
+          <a:srgbClr val="0B1226"/>
+        </a:solidFill>
+      </p:bgPr>
+    </p:bg>
+    <p:spTree>
+      <p:nvGrpSpPr>
+        <p:cNvPr id="1" name=""/>
+        <p:cNvGrpSpPr/>
+        <p:nvPr/>
+      </p:nvGrpSpPr>
+      <p:grpSpPr>
+        <a:xfrm>
+          <a:off x="0" y="0"/>
+          <a:ext cx="0" cy="0"/>
+          <a:chOff x="0" y="0"/>
+          <a:chExt cx="0" cy="0"/>
+        </a:xfrm>
+      </p:grpSpPr>
+      <p:sp>
+        <p:nvSpPr>
+          <p:cNvPr id="2" name="Text 0"/>
+          <p:cNvSpPr/>
+          <p:nvPr/>
+        </p:nvSpPr>
+        <p:spPr>
+          <a:xfrm>
+            <a:off x="640080" y="365760"/>
+            <a:ext cx="8229600" cy="274320"/>
+          </a:xfrm>
+          <a:prstGeom prst="rect">
+            <a:avLst/>
+          </a:prstGeom>
+          <a:noFill/>
+          <a:ln/>
+        </p:spPr>
+        <p:txBody>
+          <a:bodyPr wrap="square" lIns="0" tIns="0" rIns="0" bIns="0" rtlCol="0" anchor="ctr"/>
+          <a:lstStyle/>
+          <a:p>
+            <a:pPr indent="0" marL="0">
+              <a:buNone/>
+            </a:pPr>
+            <a:r>
+              <a:rPr lang="en-US" sz="1100" b="1" spc="200" kern="0" dirty="0">
+                <a:solidFill>
+                  <a:srgbClr val="2BD9E5"/>
+                </a:solidFill>
+                <a:latin typeface="Arial" pitchFamily="34" charset="0"/>
+                <a:ea typeface="Arial" pitchFamily="34" charset="-122"/>
+                <a:cs typeface="Arial" pitchFamily="34" charset="-120"/>
+              </a:rPr>
+              <a:t>IL MOLTIPLICATORE</a:t>
+            </a:r>
+            <a:endParaRPr lang="en-US" sz="1100" dirty="0"/>
+          </a:p>
+        </p:txBody>
+      </p:sp>
+      <p:sp>
+        <p:nvSpPr>
+          <p:cNvPr id="3" name="Text 1"/>
+          <p:cNvSpPr/>
+          <p:nvPr/>
+        </p:nvSpPr>
+        <p:spPr>
+          <a:xfrm>
+            <a:off x="640080" y="640080"/>
+            <a:ext cx="7863840" cy="566928"/>
+          </a:xfrm>
+          <a:prstGeom prst="rect">
+            <a:avLst/>
+          </a:prstGeom>
+          <a:noFill/>
+          <a:ln/>
+        </p:spPr>
+        <p:txBody>
+          <a:bodyPr wrap="square" lIns="0" tIns="0" rIns="0" bIns="0" rtlCol="0" anchor="ctr"/>
+          <a:lstStyle/>
+          <a:p>
+            <a:pPr indent="0" marL="0">
+              <a:buNone/>
+            </a:pPr>
+            <a:r>
+              <a:rPr lang="en-US" sz="3000" dirty="0">
+                <a:solidFill>
+                  <a:srgbClr val="F4F7FF"/>
+                </a:solidFill>
+                <a:latin typeface="Arial Black" pitchFamily="34" charset="0"/>
+                <a:ea typeface="Arial Black" pitchFamily="34" charset="-122"/>
+                <a:cs typeface="Arial Black" pitchFamily="34" charset="-120"/>
+              </a:rPr>
+              <a:t>Chiedilo a Claude Code</a:t>
+            </a:r>
+            <a:endParaRPr lang="en-US" sz="3000" dirty="0"/>
+          </a:p>
+        </p:txBody>
+      </p:sp>
+      <p:sp>
+        <p:nvSpPr>
+          <p:cNvPr id="4" name="Text 2"/>
+          <p:cNvSpPr/>
+          <p:nvPr/>
+        </p:nvSpPr>
+        <p:spPr>
+          <a:xfrm>
+            <a:off x="658368" y="1417320"/>
+            <a:ext cx="7772400" cy="914400"/>
+          </a:xfrm>
+          <a:prstGeom prst="rect">
+            <a:avLst/>
+          </a:prstGeom>
+          <a:noFill/>
+          <a:ln/>
+        </p:spPr>
+        <p:txBody>
+          <a:bodyPr wrap="square" lIns="0" tIns="0" rIns="0" bIns="0" rtlCol="0" anchor="ctr"/>
+          <a:lstStyle/>
+          <a:p>
+            <a:pPr indent="0" marL="0">
+              <a:lnSpc>
+                <a:spcPct val="130000"/>
+              </a:lnSpc>
+              <a:buNone/>
+            </a:pPr>
+            <a:r>
+              <a:rPr lang="en-US" sz="1800" dirty="0">
+                <a:solidFill>
+                  <a:srgbClr val="F4F7FF"/>
+                </a:solidFill>
+                <a:latin typeface="Arial" pitchFamily="34" charset="0"/>
+                <a:ea typeface="Arial" pitchFamily="34" charset="-122"/>
+                <a:cs typeface="Arial" pitchFamily="34" charset="-120"/>
+              </a:rPr>
+              <a:t>Ogni passo del processo può essere </a:t>
+            </a:r>
+            <a:pPr indent="0" marL="0">
+              <a:lnSpc>
+                <a:spcPct val="130000"/>
+              </a:lnSpc>
+              <a:buNone/>
+            </a:pPr>
+            <a:r>
+              <a:rPr lang="en-US" sz="1800" b="1" dirty="0">
+                <a:solidFill>
+                  <a:srgbClr val="2BD9E5"/>
+                </a:solidFill>
+                <a:latin typeface="Arial" pitchFamily="34" charset="0"/>
+                <a:ea typeface="Arial" pitchFamily="34" charset="-122"/>
+                <a:cs typeface="Arial" pitchFamily="34" charset="-120"/>
+              </a:rPr>
+              <a:t>informato</a:t>
+            </a:r>
+            <a:pPr indent="0" marL="0">
+              <a:lnSpc>
+                <a:spcPct val="130000"/>
+              </a:lnSpc>
+              <a:buNone/>
+            </a:pPr>
+            <a:r>
+              <a:rPr lang="en-US" sz="1800" dirty="0">
+                <a:solidFill>
+                  <a:srgbClr val="F4F7FF"/>
+                </a:solidFill>
+                <a:latin typeface="Arial" pitchFamily="34" charset="0"/>
+                <a:ea typeface="Arial" pitchFamily="34" charset="-122"/>
+                <a:cs typeface="Arial" pitchFamily="34" charset="-120"/>
+              </a:rPr>
+              <a:t> — o, meglio ancora, </a:t>
+            </a:r>
+            <a:pPr indent="0" marL="0">
+              <a:lnSpc>
+                <a:spcPct val="130000"/>
+              </a:lnSpc>
+              <a:buNone/>
+            </a:pPr>
+            <a:r>
+              <a:rPr lang="en-US" sz="1800" b="1" dirty="0">
+                <a:solidFill>
+                  <a:srgbClr val="2BD9E5"/>
+                </a:solidFill>
+                <a:latin typeface="Arial" pitchFamily="34" charset="0"/>
+                <a:ea typeface="Arial" pitchFamily="34" charset="-122"/>
+                <a:cs typeface="Arial" pitchFamily="34" charset="-120"/>
+              </a:rPr>
+              <a:t>realizzato</a:t>
+            </a:r>
+            <a:pPr indent="0" marL="0">
+              <a:lnSpc>
+                <a:spcPct val="130000"/>
+              </a:lnSpc>
+              <a:buNone/>
+            </a:pPr>
+            <a:r>
+              <a:rPr lang="en-US" sz="1800" dirty="0">
+                <a:solidFill>
+                  <a:srgbClr val="F4F7FF"/>
+                </a:solidFill>
+                <a:latin typeface="Arial" pitchFamily="34" charset="0"/>
+                <a:ea typeface="Arial" pitchFamily="34" charset="-122"/>
+                <a:cs typeface="Arial" pitchFamily="34" charset="-120"/>
+              </a:rPr>
+              <a:t> — direttamente da Claude Code.</a:t>
+            </a:r>
+            <a:endParaRPr lang="en-US" sz="1800" dirty="0"/>
+          </a:p>
+        </p:txBody>
+      </p:sp>
+      <p:sp>
+        <p:nvSpPr>
+          <p:cNvPr id="5" name="Shape 3"/>
+          <p:cNvSpPr/>
+          <p:nvPr/>
+        </p:nvSpPr>
+        <p:spPr>
+          <a:xfrm>
+            <a:off x="640080" y="2834640"/>
+            <a:ext cx="2496312" cy="1691640"/>
+          </a:xfrm>
+          <a:prstGeom prst="roundRect">
+            <a:avLst>
+              <a:gd name="adj" fmla="val 4324"/>
+            </a:avLst>
+          </a:prstGeom>
+          <a:solidFill>
+            <a:srgbClr val="16203F"/>
+          </a:solidFill>
+          <a:ln w="13970">
+            <a:solidFill>
+              <a:srgbClr val="2BD9E5"/>
+            </a:solidFill>
+            <a:prstDash val="solid"/>
+          </a:ln>
+        </p:spPr>
+      </p:sp>
+      <p:sp>
+        <p:nvSpPr>
+          <p:cNvPr id="6" name="Shape 4"/>
+          <p:cNvSpPr/>
+          <p:nvPr/>
+        </p:nvSpPr>
+        <p:spPr>
+          <a:xfrm>
+            <a:off x="1645920" y="3063240"/>
+            <a:ext cx="502920" cy="502920"/>
+          </a:xfrm>
+          <a:prstGeom prst="ellipse">
+            <a:avLst/>
+          </a:prstGeom>
+          <a:solidFill>
+            <a:srgbClr val="0E3A44"/>
+          </a:solidFill>
+          <a:ln w="9525">
+            <a:solidFill>
+              <a:srgbClr val="2BD9E5"/>
+            </a:solidFill>
+            <a:prstDash val="solid"/>
+          </a:ln>
+        </p:spPr>
+      </p:sp>
+      <p:pic>
+        <p:nvPicPr>
+          <p:cNvPr id="7" name="Image 0" descr="preencoded.png">    </p:cNvPr>
+          <p:cNvPicPr>
+            <a:picLocks noChangeAspect="1"/>
+          </p:cNvPicPr>
+          <p:nvPr/>
+        </p:nvPicPr>
+        <p:blipFill>
+          <a:blip r:embed="rId1"/>
+          <a:stretch>
+            <a:fillRect/>
+          </a:stretch>
+        </p:blipFill>
+        <p:spPr>
+          <a:xfrm>
+            <a:off x="1781708" y="3199028"/>
+            <a:ext cx="231343" cy="231343"/>
+          </a:xfrm>
+          <a:prstGeom prst="rect">
+            <a:avLst/>
+          </a:prstGeom>
+        </p:spPr>
+      </p:pic>
+      <p:sp>
+        <p:nvSpPr>
+          <p:cNvPr id="8" name="Text 5"/>
+          <p:cNvSpPr/>
+          <p:nvPr/>
+        </p:nvSpPr>
+        <p:spPr>
+          <a:xfrm>
+            <a:off x="640080" y="3703320"/>
+            <a:ext cx="2496312" cy="365760"/>
+          </a:xfrm>
+          <a:prstGeom prst="rect">
+            <a:avLst/>
+          </a:prstGeom>
+          <a:noFill/>
+          <a:ln/>
+        </p:spPr>
+        <p:txBody>
+          <a:bodyPr wrap="square" lIns="0" tIns="0" rIns="0" bIns="0" rtlCol="0" anchor="ctr"/>
+          <a:lstStyle/>
+          <a:p>
+            <a:pPr algn="ctr" indent="0" marL="0">
+              <a:buNone/>
+            </a:pPr>
+            <a:r>
+              <a:rPr lang="en-US" sz="1600" b="1" dirty="0">
+                <a:solidFill>
+                  <a:srgbClr val="F4F7FF"/>
+                </a:solidFill>
+                <a:latin typeface="Arial" pitchFamily="34" charset="0"/>
+                <a:ea typeface="Arial" pitchFamily="34" charset="-122"/>
+                <a:cs typeface="Arial" pitchFamily="34" charset="-120"/>
+              </a:rPr>
+              <a:t>Pianifica</a:t>
+            </a:r>
+            <a:endParaRPr lang="en-US" sz="1600" dirty="0"/>
+          </a:p>
+        </p:txBody>
+      </p:sp>
+      <p:sp>
+        <p:nvSpPr>
+          <p:cNvPr id="9" name="Text 6"/>
+          <p:cNvSpPr/>
+          <p:nvPr/>
+        </p:nvSpPr>
+        <p:spPr>
+          <a:xfrm>
+            <a:off x="640080" y="4069080"/>
+            <a:ext cx="2496312" cy="320040"/>
+          </a:xfrm>
+          <a:prstGeom prst="rect">
+            <a:avLst/>
+          </a:prstGeom>
+          <a:noFill/>
+          <a:ln/>
+        </p:spPr>
+        <p:txBody>
+          <a:bodyPr wrap="square" lIns="0" tIns="0" rIns="0" bIns="0" rtlCol="0" anchor="ctr"/>
+          <a:lstStyle/>
+          <a:p>
+            <a:pPr algn="ctr" indent="0" marL="0">
+              <a:buNone/>
+            </a:pPr>
+            <a:r>
+              <a:rPr lang="en-US" sz="1200" dirty="0">
+                <a:solidFill>
+                  <a:srgbClr val="AEBDE0"/>
+                </a:solidFill>
+                <a:latin typeface="Arial" pitchFamily="34" charset="0"/>
+                <a:ea typeface="Arial" pitchFamily="34" charset="-122"/>
+                <a:cs typeface="Arial" pitchFamily="34" charset="-120"/>
+              </a:rPr>
+              <a:t>decide come farla</a:t>
+            </a:r>
+            <a:endParaRPr lang="en-US" sz="1200" dirty="0"/>
+          </a:p>
+        </p:txBody>
+      </p:sp>
+      <p:sp>
+        <p:nvSpPr>
+          <p:cNvPr id="10" name="Shape 7"/>
+          <p:cNvSpPr/>
+          <p:nvPr/>
+        </p:nvSpPr>
+        <p:spPr>
+          <a:xfrm>
+            <a:off x="3337560" y="2834640"/>
+            <a:ext cx="2496312" cy="1691640"/>
+          </a:xfrm>
+          <a:prstGeom prst="roundRect">
+            <a:avLst>
+              <a:gd name="adj" fmla="val 4324"/>
+            </a:avLst>
+          </a:prstGeom>
+          <a:solidFill>
+            <a:srgbClr val="16203F"/>
+          </a:solidFill>
+          <a:ln w="13970">
+            <a:solidFill>
+              <a:srgbClr val="2BD9E5"/>
+            </a:solidFill>
+            <a:prstDash val="solid"/>
+          </a:ln>
+        </p:spPr>
+      </p:sp>
+      <p:sp>
+        <p:nvSpPr>
+          <p:cNvPr id="11" name="Shape 8"/>
+          <p:cNvSpPr/>
+          <p:nvPr/>
+        </p:nvSpPr>
+        <p:spPr>
+          <a:xfrm>
+            <a:off x="4343400" y="3063240"/>
+            <a:ext cx="502920" cy="502920"/>
+          </a:xfrm>
+          <a:prstGeom prst="ellipse">
+            <a:avLst/>
+          </a:prstGeom>
+          <a:solidFill>
+            <a:srgbClr val="0E3A44"/>
+          </a:solidFill>
+          <a:ln w="9525">
+            <a:solidFill>
+              <a:srgbClr val="2BD9E5"/>
+            </a:solidFill>
+            <a:prstDash val="solid"/>
+          </a:ln>
+        </p:spPr>
+      </p:sp>
+      <p:pic>
+        <p:nvPicPr>
+          <p:cNvPr id="12" name="Image 1" descr="preencoded.png">    </p:cNvPr>
+          <p:cNvPicPr>
+            <a:picLocks noChangeAspect="1"/>
+          </p:cNvPicPr>
+          <p:nvPr/>
+        </p:nvPicPr>
+        <p:blipFill>
+          <a:blip r:embed="rId2"/>
+          <a:stretch>
+            <a:fillRect/>
+          </a:stretch>
+        </p:blipFill>
+        <p:spPr>
+          <a:xfrm>
+            <a:off x="4479188" y="3199028"/>
+            <a:ext cx="231343" cy="231343"/>
+          </a:xfrm>
+          <a:prstGeom prst="rect">
+            <a:avLst/>
+          </a:prstGeom>
+        </p:spPr>
+      </p:pic>
+      <p:sp>
+        <p:nvSpPr>
+          <p:cNvPr id="13" name="Text 9"/>
+          <p:cNvSpPr/>
+          <p:nvPr/>
+        </p:nvSpPr>
+        <p:spPr>
+          <a:xfrm>
+            <a:off x="3337560" y="3703320"/>
+            <a:ext cx="2496312" cy="365760"/>
+          </a:xfrm>
+          <a:prstGeom prst="rect">
+            <a:avLst/>
+          </a:prstGeom>
+          <a:noFill/>
+          <a:ln/>
+        </p:spPr>
+        <p:txBody>
+          <a:bodyPr wrap="square" lIns="0" tIns="0" rIns="0" bIns="0" rtlCol="0" anchor="ctr"/>
+          <a:lstStyle/>
+          <a:p>
+            <a:pPr algn="ctr" indent="0" marL="0">
+              <a:buNone/>
+            </a:pPr>
+            <a:r>
+              <a:rPr lang="en-US" sz="1600" b="1" dirty="0">
+                <a:solidFill>
+                  <a:srgbClr val="F4F7FF"/>
+                </a:solidFill>
+                <a:latin typeface="Arial" pitchFamily="34" charset="0"/>
+                <a:ea typeface="Arial" pitchFamily="34" charset="-122"/>
+                <a:cs typeface="Arial" pitchFamily="34" charset="-120"/>
+              </a:rPr>
+              <a:t>Implementa</a:t>
+            </a:r>
+            <a:endParaRPr lang="en-US" sz="1600" dirty="0"/>
+          </a:p>
+        </p:txBody>
+      </p:sp>
+      <p:sp>
+        <p:nvSpPr>
+          <p:cNvPr id="14" name="Text 10"/>
+          <p:cNvSpPr/>
+          <p:nvPr/>
+        </p:nvSpPr>
+        <p:spPr>
+          <a:xfrm>
+            <a:off x="3337560" y="4069080"/>
+            <a:ext cx="2496312" cy="320040"/>
+          </a:xfrm>
+          <a:prstGeom prst="rect">
+            <a:avLst/>
+          </a:prstGeom>
+          <a:noFill/>
+          <a:ln/>
+        </p:spPr>
+        <p:txBody>
+          <a:bodyPr wrap="square" lIns="0" tIns="0" rIns="0" bIns="0" rtlCol="0" anchor="ctr"/>
+          <a:lstStyle/>
+          <a:p>
+            <a:pPr algn="ctr" indent="0" marL="0">
+              <a:buNone/>
+            </a:pPr>
+            <a:r>
+              <a:rPr lang="en-US" sz="1200" dirty="0">
+                <a:solidFill>
+                  <a:srgbClr val="AEBDE0"/>
+                </a:solidFill>
+                <a:latin typeface="Arial" pitchFamily="34" charset="0"/>
+                <a:ea typeface="Arial" pitchFamily="34" charset="-122"/>
+                <a:cs typeface="Arial" pitchFamily="34" charset="-120"/>
+              </a:rPr>
+              <a:t>la costruisce</a:t>
+            </a:r>
+            <a:endParaRPr lang="en-US" sz="1200" dirty="0"/>
+          </a:p>
+        </p:txBody>
+      </p:sp>
+      <p:sp>
+        <p:nvSpPr>
+          <p:cNvPr id="15" name="Shape 11"/>
+          <p:cNvSpPr/>
+          <p:nvPr/>
+        </p:nvSpPr>
+        <p:spPr>
+          <a:xfrm>
+            <a:off x="6035040" y="2834640"/>
+            <a:ext cx="2496312" cy="1691640"/>
+          </a:xfrm>
+          <a:prstGeom prst="roundRect">
+            <a:avLst>
+              <a:gd name="adj" fmla="val 4324"/>
+            </a:avLst>
+          </a:prstGeom>
+          <a:solidFill>
+            <a:srgbClr val="16203F"/>
+          </a:solidFill>
+          <a:ln w="13970">
+            <a:solidFill>
+              <a:srgbClr val="2BD9E5"/>
+            </a:solidFill>
+            <a:prstDash val="solid"/>
+          </a:ln>
+        </p:spPr>
+      </p:sp>
+      <p:sp>
+        <p:nvSpPr>
+          <p:cNvPr id="16" name="Shape 12"/>
+          <p:cNvSpPr/>
+          <p:nvPr/>
+        </p:nvSpPr>
+        <p:spPr>
+          <a:xfrm>
+            <a:off x="7040880" y="3063240"/>
+            <a:ext cx="502920" cy="502920"/>
+          </a:xfrm>
+          <a:prstGeom prst="ellipse">
+            <a:avLst/>
+          </a:prstGeom>
+          <a:solidFill>
+            <a:srgbClr val="0E3A44"/>
+          </a:solidFill>
+          <a:ln w="9525">
+            <a:solidFill>
+              <a:srgbClr val="2BD9E5"/>
+            </a:solidFill>
+            <a:prstDash val="solid"/>
+          </a:ln>
+        </p:spPr>
+      </p:sp>
+      <p:pic>
+        <p:nvPicPr>
+          <p:cNvPr id="17" name="Image 2" descr="preencoded.png">    </p:cNvPr>
+          <p:cNvPicPr>
+            <a:picLocks noChangeAspect="1"/>
+          </p:cNvPicPr>
+          <p:nvPr/>
+        </p:nvPicPr>
+        <p:blipFill>
+          <a:blip r:embed="rId3"/>
+          <a:stretch>
+            <a:fillRect/>
+          </a:stretch>
+        </p:blipFill>
+        <p:spPr>
+          <a:xfrm>
+            <a:off x="7176668" y="3199028"/>
+            <a:ext cx="231343" cy="231343"/>
+          </a:xfrm>
+          <a:prstGeom prst="rect">
+            <a:avLst/>
+          </a:prstGeom>
+        </p:spPr>
+      </p:pic>
+      <p:sp>
+        <p:nvSpPr>
+          <p:cNvPr id="18" name="Text 13"/>
+          <p:cNvSpPr/>
+          <p:nvPr/>
+        </p:nvSpPr>
+        <p:spPr>
+          <a:xfrm>
+            <a:off x="6035040" y="3703320"/>
+            <a:ext cx="2496312" cy="365760"/>
+          </a:xfrm>
+          <a:prstGeom prst="rect">
+            <a:avLst/>
+          </a:prstGeom>
+          <a:noFill/>
+          <a:ln/>
+        </p:spPr>
+        <p:txBody>
+          <a:bodyPr wrap="square" lIns="0" tIns="0" rIns="0" bIns="0" rtlCol="0" anchor="ctr"/>
+          <a:lstStyle/>
+          <a:p>
+            <a:pPr algn="ctr" indent="0" marL="0">
+              <a:buNone/>
+            </a:pPr>
+            <a:r>
+              <a:rPr lang="en-US" sz="1600" b="1" dirty="0">
+                <a:solidFill>
+                  <a:srgbClr val="F4F7FF"/>
+                </a:solidFill>
+                <a:latin typeface="Arial" pitchFamily="34" charset="0"/>
+                <a:ea typeface="Arial" pitchFamily="34" charset="-122"/>
+                <a:cs typeface="Arial" pitchFamily="34" charset="-120"/>
+              </a:rPr>
+              <a:t>Testa</a:t>
+            </a:r>
+            <a:endParaRPr lang="en-US" sz="1600" dirty="0"/>
+          </a:p>
+        </p:txBody>
+      </p:sp>
+      <p:sp>
+        <p:nvSpPr>
+          <p:cNvPr id="19" name="Text 14"/>
+          <p:cNvSpPr/>
+          <p:nvPr/>
+        </p:nvSpPr>
+        <p:spPr>
+          <a:xfrm>
+            <a:off x="6035040" y="4069080"/>
+            <a:ext cx="2496312" cy="320040"/>
+          </a:xfrm>
+          <a:prstGeom prst="rect">
+            <a:avLst/>
+          </a:prstGeom>
+          <a:noFill/>
+          <a:ln/>
+        </p:spPr>
+        <p:txBody>
+          <a:bodyPr wrap="square" lIns="0" tIns="0" rIns="0" bIns="0" rtlCol="0" anchor="ctr"/>
+          <a:lstStyle/>
+          <a:p>
+            <a:pPr algn="ctr" indent="0" marL="0">
+              <a:buNone/>
+            </a:pPr>
+            <a:r>
+              <a:rPr lang="en-US" sz="1200" dirty="0">
+                <a:solidFill>
+                  <a:srgbClr val="AEBDE0"/>
+                </a:solidFill>
+                <a:latin typeface="Arial" pitchFamily="34" charset="0"/>
+                <a:ea typeface="Arial" pitchFamily="34" charset="-122"/>
+                <a:cs typeface="Arial" pitchFamily="34" charset="-120"/>
+              </a:rPr>
+              <a:t>la verifica</a:t>
+            </a:r>
+            <a:endParaRPr lang="en-US" sz="1200" dirty="0"/>
+          </a:p>
+        </p:txBody>
+      </p:sp>
+    </p:spTree>
+  </p:cSld>
+  <p:clrMapOvr>
+    <a:masterClrMapping/>
+  </p:clrMapOvr>
+</p:sld>
+</file>
+
+<file path=ppt/slides/slide11.xml><?xml version="1.0" encoding="utf-8"?>
+<p:sld xmlns:a="http://schemas.openxmlformats.org/drawingml/2006/main" xmlns:r="http://schemas.openxmlformats.org/officeDocument/2006/relationships" xmlns:p="http://schemas.openxmlformats.org/presentationml/2006/main">
+  <p:cSld name="Slide 11">
+    <p:bg>
+      <p:bgPr>
+        <a:solidFill>
+          <a:srgbClr val="0B1226"/>
+        </a:solidFill>
+      </p:bgPr>
+    </p:bg>
+    <p:spTree>
+      <p:nvGrpSpPr>
+        <p:cNvPr id="1" name=""/>
+        <p:cNvGrpSpPr/>
+        <p:nvPr/>
+      </p:nvGrpSpPr>
+      <p:grpSpPr>
+        <a:xfrm>
+          <a:off x="0" y="0"/>
+          <a:ext cx="0" cy="0"/>
+          <a:chOff x="0" y="0"/>
+          <a:chExt cx="0" cy="0"/>
+        </a:xfrm>
+      </p:grpSpPr>
+      <p:sp>
+        <p:nvSpPr>
+          <p:cNvPr id="2" name="Text 0"/>
+          <p:cNvSpPr/>
+          <p:nvPr/>
+        </p:nvSpPr>
+        <p:spPr>
+          <a:xfrm>
+            <a:off x="640080" y="365760"/>
+            <a:ext cx="8229600" cy="274320"/>
+          </a:xfrm>
+          <a:prstGeom prst="rect">
+            <a:avLst/>
+          </a:prstGeom>
+          <a:noFill/>
+          <a:ln/>
+        </p:spPr>
+        <p:txBody>
+          <a:bodyPr wrap="square" lIns="0" tIns="0" rIns="0" bIns="0" rtlCol="0" anchor="ctr"/>
+          <a:lstStyle/>
+          <a:p>
+            <a:pPr indent="0" marL="0">
+              <a:buNone/>
+            </a:pPr>
+            <a:r>
+              <a:rPr lang="en-US" sz="1100" b="1" spc="200" kern="0" dirty="0">
+                <a:solidFill>
+                  <a:srgbClr val="2BD9E5"/>
+                </a:solidFill>
+                <a:latin typeface="Arial" pitchFamily="34" charset="0"/>
+                <a:ea typeface="Arial" pitchFamily="34" charset="-122"/>
+                <a:cs typeface="Arial" pitchFamily="34" charset="-120"/>
+              </a:rPr>
+              <a:t>CHIEDILO A CLAUDE CODE · 1 · PIANIFICA</a:t>
+            </a:r>
+            <a:endParaRPr lang="en-US" sz="1100" dirty="0"/>
+          </a:p>
+        </p:txBody>
+      </p:sp>
+      <p:sp>
+        <p:nvSpPr>
+          <p:cNvPr id="3" name="Text 1"/>
+          <p:cNvSpPr/>
+          <p:nvPr/>
+        </p:nvSpPr>
+        <p:spPr>
+          <a:xfrm>
+            <a:off x="640080" y="640080"/>
+            <a:ext cx="7863840" cy="566928"/>
+          </a:xfrm>
+          <a:prstGeom prst="rect">
+            <a:avLst/>
+          </a:prstGeom>
+          <a:noFill/>
+          <a:ln/>
+        </p:spPr>
+        <p:txBody>
+          <a:bodyPr wrap="square" lIns="0" tIns="0" rIns="0" bIns="0" rtlCol="0" anchor="ctr"/>
+          <a:lstStyle/>
+          <a:p>
+            <a:pPr indent="0" marL="0">
+              <a:buNone/>
+            </a:pPr>
+            <a:r>
+              <a:rPr lang="en-US" sz="3000" dirty="0">
+                <a:solidFill>
+                  <a:srgbClr val="F4F7FF"/>
+                </a:solidFill>
+                <a:latin typeface="Arial Black" pitchFamily="34" charset="0"/>
+                <a:ea typeface="Arial Black" pitchFamily="34" charset="-122"/>
+                <a:cs typeface="Arial Black" pitchFamily="34" charset="-120"/>
+              </a:rPr>
+              <a:t>Pianifica</a:t>
+            </a:r>
+            <a:endParaRPr lang="en-US" sz="3000" dirty="0"/>
+          </a:p>
+        </p:txBody>
+      </p:sp>
+      <p:sp>
+        <p:nvSpPr>
+          <p:cNvPr id="4" name="Text 2"/>
+          <p:cNvSpPr/>
+          <p:nvPr/>
+        </p:nvSpPr>
+        <p:spPr>
+          <a:xfrm>
+            <a:off x="658368" y="1188720"/>
+            <a:ext cx="7772400" cy="292608"/>
+          </a:xfrm>
+          <a:prstGeom prst="rect">
+            <a:avLst/>
+          </a:prstGeom>
+          <a:noFill/>
+          <a:ln/>
+        </p:spPr>
+        <p:txBody>
+          <a:bodyPr wrap="square" lIns="0" tIns="0" rIns="0" bIns="0" rtlCol="0" anchor="ctr"/>
+          <a:lstStyle/>
+          <a:p>
+            <a:pPr indent="0" marL="0">
+              <a:buNone/>
+            </a:pPr>
+            <a:r>
+              <a:rPr lang="en-US" sz="1350" i="1" dirty="0">
+                <a:solidFill>
+                  <a:srgbClr val="AEBDE0"/>
+                </a:solidFill>
+                <a:latin typeface="Arial" pitchFamily="34" charset="0"/>
+                <a:ea typeface="Arial" pitchFamily="34" charset="-122"/>
+                <a:cs typeface="Arial" pitchFamily="34" charset="-120"/>
+              </a:rPr>
+              <a:t>Prima di scrivere una riga di codice, Claude Code è il tuo consulente.</a:t>
+            </a:r>
+            <a:endParaRPr lang="en-US" sz="1350" dirty="0"/>
+          </a:p>
+        </p:txBody>
+      </p:sp>
+      <p:sp>
+        <p:nvSpPr>
+          <p:cNvPr id="5" name="Shape 3"/>
+          <p:cNvSpPr/>
+          <p:nvPr/>
+        </p:nvSpPr>
+        <p:spPr>
+          <a:xfrm>
+            <a:off x="777240" y="1737360"/>
+            <a:ext cx="457200" cy="457200"/>
+          </a:xfrm>
+          <a:prstGeom prst="ellipse">
+            <a:avLst/>
+          </a:prstGeom>
+          <a:solidFill>
+            <a:srgbClr val="0E3A44"/>
+          </a:solidFill>
+          <a:ln w="12700">
+            <a:solidFill>
+              <a:srgbClr val="0E3A44"/>
+            </a:solidFill>
+            <a:prstDash val="solid"/>
+          </a:ln>
+        </p:spPr>
+      </p:sp>
+      <p:pic>
+        <p:nvPicPr>
+          <p:cNvPr id="6" name="Image 0" descr="preencoded.png">    </p:cNvPr>
+          <p:cNvPicPr>
+            <a:picLocks noChangeAspect="1"/>
+          </p:cNvPicPr>
+          <p:nvPr/>
+        </p:nvPicPr>
+        <p:blipFill>
+          <a:blip r:embed="rId1"/>
+          <a:stretch>
+            <a:fillRect/>
+          </a:stretch>
+        </p:blipFill>
+        <p:spPr>
+          <a:xfrm>
+            <a:off x="900684" y="1860804"/>
+            <a:ext cx="210312" cy="210312"/>
+          </a:xfrm>
+          <a:prstGeom prst="rect">
+            <a:avLst/>
+          </a:prstGeom>
+        </p:spPr>
+      </p:pic>
+      <p:sp>
+        <p:nvSpPr>
+          <p:cNvPr id="7" name="Text 4"/>
+          <p:cNvSpPr/>
+          <p:nvPr/>
+        </p:nvSpPr>
+        <p:spPr>
+          <a:xfrm>
+            <a:off x="1417320" y="1691640"/>
+            <a:ext cx="6949440" cy="548640"/>
+          </a:xfrm>
+          <a:prstGeom prst="rect">
+            <a:avLst/>
+          </a:prstGeom>
+          <a:noFill/>
+          <a:ln/>
+        </p:spPr>
+        <p:txBody>
+          <a:bodyPr wrap="square" lIns="0" tIns="0" rIns="0" bIns="0" rtlCol="0" anchor="ctr"/>
+          <a:lstStyle/>
+          <a:p>
+            <a:pPr indent="0" marL="0">
+              <a:buNone/>
+            </a:pPr>
+            <a:r>
+              <a:rPr lang="en-US" sz="1450" b="1" dirty="0">
+                <a:solidFill>
+                  <a:srgbClr val="F4F7FF"/>
+                </a:solidFill>
+                <a:latin typeface="Arial" pitchFamily="34" charset="0"/>
+                <a:ea typeface="Arial" pitchFamily="34" charset="-122"/>
+                <a:cs typeface="Arial" pitchFamily="34" charset="-120"/>
+              </a:rPr>
+              <a:t>Architettura  </a:t>
+            </a:r>
+            <a:pPr indent="0" marL="0">
+              <a:buNone/>
+            </a:pPr>
+            <a:r>
+              <a:rPr lang="en-US" sz="1450" dirty="0">
+                <a:solidFill>
+                  <a:srgbClr val="AEBDE0"/>
+                </a:solidFill>
+                <a:latin typeface="Arial" pitchFamily="34" charset="0"/>
+                <a:ea typeface="Arial" pitchFamily="34" charset="-122"/>
+                <a:cs typeface="Arial" pitchFamily="34" charset="-120"/>
+              </a:rPr>
+              <a:t>— come strutturare l'app e i suoi pezzi</a:t>
+            </a:r>
+            <a:endParaRPr lang="en-US" sz="1450" dirty="0"/>
+          </a:p>
+        </p:txBody>
+      </p:sp>
+      <p:sp>
+        <p:nvSpPr>
+          <p:cNvPr id="8" name="Shape 5"/>
+          <p:cNvSpPr/>
+          <p:nvPr/>
+        </p:nvSpPr>
+        <p:spPr>
+          <a:xfrm>
+            <a:off x="1417320" y="2249424"/>
+            <a:ext cx="6903720" cy="0"/>
+          </a:xfrm>
+          <a:prstGeom prst="line">
+            <a:avLst/>
+          </a:prstGeom>
+          <a:noFill/>
+          <a:ln w="6350">
+            <a:solidFill>
+              <a:srgbClr val="2A3A6B"/>
+            </a:solidFill>
+            <a:prstDash val="solid"/>
+          </a:ln>
+        </p:spPr>
+      </p:sp>
+      <p:sp>
+        <p:nvSpPr>
+          <p:cNvPr id="9" name="Shape 6"/>
+          <p:cNvSpPr/>
+          <p:nvPr/>
+        </p:nvSpPr>
+        <p:spPr>
+          <a:xfrm>
+            <a:off x="777240" y="2340864"/>
+            <a:ext cx="457200" cy="457200"/>
+          </a:xfrm>
+          <a:prstGeom prst="ellipse">
+            <a:avLst/>
+          </a:prstGeom>
+          <a:solidFill>
+            <a:srgbClr val="0E3A44"/>
+          </a:solidFill>
+          <a:ln w="12700">
+            <a:solidFill>
+              <a:srgbClr val="0E3A44"/>
+            </a:solidFill>
+            <a:prstDash val="solid"/>
+          </a:ln>
+        </p:spPr>
+      </p:sp>
+      <p:pic>
+        <p:nvPicPr>
+          <p:cNvPr id="10" name="Image 1" descr="preencoded.png">    </p:cNvPr>
+          <p:cNvPicPr>
+            <a:picLocks noChangeAspect="1"/>
+          </p:cNvPicPr>
+          <p:nvPr/>
+        </p:nvPicPr>
+        <p:blipFill>
+          <a:blip r:embed="rId2"/>
+          <a:stretch>
+            <a:fillRect/>
+          </a:stretch>
+        </p:blipFill>
+        <p:spPr>
+          <a:xfrm>
+            <a:off x="900684" y="2464308"/>
+            <a:ext cx="210312" cy="210312"/>
+          </a:xfrm>
+          <a:prstGeom prst="rect">
+            <a:avLst/>
+          </a:prstGeom>
+        </p:spPr>
+      </p:pic>
+      <p:sp>
+        <p:nvSpPr>
+          <p:cNvPr id="11" name="Text 7"/>
+          <p:cNvSpPr/>
+          <p:nvPr/>
+        </p:nvSpPr>
+        <p:spPr>
+          <a:xfrm>
+            <a:off x="1417320" y="2295144"/>
+            <a:ext cx="6949440" cy="548640"/>
+          </a:xfrm>
+          <a:prstGeom prst="rect">
+            <a:avLst/>
+          </a:prstGeom>
+          <a:noFill/>
+          <a:ln/>
+        </p:spPr>
+        <p:txBody>
+          <a:bodyPr wrap="square" lIns="0" tIns="0" rIns="0" bIns="0" rtlCol="0" anchor="ctr"/>
+          <a:lstStyle/>
+          <a:p>
+            <a:pPr indent="0" marL="0">
+              <a:buNone/>
+            </a:pPr>
+            <a:r>
+              <a:rPr lang="en-US" sz="1450" b="1" dirty="0">
+                <a:solidFill>
+                  <a:srgbClr val="F4F7FF"/>
+                </a:solidFill>
+                <a:latin typeface="Arial" pitchFamily="34" charset="0"/>
+                <a:ea typeface="Arial" pitchFamily="34" charset="-122"/>
+                <a:cs typeface="Arial" pitchFamily="34" charset="-120"/>
+              </a:rPr>
+              <a:t>Strumenti  </a:t>
+            </a:r>
+            <a:pPr indent="0" marL="0">
+              <a:buNone/>
+            </a:pPr>
+            <a:r>
+              <a:rPr lang="en-US" sz="1450" dirty="0">
+                <a:solidFill>
+                  <a:srgbClr val="AEBDE0"/>
+                </a:solidFill>
+                <a:latin typeface="Arial" pitchFamily="34" charset="0"/>
+                <a:ea typeface="Arial" pitchFamily="34" charset="-122"/>
+                <a:cs typeface="Arial" pitchFamily="34" charset="-120"/>
+              </a:rPr>
+              <a:t>— quali librerie e servizi conviene usare</a:t>
+            </a:r>
+            <a:endParaRPr lang="en-US" sz="1450" dirty="0"/>
+          </a:p>
+        </p:txBody>
+      </p:sp>
+      <p:sp>
+        <p:nvSpPr>
+          <p:cNvPr id="12" name="Shape 8"/>
+          <p:cNvSpPr/>
+          <p:nvPr/>
+        </p:nvSpPr>
+        <p:spPr>
+          <a:xfrm>
+            <a:off x="1417320" y="2852928"/>
+            <a:ext cx="6903720" cy="0"/>
+          </a:xfrm>
+          <a:prstGeom prst="line">
+            <a:avLst/>
+          </a:prstGeom>
+          <a:noFill/>
+          <a:ln w="6350">
+            <a:solidFill>
+              <a:srgbClr val="2A3A6B"/>
+            </a:solidFill>
+            <a:prstDash val="solid"/>
+          </a:ln>
+        </p:spPr>
+      </p:sp>
+      <p:sp>
+        <p:nvSpPr>
+          <p:cNvPr id="13" name="Shape 9"/>
+          <p:cNvSpPr/>
+          <p:nvPr/>
+        </p:nvSpPr>
+        <p:spPr>
+          <a:xfrm>
+            <a:off x="777240" y="2944368"/>
+            <a:ext cx="457200" cy="457200"/>
+          </a:xfrm>
+          <a:prstGeom prst="ellipse">
+            <a:avLst/>
+          </a:prstGeom>
+          <a:solidFill>
+            <a:srgbClr val="0E3A44"/>
+          </a:solidFill>
+          <a:ln w="12700">
+            <a:solidFill>
+              <a:srgbClr val="0E3A44"/>
+            </a:solidFill>
+            <a:prstDash val="solid"/>
+          </a:ln>
+        </p:spPr>
+      </p:sp>
+      <p:pic>
+        <p:nvPicPr>
+          <p:cNvPr id="14" name="Image 2" descr="preencoded.png">    </p:cNvPr>
+          <p:cNvPicPr>
+            <a:picLocks noChangeAspect="1"/>
+          </p:cNvPicPr>
+          <p:nvPr/>
+        </p:nvPicPr>
+        <p:blipFill>
+          <a:blip r:embed="rId3"/>
+          <a:stretch>
+            <a:fillRect/>
+          </a:stretch>
+        </p:blipFill>
+        <p:spPr>
+          <a:xfrm>
+            <a:off x="900684" y="3067812"/>
+            <a:ext cx="210312" cy="210312"/>
+          </a:xfrm>
+          <a:prstGeom prst="rect">
+            <a:avLst/>
+          </a:prstGeom>
+        </p:spPr>
+      </p:pic>
+      <p:sp>
+        <p:nvSpPr>
+          <p:cNvPr id="15" name="Text 10"/>
+          <p:cNvSpPr/>
+          <p:nvPr/>
+        </p:nvSpPr>
+        <p:spPr>
+          <a:xfrm>
+            <a:off x="1417320" y="2898648"/>
+            <a:ext cx="6949440" cy="548640"/>
+          </a:xfrm>
+          <a:prstGeom prst="rect">
+            <a:avLst/>
+          </a:prstGeom>
+          <a:noFill/>
+          <a:ln/>
+        </p:spPr>
+        <p:txBody>
+          <a:bodyPr wrap="square" lIns="0" tIns="0" rIns="0" bIns="0" rtlCol="0" anchor="ctr"/>
+          <a:lstStyle/>
+          <a:p>
+            <a:pPr indent="0" marL="0">
+              <a:buNone/>
+            </a:pPr>
+            <a:r>
+              <a:rPr lang="en-US" sz="1450" b="1" dirty="0">
+                <a:solidFill>
+                  <a:srgbClr val="F4F7FF"/>
+                </a:solidFill>
+                <a:latin typeface="Arial" pitchFamily="34" charset="0"/>
+                <a:ea typeface="Arial" pitchFamily="34" charset="-122"/>
+                <a:cs typeface="Arial" pitchFamily="34" charset="-120"/>
+              </a:rPr>
+              <a:t>Alternative  </a:t>
+            </a:r>
+            <a:pPr indent="0" marL="0">
+              <a:buNone/>
+            </a:pPr>
+            <a:r>
+              <a:rPr lang="en-US" sz="1450" dirty="0">
+                <a:solidFill>
+                  <a:srgbClr val="AEBDE0"/>
+                </a:solidFill>
+                <a:latin typeface="Arial" pitchFamily="34" charset="0"/>
+                <a:ea typeface="Arial" pitchFamily="34" charset="-122"/>
+                <a:cs typeface="Arial" pitchFamily="34" charset="-120"/>
+              </a:rPr>
+              <a:t>— confronta più soluzioni e ti spiega i compromessi</a:t>
+            </a:r>
+            <a:endParaRPr lang="en-US" sz="1450" dirty="0"/>
+          </a:p>
+        </p:txBody>
+      </p:sp>
+      <p:sp>
+        <p:nvSpPr>
+          <p:cNvPr id="16" name="Shape 11"/>
+          <p:cNvSpPr/>
+          <p:nvPr/>
+        </p:nvSpPr>
+        <p:spPr>
+          <a:xfrm>
+            <a:off x="1417320" y="3456432"/>
+            <a:ext cx="6903720" cy="0"/>
+          </a:xfrm>
+          <a:prstGeom prst="line">
+            <a:avLst/>
+          </a:prstGeom>
+          <a:noFill/>
+          <a:ln w="6350">
+            <a:solidFill>
+              <a:srgbClr val="2A3A6B"/>
+            </a:solidFill>
+            <a:prstDash val="solid"/>
+          </a:ln>
+        </p:spPr>
+      </p:sp>
+      <p:sp>
+        <p:nvSpPr>
+          <p:cNvPr id="17" name="Shape 12"/>
+          <p:cNvSpPr/>
+          <p:nvPr/>
+        </p:nvSpPr>
+        <p:spPr>
+          <a:xfrm>
+            <a:off x="777240" y="3547872"/>
+            <a:ext cx="457200" cy="457200"/>
+          </a:xfrm>
+          <a:prstGeom prst="ellipse">
+            <a:avLst/>
+          </a:prstGeom>
+          <a:solidFill>
+            <a:srgbClr val="0E3A44"/>
+          </a:solidFill>
+          <a:ln w="12700">
+            <a:solidFill>
+              <a:srgbClr val="0E3A44"/>
+            </a:solidFill>
+            <a:prstDash val="solid"/>
+          </a:ln>
+        </p:spPr>
+      </p:sp>
+      <p:pic>
+        <p:nvPicPr>
+          <p:cNvPr id="18" name="Image 3" descr="preencoded.png">    </p:cNvPr>
+          <p:cNvPicPr>
+            <a:picLocks noChangeAspect="1"/>
+          </p:cNvPicPr>
+          <p:nvPr/>
+        </p:nvPicPr>
+        <p:blipFill>
+          <a:blip r:embed="rId4"/>
+          <a:stretch>
+            <a:fillRect/>
+          </a:stretch>
+        </p:blipFill>
+        <p:spPr>
+          <a:xfrm>
+            <a:off x="900684" y="3671316"/>
+            <a:ext cx="210312" cy="210312"/>
+          </a:xfrm>
+          <a:prstGeom prst="rect">
+            <a:avLst/>
+          </a:prstGeom>
+        </p:spPr>
+      </p:pic>
+      <p:sp>
+        <p:nvSpPr>
+          <p:cNvPr id="19" name="Text 13"/>
+          <p:cNvSpPr/>
+          <p:nvPr/>
+        </p:nvSpPr>
+        <p:spPr>
+          <a:xfrm>
+            <a:off x="1417320" y="3502152"/>
+            <a:ext cx="6949440" cy="548640"/>
+          </a:xfrm>
+          <a:prstGeom prst="rect">
+            <a:avLst/>
+          </a:prstGeom>
+          <a:noFill/>
+          <a:ln/>
+        </p:spPr>
+        <p:txBody>
+          <a:bodyPr wrap="square" lIns="0" tIns="0" rIns="0" bIns="0" rtlCol="0" anchor="ctr"/>
+          <a:lstStyle/>
+          <a:p>
+            <a:pPr indent="0" marL="0">
+              <a:buNone/>
+            </a:pPr>
+            <a:r>
+              <a:rPr lang="en-US" sz="1450" b="1" dirty="0">
+                <a:solidFill>
+                  <a:srgbClr val="F4F7FF"/>
+                </a:solidFill>
+                <a:latin typeface="Arial" pitchFamily="34" charset="0"/>
+                <a:ea typeface="Arial" pitchFamily="34" charset="-122"/>
+                <a:cs typeface="Arial" pitchFamily="34" charset="-120"/>
+              </a:rPr>
+              <a:t>Costi  </a:t>
+            </a:r>
+            <a:pPr indent="0" marL="0">
+              <a:buNone/>
+            </a:pPr>
+            <a:r>
+              <a:rPr lang="en-US" sz="1450" dirty="0">
+                <a:solidFill>
+                  <a:srgbClr val="AEBDE0"/>
+                </a:solidFill>
+                <a:latin typeface="Arial" pitchFamily="34" charset="0"/>
+                <a:ea typeface="Arial" pitchFamily="34" charset="-122"/>
+                <a:cs typeface="Arial" pitchFamily="34" charset="-120"/>
+              </a:rPr>
+              <a:t>— stima la spesa prima di iniziare</a:t>
+            </a:r>
+            <a:endParaRPr lang="en-US" sz="1450" dirty="0"/>
+          </a:p>
+        </p:txBody>
+      </p:sp>
+      <p:sp>
+        <p:nvSpPr>
+          <p:cNvPr id="20" name="Shape 14"/>
+          <p:cNvSpPr/>
+          <p:nvPr/>
+        </p:nvSpPr>
+        <p:spPr>
+          <a:xfrm>
+            <a:off x="1417320" y="4059936"/>
+            <a:ext cx="6903720" cy="0"/>
+          </a:xfrm>
+          <a:prstGeom prst="line">
+            <a:avLst/>
+          </a:prstGeom>
+          <a:noFill/>
+          <a:ln w="6350">
+            <a:solidFill>
+              <a:srgbClr val="2A3A6B"/>
+            </a:solidFill>
+            <a:prstDash val="solid"/>
+          </a:ln>
+        </p:spPr>
+      </p:sp>
+      <p:sp>
+        <p:nvSpPr>
+          <p:cNvPr id="21" name="Shape 15"/>
+          <p:cNvSpPr/>
+          <p:nvPr/>
+        </p:nvSpPr>
+        <p:spPr>
+          <a:xfrm>
+            <a:off x="777240" y="4151376"/>
+            <a:ext cx="457200" cy="457200"/>
+          </a:xfrm>
+          <a:prstGeom prst="ellipse">
+            <a:avLst/>
+          </a:prstGeom>
+          <a:solidFill>
+            <a:srgbClr val="0E3A44"/>
+          </a:solidFill>
+          <a:ln w="12700">
+            <a:solidFill>
+              <a:srgbClr val="0E3A44"/>
+            </a:solidFill>
+            <a:prstDash val="solid"/>
+          </a:ln>
+        </p:spPr>
+      </p:sp>
+      <p:pic>
+        <p:nvPicPr>
+          <p:cNvPr id="22" name="Image 4" descr="preencoded.png">    </p:cNvPr>
+          <p:cNvPicPr>
+            <a:picLocks noChangeAspect="1"/>
+          </p:cNvPicPr>
+          <p:nvPr/>
+        </p:nvPicPr>
+        <p:blipFill>
+          <a:blip r:embed="rId5"/>
+          <a:stretch>
+            <a:fillRect/>
+          </a:stretch>
+        </p:blipFill>
+        <p:spPr>
+          <a:xfrm>
+            <a:off x="900684" y="4274820"/>
+            <a:ext cx="210312" cy="210312"/>
+          </a:xfrm>
+          <a:prstGeom prst="rect">
+            <a:avLst/>
+          </a:prstGeom>
+        </p:spPr>
+      </p:pic>
+      <p:sp>
+        <p:nvSpPr>
+          <p:cNvPr id="23" name="Text 16"/>
+          <p:cNvSpPr/>
+          <p:nvPr/>
+        </p:nvSpPr>
+        <p:spPr>
+          <a:xfrm>
+            <a:off x="1417320" y="4105656"/>
+            <a:ext cx="6949440" cy="548640"/>
+          </a:xfrm>
+          <a:prstGeom prst="rect">
+            <a:avLst/>
+          </a:prstGeom>
+          <a:noFill/>
+          <a:ln/>
+        </p:spPr>
+        <p:txBody>
+          <a:bodyPr wrap="square" lIns="0" tIns="0" rIns="0" bIns="0" rtlCol="0" anchor="ctr"/>
+          <a:lstStyle/>
+          <a:p>
+            <a:pPr indent="0" marL="0">
+              <a:buNone/>
+            </a:pPr>
+            <a:r>
+              <a:rPr lang="en-US" sz="1450" b="1" dirty="0">
+                <a:solidFill>
+                  <a:srgbClr val="F4F7FF"/>
+                </a:solidFill>
+                <a:latin typeface="Arial" pitchFamily="34" charset="0"/>
+                <a:ea typeface="Arial" pitchFamily="34" charset="-122"/>
+                <a:cs typeface="Arial" pitchFamily="34" charset="-120"/>
+              </a:rPr>
+              <a:t>Mercato  </a:t>
+            </a:r>
+            <a:pPr indent="0" marL="0">
+              <a:buNone/>
+            </a:pPr>
+            <a:r>
+              <a:rPr lang="en-US" sz="1450" dirty="0">
+                <a:solidFill>
+                  <a:srgbClr val="AEBDE0"/>
+                </a:solidFill>
+                <a:latin typeface="Arial" pitchFamily="34" charset="0"/>
+                <a:ea typeface="Arial" pitchFamily="34" charset="-122"/>
+                <a:cs typeface="Arial" pitchFamily="34" charset="-120"/>
+              </a:rPr>
+              <a:t>— ricerche su concorrenti e domanda reale</a:t>
+            </a:r>
+            <a:endParaRPr lang="en-US" sz="1450" dirty="0"/>
+          </a:p>
+        </p:txBody>
+      </p:sp>
+    </p:spTree>
+  </p:cSld>
+  <p:clrMapOvr>
+    <a:masterClrMapping/>
+  </p:clrMapOvr>
+</p:sld>
+</file>
+
+<file path=ppt/slides/slide12.xml><?xml version="1.0" encoding="utf-8"?>
+<p:sld xmlns:a="http://schemas.openxmlformats.org/drawingml/2006/main" xmlns:r="http://schemas.openxmlformats.org/officeDocument/2006/relationships" xmlns:p="http://schemas.openxmlformats.org/presentationml/2006/main">
+  <p:cSld name="Slide 12">
+    <p:bg>
+      <p:bgPr>
+        <a:solidFill>
+          <a:srgbClr val="0B1226"/>
+        </a:solidFill>
+      </p:bgPr>
+    </p:bg>
+    <p:spTree>
+      <p:nvGrpSpPr>
+        <p:cNvPr id="1" name=""/>
+        <p:cNvGrpSpPr/>
+        <p:nvPr/>
+      </p:nvGrpSpPr>
+      <p:grpSpPr>
+        <a:xfrm>
+          <a:off x="0" y="0"/>
+          <a:ext cx="0" cy="0"/>
+          <a:chOff x="0" y="0"/>
+          <a:chExt cx="0" cy="0"/>
+        </a:xfrm>
+      </p:grpSpPr>
+      <p:sp>
+        <p:nvSpPr>
+          <p:cNvPr id="2" name="Text 0"/>
+          <p:cNvSpPr/>
+          <p:nvPr/>
+        </p:nvSpPr>
+        <p:spPr>
+          <a:xfrm>
+            <a:off x="640080" y="365760"/>
+            <a:ext cx="8229600" cy="274320"/>
+          </a:xfrm>
+          <a:prstGeom prst="rect">
+            <a:avLst/>
+          </a:prstGeom>
+          <a:noFill/>
+          <a:ln/>
+        </p:spPr>
+        <p:txBody>
+          <a:bodyPr wrap="square" lIns="0" tIns="0" rIns="0" bIns="0" rtlCol="0" anchor="ctr"/>
+          <a:lstStyle/>
+          <a:p>
+            <a:pPr indent="0" marL="0">
+              <a:buNone/>
+            </a:pPr>
+            <a:r>
+              <a:rPr lang="en-US" sz="1100" b="1" spc="200" kern="0" dirty="0">
+                <a:solidFill>
+                  <a:srgbClr val="2BD9E5"/>
+                </a:solidFill>
+                <a:latin typeface="Arial" pitchFamily="34" charset="0"/>
+                <a:ea typeface="Arial" pitchFamily="34" charset="-122"/>
+                <a:cs typeface="Arial" pitchFamily="34" charset="-120"/>
+              </a:rPr>
+              <a:t>CHIEDILO A CLAUDE CODE · 2 · IMPLEMENTA</a:t>
+            </a:r>
+            <a:endParaRPr lang="en-US" sz="1100" dirty="0"/>
+          </a:p>
+        </p:txBody>
+      </p:sp>
+      <p:sp>
+        <p:nvSpPr>
+          <p:cNvPr id="3" name="Text 1"/>
+          <p:cNvSpPr/>
+          <p:nvPr/>
+        </p:nvSpPr>
+        <p:spPr>
+          <a:xfrm>
+            <a:off x="640080" y="640080"/>
+            <a:ext cx="7863840" cy="566928"/>
+          </a:xfrm>
+          <a:prstGeom prst="rect">
+            <a:avLst/>
+          </a:prstGeom>
+          <a:noFill/>
+          <a:ln/>
+        </p:spPr>
+        <p:txBody>
+          <a:bodyPr wrap="square" lIns="0" tIns="0" rIns="0" bIns="0" rtlCol="0" anchor="ctr"/>
+          <a:lstStyle/>
+          <a:p>
+            <a:pPr indent="0" marL="0">
+              <a:buNone/>
+            </a:pPr>
+            <a:r>
+              <a:rPr lang="en-US" sz="3000" dirty="0">
+                <a:solidFill>
+                  <a:srgbClr val="F4F7FF"/>
+                </a:solidFill>
+                <a:latin typeface="Arial Black" pitchFamily="34" charset="0"/>
+                <a:ea typeface="Arial Black" pitchFamily="34" charset="-122"/>
+                <a:cs typeface="Arial Black" pitchFamily="34" charset="-120"/>
+              </a:rPr>
+              <a:t>Implementa</a:t>
+            </a:r>
+            <a:endParaRPr lang="en-US" sz="3000" dirty="0"/>
+          </a:p>
+        </p:txBody>
+      </p:sp>
+      <p:sp>
+        <p:nvSpPr>
+          <p:cNvPr id="4" name="Text 2"/>
+          <p:cNvSpPr/>
+          <p:nvPr/>
+        </p:nvSpPr>
+        <p:spPr>
+          <a:xfrm>
+            <a:off x="658368" y="1188720"/>
+            <a:ext cx="7772400" cy="292608"/>
+          </a:xfrm>
+          <a:prstGeom prst="rect">
+            <a:avLst/>
+          </a:prstGeom>
+          <a:noFill/>
+          <a:ln/>
+        </p:spPr>
+        <p:txBody>
+          <a:bodyPr wrap="square" lIns="0" tIns="0" rIns="0" bIns="0" rtlCol="0" anchor="ctr"/>
+          <a:lstStyle/>
+          <a:p>
+            <a:pPr indent="0" marL="0">
+              <a:buNone/>
+            </a:pPr>
+            <a:r>
+              <a:rPr lang="en-US" sz="1350" i="1" dirty="0">
+                <a:solidFill>
+                  <a:srgbClr val="AEBDE0"/>
+                </a:solidFill>
+                <a:latin typeface="Arial" pitchFamily="34" charset="0"/>
+                <a:ea typeface="Arial" pitchFamily="34" charset="-122"/>
+                <a:cs typeface="Arial" pitchFamily="34" charset="-120"/>
+              </a:rPr>
+              <a:t>Non solo codice: anche tutte le istruzioni per arrivare in fondo.</a:t>
+            </a:r>
+            <a:endParaRPr lang="en-US" sz="1350" dirty="0"/>
+          </a:p>
+        </p:txBody>
+      </p:sp>
+      <p:sp>
+        <p:nvSpPr>
+          <p:cNvPr id="5" name="Shape 3"/>
+          <p:cNvSpPr/>
+          <p:nvPr/>
+        </p:nvSpPr>
+        <p:spPr>
+          <a:xfrm>
+            <a:off x="640080" y="1691640"/>
+            <a:ext cx="3794760" cy="2468880"/>
+          </a:xfrm>
+          <a:prstGeom prst="roundRect">
+            <a:avLst>
+              <a:gd name="adj" fmla="val 2963"/>
+            </a:avLst>
+          </a:prstGeom>
+          <a:solidFill>
+            <a:srgbClr val="16203F"/>
+          </a:solidFill>
+          <a:ln w="9525">
+            <a:solidFill>
+              <a:srgbClr val="2A3A6B"/>
+            </a:solidFill>
+            <a:prstDash val="solid"/>
+          </a:ln>
+        </p:spPr>
+      </p:sp>
+      <p:sp>
+        <p:nvSpPr>
+          <p:cNvPr id="6" name="Shape 4"/>
+          <p:cNvSpPr/>
+          <p:nvPr/>
+        </p:nvSpPr>
+        <p:spPr>
+          <a:xfrm>
+            <a:off x="868680" y="1920240"/>
+            <a:ext cx="502920" cy="502920"/>
+          </a:xfrm>
+          <a:prstGeom prst="ellipse">
+            <a:avLst/>
+          </a:prstGeom>
+          <a:solidFill>
+            <a:srgbClr val="0E3A44"/>
+          </a:solidFill>
+          <a:ln w="12700">
+            <a:solidFill>
+              <a:srgbClr val="0E3A44"/>
+            </a:solidFill>
+            <a:prstDash val="solid"/>
+          </a:ln>
+        </p:spPr>
+      </p:sp>
+      <p:pic>
+        <p:nvPicPr>
+          <p:cNvPr id="7" name="Image 0" descr="preencoded.png">    </p:cNvPr>
+          <p:cNvPicPr>
+            <a:picLocks noChangeAspect="1"/>
+          </p:cNvPicPr>
+          <p:nvPr/>
+        </p:nvPicPr>
+        <p:blipFill>
+          <a:blip r:embed="rId1"/>
+          <a:stretch>
+            <a:fillRect/>
+          </a:stretch>
+        </p:blipFill>
+        <p:spPr>
+          <a:xfrm>
+            <a:off x="1004468" y="2056028"/>
+            <a:ext cx="231343" cy="231343"/>
+          </a:xfrm>
+          <a:prstGeom prst="rect">
+            <a:avLst/>
+          </a:prstGeom>
+        </p:spPr>
+      </p:pic>
+      <p:sp>
+        <p:nvSpPr>
+          <p:cNvPr id="8" name="Text 5"/>
+          <p:cNvSpPr/>
+          <p:nvPr/>
+        </p:nvSpPr>
+        <p:spPr>
+          <a:xfrm>
+            <a:off x="1508760" y="1920240"/>
+            <a:ext cx="2743200" cy="502920"/>
+          </a:xfrm>
+          <a:prstGeom prst="rect">
+            <a:avLst/>
+          </a:prstGeom>
+          <a:noFill/>
+          <a:ln/>
+        </p:spPr>
+        <p:txBody>
+          <a:bodyPr wrap="square" lIns="0" tIns="0" rIns="0" bIns="0" rtlCol="0" anchor="ctr"/>
+          <a:lstStyle/>
+          <a:p>
+            <a:pPr indent="0" marL="0">
+              <a:buNone/>
+            </a:pPr>
+            <a:r>
+              <a:rPr lang="en-US" sz="1500" b="1" dirty="0">
+                <a:solidFill>
+                  <a:srgbClr val="F4F7FF"/>
+                </a:solidFill>
+                <a:latin typeface="Arial" pitchFamily="34" charset="0"/>
+                <a:ea typeface="Arial" pitchFamily="34" charset="-122"/>
+                <a:cs typeface="Arial" pitchFamily="34" charset="-120"/>
+              </a:rPr>
+              <a:t>Scrive il codice</a:t>
+            </a:r>
+            <a:endParaRPr lang="en-US" sz="1500" dirty="0"/>
+          </a:p>
+        </p:txBody>
+      </p:sp>
+      <p:sp>
+        <p:nvSpPr>
+          <p:cNvPr id="9" name="Text 6"/>
+          <p:cNvSpPr/>
+          <p:nvPr/>
+        </p:nvSpPr>
+        <p:spPr>
+          <a:xfrm>
+            <a:off x="868680" y="2532888"/>
+            <a:ext cx="3337560" cy="1508760"/>
+          </a:xfrm>
+          <a:prstGeom prst="rect">
+            <a:avLst/>
+          </a:prstGeom>
+          <a:noFill/>
+          <a:ln/>
+        </p:spPr>
+        <p:txBody>
+          <a:bodyPr wrap="square" lIns="0" tIns="0" rIns="0" bIns="0" rtlCol="0" anchor="t"/>
+          <a:lstStyle/>
+          <a:p>
+            <a:pPr indent="0" marL="0">
+              <a:lnSpc>
+                <a:spcPct val="118000"/>
+              </a:lnSpc>
+              <a:buNone/>
+            </a:pPr>
+            <a:r>
+              <a:rPr lang="en-US" sz="1150" dirty="0">
+                <a:solidFill>
+                  <a:srgbClr val="AEBDE0"/>
+                </a:solidFill>
+                <a:latin typeface="Arial" pitchFamily="34" charset="0"/>
+                <a:ea typeface="Arial" pitchFamily="34" charset="-122"/>
+                <a:cs typeface="Arial" pitchFamily="34" charset="-120"/>
+              </a:rPr>
+              <a:t>L'app, gli script di build, i testi dello store. Tu descrivi cosa vuoi, lui costruisce e corregge finché funziona.</a:t>
+            </a:r>
+            <a:endParaRPr lang="en-US" sz="1150" dirty="0"/>
+          </a:p>
+        </p:txBody>
+      </p:sp>
+      <p:sp>
+        <p:nvSpPr>
+          <p:cNvPr id="10" name="Shape 7"/>
+          <p:cNvSpPr/>
+          <p:nvPr/>
+        </p:nvSpPr>
+        <p:spPr>
+          <a:xfrm>
+            <a:off x="4709160" y="1691640"/>
+            <a:ext cx="3794760" cy="2468880"/>
+          </a:xfrm>
+          <a:prstGeom prst="roundRect">
+            <a:avLst>
+              <a:gd name="adj" fmla="val 2963"/>
+            </a:avLst>
+          </a:prstGeom>
+          <a:solidFill>
+            <a:srgbClr val="16203F"/>
+          </a:solidFill>
+          <a:ln w="9525">
+            <a:solidFill>
+              <a:srgbClr val="2A3A6B"/>
+            </a:solidFill>
+            <a:prstDash val="solid"/>
+          </a:ln>
+        </p:spPr>
+      </p:sp>
+      <p:sp>
+        <p:nvSpPr>
+          <p:cNvPr id="11" name="Shape 8"/>
+          <p:cNvSpPr/>
+          <p:nvPr/>
+        </p:nvSpPr>
+        <p:spPr>
+          <a:xfrm>
+            <a:off x="4937760" y="1920240"/>
+            <a:ext cx="502920" cy="502920"/>
+          </a:xfrm>
+          <a:prstGeom prst="ellipse">
+            <a:avLst/>
+          </a:prstGeom>
+          <a:solidFill>
+            <a:srgbClr val="0E3A44"/>
+          </a:solidFill>
+          <a:ln w="12700">
+            <a:solidFill>
+              <a:srgbClr val="0E3A44"/>
+            </a:solidFill>
+            <a:prstDash val="solid"/>
+          </a:ln>
+        </p:spPr>
+      </p:sp>
+      <p:pic>
+        <p:nvPicPr>
+          <p:cNvPr id="12" name="Image 1" descr="preencoded.png">    </p:cNvPr>
+          <p:cNvPicPr>
+            <a:picLocks noChangeAspect="1"/>
+          </p:cNvPicPr>
+          <p:nvPr/>
+        </p:nvPicPr>
+        <p:blipFill>
+          <a:blip r:embed="rId2"/>
+          <a:stretch>
+            <a:fillRect/>
+          </a:stretch>
+        </p:blipFill>
+        <p:spPr>
+          <a:xfrm>
+            <a:off x="5073548" y="2056028"/>
+            <a:ext cx="231343" cy="231343"/>
+          </a:xfrm>
+          <a:prstGeom prst="rect">
+            <a:avLst/>
+          </a:prstGeom>
+        </p:spPr>
+      </p:pic>
+      <p:sp>
+        <p:nvSpPr>
+          <p:cNvPr id="13" name="Text 9"/>
+          <p:cNvSpPr/>
+          <p:nvPr/>
+        </p:nvSpPr>
+        <p:spPr>
+          <a:xfrm>
+            <a:off x="5577840" y="1920240"/>
+            <a:ext cx="2743200" cy="502920"/>
+          </a:xfrm>
+          <a:prstGeom prst="rect">
+            <a:avLst/>
+          </a:prstGeom>
+          <a:noFill/>
+          <a:ln/>
+        </p:spPr>
+        <p:txBody>
+          <a:bodyPr wrap="square" lIns="0" tIns="0" rIns="0" bIns="0" rtlCol="0" anchor="ctr"/>
+          <a:lstStyle/>
+          <a:p>
+            <a:pPr indent="0" marL="0">
+              <a:buNone/>
+            </a:pPr>
+            <a:r>
+              <a:rPr lang="en-US" sz="1500" b="1" dirty="0">
+                <a:solidFill>
+                  <a:srgbClr val="F4F7FF"/>
+                </a:solidFill>
+                <a:latin typeface="Arial" pitchFamily="34" charset="0"/>
+                <a:ea typeface="Arial" pitchFamily="34" charset="-122"/>
+                <a:cs typeface="Arial" pitchFamily="34" charset="-120"/>
+              </a:rPr>
+              <a:t>Ti guida passo-passo</a:t>
+            </a:r>
+            <a:endParaRPr lang="en-US" sz="1500" dirty="0"/>
+          </a:p>
+        </p:txBody>
+      </p:sp>
+      <p:sp>
+        <p:nvSpPr>
+          <p:cNvPr id="14" name="Text 10"/>
+          <p:cNvSpPr/>
+          <p:nvPr/>
+        </p:nvSpPr>
+        <p:spPr>
+          <a:xfrm>
+            <a:off x="4937760" y="2532888"/>
+            <a:ext cx="3337560" cy="1508760"/>
+          </a:xfrm>
+          <a:prstGeom prst="rect">
+            <a:avLst/>
+          </a:prstGeom>
+          <a:noFill/>
+          <a:ln/>
+        </p:spPr>
+        <p:txBody>
+          <a:bodyPr wrap="square" lIns="0" tIns="0" rIns="0" bIns="0" rtlCol="0" anchor="t"/>
+          <a:lstStyle/>
+          <a:p>
+            <a:pPr indent="0" marL="0">
+              <a:lnSpc>
+                <a:spcPct val="118000"/>
+              </a:lnSpc>
+              <a:buNone/>
+            </a:pPr>
+            <a:r>
+              <a:rPr lang="en-US" sz="1150" dirty="0">
+                <a:solidFill>
+                  <a:srgbClr val="AEBDE0"/>
+                </a:solidFill>
+                <a:latin typeface="Arial" pitchFamily="34" charset="0"/>
+                <a:ea typeface="Arial" pitchFamily="34" charset="-122"/>
+                <a:cs typeface="Arial" pitchFamily="34" charset="-120"/>
+              </a:rPr>
+              <a:t>Come aprire l'account sviluppatore, configurare i servizi, firmare e caricare l'app. Le guide operative, non solo il codice.</a:t>
+            </a:r>
+            <a:endParaRPr lang="en-US" sz="1150" dirty="0"/>
+          </a:p>
+        </p:txBody>
+      </p:sp>
+      <p:sp>
+        <p:nvSpPr>
+          <p:cNvPr id="15" name="Text 11"/>
+          <p:cNvSpPr/>
+          <p:nvPr/>
+        </p:nvSpPr>
+        <p:spPr>
+          <a:xfrm>
+            <a:off x="640080" y="4343400"/>
+            <a:ext cx="7863840" cy="365760"/>
+          </a:xfrm>
+          <a:prstGeom prst="rect">
+            <a:avLst/>
+          </a:prstGeom>
+          <a:noFill/>
+          <a:ln/>
+        </p:spPr>
+        <p:txBody>
+          <a:bodyPr wrap="square" lIns="0" tIns="0" rIns="0" bIns="0" rtlCol="0" anchor="ctr"/>
+          <a:lstStyle/>
+          <a:p>
+            <a:pPr algn="ctr" indent="0" marL="0">
+              <a:buNone/>
+            </a:pPr>
+            <a:r>
+              <a:rPr lang="en-US" sz="1300" i="1" dirty="0">
+                <a:solidFill>
+                  <a:srgbClr val="2BD9E5"/>
+                </a:solidFill>
+                <a:latin typeface="Arial" pitchFamily="34" charset="0"/>
+                <a:ea typeface="Arial" pitchFamily="34" charset="-122"/>
+                <a:cs typeface="Arial" pitchFamily="34" charset="-120"/>
+              </a:rPr>
+              <a:t>Resti tu al comando: leggi, capisci, approvi.</a:t>
+            </a:r>
+            <a:endParaRPr lang="en-US" sz="1300" dirty="0"/>
+          </a:p>
+        </p:txBody>
+      </p:sp>
+    </p:spTree>
+  </p:cSld>
+  <p:clrMapOvr>
+    <a:masterClrMapping/>
+  </p:clrMapOvr>
+</p:sld>
+</file>
+
+<file path=ppt/slides/slide13.xml><?xml version="1.0" encoding="utf-8"?>
+<p:sld xmlns:a="http://schemas.openxmlformats.org/drawingml/2006/main" xmlns:r="http://schemas.openxmlformats.org/officeDocument/2006/relationships" xmlns:p="http://schemas.openxmlformats.org/presentationml/2006/main">
+  <p:cSld name="Slide 13">
+    <p:bg>
+      <p:bgPr>
+        <a:solidFill>
+          <a:srgbClr val="0B1226"/>
+        </a:solidFill>
+      </p:bgPr>
+    </p:bg>
+    <p:spTree>
+      <p:nvGrpSpPr>
+        <p:cNvPr id="1" name=""/>
+        <p:cNvGrpSpPr/>
+        <p:nvPr/>
+      </p:nvGrpSpPr>
+      <p:grpSpPr>
+        <a:xfrm>
+          <a:off x="0" y="0"/>
+          <a:ext cx="0" cy="0"/>
+          <a:chOff x="0" y="0"/>
+          <a:chExt cx="0" cy="0"/>
+        </a:xfrm>
+      </p:grpSpPr>
+      <p:sp>
+        <p:nvSpPr>
+          <p:cNvPr id="2" name="Text 0"/>
+          <p:cNvSpPr/>
+          <p:nvPr/>
+        </p:nvSpPr>
+        <p:spPr>
+          <a:xfrm>
+            <a:off x="640080" y="365760"/>
+            <a:ext cx="8229600" cy="274320"/>
+          </a:xfrm>
+          <a:prstGeom prst="rect">
+            <a:avLst/>
+          </a:prstGeom>
+          <a:noFill/>
+          <a:ln/>
+        </p:spPr>
+        <p:txBody>
+          <a:bodyPr wrap="square" lIns="0" tIns="0" rIns="0" bIns="0" rtlCol="0" anchor="ctr"/>
+          <a:lstStyle/>
+          <a:p>
+            <a:pPr indent="0" marL="0">
+              <a:buNone/>
+            </a:pPr>
+            <a:r>
+              <a:rPr lang="en-US" sz="1100" b="1" spc="200" kern="0" dirty="0">
+                <a:solidFill>
+                  <a:srgbClr val="2BD9E5"/>
+                </a:solidFill>
+                <a:latin typeface="Arial" pitchFamily="34" charset="0"/>
+                <a:ea typeface="Arial" pitchFamily="34" charset="-122"/>
+                <a:cs typeface="Arial" pitchFamily="34" charset="-120"/>
+              </a:rPr>
+              <a:t>CHIEDILO A CLAUDE CODE · 3 · TESTA</a:t>
+            </a:r>
+            <a:endParaRPr lang="en-US" sz="1100" dirty="0"/>
+          </a:p>
+        </p:txBody>
+      </p:sp>
+      <p:sp>
+        <p:nvSpPr>
+          <p:cNvPr id="3" name="Text 1"/>
+          <p:cNvSpPr/>
+          <p:nvPr/>
+        </p:nvSpPr>
+        <p:spPr>
+          <a:xfrm>
+            <a:off x="640080" y="640080"/>
+            <a:ext cx="7863840" cy="566928"/>
+          </a:xfrm>
+          <a:prstGeom prst="rect">
+            <a:avLst/>
+          </a:prstGeom>
+          <a:noFill/>
+          <a:ln/>
+        </p:spPr>
+        <p:txBody>
+          <a:bodyPr wrap="square" lIns="0" tIns="0" rIns="0" bIns="0" rtlCol="0" anchor="ctr"/>
+          <a:lstStyle/>
+          <a:p>
+            <a:pPr indent="0" marL="0">
+              <a:buNone/>
+            </a:pPr>
+            <a:r>
+              <a:rPr lang="en-US" sz="3000" dirty="0">
+                <a:solidFill>
+                  <a:srgbClr val="F4F7FF"/>
+                </a:solidFill>
+                <a:latin typeface="Arial Black" pitchFamily="34" charset="0"/>
+                <a:ea typeface="Arial Black" pitchFamily="34" charset="-122"/>
+                <a:cs typeface="Arial Black" pitchFamily="34" charset="-120"/>
+              </a:rPr>
+              <a:t>Testa</a:t>
+            </a:r>
+            <a:endParaRPr lang="en-US" sz="3000" dirty="0"/>
+          </a:p>
+        </p:txBody>
+      </p:sp>
+      <p:sp>
+        <p:nvSpPr>
+          <p:cNvPr id="4" name="Text 2"/>
+          <p:cNvSpPr/>
+          <p:nvPr/>
+        </p:nvSpPr>
+        <p:spPr>
+          <a:xfrm>
+            <a:off x="658368" y="1188720"/>
+            <a:ext cx="7772400" cy="292608"/>
+          </a:xfrm>
+          <a:prstGeom prst="rect">
+            <a:avLst/>
+          </a:prstGeom>
+          <a:noFill/>
+          <a:ln/>
+        </p:spPr>
+        <p:txBody>
+          <a:bodyPr wrap="square" lIns="0" tIns="0" rIns="0" bIns="0" rtlCol="0" anchor="ctr"/>
+          <a:lstStyle/>
+          <a:p>
+            <a:pPr indent="0" marL="0">
+              <a:buNone/>
+            </a:pPr>
+            <a:r>
+              <a:rPr lang="en-US" sz="1350" i="1" dirty="0">
+                <a:solidFill>
+                  <a:srgbClr val="AEBDE0"/>
+                </a:solidFill>
+                <a:latin typeface="Arial" pitchFamily="34" charset="0"/>
+                <a:ea typeface="Arial" pitchFamily="34" charset="-122"/>
+                <a:cs typeface="Arial" pitchFamily="34" charset="-120"/>
+              </a:rPr>
+              <a:t>Fino al 90% dei test li fa Claude da solo — in due modi.</a:t>
+            </a:r>
+            <a:endParaRPr lang="en-US" sz="1350" dirty="0"/>
+          </a:p>
+        </p:txBody>
+      </p:sp>
+      <p:sp>
+        <p:nvSpPr>
+          <p:cNvPr id="5" name="Shape 3"/>
+          <p:cNvSpPr/>
+          <p:nvPr/>
+        </p:nvSpPr>
+        <p:spPr>
+          <a:xfrm>
+            <a:off x="640080" y="1691640"/>
+            <a:ext cx="3794760" cy="2331720"/>
+          </a:xfrm>
+          <a:prstGeom prst="roundRect">
+            <a:avLst>
+              <a:gd name="adj" fmla="val 3137"/>
+            </a:avLst>
+          </a:prstGeom>
+          <a:solidFill>
+            <a:srgbClr val="16203F"/>
+          </a:solidFill>
+          <a:ln w="9525">
+            <a:solidFill>
+              <a:srgbClr val="2A3A6B"/>
+            </a:solidFill>
+            <a:prstDash val="solid"/>
+          </a:ln>
+        </p:spPr>
+      </p:sp>
+      <p:sp>
+        <p:nvSpPr>
+          <p:cNvPr id="6" name="Shape 4"/>
+          <p:cNvSpPr/>
+          <p:nvPr/>
+        </p:nvSpPr>
+        <p:spPr>
+          <a:xfrm>
+            <a:off x="868680" y="1920240"/>
+            <a:ext cx="502920" cy="502920"/>
+          </a:xfrm>
+          <a:prstGeom prst="ellipse">
+            <a:avLst/>
+          </a:prstGeom>
+          <a:solidFill>
+            <a:srgbClr val="0E3A44"/>
+          </a:solidFill>
+          <a:ln w="12700">
+            <a:solidFill>
+              <a:srgbClr val="0E3A44"/>
+            </a:solidFill>
+            <a:prstDash val="solid"/>
+          </a:ln>
+        </p:spPr>
+      </p:sp>
+      <p:pic>
+        <p:nvPicPr>
+          <p:cNvPr id="7" name="Image 0" descr="preencoded.png">    </p:cNvPr>
+          <p:cNvPicPr>
+            <a:picLocks noChangeAspect="1"/>
+          </p:cNvPicPr>
+          <p:nvPr/>
+        </p:nvPicPr>
+        <p:blipFill>
+          <a:blip r:embed="rId1"/>
+          <a:stretch>
+            <a:fillRect/>
+          </a:stretch>
+        </p:blipFill>
+        <p:spPr>
+          <a:xfrm>
+            <a:off x="1004468" y="2056028"/>
+            <a:ext cx="231343" cy="231343"/>
+          </a:xfrm>
+          <a:prstGeom prst="rect">
+            <a:avLst/>
+          </a:prstGeom>
+        </p:spPr>
+      </p:pic>
+      <p:sp>
+        <p:nvSpPr>
+          <p:cNvPr id="8" name="Text 5"/>
+          <p:cNvSpPr/>
+          <p:nvPr/>
+        </p:nvSpPr>
+        <p:spPr>
+          <a:xfrm>
+            <a:off x="1508760" y="1920240"/>
+            <a:ext cx="2743200" cy="502920"/>
+          </a:xfrm>
+          <a:prstGeom prst="rect">
+            <a:avLst/>
+          </a:prstGeom>
+          <a:noFill/>
+          <a:ln/>
+        </p:spPr>
+        <p:txBody>
+          <a:bodyPr wrap="square" lIns="0" tIns="0" rIns="0" bIns="0" rtlCol="0" anchor="ctr"/>
+          <a:lstStyle/>
+          <a:p>
+            <a:pPr indent="0" marL="0">
+              <a:buNone/>
+            </a:pPr>
+            <a:r>
+              <a:rPr lang="en-US" sz="1500" b="1" dirty="0">
+                <a:solidFill>
+                  <a:srgbClr val="F4F7FF"/>
+                </a:solidFill>
+                <a:latin typeface="Arial" pitchFamily="34" charset="0"/>
+                <a:ea typeface="Arial" pitchFamily="34" charset="-122"/>
+                <a:cs typeface="Arial" pitchFamily="34" charset="-120"/>
+              </a:rPr>
+              <a:t>Nel browser</a:t>
+            </a:r>
+            <a:endParaRPr lang="en-US" sz="1500" dirty="0"/>
+          </a:p>
+        </p:txBody>
+      </p:sp>
+      <p:sp>
+        <p:nvSpPr>
+          <p:cNvPr id="9" name="Text 6"/>
+          <p:cNvSpPr/>
+          <p:nvPr/>
+        </p:nvSpPr>
+        <p:spPr>
+          <a:xfrm>
+            <a:off x="868680" y="2532888"/>
+            <a:ext cx="3337560" cy="1371600"/>
+          </a:xfrm>
+          <a:prstGeom prst="rect">
+            <a:avLst/>
+          </a:prstGeom>
+          <a:noFill/>
+          <a:ln/>
+        </p:spPr>
+        <p:txBody>
+          <a:bodyPr wrap="square" lIns="0" tIns="0" rIns="0" bIns="0" rtlCol="0" anchor="t"/>
+          <a:lstStyle/>
+          <a:p>
+            <a:pPr indent="0" marL="0">
+              <a:lnSpc>
+                <a:spcPct val="118000"/>
+              </a:lnSpc>
+              <a:buNone/>
+            </a:pPr>
+            <a:r>
+              <a:rPr lang="en-US" sz="1150" dirty="0">
+                <a:solidFill>
+                  <a:srgbClr val="AEBDE0"/>
+                </a:solidFill>
+                <a:latin typeface="Arial" pitchFamily="34" charset="0"/>
+                <a:ea typeface="Arial" pitchFamily="34" charset="-122"/>
+                <a:cs typeface="Arial" pitchFamily="34" charset="-120"/>
+              </a:rPr>
+              <a:t>Claude crea una web app identica alla tua app Android e la prova lui stesso, con Claude in Chrome, direttamente nel tuo browser.</a:t>
+            </a:r>
+            <a:endParaRPr lang="en-US" sz="1150" dirty="0"/>
+          </a:p>
+        </p:txBody>
+      </p:sp>
+      <p:sp>
+        <p:nvSpPr>
+          <p:cNvPr id="10" name="Shape 7"/>
+          <p:cNvSpPr/>
+          <p:nvPr/>
+        </p:nvSpPr>
+        <p:spPr>
+          <a:xfrm>
+            <a:off x="4709160" y="1691640"/>
+            <a:ext cx="3794760" cy="2331720"/>
+          </a:xfrm>
+          <a:prstGeom prst="roundRect">
+            <a:avLst>
+              <a:gd name="adj" fmla="val 3137"/>
+            </a:avLst>
+          </a:prstGeom>
+          <a:solidFill>
+            <a:srgbClr val="16203F"/>
+          </a:solidFill>
+          <a:ln w="9525">
+            <a:solidFill>
+              <a:srgbClr val="2A3A6B"/>
+            </a:solidFill>
+            <a:prstDash val="solid"/>
+          </a:ln>
+        </p:spPr>
+      </p:sp>
+      <p:sp>
+        <p:nvSpPr>
+          <p:cNvPr id="11" name="Shape 8"/>
+          <p:cNvSpPr/>
+          <p:nvPr/>
+        </p:nvSpPr>
+        <p:spPr>
+          <a:xfrm>
+            <a:off x="4937760" y="1920240"/>
+            <a:ext cx="502920" cy="502920"/>
+          </a:xfrm>
+          <a:prstGeom prst="ellipse">
+            <a:avLst/>
+          </a:prstGeom>
+          <a:solidFill>
+            <a:srgbClr val="0E3A44"/>
+          </a:solidFill>
+          <a:ln w="12700">
+            <a:solidFill>
+              <a:srgbClr val="0E3A44"/>
+            </a:solidFill>
+            <a:prstDash val="solid"/>
+          </a:ln>
+        </p:spPr>
+      </p:sp>
+      <p:pic>
+        <p:nvPicPr>
+          <p:cNvPr id="12" name="Image 1" descr="preencoded.png">    </p:cNvPr>
+          <p:cNvPicPr>
+            <a:picLocks noChangeAspect="1"/>
+          </p:cNvPicPr>
+          <p:nvPr/>
+        </p:nvPicPr>
+        <p:blipFill>
+          <a:blip r:embed="rId2"/>
+          <a:stretch>
+            <a:fillRect/>
+          </a:stretch>
+        </p:blipFill>
+        <p:spPr>
+          <a:xfrm>
+            <a:off x="5073548" y="2056028"/>
+            <a:ext cx="231343" cy="231343"/>
+          </a:xfrm>
+          <a:prstGeom prst="rect">
+            <a:avLst/>
+          </a:prstGeom>
+        </p:spPr>
+      </p:pic>
+      <p:sp>
+        <p:nvSpPr>
+          <p:cNvPr id="13" name="Text 9"/>
+          <p:cNvSpPr/>
+          <p:nvPr/>
+        </p:nvSpPr>
+        <p:spPr>
+          <a:xfrm>
+            <a:off x="5577840" y="1920240"/>
+            <a:ext cx="2743200" cy="502920"/>
+          </a:xfrm>
+          <a:prstGeom prst="rect">
+            <a:avLst/>
+          </a:prstGeom>
+          <a:noFill/>
+          <a:ln/>
+        </p:spPr>
+        <p:txBody>
+          <a:bodyPr wrap="square" lIns="0" tIns="0" rIns="0" bIns="0" rtlCol="0" anchor="ctr"/>
+          <a:lstStyle/>
+          <a:p>
+            <a:pPr indent="0" marL="0">
+              <a:buNone/>
+            </a:pPr>
+            <a:r>
+              <a:rPr lang="en-US" sz="1500" b="1" dirty="0">
+                <a:solidFill>
+                  <a:srgbClr val="F4F7FF"/>
+                </a:solidFill>
+                <a:latin typeface="Arial" pitchFamily="34" charset="0"/>
+                <a:ea typeface="Arial" pitchFamily="34" charset="-122"/>
+                <a:cs typeface="Arial" pitchFamily="34" charset="-120"/>
+              </a:rPr>
+              <a:t>Sul telefono</a:t>
+            </a:r>
+            <a:endParaRPr lang="en-US" sz="1500" dirty="0"/>
+          </a:p>
+        </p:txBody>
+      </p:sp>
+      <p:sp>
+        <p:nvSpPr>
+          <p:cNvPr id="14" name="Text 10"/>
+          <p:cNvSpPr/>
+          <p:nvPr/>
+        </p:nvSpPr>
+        <p:spPr>
+          <a:xfrm>
+            <a:off x="4937760" y="2532888"/>
+            <a:ext cx="3337560" cy="1371600"/>
+          </a:xfrm>
+          <a:prstGeom prst="rect">
+            <a:avLst/>
+          </a:prstGeom>
+          <a:noFill/>
+          <a:ln/>
+        </p:spPr>
+        <p:txBody>
+          <a:bodyPr wrap="square" lIns="0" tIns="0" rIns="0" bIns="0" rtlCol="0" anchor="t"/>
+          <a:lstStyle/>
+          <a:p>
+            <a:pPr indent="0" marL="0">
+              <a:lnSpc>
+                <a:spcPct val="118000"/>
+              </a:lnSpc>
+              <a:buNone/>
+            </a:pPr>
+            <a:r>
+              <a:rPr lang="en-US" sz="1150" dirty="0">
+                <a:solidFill>
+                  <a:srgbClr val="AEBDE0"/>
+                </a:solidFill>
+                <a:latin typeface="Arial" pitchFamily="34" charset="0"/>
+                <a:ea typeface="Arial" pitchFamily="34" charset="-122"/>
+                <a:cs typeface="Arial" pitchFamily="34" charset="-120"/>
+              </a:rPr>
+              <a:t>Colleghi il telefono via USB e gli dai accesso con ADB (o l'equivalente Apple). Fa screenshot, tocca i punti giusti, verifica i risultati e valuta anche i video.</a:t>
+            </a:r>
+            <a:endParaRPr lang="en-US" sz="1150" dirty="0"/>
+          </a:p>
+        </p:txBody>
+      </p:sp>
+      <p:sp>
+        <p:nvSpPr>
+          <p:cNvPr id="15" name="Shape 11"/>
+          <p:cNvSpPr/>
+          <p:nvPr/>
+        </p:nvSpPr>
+        <p:spPr>
+          <a:xfrm>
+            <a:off x="640080" y="4206240"/>
+            <a:ext cx="7863840" cy="548640"/>
+          </a:xfrm>
+          <a:prstGeom prst="roundRect">
+            <a:avLst>
+              <a:gd name="adj" fmla="val 10000"/>
+            </a:avLst>
+          </a:prstGeom>
+          <a:solidFill>
+            <a:srgbClr val="0E3A44"/>
+          </a:solidFill>
+          <a:ln w="6350">
+            <a:solidFill>
+              <a:srgbClr val="2BD9E5"/>
+            </a:solidFill>
+            <a:prstDash val="solid"/>
+          </a:ln>
+        </p:spPr>
+      </p:sp>
+      <p:sp>
+        <p:nvSpPr>
+          <p:cNvPr id="16" name="Text 12"/>
+          <p:cNvSpPr/>
+          <p:nvPr/>
+        </p:nvSpPr>
+        <p:spPr>
+          <a:xfrm>
+            <a:off x="822960" y="4206240"/>
+            <a:ext cx="7498080" cy="548640"/>
+          </a:xfrm>
+          <a:prstGeom prst="rect">
+            <a:avLst/>
+          </a:prstGeom>
+          <a:noFill/>
+          <a:ln/>
+        </p:spPr>
+        <p:txBody>
+          <a:bodyPr wrap="square" lIns="0" tIns="0" rIns="0" bIns="0" rtlCol="0" anchor="ctr"/>
+          <a:lstStyle/>
+          <a:p>
+            <a:pPr algn="ctr" indent="0" marL="0">
+              <a:buNone/>
+            </a:pPr>
+            <a:r>
+              <a:rPr lang="en-US" sz="1250" dirty="0">
+                <a:solidFill>
+                  <a:srgbClr val="F4F7FF"/>
+                </a:solidFill>
+                <a:latin typeface="Arial" pitchFamily="34" charset="0"/>
+                <a:ea typeface="Arial" pitchFamily="34" charset="-122"/>
+                <a:cs typeface="Arial" pitchFamily="34" charset="-120"/>
+              </a:rPr>
+              <a:t>Ti spiega anche come autorizzare l'accesso al telefono, passo per passo.</a:t>
+            </a:r>
+            <a:endParaRPr lang="en-US" sz="1250" dirty="0"/>
+          </a:p>
+        </p:txBody>
+      </p:sp>
+    </p:spTree>
+  </p:cSld>
+  <p:clrMapOvr>
+    <a:masterClrMapping/>
+  </p:clrMapOvr>
+</p:sld>
+</file>
+
 <file path=ppt/slides/slide2.xml><?xml version="1.0" encoding="utf-8"?>
 <p:sld xmlns:a="http://schemas.openxmlformats.org/drawingml/2006/main" xmlns:r="http://schemas.openxmlformats.org/officeDocument/2006/relationships" xmlns:p="http://schemas.openxmlformats.org/presentationml/2006/main">
   <p:cSld name="Slide 2">
@@ -1930,24 +4928,24 @@
         </p:nvSpPr>
         <p:spPr>
           <a:xfrm>
-            <a:off x="640080" y="347472"/>
-            <a:ext cx="7863840" cy="274320"/>
-          </a:xfrm>
-          <a:prstGeom prst="rect">
-            <a:avLst/>
-          </a:prstGeom>
-          <a:noFill/>
-          <a:ln/>
-        </p:spPr>
-        <p:txBody>
-          <a:bodyPr wrap="square" lIns="0" tIns="0" rIns="0" bIns="0" rtlCol="0" anchor="ctr"/>
-          <a:lstStyle/>
-          <a:p>
-            <a:pPr indent="0" marL="0">
-              <a:buNone/>
-            </a:pPr>
-            <a:r>
-              <a:rPr lang="en-US" sz="1100" b="1" spc="300" kern="0" dirty="0">
+            <a:off x="640080" y="365760"/>
+            <a:ext cx="8229600" cy="274320"/>
+          </a:xfrm>
+          <a:prstGeom prst="rect">
+            <a:avLst/>
+          </a:prstGeom>
+          <a:noFill/>
+          <a:ln/>
+        </p:spPr>
+        <p:txBody>
+          <a:bodyPr wrap="square" lIns="0" tIns="0" rIns="0" bIns="0" rtlCol="0" anchor="ctr"/>
+          <a:lstStyle/>
+          <a:p>
+            <a:pPr indent="0" marL="0">
+              <a:buNone/>
+            </a:pPr>
+            <a:r>
+              <a:rPr lang="en-US" sz="1100" b="1" spc="200" kern="0" dirty="0">
                 <a:solidFill>
                   <a:srgbClr val="2BD9E5"/>
                 </a:solidFill>
@@ -1969,7 +4967,7 @@
         </p:nvSpPr>
         <p:spPr>
           <a:xfrm>
-            <a:off x="640080" y="621792"/>
+            <a:off x="640080" y="640080"/>
             <a:ext cx="7863840" cy="566928"/>
           </a:xfrm>
           <a:prstGeom prst="rect">
@@ -2008,12 +5006,12 @@
         </p:nvSpPr>
         <p:spPr>
           <a:xfrm>
-            <a:off x="640080" y="1463040"/>
-            <a:ext cx="3794760" cy="1572768"/>
+            <a:off x="640080" y="1554480"/>
+            <a:ext cx="2496312" cy="2423160"/>
           </a:xfrm>
           <a:prstGeom prst="roundRect">
             <a:avLst>
-              <a:gd name="adj" fmla="val 4651"/>
+              <a:gd name="adj" fmla="val 3019"/>
             </a:avLst>
           </a:prstGeom>
           <a:solidFill>
@@ -2035,8 +5033,8 @@
         </p:nvSpPr>
         <p:spPr>
           <a:xfrm>
-            <a:off x="868680" y="1691640"/>
-            <a:ext cx="475488" cy="475488"/>
+            <a:off x="868680" y="1783080"/>
+            <a:ext cx="502920" cy="502920"/>
           </a:xfrm>
           <a:prstGeom prst="ellipse">
             <a:avLst/>
@@ -2044,7 +5042,12 @@
           <a:solidFill>
             <a:srgbClr val="0E3A44"/>
           </a:solidFill>
-          <a:ln/>
+          <a:ln w="12700">
+            <a:solidFill>
+              <a:srgbClr val="0E3A44"/>
+            </a:solidFill>
+            <a:prstDash val="solid"/>
+          </a:ln>
         </p:spPr>
       </p:sp>
       <p:pic>
@@ -2063,8 +5066,8 @@
         </p:blipFill>
         <p:spPr>
           <a:xfrm>
-            <a:off x="987552" y="1810512"/>
-            <a:ext cx="237744" cy="237744"/>
+            <a:off x="1004468" y="1918868"/>
+            <a:ext cx="231343" cy="231343"/>
           </a:xfrm>
           <a:prstGeom prst="rect">
             <a:avLst/>
@@ -2079,17 +5082,17 @@
         </p:nvSpPr>
         <p:spPr>
           <a:xfrm>
-            <a:off x="1508760" y="1709928"/>
-            <a:ext cx="2743200" cy="457200"/>
-          </a:xfrm>
-          <a:prstGeom prst="rect">
-            <a:avLst/>
-          </a:prstGeom>
-          <a:noFill/>
-          <a:ln/>
-        </p:spPr>
-        <p:txBody>
-          <a:bodyPr wrap="square" lIns="0" tIns="0" rIns="0" bIns="0" rtlCol="0" anchor="ctr"/>
+            <a:off x="868680" y="2395728"/>
+            <a:ext cx="2039112" cy="502920"/>
+          </a:xfrm>
+          <a:prstGeom prst="rect">
+            <a:avLst/>
+          </a:prstGeom>
+          <a:noFill/>
+          <a:ln/>
+        </p:spPr>
+        <p:txBody>
+          <a:bodyPr wrap="square" lIns="0" tIns="0" rIns="0" bIns="0" rtlCol="0" anchor="t"/>
           <a:lstStyle/>
           <a:p>
             <a:pPr indent="0" marL="0">
@@ -2118,8 +5121,8 @@
         </p:nvSpPr>
         <p:spPr>
           <a:xfrm>
-            <a:off x="868680" y="2267712"/>
-            <a:ext cx="3337560" cy="658368"/>
+            <a:off x="868680" y="2926080"/>
+            <a:ext cx="2039112" cy="914400"/>
           </a:xfrm>
           <a:prstGeom prst="rect">
             <a:avLst/>
@@ -2133,7 +5136,7 @@
           <a:p>
             <a:pPr indent="0" marL="0">
               <a:lnSpc>
-                <a:spcPct val="115000"/>
+                <a:spcPct val="118000"/>
               </a:lnSpc>
               <a:buNone/>
             </a:pPr>
@@ -2160,12 +5163,12 @@
         </p:nvSpPr>
         <p:spPr>
           <a:xfrm>
-            <a:off x="4709160" y="1463040"/>
-            <a:ext cx="3794760" cy="1572768"/>
+            <a:off x="3337560" y="1554480"/>
+            <a:ext cx="2496312" cy="2423160"/>
           </a:xfrm>
           <a:prstGeom prst="roundRect">
             <a:avLst>
-              <a:gd name="adj" fmla="val 4651"/>
+              <a:gd name="adj" fmla="val 3019"/>
             </a:avLst>
           </a:prstGeom>
           <a:solidFill>
@@ -2187,8 +5190,8 @@
         </p:nvSpPr>
         <p:spPr>
           <a:xfrm>
-            <a:off x="4937760" y="1691640"/>
-            <a:ext cx="475488" cy="475488"/>
+            <a:off x="3566160" y="1783080"/>
+            <a:ext cx="502920" cy="502920"/>
           </a:xfrm>
           <a:prstGeom prst="ellipse">
             <a:avLst/>
@@ -2196,7 +5199,12 @@
           <a:solidFill>
             <a:srgbClr val="0E3A44"/>
           </a:solidFill>
-          <a:ln/>
+          <a:ln w="12700">
+            <a:solidFill>
+              <a:srgbClr val="0E3A44"/>
+            </a:solidFill>
+            <a:prstDash val="solid"/>
+          </a:ln>
         </p:spPr>
       </p:sp>
       <p:pic>
@@ -2215,8 +5223,8 @@
         </p:blipFill>
         <p:spPr>
           <a:xfrm>
-            <a:off x="5056632" y="1810512"/>
-            <a:ext cx="237744" cy="237744"/>
+            <a:off x="3701948" y="1918868"/>
+            <a:ext cx="231343" cy="231343"/>
           </a:xfrm>
           <a:prstGeom prst="rect">
             <a:avLst/>
@@ -2231,17 +5239,17 @@
         </p:nvSpPr>
         <p:spPr>
           <a:xfrm>
-            <a:off x="5577840" y="1709928"/>
-            <a:ext cx="2743200" cy="457200"/>
-          </a:xfrm>
-          <a:prstGeom prst="rect">
-            <a:avLst/>
-          </a:prstGeom>
-          <a:noFill/>
-          <a:ln/>
-        </p:spPr>
-        <p:txBody>
-          <a:bodyPr wrap="square" lIns="0" tIns="0" rIns="0" bIns="0" rtlCol="0" anchor="ctr"/>
+            <a:off x="3566160" y="2395728"/>
+            <a:ext cx="2039112" cy="502920"/>
+          </a:xfrm>
+          <a:prstGeom prst="rect">
+            <a:avLst/>
+          </a:prstGeom>
+          <a:noFill/>
+          <a:ln/>
+        </p:spPr>
+        <p:txBody>
+          <a:bodyPr wrap="square" lIns="0" tIns="0" rIns="0" bIns="0" rtlCol="0" anchor="t"/>
           <a:lstStyle/>
           <a:p>
             <a:pPr indent="0" marL="0">
@@ -2256,7 +5264,7 @@
                 <a:ea typeface="Arial" pitchFamily="34" charset="-122"/>
                 <a:cs typeface="Arial" pitchFamily="34" charset="-120"/>
               </a:rPr>
-              <a:t>ElevenLabs</a:t>
+              <a:t>Emulatore Android</a:t>
             </a:r>
             <a:endParaRPr lang="en-US" sz="1500" dirty="0"/>
           </a:p>
@@ -2270,8 +5278,8 @@
         </p:nvSpPr>
         <p:spPr>
           <a:xfrm>
-            <a:off x="4937760" y="2267712"/>
-            <a:ext cx="3337560" cy="658368"/>
+            <a:off x="3566160" y="2926080"/>
+            <a:ext cx="2039112" cy="914400"/>
           </a:xfrm>
           <a:prstGeom prst="rect">
             <a:avLst/>
@@ -2285,7 +5293,7 @@
           <a:p>
             <a:pPr indent="0" marL="0">
               <a:lnSpc>
-                <a:spcPct val="115000"/>
+                <a:spcPct val="118000"/>
               </a:lnSpc>
               <a:buNone/>
             </a:pPr>
@@ -2298,7 +5306,7 @@
                 <a:ea typeface="Arial" pitchFamily="34" charset="-122"/>
                 <a:cs typeface="Arial" pitchFamily="34" charset="-120"/>
               </a:rPr>
-              <a:t>Le voci dell'app. Il countdown vocale «3, 2, 1» è generato dall'AI, in italiano e in inglese.</a:t>
+              <a:t>Un telefono virtuale sul PC. L'AI ci installa l'app, la prova da sola e verifica le modifiche.</a:t>
             </a:r>
             <a:endParaRPr lang="en-US" sz="1100" dirty="0"/>
           </a:p>
@@ -2312,12 +5320,12 @@
         </p:nvSpPr>
         <p:spPr>
           <a:xfrm>
-            <a:off x="640080" y="3200400"/>
-            <a:ext cx="3794760" cy="1572768"/>
+            <a:off x="6035040" y="1554480"/>
+            <a:ext cx="2496312" cy="2423160"/>
           </a:xfrm>
           <a:prstGeom prst="roundRect">
             <a:avLst>
-              <a:gd name="adj" fmla="val 4651"/>
+              <a:gd name="adj" fmla="val 3019"/>
             </a:avLst>
           </a:prstGeom>
           <a:solidFill>
@@ -2339,8 +5347,8 @@
         </p:nvSpPr>
         <p:spPr>
           <a:xfrm>
-            <a:off x="868680" y="3429000"/>
-            <a:ext cx="475488" cy="475488"/>
+            <a:off x="6263640" y="1783080"/>
+            <a:ext cx="502920" cy="502920"/>
           </a:xfrm>
           <a:prstGeom prst="ellipse">
             <a:avLst/>
@@ -2348,7 +5356,12 @@
           <a:solidFill>
             <a:srgbClr val="0E3A44"/>
           </a:solidFill>
-          <a:ln/>
+          <a:ln w="12700">
+            <a:solidFill>
+              <a:srgbClr val="0E3A44"/>
+            </a:solidFill>
+            <a:prstDash val="solid"/>
+          </a:ln>
         </p:spPr>
       </p:sp>
       <p:pic>
@@ -2367,8 +5380,8 @@
         </p:blipFill>
         <p:spPr>
           <a:xfrm>
-            <a:off x="987552" y="3547872"/>
-            <a:ext cx="237744" cy="237744"/>
+            <a:off x="6399428" y="1918868"/>
+            <a:ext cx="231343" cy="231343"/>
           </a:xfrm>
           <a:prstGeom prst="rect">
             <a:avLst/>
@@ -2383,17 +5396,17 @@
         </p:nvSpPr>
         <p:spPr>
           <a:xfrm>
-            <a:off x="1508760" y="3447288"/>
-            <a:ext cx="2743200" cy="457200"/>
-          </a:xfrm>
-          <a:prstGeom prst="rect">
-            <a:avLst/>
-          </a:prstGeom>
-          <a:noFill/>
-          <a:ln/>
-        </p:spPr>
-        <p:txBody>
-          <a:bodyPr wrap="square" lIns="0" tIns="0" rIns="0" bIns="0" rtlCol="0" anchor="ctr"/>
+            <a:off x="6263640" y="2395728"/>
+            <a:ext cx="2039112" cy="502920"/>
+          </a:xfrm>
+          <a:prstGeom prst="rect">
+            <a:avLst/>
+          </a:prstGeom>
+          <a:noFill/>
+          <a:ln/>
+        </p:spPr>
+        <p:txBody>
+          <a:bodyPr wrap="square" lIns="0" tIns="0" rIns="0" bIns="0" rtlCol="0" anchor="t"/>
           <a:lstStyle/>
           <a:p>
             <a:pPr indent="0" marL="0">
@@ -2408,7 +5421,7 @@
                 <a:ea typeface="Arial" pitchFamily="34" charset="-122"/>
                 <a:cs typeface="Arial" pitchFamily="34" charset="-120"/>
               </a:rPr>
-              <a:t>Emulatore Android</a:t>
+              <a:t>GitHub</a:t>
             </a:r>
             <a:endParaRPr lang="en-US" sz="1500" dirty="0"/>
           </a:p>
@@ -2422,8 +5435,8 @@
         </p:nvSpPr>
         <p:spPr>
           <a:xfrm>
-            <a:off x="868680" y="4005072"/>
-            <a:ext cx="3337560" cy="658368"/>
+            <a:off x="6263640" y="2926080"/>
+            <a:ext cx="2039112" cy="914400"/>
           </a:xfrm>
           <a:prstGeom prst="rect">
             <a:avLst/>
@@ -2437,7 +5450,7 @@
           <a:p>
             <a:pPr indent="0" marL="0">
               <a:lnSpc>
-                <a:spcPct val="115000"/>
+                <a:spcPct val="118000"/>
               </a:lnSpc>
               <a:buNone/>
             </a:pPr>
@@ -2450,7 +5463,7 @@
                 <a:ea typeface="Arial" pitchFamily="34" charset="-122"/>
                 <a:cs typeface="Arial" pitchFamily="34" charset="-120"/>
               </a:rPr>
-              <a:t>Un telefono virtuale sul PC. L'AI ci installa l'app, la prova da sola e verifica le modifiche.</a:t>
+              <a:t>L'archivio del progetto. Ogni versione salvata, ogni modifica documentata e reversibile.</a:t>
             </a:r>
             <a:endParaRPr lang="en-US" sz="1100" dirty="0"/>
           </a:p>
@@ -2458,153 +5471,40 @@
       </p:sp>
       <p:sp>
         <p:nvSpPr>
-          <p:cNvPr id="19" name="Shape 14"/>
-          <p:cNvSpPr/>
-          <p:nvPr/>
-        </p:nvSpPr>
-        <p:spPr>
-          <a:xfrm>
-            <a:off x="4709160" y="3200400"/>
-            <a:ext cx="3794760" cy="1572768"/>
-          </a:xfrm>
-          <a:prstGeom prst="roundRect">
-            <a:avLst>
-              <a:gd name="adj" fmla="val 4651"/>
-            </a:avLst>
-          </a:prstGeom>
-          <a:solidFill>
-            <a:srgbClr val="16203F"/>
-          </a:solidFill>
-          <a:ln w="9525">
-            <a:solidFill>
-              <a:srgbClr val="2A3A6B"/>
-            </a:solidFill>
-            <a:prstDash val="solid"/>
-          </a:ln>
-        </p:spPr>
-      </p:sp>
-      <p:sp>
-        <p:nvSpPr>
-          <p:cNvPr id="20" name="Shape 15"/>
-          <p:cNvSpPr/>
-          <p:nvPr/>
-        </p:nvSpPr>
-        <p:spPr>
-          <a:xfrm>
-            <a:off x="4937760" y="3429000"/>
-            <a:ext cx="475488" cy="475488"/>
-          </a:xfrm>
-          <a:prstGeom prst="ellipse">
-            <a:avLst/>
-          </a:prstGeom>
-          <a:solidFill>
-            <a:srgbClr val="0E3A44"/>
-          </a:solidFill>
-          <a:ln/>
-        </p:spPr>
-      </p:sp>
-      <p:pic>
-        <p:nvPicPr>
-          <p:cNvPr id="21" name="Image 3" descr="preencoded.png">    </p:cNvPr>
-          <p:cNvPicPr>
-            <a:picLocks noChangeAspect="1"/>
-          </p:cNvPicPr>
-          <p:nvPr/>
-        </p:nvPicPr>
-        <p:blipFill>
-          <a:blip r:embed="rId4"/>
-          <a:stretch>
-            <a:fillRect/>
-          </a:stretch>
-        </p:blipFill>
-        <p:spPr>
-          <a:xfrm>
-            <a:off x="5056632" y="3547872"/>
-            <a:ext cx="237744" cy="237744"/>
-          </a:xfrm>
-          <a:prstGeom prst="rect">
-            <a:avLst/>
-          </a:prstGeom>
-        </p:spPr>
-      </p:pic>
-      <p:sp>
-        <p:nvSpPr>
-          <p:cNvPr id="22" name="Text 16"/>
-          <p:cNvSpPr/>
-          <p:nvPr/>
-        </p:nvSpPr>
-        <p:spPr>
-          <a:xfrm>
-            <a:off x="5577840" y="3447288"/>
-            <a:ext cx="2743200" cy="457200"/>
-          </a:xfrm>
-          <a:prstGeom prst="rect">
-            <a:avLst/>
-          </a:prstGeom>
-          <a:noFill/>
-          <a:ln/>
-        </p:spPr>
-        <p:txBody>
-          <a:bodyPr wrap="square" lIns="0" tIns="0" rIns="0" bIns="0" rtlCol="0" anchor="ctr"/>
-          <a:lstStyle/>
-          <a:p>
-            <a:pPr indent="0" marL="0">
-              <a:buNone/>
-            </a:pPr>
-            <a:r>
-              <a:rPr lang="en-US" sz="1500" b="1" dirty="0">
-                <a:solidFill>
-                  <a:srgbClr val="F4F7FF"/>
-                </a:solidFill>
-                <a:latin typeface="Arial" pitchFamily="34" charset="0"/>
-                <a:ea typeface="Arial" pitchFamily="34" charset="-122"/>
-                <a:cs typeface="Arial" pitchFamily="34" charset="-120"/>
-              </a:rPr>
-              <a:t>GitHub</a:t>
-            </a:r>
-            <a:endParaRPr lang="en-US" sz="1500" dirty="0"/>
-          </a:p>
-        </p:txBody>
-      </p:sp>
-      <p:sp>
-        <p:nvSpPr>
-          <p:cNvPr id="23" name="Text 17"/>
-          <p:cNvSpPr/>
-          <p:nvPr/>
-        </p:nvSpPr>
-        <p:spPr>
-          <a:xfrm>
-            <a:off x="4937760" y="4005072"/>
-            <a:ext cx="3337560" cy="658368"/>
-          </a:xfrm>
-          <a:prstGeom prst="rect">
-            <a:avLst/>
-          </a:prstGeom>
-          <a:noFill/>
-          <a:ln/>
-        </p:spPr>
-        <p:txBody>
-          <a:bodyPr wrap="square" lIns="0" tIns="0" rIns="0" bIns="0" rtlCol="0" anchor="t"/>
-          <a:lstStyle/>
-          <a:p>
-            <a:pPr indent="0" marL="0">
-              <a:lnSpc>
-                <a:spcPct val="115000"/>
-              </a:lnSpc>
-              <a:buNone/>
-            </a:pPr>
-            <a:r>
-              <a:rPr lang="en-US" sz="1100" dirty="0">
-                <a:solidFill>
-                  <a:srgbClr val="AEBDE0"/>
-                </a:solidFill>
-                <a:latin typeface="Arial" pitchFamily="34" charset="0"/>
-                <a:ea typeface="Arial" pitchFamily="34" charset="-122"/>
-                <a:cs typeface="Arial" pitchFamily="34" charset="-120"/>
-              </a:rPr>
-              <a:t>L'archivio del progetto. Ogni versione salvata, ogni modifica documentata e reversibile.</a:t>
-            </a:r>
-            <a:endParaRPr lang="en-US" sz="1100" dirty="0"/>
+          <p:cNvPr id="19" name="Text 14"/>
+          <p:cNvSpPr/>
+          <p:nvPr/>
+        </p:nvSpPr>
+        <p:spPr>
+          <a:xfrm>
+            <a:off x="640080" y="4251960"/>
+            <a:ext cx="7863840" cy="411480"/>
+          </a:xfrm>
+          <a:prstGeom prst="rect">
+            <a:avLst/>
+          </a:prstGeom>
+          <a:noFill/>
+          <a:ln/>
+        </p:spPr>
+        <p:txBody>
+          <a:bodyPr wrap="square" lIns="0" tIns="0" rIns="0" bIns="0" rtlCol="0" anchor="ctr"/>
+          <a:lstStyle/>
+          <a:p>
+            <a:pPr algn="ctr" indent="0" marL="0">
+              <a:buNone/>
+            </a:pPr>
+            <a:r>
+              <a:rPr lang="en-US" sz="1300" i="1" dirty="0">
+                <a:solidFill>
+                  <a:srgbClr val="2BD9E5"/>
+                </a:solidFill>
+                <a:latin typeface="Arial" pitchFamily="34" charset="0"/>
+                <a:ea typeface="Arial" pitchFamily="34" charset="-122"/>
+                <a:cs typeface="Arial" pitchFamily="34" charset="-120"/>
+              </a:rPr>
+              <a:t>Pochi strumenti, tutti guidati a parole.</a:t>
+            </a:r>
+            <a:endParaRPr lang="en-US" sz="1300" dirty="0"/>
           </a:p>
         </p:txBody>
       </p:sp>
@@ -2648,24 +5548,24 @@
         </p:nvSpPr>
         <p:spPr>
           <a:xfrm>
-            <a:off x="640080" y="347472"/>
-            <a:ext cx="7863840" cy="274320"/>
-          </a:xfrm>
-          <a:prstGeom prst="rect">
-            <a:avLst/>
-          </a:prstGeom>
-          <a:noFill/>
-          <a:ln/>
-        </p:spPr>
-        <p:txBody>
-          <a:bodyPr wrap="square" lIns="0" tIns="0" rIns="0" bIns="0" rtlCol="0" anchor="ctr"/>
-          <a:lstStyle/>
-          <a:p>
-            <a:pPr indent="0" marL="0">
-              <a:buNone/>
-            </a:pPr>
-            <a:r>
-              <a:rPr lang="en-US" sz="1100" b="1" spc="300" kern="0" dirty="0">
+            <a:off x="640080" y="365760"/>
+            <a:ext cx="8229600" cy="274320"/>
+          </a:xfrm>
+          <a:prstGeom prst="rect">
+            <a:avLst/>
+          </a:prstGeom>
+          <a:noFill/>
+          <a:ln/>
+        </p:spPr>
+        <p:txBody>
+          <a:bodyPr wrap="square" lIns="0" tIns="0" rIns="0" bIns="0" rtlCol="0" anchor="ctr"/>
+          <a:lstStyle/>
+          <a:p>
+            <a:pPr indent="0" marL="0">
+              <a:buNone/>
+            </a:pPr>
+            <a:r>
+              <a:rPr lang="en-US" sz="1100" b="1" spc="200" kern="0" dirty="0">
                 <a:solidFill>
                   <a:srgbClr val="2BD9E5"/>
                 </a:solidFill>
@@ -2687,7 +5587,7 @@
         </p:nvSpPr>
         <p:spPr>
           <a:xfrm>
-            <a:off x="640080" y="621792"/>
+            <a:off x="640080" y="640080"/>
             <a:ext cx="7863840" cy="566928"/>
           </a:xfrm>
           <a:prstGeom prst="rect">
@@ -2754,7 +5654,7 @@
         <p:spPr>
           <a:xfrm>
             <a:off x="868680" y="1691640"/>
-            <a:ext cx="475488" cy="475488"/>
+            <a:ext cx="502920" cy="502920"/>
           </a:xfrm>
           <a:prstGeom prst="ellipse">
             <a:avLst/>
@@ -2762,7 +5662,12 @@
           <a:solidFill>
             <a:srgbClr val="0E3A44"/>
           </a:solidFill>
-          <a:ln/>
+          <a:ln w="12700">
+            <a:solidFill>
+              <a:srgbClr val="0E3A44"/>
+            </a:solidFill>
+            <a:prstDash val="solid"/>
+          </a:ln>
         </p:spPr>
       </p:sp>
       <p:pic>
@@ -2781,8 +5686,8 @@
         </p:blipFill>
         <p:spPr>
           <a:xfrm>
-            <a:off x="987552" y="1810512"/>
-            <a:ext cx="237744" cy="237744"/>
+            <a:off x="1004468" y="1827428"/>
+            <a:ext cx="231343" cy="231343"/>
           </a:xfrm>
           <a:prstGeom prst="rect">
             <a:avLst/>
@@ -2906,7 +5811,7 @@
         <p:spPr>
           <a:xfrm>
             <a:off x="3566160" y="1691640"/>
-            <a:ext cx="475488" cy="475488"/>
+            <a:ext cx="502920" cy="502920"/>
           </a:xfrm>
           <a:prstGeom prst="ellipse">
             <a:avLst/>
@@ -2914,7 +5819,12 @@
           <a:solidFill>
             <a:srgbClr val="0E3A44"/>
           </a:solidFill>
-          <a:ln/>
+          <a:ln w="12700">
+            <a:solidFill>
+              <a:srgbClr val="0E3A44"/>
+            </a:solidFill>
+            <a:prstDash val="solid"/>
+          </a:ln>
         </p:spPr>
       </p:sp>
       <p:pic>
@@ -2933,8 +5843,8 @@
         </p:blipFill>
         <p:spPr>
           <a:xfrm>
-            <a:off x="3685032" y="1810512"/>
-            <a:ext cx="237744" cy="237744"/>
+            <a:off x="3701948" y="1827428"/>
+            <a:ext cx="231343" cy="231343"/>
           </a:xfrm>
           <a:prstGeom prst="rect">
             <a:avLst/>
@@ -3058,7 +5968,7 @@
         <p:spPr>
           <a:xfrm>
             <a:off x="6263640" y="1691640"/>
-            <a:ext cx="475488" cy="475488"/>
+            <a:ext cx="502920" cy="502920"/>
           </a:xfrm>
           <a:prstGeom prst="ellipse">
             <a:avLst/>
@@ -3066,7 +5976,12 @@
           <a:solidFill>
             <a:srgbClr val="0E3A44"/>
           </a:solidFill>
-          <a:ln/>
+          <a:ln w="12700">
+            <a:solidFill>
+              <a:srgbClr val="0E3A44"/>
+            </a:solidFill>
+            <a:prstDash val="solid"/>
+          </a:ln>
         </p:spPr>
       </p:sp>
       <p:pic>
@@ -3085,8 +6000,8 @@
         </p:blipFill>
         <p:spPr>
           <a:xfrm>
-            <a:off x="6382512" y="1810512"/>
-            <a:ext cx="237744" cy="237744"/>
+            <a:off x="6399428" y="1827428"/>
+            <a:ext cx="231343" cy="231343"/>
           </a:xfrm>
           <a:prstGeom prst="rect">
             <a:avLst/>
@@ -3253,24 +6168,24 @@
         </p:nvSpPr>
         <p:spPr>
           <a:xfrm>
-            <a:off x="640080" y="347472"/>
-            <a:ext cx="7863840" cy="274320"/>
-          </a:xfrm>
-          <a:prstGeom prst="rect">
-            <a:avLst/>
-          </a:prstGeom>
-          <a:noFill/>
-          <a:ln/>
-        </p:spPr>
-        <p:txBody>
-          <a:bodyPr wrap="square" lIns="0" tIns="0" rIns="0" bIns="0" rtlCol="0" anchor="ctr"/>
-          <a:lstStyle/>
-          <a:p>
-            <a:pPr indent="0" marL="0">
-              <a:buNone/>
-            </a:pPr>
-            <a:r>
-              <a:rPr lang="en-US" sz="1100" b="1" spc="300" kern="0" dirty="0">
+            <a:off x="640080" y="365760"/>
+            <a:ext cx="8229600" cy="274320"/>
+          </a:xfrm>
+          <a:prstGeom prst="rect">
+            <a:avLst/>
+          </a:prstGeom>
+          <a:noFill/>
+          <a:ln/>
+        </p:spPr>
+        <p:txBody>
+          <a:bodyPr wrap="square" lIns="0" tIns="0" rIns="0" bIns="0" rtlCol="0" anchor="ctr"/>
+          <a:lstStyle/>
+          <a:p>
+            <a:pPr indent="0" marL="0">
+              <a:buNone/>
+            </a:pPr>
+            <a:r>
+              <a:rPr lang="en-US" sz="1100" b="1" spc="200" kern="0" dirty="0">
                 <a:solidFill>
                   <a:srgbClr val="2BD9E5"/>
                 </a:solidFill>
@@ -3292,7 +6207,7 @@
         </p:nvSpPr>
         <p:spPr>
           <a:xfrm>
-            <a:off x="640080" y="621792"/>
+            <a:off x="640080" y="640080"/>
             <a:ext cx="7863840" cy="566928"/>
           </a:xfrm>
           <a:prstGeom prst="rect">
@@ -3359,7 +6274,7 @@
         <p:spPr>
           <a:xfrm>
             <a:off x="868680" y="1645920"/>
-            <a:ext cx="475488" cy="475488"/>
+            <a:ext cx="502920" cy="502920"/>
           </a:xfrm>
           <a:prstGeom prst="ellipse">
             <a:avLst/>
@@ -3367,7 +6282,12 @@
           <a:solidFill>
             <a:srgbClr val="0E3A44"/>
           </a:solidFill>
-          <a:ln/>
+          <a:ln w="12700">
+            <a:solidFill>
+              <a:srgbClr val="0E3A44"/>
+            </a:solidFill>
+            <a:prstDash val="solid"/>
+          </a:ln>
         </p:spPr>
       </p:sp>
       <p:pic>
@@ -3386,8 +6306,8 @@
         </p:blipFill>
         <p:spPr>
           <a:xfrm>
-            <a:off x="987552" y="1764792"/>
-            <a:ext cx="237744" cy="237744"/>
+            <a:off x="1004468" y="1781708"/>
+            <a:ext cx="231343" cy="231343"/>
           </a:xfrm>
           <a:prstGeom prst="rect">
             <a:avLst/>
@@ -3402,8 +6322,8 @@
         </p:nvSpPr>
         <p:spPr>
           <a:xfrm>
-            <a:off x="1508760" y="1664208"/>
-            <a:ext cx="2743200" cy="457200"/>
+            <a:off x="1508760" y="1645920"/>
+            <a:ext cx="2743200" cy="502920"/>
           </a:xfrm>
           <a:prstGeom prst="rect">
             <a:avLst/>
@@ -3441,8 +6361,8 @@
         </p:nvSpPr>
         <p:spPr>
           <a:xfrm>
-            <a:off x="868680" y="2221992"/>
-            <a:ext cx="3337560" cy="868680"/>
+            <a:off x="868680" y="2258568"/>
+            <a:ext cx="3337560" cy="822960"/>
           </a:xfrm>
           <a:prstGeom prst="rect">
             <a:avLst/>
@@ -3456,12 +6376,12 @@
           <a:p>
             <a:pPr indent="0" marL="0">
               <a:lnSpc>
-                <a:spcPct val="115000"/>
+                <a:spcPct val="118000"/>
               </a:lnSpc>
               <a:buNone/>
             </a:pPr>
             <a:r>
-              <a:rPr lang="en-US" sz="1100" dirty="0">
+              <a:rPr lang="en-US" sz="1150" dirty="0">
                 <a:solidFill>
                   <a:srgbClr val="AEBDE0"/>
                 </a:solidFill>
@@ -3471,7 +6391,7 @@
               </a:rPr>
               <a:t>Banner pubblicitari a fine partita. Si attiva gratis: Google vende gli spazi e gira la quota dei ricavi all'autore.</a:t>
             </a:r>
-            <a:endParaRPr lang="en-US" sz="1100" dirty="0"/>
+            <a:endParaRPr lang="en-US" sz="1150" dirty="0"/>
           </a:p>
         </p:txBody>
       </p:sp>
@@ -3511,7 +6431,7 @@
         <p:spPr>
           <a:xfrm>
             <a:off x="4937760" y="1645920"/>
-            <a:ext cx="475488" cy="475488"/>
+            <a:ext cx="502920" cy="502920"/>
           </a:xfrm>
           <a:prstGeom prst="ellipse">
             <a:avLst/>
@@ -3519,7 +6439,12 @@
           <a:solidFill>
             <a:srgbClr val="0E3A44"/>
           </a:solidFill>
-          <a:ln/>
+          <a:ln w="12700">
+            <a:solidFill>
+              <a:srgbClr val="0E3A44"/>
+            </a:solidFill>
+            <a:prstDash val="solid"/>
+          </a:ln>
         </p:spPr>
       </p:sp>
       <p:pic>
@@ -3538,8 +6463,8 @@
         </p:blipFill>
         <p:spPr>
           <a:xfrm>
-            <a:off x="5056632" y="1764792"/>
-            <a:ext cx="237744" cy="237744"/>
+            <a:off x="5073548" y="1781708"/>
+            <a:ext cx="231343" cy="231343"/>
           </a:xfrm>
           <a:prstGeom prst="rect">
             <a:avLst/>
@@ -3554,8 +6479,8 @@
         </p:nvSpPr>
         <p:spPr>
           <a:xfrm>
-            <a:off x="5577840" y="1664208"/>
-            <a:ext cx="2743200" cy="457200"/>
+            <a:off x="5577840" y="1645920"/>
+            <a:ext cx="2743200" cy="502920"/>
           </a:xfrm>
           <a:prstGeom prst="rect">
             <a:avLst/>
@@ -3593,8 +6518,8 @@
         </p:nvSpPr>
         <p:spPr>
           <a:xfrm>
-            <a:off x="4937760" y="2221992"/>
-            <a:ext cx="3337560" cy="868680"/>
+            <a:off x="4937760" y="2258568"/>
+            <a:ext cx="3337560" cy="822960"/>
           </a:xfrm>
           <a:prstGeom prst="rect">
             <a:avLst/>
@@ -3608,12 +6533,12 @@
           <a:p>
             <a:pPr indent="0" marL="0">
               <a:lnSpc>
-                <a:spcPct val="115000"/>
+                <a:spcPct val="118000"/>
               </a:lnSpc>
               <a:buNone/>
             </a:pPr>
             <a:r>
-              <a:rPr lang="en-US" sz="1100" dirty="0">
+              <a:rPr lang="en-US" sz="1150" dirty="0">
                 <a:solidFill>
                   <a:srgbClr val="AEBDE0"/>
                 </a:solidFill>
@@ -3623,13 +6548,52 @@
               </a:rPr>
               <a:t>Gestisce l'acquisto in-app «Rimuovi pubblicità». Gratuito fino a 2.500 $ al mese di incassi.</a:t>
             </a:r>
+            <a:endParaRPr lang="en-US" sz="1150" dirty="0"/>
+          </a:p>
+        </p:txBody>
+      </p:sp>
+      <p:sp>
+        <p:nvSpPr>
+          <p:cNvPr id="14" name="Text 10"/>
+          <p:cNvSpPr/>
+          <p:nvPr/>
+        </p:nvSpPr>
+        <p:spPr>
+          <a:xfrm>
+            <a:off x="640080" y="3310128"/>
+            <a:ext cx="7863840" cy="274320"/>
+          </a:xfrm>
+          <a:prstGeom prst="rect">
+            <a:avLst/>
+          </a:prstGeom>
+          <a:noFill/>
+          <a:ln/>
+        </p:spPr>
+        <p:txBody>
+          <a:bodyPr wrap="square" lIns="0" tIns="0" rIns="0" bIns="0" rtlCol="0" anchor="ctr"/>
+          <a:lstStyle/>
+          <a:p>
+            <a:pPr indent="0" marL="0">
+              <a:buNone/>
+            </a:pPr>
+            <a:r>
+              <a:rPr lang="en-US" sz="1100" b="1" spc="200" kern="0" dirty="0">
+                <a:solidFill>
+                  <a:srgbClr val="AEBDE0"/>
+                </a:solidFill>
+                <a:latin typeface="Arial" pitchFamily="34" charset="0"/>
+                <a:ea typeface="Arial" pitchFamily="34" charset="-122"/>
+                <a:cs typeface="Arial" pitchFamily="34" charset="-120"/>
+              </a:rPr>
+              <a:t>Il modello freemium</a:t>
+            </a:r>
             <a:endParaRPr lang="en-US" sz="1100" dirty="0"/>
           </a:p>
         </p:txBody>
       </p:sp>
       <p:sp>
         <p:nvSpPr>
-          <p:cNvPr id="14" name="Shape 10"/>
+          <p:cNvPr id="15" name="Shape 11"/>
           <p:cNvSpPr/>
           <p:nvPr/>
         </p:nvSpPr>
@@ -3656,7 +6620,7 @@
       </p:sp>
       <p:sp>
         <p:nvSpPr>
-          <p:cNvPr id="15" name="Text 11"/>
+          <p:cNvPr id="16" name="Text 12"/>
           <p:cNvSpPr/>
           <p:nvPr/>
         </p:nvSpPr>
@@ -3698,7 +6662,7 @@
       </p:sp>
       <p:sp>
         <p:nvSpPr>
-          <p:cNvPr id="16" name="Text 12"/>
+          <p:cNvPr id="17" name="Text 13"/>
           <p:cNvSpPr/>
           <p:nvPr/>
         </p:nvSpPr>
@@ -3721,7 +6685,7 @@
               <a:buNone/>
             </a:pPr>
             <a:r>
-              <a:rPr lang="en-US" sz="1800" dirty="0">
+              <a:rPr lang="en-US" sz="1600" dirty="0">
                 <a:solidFill>
                   <a:srgbClr val="2BD9E5"/>
                 </a:solidFill>
@@ -3731,13 +6695,13 @@
               </a:rPr>
               <a:t>→</a:t>
             </a:r>
-            <a:endParaRPr lang="en-US" sz="1800" dirty="0"/>
-          </a:p>
-        </p:txBody>
-      </p:sp>
-      <p:sp>
-        <p:nvSpPr>
-          <p:cNvPr id="17" name="Shape 13"/>
+            <a:endParaRPr lang="en-US" sz="1600" dirty="0"/>
+          </a:p>
+        </p:txBody>
+      </p:sp>
+      <p:sp>
+        <p:nvSpPr>
+          <p:cNvPr id="18" name="Shape 14"/>
           <p:cNvSpPr/>
           <p:nvPr/>
         </p:nvSpPr>
@@ -3764,7 +6728,7 @@
       </p:sp>
       <p:sp>
         <p:nvSpPr>
-          <p:cNvPr id="18" name="Text 14"/>
+          <p:cNvPr id="19" name="Text 15"/>
           <p:cNvSpPr/>
           <p:nvPr/>
         </p:nvSpPr>
@@ -3806,7 +6770,7 @@
       </p:sp>
       <p:sp>
         <p:nvSpPr>
-          <p:cNvPr id="19" name="Text 15"/>
+          <p:cNvPr id="20" name="Text 16"/>
           <p:cNvSpPr/>
           <p:nvPr/>
         </p:nvSpPr>
@@ -3829,7 +6793,7 @@
               <a:buNone/>
             </a:pPr>
             <a:r>
-              <a:rPr lang="en-US" sz="1800" dirty="0">
+              <a:rPr lang="en-US" sz="1600" dirty="0">
                 <a:solidFill>
                   <a:srgbClr val="2BD9E5"/>
                 </a:solidFill>
@@ -3839,13 +6803,13 @@
               </a:rPr>
               <a:t>→</a:t>
             </a:r>
-            <a:endParaRPr lang="en-US" sz="1800" dirty="0"/>
-          </a:p>
-        </p:txBody>
-      </p:sp>
-      <p:sp>
-        <p:nvSpPr>
-          <p:cNvPr id="20" name="Shape 16"/>
+            <a:endParaRPr lang="en-US" sz="1600" dirty="0"/>
+          </a:p>
+        </p:txBody>
+      </p:sp>
+      <p:sp>
+        <p:nvSpPr>
+          <p:cNvPr id="21" name="Shape 17"/>
           <p:cNvSpPr/>
           <p:nvPr/>
         </p:nvSpPr>
@@ -3872,7 +6836,7 @@
       </p:sp>
       <p:sp>
         <p:nvSpPr>
-          <p:cNvPr id="21" name="Text 17"/>
+          <p:cNvPr id="22" name="Text 18"/>
           <p:cNvSpPr/>
           <p:nvPr/>
         </p:nvSpPr>
@@ -3909,45 +6873,6 @@
               <a:t>Un acquisto la toglie per sempre</a:t>
             </a:r>
             <a:endParaRPr lang="en-US" sz="1150" dirty="0"/>
-          </a:p>
-        </p:txBody>
-      </p:sp>
-      <p:sp>
-        <p:nvSpPr>
-          <p:cNvPr id="22" name="Text 18"/>
-          <p:cNvSpPr/>
-          <p:nvPr/>
-        </p:nvSpPr>
-        <p:spPr>
-          <a:xfrm>
-            <a:off x="640080" y="3310128"/>
-            <a:ext cx="7863840" cy="274320"/>
-          </a:xfrm>
-          <a:prstGeom prst="rect">
-            <a:avLst/>
-          </a:prstGeom>
-          <a:noFill/>
-          <a:ln/>
-        </p:spPr>
-        <p:txBody>
-          <a:bodyPr wrap="square" lIns="0" tIns="0" rIns="0" bIns="0" rtlCol="0" anchor="ctr"/>
-          <a:lstStyle/>
-          <a:p>
-            <a:pPr indent="0" marL="0">
-              <a:buNone/>
-            </a:pPr>
-            <a:r>
-              <a:rPr lang="en-US" sz="1100" b="1" spc="200" kern="0" dirty="0">
-                <a:solidFill>
-                  <a:srgbClr val="AEBDE0"/>
-                </a:solidFill>
-                <a:latin typeface="Arial" pitchFamily="34" charset="0"/>
-                <a:ea typeface="Arial" pitchFamily="34" charset="-122"/>
-                <a:cs typeface="Arial" pitchFamily="34" charset="-120"/>
-              </a:rPr>
-              <a:t>Il modello freemium</a:t>
-            </a:r>
-            <a:endParaRPr lang="en-US" sz="1100" dirty="0"/>
           </a:p>
         </p:txBody>
       </p:sp>
@@ -3991,24 +6916,24 @@
         </p:nvSpPr>
         <p:spPr>
           <a:xfrm>
-            <a:off x="640080" y="347472"/>
-            <a:ext cx="7863840" cy="274320"/>
-          </a:xfrm>
-          <a:prstGeom prst="rect">
-            <a:avLst/>
-          </a:prstGeom>
-          <a:noFill/>
-          <a:ln/>
-        </p:spPr>
-        <p:txBody>
-          <a:bodyPr wrap="square" lIns="0" tIns="0" rIns="0" bIns="0" rtlCol="0" anchor="ctr"/>
-          <a:lstStyle/>
-          <a:p>
-            <a:pPr indent="0" marL="0">
-              <a:buNone/>
-            </a:pPr>
-            <a:r>
-              <a:rPr lang="en-US" sz="1100" b="1" spc="300" kern="0" dirty="0">
+            <a:off x="640080" y="365760"/>
+            <a:ext cx="8229600" cy="274320"/>
+          </a:xfrm>
+          <a:prstGeom prst="rect">
+            <a:avLst/>
+          </a:prstGeom>
+          <a:noFill/>
+          <a:ln/>
+        </p:spPr>
+        <p:txBody>
+          <a:bodyPr wrap="square" lIns="0" tIns="0" rIns="0" bIns="0" rtlCol="0" anchor="ctr"/>
+          <a:lstStyle/>
+          <a:p>
+            <a:pPr indent="0" marL="0">
+              <a:buNone/>
+            </a:pPr>
+            <a:r>
+              <a:rPr lang="en-US" sz="1100" b="1" spc="200" kern="0" dirty="0">
                 <a:solidFill>
                   <a:srgbClr val="2BD9E5"/>
                 </a:solidFill>
@@ -4030,7 +6955,7 @@
         </p:nvSpPr>
         <p:spPr>
           <a:xfrm>
-            <a:off x="640080" y="621792"/>
+            <a:off x="640080" y="640080"/>
             <a:ext cx="7863840" cy="566928"/>
           </a:xfrm>
           <a:prstGeom prst="rect">
@@ -4069,12 +6994,12 @@
         </p:nvSpPr>
         <p:spPr>
           <a:xfrm>
-            <a:off x="640080" y="1417320"/>
-            <a:ext cx="4937760" cy="749808"/>
+            <a:off x="640080" y="1508760"/>
+            <a:ext cx="7863840" cy="786384"/>
           </a:xfrm>
           <a:prstGeom prst="roundRect">
             <a:avLst>
-              <a:gd name="adj" fmla="val 7317"/>
+              <a:gd name="adj" fmla="val 9302"/>
             </a:avLst>
           </a:prstGeom>
           <a:solidFill>
@@ -4096,24 +7021,24 @@
         </p:nvSpPr>
         <p:spPr>
           <a:xfrm>
-            <a:off x="868680" y="1508760"/>
-            <a:ext cx="3108960" cy="292608"/>
-          </a:xfrm>
-          <a:prstGeom prst="rect">
-            <a:avLst/>
-          </a:prstGeom>
-          <a:noFill/>
-          <a:ln/>
-        </p:spPr>
-        <p:txBody>
-          <a:bodyPr wrap="square" lIns="0" tIns="0" rIns="0" bIns="0" rtlCol="0" anchor="ctr"/>
-          <a:lstStyle/>
-          <a:p>
-            <a:pPr indent="0" marL="0">
-              <a:buNone/>
-            </a:pPr>
-            <a:r>
-              <a:rPr lang="en-US" sz="1300" b="1" dirty="0">
+            <a:off x="868680" y="1627632"/>
+            <a:ext cx="4937760" cy="310896"/>
+          </a:xfrm>
+          <a:prstGeom prst="rect">
+            <a:avLst/>
+          </a:prstGeom>
+          <a:noFill/>
+          <a:ln/>
+        </p:spPr>
+        <p:txBody>
+          <a:bodyPr wrap="square" lIns="0" tIns="0" rIns="0" bIns="0" rtlCol="0" anchor="ctr"/>
+          <a:lstStyle/>
+          <a:p>
+            <a:pPr indent="0" marL="0">
+              <a:buNone/>
+            </a:pPr>
+            <a:r>
+              <a:rPr lang="en-US" sz="1400" b="1" dirty="0">
                 <a:solidFill>
                   <a:srgbClr val="F4F7FF"/>
                 </a:solidFill>
@@ -4123,7 +7048,7 @@
               </a:rPr>
               <a:t>Claude (abbonamento)</a:t>
             </a:r>
-            <a:endParaRPr lang="en-US" sz="1300" dirty="0"/>
+            <a:endParaRPr lang="en-US" sz="1400" dirty="0"/>
           </a:p>
         </p:txBody>
       </p:sp>
@@ -4135,24 +7060,24 @@
         </p:nvSpPr>
         <p:spPr>
           <a:xfrm>
-            <a:off x="868680" y="1801368"/>
-            <a:ext cx="3200400" cy="292608"/>
-          </a:xfrm>
-          <a:prstGeom prst="rect">
-            <a:avLst/>
-          </a:prstGeom>
-          <a:noFill/>
-          <a:ln/>
-        </p:spPr>
-        <p:txBody>
-          <a:bodyPr wrap="square" lIns="0" tIns="0" rIns="0" bIns="0" rtlCol="0" anchor="ctr"/>
-          <a:lstStyle/>
-          <a:p>
-            <a:pPr indent="0" marL="0">
-              <a:buNone/>
-            </a:pPr>
-            <a:r>
-              <a:rPr lang="en-US" sz="950" dirty="0">
+            <a:off x="868680" y="1938528"/>
+            <a:ext cx="5120640" cy="274320"/>
+          </a:xfrm>
+          <a:prstGeom prst="rect">
+            <a:avLst/>
+          </a:prstGeom>
+          <a:noFill/>
+          <a:ln/>
+        </p:spPr>
+        <p:txBody>
+          <a:bodyPr wrap="square" lIns="0" tIns="0" rIns="0" bIns="0" rtlCol="0" anchor="ctr"/>
+          <a:lstStyle/>
+          <a:p>
+            <a:pPr indent="0" marL="0">
+              <a:buNone/>
+            </a:pPr>
+            <a:r>
+              <a:rPr lang="en-US" sz="1050" dirty="0">
                 <a:solidFill>
                   <a:srgbClr val="AEBDE0"/>
                 </a:solidFill>
@@ -4162,7 +7087,7 @@
               </a:rPr>
               <a:t>Il vero costo di sviluppo: l'AI che costruisce tutto</a:t>
             </a:r>
-            <a:endParaRPr lang="en-US" sz="950" dirty="0"/>
+            <a:endParaRPr lang="en-US" sz="1050" dirty="0"/>
           </a:p>
         </p:txBody>
       </p:sp>
@@ -4174,8 +7099,8 @@
         </p:nvSpPr>
         <p:spPr>
           <a:xfrm>
-            <a:off x="3977640" y="1417320"/>
-            <a:ext cx="1417320" cy="749808"/>
+            <a:off x="5943600" y="1508760"/>
+            <a:ext cx="2377440" cy="786384"/>
           </a:xfrm>
           <a:prstGeom prst="rect">
             <a:avLst/>
@@ -4191,7 +7116,7 @@
               <a:buNone/>
             </a:pPr>
             <a:r>
-              <a:rPr lang="en-US" sz="1300" dirty="0">
+              <a:rPr lang="en-US" sz="1700" dirty="0">
                 <a:solidFill>
                   <a:srgbClr val="F5C84C"/>
                 </a:solidFill>
@@ -4199,9 +7124,9 @@
                 <a:ea typeface="Arial Black" pitchFamily="34" charset="-122"/>
                 <a:cs typeface="Arial Black" pitchFamily="34" charset="-120"/>
               </a:rPr>
-              <a:t>20 €/mese</a:t>
-            </a:r>
-            <a:endParaRPr lang="en-US" sz="1300" dirty="0"/>
+              <a:t>20–100 €/mese</a:t>
+            </a:r>
+            <a:endParaRPr lang="en-US" sz="1700" dirty="0"/>
           </a:p>
         </p:txBody>
       </p:sp>
@@ -4213,12 +7138,12 @@
         </p:nvSpPr>
         <p:spPr>
           <a:xfrm>
-            <a:off x="640080" y="2286000"/>
-            <a:ext cx="4937760" cy="749808"/>
+            <a:off x="640080" y="2423160"/>
+            <a:ext cx="7863840" cy="786384"/>
           </a:xfrm>
           <a:prstGeom prst="roundRect">
             <a:avLst>
-              <a:gd name="adj" fmla="val 7317"/>
+              <a:gd name="adj" fmla="val 9302"/>
             </a:avLst>
           </a:prstGeom>
           <a:solidFill>
@@ -4240,24 +7165,24 @@
         </p:nvSpPr>
         <p:spPr>
           <a:xfrm>
-            <a:off x="868680" y="2377440"/>
-            <a:ext cx="3108960" cy="292608"/>
-          </a:xfrm>
-          <a:prstGeom prst="rect">
-            <a:avLst/>
-          </a:prstGeom>
-          <a:noFill/>
-          <a:ln/>
-        </p:spPr>
-        <p:txBody>
-          <a:bodyPr wrap="square" lIns="0" tIns="0" rIns="0" bIns="0" rtlCol="0" anchor="ctr"/>
-          <a:lstStyle/>
-          <a:p>
-            <a:pPr indent="0" marL="0">
-              <a:buNone/>
-            </a:pPr>
-            <a:r>
-              <a:rPr lang="en-US" sz="1300" b="1" dirty="0">
+            <a:off x="868680" y="2542032"/>
+            <a:ext cx="4937760" cy="310896"/>
+          </a:xfrm>
+          <a:prstGeom prst="rect">
+            <a:avLst/>
+          </a:prstGeom>
+          <a:noFill/>
+          <a:ln/>
+        </p:spPr>
+        <p:txBody>
+          <a:bodyPr wrap="square" lIns="0" tIns="0" rIns="0" bIns="0" rtlCol="0" anchor="ctr"/>
+          <a:lstStyle/>
+          <a:p>
+            <a:pPr indent="0" marL="0">
+              <a:buNone/>
+            </a:pPr>
+            <a:r>
+              <a:rPr lang="en-US" sz="1400" b="1" dirty="0">
                 <a:solidFill>
                   <a:srgbClr val="F4F7FF"/>
                 </a:solidFill>
@@ -4267,7 +7192,7 @@
               </a:rPr>
               <a:t>Google Play Console</a:t>
             </a:r>
-            <a:endParaRPr lang="en-US" sz="1300" dirty="0"/>
+            <a:endParaRPr lang="en-US" sz="1400" dirty="0"/>
           </a:p>
         </p:txBody>
       </p:sp>
@@ -4279,24 +7204,24 @@
         </p:nvSpPr>
         <p:spPr>
           <a:xfrm>
-            <a:off x="868680" y="2670048"/>
-            <a:ext cx="3200400" cy="292608"/>
-          </a:xfrm>
-          <a:prstGeom prst="rect">
-            <a:avLst/>
-          </a:prstGeom>
-          <a:noFill/>
-          <a:ln/>
-        </p:spPr>
-        <p:txBody>
-          <a:bodyPr wrap="square" lIns="0" tIns="0" rIns="0" bIns="0" rtlCol="0" anchor="ctr"/>
-          <a:lstStyle/>
-          <a:p>
-            <a:pPr indent="0" marL="0">
-              <a:buNone/>
-            </a:pPr>
-            <a:r>
-              <a:rPr lang="en-US" sz="950" dirty="0">
+            <a:off x="868680" y="2852928"/>
+            <a:ext cx="5120640" cy="274320"/>
+          </a:xfrm>
+          <a:prstGeom prst="rect">
+            <a:avLst/>
+          </a:prstGeom>
+          <a:noFill/>
+          <a:ln/>
+        </p:spPr>
+        <p:txBody>
+          <a:bodyPr wrap="square" lIns="0" tIns="0" rIns="0" bIns="0" rtlCol="0" anchor="ctr"/>
+          <a:lstStyle/>
+          <a:p>
+            <a:pPr indent="0" marL="0">
+              <a:buNone/>
+            </a:pPr>
+            <a:r>
+              <a:rPr lang="en-US" sz="1050" dirty="0">
                 <a:solidFill>
                   <a:srgbClr val="AEBDE0"/>
                 </a:solidFill>
@@ -4306,7 +7231,7 @@
               </a:rPr>
               <a:t>Account sviluppatore una tantum, vale per tutte le app future</a:t>
             </a:r>
-            <a:endParaRPr lang="en-US" sz="950" dirty="0"/>
+            <a:endParaRPr lang="en-US" sz="1050" dirty="0"/>
           </a:p>
         </p:txBody>
       </p:sp>
@@ -4318,8 +7243,8 @@
         </p:nvSpPr>
         <p:spPr>
           <a:xfrm>
-            <a:off x="3977640" y="2286000"/>
-            <a:ext cx="1417320" cy="749808"/>
+            <a:off x="5943600" y="2423160"/>
+            <a:ext cx="2377440" cy="786384"/>
           </a:xfrm>
           <a:prstGeom prst="rect">
             <a:avLst/>
@@ -4335,7 +7260,7 @@
               <a:buNone/>
             </a:pPr>
             <a:r>
-              <a:rPr lang="en-US" sz="1300" dirty="0">
+              <a:rPr lang="en-US" sz="1700" dirty="0">
                 <a:solidFill>
                   <a:srgbClr val="F5C84C"/>
                 </a:solidFill>
@@ -4343,9 +7268,9 @@
                 <a:ea typeface="Arial Black" pitchFamily="34" charset="-122"/>
                 <a:cs typeface="Arial Black" pitchFamily="34" charset="-120"/>
               </a:rPr>
-              <a:t>25 $</a:t>
-            </a:r>
-            <a:endParaRPr lang="en-US" sz="1300" dirty="0"/>
+              <a:t>25 €</a:t>
+            </a:r>
+            <a:endParaRPr lang="en-US" sz="1700" dirty="0"/>
           </a:p>
         </p:txBody>
       </p:sp>
@@ -4357,12 +7282,12 @@
         </p:nvSpPr>
         <p:spPr>
           <a:xfrm>
-            <a:off x="640080" y="3154680"/>
-            <a:ext cx="4937760" cy="749808"/>
+            <a:off x="640080" y="3337560"/>
+            <a:ext cx="7863840" cy="786384"/>
           </a:xfrm>
           <a:prstGeom prst="roundRect">
             <a:avLst>
-              <a:gd name="adj" fmla="val 7317"/>
+              <a:gd name="adj" fmla="val 9302"/>
             </a:avLst>
           </a:prstGeom>
           <a:solidFill>
@@ -4384,24 +7309,24 @@
         </p:nvSpPr>
         <p:spPr>
           <a:xfrm>
-            <a:off x="868680" y="3246120"/>
-            <a:ext cx="3108960" cy="292608"/>
-          </a:xfrm>
-          <a:prstGeom prst="rect">
-            <a:avLst/>
-          </a:prstGeom>
-          <a:noFill/>
-          <a:ln/>
-        </p:spPr>
-        <p:txBody>
-          <a:bodyPr wrap="square" lIns="0" tIns="0" rIns="0" bIns="0" rtlCol="0" anchor="ctr"/>
-          <a:lstStyle/>
-          <a:p>
-            <a:pPr indent="0" marL="0">
-              <a:buNone/>
-            </a:pPr>
-            <a:r>
-              <a:rPr lang="en-US" sz="1300" b="1" dirty="0">
+            <a:off x="868680" y="3456432"/>
+            <a:ext cx="4937760" cy="310896"/>
+          </a:xfrm>
+          <a:prstGeom prst="rect">
+            <a:avLst/>
+          </a:prstGeom>
+          <a:noFill/>
+          <a:ln/>
+        </p:spPr>
+        <p:txBody>
+          <a:bodyPr wrap="square" lIns="0" tIns="0" rIns="0" bIns="0" rtlCol="0" anchor="ctr"/>
+          <a:lstStyle/>
+          <a:p>
+            <a:pPr indent="0" marL="0">
+              <a:buNone/>
+            </a:pPr>
+            <a:r>
+              <a:rPr lang="en-US" sz="1400" b="1" dirty="0">
                 <a:solidFill>
                   <a:srgbClr val="F4F7FF"/>
                 </a:solidFill>
@@ -4411,7 +7336,7 @@
               </a:rPr>
               <a:t>Tutto il resto</a:t>
             </a:r>
-            <a:endParaRPr lang="en-US" sz="1300" dirty="0"/>
+            <a:endParaRPr lang="en-US" sz="1400" dirty="0"/>
           </a:p>
         </p:txBody>
       </p:sp>
@@ -4423,24 +7348,24 @@
         </p:nvSpPr>
         <p:spPr>
           <a:xfrm>
-            <a:off x="868680" y="3538728"/>
-            <a:ext cx="3200400" cy="292608"/>
-          </a:xfrm>
-          <a:prstGeom prst="rect">
-            <a:avLst/>
-          </a:prstGeom>
-          <a:noFill/>
-          <a:ln/>
-        </p:spPr>
-        <p:txBody>
-          <a:bodyPr wrap="square" lIns="0" tIns="0" rIns="0" bIns="0" rtlCol="0" anchor="ctr"/>
-          <a:lstStyle/>
-          <a:p>
-            <a:pPr indent="0" marL="0">
-              <a:buNone/>
-            </a:pPr>
-            <a:r>
-              <a:rPr lang="en-US" sz="950" dirty="0">
+            <a:off x="868680" y="3767328"/>
+            <a:ext cx="5120640" cy="274320"/>
+          </a:xfrm>
+          <a:prstGeom prst="rect">
+            <a:avLst/>
+          </a:prstGeom>
+          <a:noFill/>
+          <a:ln/>
+        </p:spPr>
+        <p:txBody>
+          <a:bodyPr wrap="square" lIns="0" tIns="0" rIns="0" bIns="0" rtlCol="0" anchor="ctr"/>
+          <a:lstStyle/>
+          <a:p>
+            <a:pPr indent="0" marL="0">
+              <a:buNone/>
+            </a:pPr>
+            <a:r>
+              <a:rPr lang="en-US" sz="1050" dirty="0">
                 <a:solidFill>
                   <a:srgbClr val="AEBDE0"/>
                 </a:solidFill>
@@ -4450,7 +7375,7 @@
               </a:rPr>
               <a:t>GitHub, Expo, emulatore, AdMob, RevenueCat</a:t>
             </a:r>
-            <a:endParaRPr lang="en-US" sz="950" dirty="0"/>
+            <a:endParaRPr lang="en-US" sz="1050" dirty="0"/>
           </a:p>
         </p:txBody>
       </p:sp>
@@ -4462,8 +7387,8 @@
         </p:nvSpPr>
         <p:spPr>
           <a:xfrm>
-            <a:off x="3977640" y="3154680"/>
-            <a:ext cx="1417320" cy="749808"/>
+            <a:off x="5943600" y="3337560"/>
+            <a:ext cx="2377440" cy="786384"/>
           </a:xfrm>
           <a:prstGeom prst="rect">
             <a:avLst/>
@@ -4479,7 +7404,7 @@
               <a:buNone/>
             </a:pPr>
             <a:r>
-              <a:rPr lang="en-US" sz="1300" dirty="0">
+              <a:rPr lang="en-US" sz="1700" dirty="0">
                 <a:solidFill>
                   <a:srgbClr val="F5C84C"/>
                 </a:solidFill>
@@ -4489,243 +7414,46 @@
               </a:rPr>
               <a:t>0 €</a:t>
             </a:r>
+            <a:endParaRPr lang="en-US" sz="1700" dirty="0"/>
+          </a:p>
+        </p:txBody>
+      </p:sp>
+      <p:sp>
+        <p:nvSpPr>
+          <p:cNvPr id="16" name="Text 14"/>
+          <p:cNvSpPr/>
+          <p:nvPr/>
+        </p:nvSpPr>
+        <p:spPr>
+          <a:xfrm>
+            <a:off x="640080" y="4434840"/>
+            <a:ext cx="7863840" cy="411480"/>
+          </a:xfrm>
+          <a:prstGeom prst="rect">
+            <a:avLst/>
+          </a:prstGeom>
+          <a:noFill/>
+          <a:ln/>
+        </p:spPr>
+        <p:txBody>
+          <a:bodyPr wrap="square" lIns="0" tIns="0" rIns="0" bIns="0" rtlCol="0" anchor="ctr"/>
+          <a:lstStyle/>
+          <a:p>
+            <a:pPr algn="ctr" indent="0" marL="0">
+              <a:buNone/>
+            </a:pPr>
+            <a:r>
+              <a:rPr lang="en-US" sz="1300" i="1" dirty="0">
+                <a:solidFill>
+                  <a:srgbClr val="2BD9E5"/>
+                </a:solidFill>
+                <a:latin typeface="Arial" pitchFamily="34" charset="0"/>
+                <a:ea typeface="Arial" pitchFamily="34" charset="-122"/>
+                <a:cs typeface="Arial" pitchFamily="34" charset="-120"/>
+              </a:rPr>
+              <a:t>Nessun team, nessun budget di sviluppo: un abbonamento all'AI e un account sviluppatore.</a:t>
+            </a:r>
             <a:endParaRPr lang="en-US" sz="1300" dirty="0"/>
-          </a:p>
-        </p:txBody>
-      </p:sp>
-      <p:sp>
-        <p:nvSpPr>
-          <p:cNvPr id="16" name="Shape 14"/>
-          <p:cNvSpPr/>
-          <p:nvPr/>
-        </p:nvSpPr>
-        <p:spPr>
-          <a:xfrm>
-            <a:off x="5852160" y="1417320"/>
-            <a:ext cx="2651760" cy="2487168"/>
-          </a:xfrm>
-          <a:prstGeom prst="roundRect">
-            <a:avLst>
-              <a:gd name="adj" fmla="val 2941"/>
-            </a:avLst>
-          </a:prstGeom>
-          <a:solidFill>
-            <a:srgbClr val="16203F"/>
-          </a:solidFill>
-          <a:ln w="15875">
-            <a:solidFill>
-              <a:srgbClr val="F5C84C"/>
-            </a:solidFill>
-            <a:prstDash val="solid"/>
-          </a:ln>
-        </p:spPr>
-      </p:sp>
-      <p:pic>
-        <p:nvPicPr>
-          <p:cNvPr id="17" name="Image 0" descr="preencoded.png">    </p:cNvPr>
-          <p:cNvPicPr>
-            <a:picLocks noChangeAspect="1"/>
-          </p:cNvPicPr>
-          <p:nvPr/>
-        </p:nvPicPr>
-        <p:blipFill>
-          <a:blip r:embed="rId1"/>
-          <a:stretch>
-            <a:fillRect/>
-          </a:stretch>
-        </p:blipFill>
-        <p:spPr>
-          <a:xfrm>
-            <a:off x="6903720" y="1691640"/>
-            <a:ext cx="548640" cy="548640"/>
-          </a:xfrm>
-          <a:prstGeom prst="rect">
-            <a:avLst/>
-          </a:prstGeom>
-        </p:spPr>
-      </p:pic>
-      <p:sp>
-        <p:nvSpPr>
-          <p:cNvPr id="18" name="Text 15"/>
-          <p:cNvSpPr/>
-          <p:nvPr/>
-        </p:nvSpPr>
-        <p:spPr>
-          <a:xfrm>
-            <a:off x="5943600" y="2331720"/>
-            <a:ext cx="2468880" cy="685800"/>
-          </a:xfrm>
-          <a:prstGeom prst="rect">
-            <a:avLst/>
-          </a:prstGeom>
-          <a:noFill/>
-          <a:ln/>
-        </p:spPr>
-        <p:txBody>
-          <a:bodyPr wrap="square" lIns="0" tIns="0" rIns="0" bIns="0" rtlCol="0" anchor="ctr"/>
-          <a:lstStyle/>
-          <a:p>
-            <a:pPr algn="ctr" indent="0" marL="0">
-              <a:buNone/>
-            </a:pPr>
-            <a:r>
-              <a:rPr lang="en-US" sz="3600" dirty="0">
-                <a:solidFill>
-                  <a:srgbClr val="F5C84C"/>
-                </a:solidFill>
-                <a:latin typeface="Arial Black" pitchFamily="34" charset="0"/>
-                <a:ea typeface="Arial Black" pitchFamily="34" charset="-122"/>
-                <a:cs typeface="Arial Black" pitchFamily="34" charset="-120"/>
-              </a:rPr>
-              <a:t>&lt; 50 €</a:t>
-            </a:r>
-            <a:endParaRPr lang="en-US" sz="3600" dirty="0"/>
-          </a:p>
-        </p:txBody>
-      </p:sp>
-      <p:sp>
-        <p:nvSpPr>
-          <p:cNvPr id="19" name="Text 16"/>
-          <p:cNvSpPr/>
-          <p:nvPr/>
-        </p:nvSpPr>
-        <p:spPr>
-          <a:xfrm>
-            <a:off x="6126480" y="3063240"/>
-            <a:ext cx="2103120" cy="640080"/>
-          </a:xfrm>
-          <a:prstGeom prst="rect">
-            <a:avLst/>
-          </a:prstGeom>
-          <a:noFill/>
-          <a:ln/>
-        </p:spPr>
-        <p:txBody>
-          <a:bodyPr wrap="square" lIns="0" tIns="0" rIns="0" bIns="0" rtlCol="0" anchor="ctr"/>
-          <a:lstStyle/>
-          <a:p>
-            <a:pPr algn="ctr" indent="0" marL="0">
-              <a:lnSpc>
-                <a:spcPct val="115000"/>
-              </a:lnSpc>
-              <a:buNone/>
-            </a:pPr>
-            <a:r>
-              <a:rPr lang="en-US" sz="1150" dirty="0">
-                <a:solidFill>
-                  <a:srgbClr val="AEBDE0"/>
-                </a:solidFill>
-                <a:latin typeface="Arial" pitchFamily="34" charset="0"/>
-                <a:ea typeface="Arial" pitchFamily="34" charset="-122"/>
-                <a:cs typeface="Arial" pitchFamily="34" charset="-120"/>
-              </a:rPr>
-              <a:t>per mettere la tua prima app sul Play Store</a:t>
-            </a:r>
-            <a:endParaRPr lang="en-US" sz="1150" dirty="0"/>
-          </a:p>
-        </p:txBody>
-      </p:sp>
-      <p:sp>
-        <p:nvSpPr>
-          <p:cNvPr id="20" name="Shape 17"/>
-          <p:cNvSpPr/>
-          <p:nvPr/>
-        </p:nvSpPr>
-        <p:spPr>
-          <a:xfrm>
-            <a:off x="640080" y="4160520"/>
-            <a:ext cx="7863840" cy="566928"/>
-          </a:xfrm>
-          <a:prstGeom prst="roundRect">
-            <a:avLst>
-              <a:gd name="adj" fmla="val 9677"/>
-            </a:avLst>
-          </a:prstGeom>
-          <a:solidFill>
-            <a:srgbClr val="0E3A44"/>
-          </a:solidFill>
-          <a:ln w="6350">
-            <a:solidFill>
-              <a:srgbClr val="2BD9E5"/>
-            </a:solidFill>
-            <a:prstDash val="solid"/>
-          </a:ln>
-        </p:spPr>
-      </p:sp>
-      <p:pic>
-        <p:nvPicPr>
-          <p:cNvPr id="21" name="Image 1" descr="preencoded.png">    </p:cNvPr>
-          <p:cNvPicPr>
-            <a:picLocks noChangeAspect="1"/>
-          </p:cNvPicPr>
-          <p:nvPr/>
-        </p:nvPicPr>
-        <p:blipFill>
-          <a:blip r:embed="rId2"/>
-          <a:stretch>
-            <a:fillRect/>
-          </a:stretch>
-        </p:blipFill>
-        <p:spPr>
-          <a:xfrm>
-            <a:off x="841248" y="4334256"/>
-            <a:ext cx="219456" cy="219456"/>
-          </a:xfrm>
-          <a:prstGeom prst="rect">
-            <a:avLst/>
-          </a:prstGeom>
-        </p:spPr>
-      </p:pic>
-      <p:sp>
-        <p:nvSpPr>
-          <p:cNvPr id="22" name="Text 18"/>
-          <p:cNvSpPr/>
-          <p:nvPr/>
-        </p:nvSpPr>
-        <p:spPr>
-          <a:xfrm>
-            <a:off x="1188720" y="4160520"/>
-            <a:ext cx="7178040" cy="566928"/>
-          </a:xfrm>
-          <a:prstGeom prst="rect">
-            <a:avLst/>
-          </a:prstGeom>
-          <a:noFill/>
-          <a:ln/>
-        </p:spPr>
-        <p:txBody>
-          <a:bodyPr wrap="square" lIns="0" tIns="0" rIns="0" bIns="0" rtlCol="0" anchor="ctr"/>
-          <a:lstStyle/>
-          <a:p>
-            <a:pPr indent="0" marL="0">
-              <a:buNone/>
-            </a:pPr>
-            <a:r>
-              <a:rPr lang="en-US" sz="1150" b="1" dirty="0">
-                <a:solidFill>
-                  <a:srgbClr val="F4F7FF"/>
-                </a:solidFill>
-                <a:latin typeface="Arial" pitchFamily="34" charset="0"/>
-                <a:ea typeface="Arial" pitchFamily="34" charset="-122"/>
-                <a:cs typeface="Arial" pitchFamily="34" charset="-120"/>
-              </a:rPr>
-              <a:t>Caso a parte: ElevenLabs. </a:t>
-            </a:r>
-            <a:pPr indent="0" marL="0">
-              <a:buNone/>
-            </a:pPr>
-            <a:r>
-              <a:rPr lang="en-US" sz="1150" dirty="0">
-                <a:solidFill>
-                  <a:srgbClr val="AEBDE0"/>
-                </a:solidFill>
-                <a:latin typeface="Arial" pitchFamily="34" charset="0"/>
-                <a:ea typeface="Arial" pitchFamily="34" charset="-122"/>
-                <a:cs typeface="Arial" pitchFamily="34" charset="-120"/>
-              </a:rPr>
-              <a:t>Solo se vuoi voci AI nell'app — gratis per iniziare, poi da ~5 $/mese.</a:t>
-            </a:r>
-            <a:endParaRPr lang="en-US" sz="1150" dirty="0"/>
           </a:p>
         </p:txBody>
       </p:sp>
@@ -4769,24 +7497,24 @@
         </p:nvSpPr>
         <p:spPr>
           <a:xfrm>
-            <a:off x="640080" y="347472"/>
-            <a:ext cx="7863840" cy="274320"/>
-          </a:xfrm>
-          <a:prstGeom prst="rect">
-            <a:avLst/>
-          </a:prstGeom>
-          <a:noFill/>
-          <a:ln/>
-        </p:spPr>
-        <p:txBody>
-          <a:bodyPr wrap="square" lIns="0" tIns="0" rIns="0" bIns="0" rtlCol="0" anchor="ctr"/>
-          <a:lstStyle/>
-          <a:p>
-            <a:pPr indent="0" marL="0">
-              <a:buNone/>
-            </a:pPr>
-            <a:r>
-              <a:rPr lang="en-US" sz="1100" b="1" spc="300" kern="0" dirty="0">
+            <a:off x="640080" y="365760"/>
+            <a:ext cx="8229600" cy="274320"/>
+          </a:xfrm>
+          <a:prstGeom prst="rect">
+            <a:avLst/>
+          </a:prstGeom>
+          <a:noFill/>
+          <a:ln/>
+        </p:spPr>
+        <p:txBody>
+          <a:bodyPr wrap="square" lIns="0" tIns="0" rIns="0" bIns="0" rtlCol="0" anchor="ctr"/>
+          <a:lstStyle/>
+          <a:p>
+            <a:pPr indent="0" marL="0">
+              <a:buNone/>
+            </a:pPr>
+            <a:r>
+              <a:rPr lang="en-US" sz="1100" b="1" spc="200" kern="0" dirty="0">
                 <a:solidFill>
                   <a:srgbClr val="2BD9E5"/>
                 </a:solidFill>
@@ -4808,7 +7536,7 @@
         </p:nvSpPr>
         <p:spPr>
           <a:xfrm>
-            <a:off x="640080" y="621792"/>
+            <a:off x="640080" y="640080"/>
             <a:ext cx="7863840" cy="566928"/>
           </a:xfrm>
           <a:prstGeom prst="rect">
@@ -4841,23 +7569,136 @@
       </p:sp>
       <p:sp>
         <p:nvSpPr>
-          <p:cNvPr id="4" name="Shape 2"/>
-          <p:cNvSpPr/>
-          <p:nvPr/>
-        </p:nvSpPr>
-        <p:spPr>
-          <a:xfrm>
-            <a:off x="640080" y="1371600"/>
-            <a:ext cx="2496312" cy="1645920"/>
-          </a:xfrm>
-          <a:prstGeom prst="roundRect">
-            <a:avLst>
-              <a:gd name="adj" fmla="val 4444"/>
-            </a:avLst>
-          </a:prstGeom>
-          <a:solidFill>
-            <a:srgbClr val="16203F"/>
-          </a:solidFill>
+          <p:cNvPr id="4" name="Text 2"/>
+          <p:cNvSpPr/>
+          <p:nvPr/>
+        </p:nvSpPr>
+        <p:spPr>
+          <a:xfrm>
+            <a:off x="658368" y="1188720"/>
+            <a:ext cx="7772400" cy="274320"/>
+          </a:xfrm>
+          <a:prstGeom prst="rect">
+            <a:avLst/>
+          </a:prstGeom>
+          <a:noFill/>
+          <a:ln/>
+        </p:spPr>
+        <p:txBody>
+          <a:bodyPr wrap="square" lIns="0" tIns="0" rIns="0" bIns="0" rtlCol="0" anchor="ctr"/>
+          <a:lstStyle/>
+          <a:p>
+            <a:pPr indent="0" marL="0">
+              <a:buNone/>
+            </a:pPr>
+            <a:r>
+              <a:rPr lang="en-US" sz="1300" i="1" dirty="0">
+                <a:solidFill>
+                  <a:srgbClr val="AEBDE0"/>
+                </a:solidFill>
+                <a:latin typeface="Arial" pitchFamily="34" charset="0"/>
+                <a:ea typeface="Arial" pitchFamily="34" charset="-122"/>
+                <a:cs typeface="Arial" pitchFamily="34" charset="-120"/>
+              </a:rPr>
+              <a:t>I passi, in breve</a:t>
+            </a:r>
+            <a:endParaRPr lang="en-US" sz="1300" dirty="0"/>
+          </a:p>
+        </p:txBody>
+      </p:sp>
+      <p:sp>
+        <p:nvSpPr>
+          <p:cNvPr id="5" name="Text 3"/>
+          <p:cNvSpPr/>
+          <p:nvPr/>
+        </p:nvSpPr>
+        <p:spPr>
+          <a:xfrm>
+            <a:off x="868680" y="1691640"/>
+            <a:ext cx="685800" cy="463296"/>
+          </a:xfrm>
+          <a:prstGeom prst="rect">
+            <a:avLst/>
+          </a:prstGeom>
+          <a:noFill/>
+          <a:ln/>
+        </p:spPr>
+        <p:txBody>
+          <a:bodyPr wrap="square" lIns="0" tIns="0" rIns="0" bIns="0" rtlCol="0" anchor="ctr"/>
+          <a:lstStyle/>
+          <a:p>
+            <a:pPr indent="0" marL="0">
+              <a:buNone/>
+            </a:pPr>
+            <a:r>
+              <a:rPr lang="en-US" sz="2200" dirty="0">
+                <a:solidFill>
+                  <a:srgbClr val="2BD9E5"/>
+                </a:solidFill>
+                <a:latin typeface="Arial Black" pitchFamily="34" charset="0"/>
+                <a:ea typeface="Arial Black" pitchFamily="34" charset="-122"/>
+                <a:cs typeface="Arial Black" pitchFamily="34" charset="-120"/>
+              </a:rPr>
+              <a:t>01</a:t>
+            </a:r>
+            <a:endParaRPr lang="en-US" sz="2200" dirty="0"/>
+          </a:p>
+        </p:txBody>
+      </p:sp>
+      <p:sp>
+        <p:nvSpPr>
+          <p:cNvPr id="6" name="Text 4"/>
+          <p:cNvSpPr/>
+          <p:nvPr/>
+        </p:nvSpPr>
+        <p:spPr>
+          <a:xfrm>
+            <a:off x="1645920" y="1691640"/>
+            <a:ext cx="6675120" cy="463296"/>
+          </a:xfrm>
+          <a:prstGeom prst="rect">
+            <a:avLst/>
+          </a:prstGeom>
+          <a:noFill/>
+          <a:ln/>
+        </p:spPr>
+        <p:txBody>
+          <a:bodyPr wrap="square" lIns="0" tIns="0" rIns="0" bIns="0" rtlCol="0" anchor="ctr"/>
+          <a:lstStyle/>
+          <a:p>
+            <a:pPr indent="0" marL="0">
+              <a:buNone/>
+            </a:pPr>
+            <a:r>
+              <a:rPr lang="en-US" sz="1900" dirty="0">
+                <a:solidFill>
+                  <a:srgbClr val="F4F7FF"/>
+                </a:solidFill>
+                <a:latin typeface="Arial" pitchFamily="34" charset="0"/>
+                <a:ea typeface="Arial" pitchFamily="34" charset="-122"/>
+                <a:cs typeface="Arial" pitchFamily="34" charset="-120"/>
+              </a:rPr>
+              <a:t>Parti dal problema</a:t>
+            </a:r>
+            <a:endParaRPr lang="en-US" sz="1900" dirty="0"/>
+          </a:p>
+        </p:txBody>
+      </p:sp>
+      <p:sp>
+        <p:nvSpPr>
+          <p:cNvPr id="7" name="Shape 5"/>
+          <p:cNvSpPr/>
+          <p:nvPr/>
+        </p:nvSpPr>
+        <p:spPr>
+          <a:xfrm>
+            <a:off x="1645920" y="2173224"/>
+            <a:ext cx="6583680" cy="0"/>
+          </a:xfrm>
+          <a:prstGeom prst="line">
+            <a:avLst/>
+          </a:prstGeom>
+          <a:noFill/>
           <a:ln w="9525">
             <a:solidFill>
               <a:srgbClr val="2A3A6B"/>
@@ -4868,30 +7709,30 @@
       </p:sp>
       <p:sp>
         <p:nvSpPr>
-          <p:cNvPr id="5" name="Text 3"/>
-          <p:cNvSpPr/>
-          <p:nvPr/>
-        </p:nvSpPr>
-        <p:spPr>
-          <a:xfrm>
-            <a:off x="841248" y="1499616"/>
-            <a:ext cx="731520" cy="384048"/>
-          </a:xfrm>
-          <a:prstGeom prst="rect">
-            <a:avLst/>
-          </a:prstGeom>
-          <a:noFill/>
-          <a:ln/>
-        </p:spPr>
-        <p:txBody>
-          <a:bodyPr wrap="square" lIns="0" tIns="0" rIns="0" bIns="0" rtlCol="0" anchor="ctr"/>
-          <a:lstStyle/>
-          <a:p>
-            <a:pPr indent="0" marL="0">
-              <a:buNone/>
-            </a:pPr>
-            <a:r>
-              <a:rPr lang="en-US" sz="1900" dirty="0">
+          <p:cNvPr id="8" name="Text 6"/>
+          <p:cNvSpPr/>
+          <p:nvPr/>
+        </p:nvSpPr>
+        <p:spPr>
+          <a:xfrm>
+            <a:off x="868680" y="2209800"/>
+            <a:ext cx="685800" cy="463296"/>
+          </a:xfrm>
+          <a:prstGeom prst="rect">
+            <a:avLst/>
+          </a:prstGeom>
+          <a:noFill/>
+          <a:ln/>
+        </p:spPr>
+        <p:txBody>
+          <a:bodyPr wrap="square" lIns="0" tIns="0" rIns="0" bIns="0" rtlCol="0" anchor="ctr"/>
+          <a:lstStyle/>
+          <a:p>
+            <a:pPr indent="0" marL="0">
+              <a:buNone/>
+            </a:pPr>
+            <a:r>
+              <a:rPr lang="en-US" sz="2200" dirty="0">
                 <a:solidFill>
                   <a:srgbClr val="2BD9E5"/>
                 </a:solidFill>
@@ -4899,7 +7740,46 @@
                 <a:ea typeface="Arial Black" pitchFamily="34" charset="-122"/>
                 <a:cs typeface="Arial Black" pitchFamily="34" charset="-120"/>
               </a:rPr>
-              <a:t>01</a:t>
+              <a:t>02</a:t>
+            </a:r>
+            <a:endParaRPr lang="en-US" sz="2200" dirty="0"/>
+          </a:p>
+        </p:txBody>
+      </p:sp>
+      <p:sp>
+        <p:nvSpPr>
+          <p:cNvPr id="9" name="Text 7"/>
+          <p:cNvSpPr/>
+          <p:nvPr/>
+        </p:nvSpPr>
+        <p:spPr>
+          <a:xfrm>
+            <a:off x="1645920" y="2209800"/>
+            <a:ext cx="6675120" cy="463296"/>
+          </a:xfrm>
+          <a:prstGeom prst="rect">
+            <a:avLst/>
+          </a:prstGeom>
+          <a:noFill/>
+          <a:ln/>
+        </p:spPr>
+        <p:txBody>
+          <a:bodyPr wrap="square" lIns="0" tIns="0" rIns="0" bIns="0" rtlCol="0" anchor="ctr"/>
+          <a:lstStyle/>
+          <a:p>
+            <a:pPr indent="0" marL="0">
+              <a:buNone/>
+            </a:pPr>
+            <a:r>
+              <a:rPr lang="en-US" sz="1900" dirty="0">
+                <a:solidFill>
+                  <a:srgbClr val="F4F7FF"/>
+                </a:solidFill>
+                <a:latin typeface="Arial" pitchFamily="34" charset="0"/>
+                <a:ea typeface="Arial" pitchFamily="34" charset="-122"/>
+                <a:cs typeface="Arial" pitchFamily="34" charset="-120"/>
+              </a:rPr>
+              <a:t>Descrivi all'AI</a:t>
             </a:r>
             <a:endParaRPr lang="en-US" sz="1900" dirty="0"/>
           </a:p>
@@ -4907,104 +7787,19 @@
       </p:sp>
       <p:sp>
         <p:nvSpPr>
-          <p:cNvPr id="6" name="Text 4"/>
-          <p:cNvSpPr/>
-          <p:nvPr/>
-        </p:nvSpPr>
-        <p:spPr>
-          <a:xfrm>
-            <a:off x="841248" y="1901952"/>
-            <a:ext cx="2103120" cy="292608"/>
-          </a:xfrm>
-          <a:prstGeom prst="rect">
-            <a:avLst/>
-          </a:prstGeom>
-          <a:noFill/>
-          <a:ln/>
-        </p:spPr>
-        <p:txBody>
-          <a:bodyPr wrap="square" lIns="0" tIns="0" rIns="0" bIns="0" rtlCol="0" anchor="ctr"/>
-          <a:lstStyle/>
-          <a:p>
-            <a:pPr indent="0" marL="0">
-              <a:buNone/>
-            </a:pPr>
-            <a:r>
-              <a:rPr lang="en-US" sz="1300" b="1" dirty="0">
-                <a:solidFill>
-                  <a:srgbClr val="F4F7FF"/>
-                </a:solidFill>
-                <a:latin typeface="Arial" pitchFamily="34" charset="0"/>
-                <a:ea typeface="Arial" pitchFamily="34" charset="-122"/>
-                <a:cs typeface="Arial" pitchFamily="34" charset="-120"/>
-              </a:rPr>
-              <a:t>Parti dal problema</a:t>
-            </a:r>
-            <a:endParaRPr lang="en-US" sz="1300" dirty="0"/>
-          </a:p>
-        </p:txBody>
-      </p:sp>
-      <p:sp>
-        <p:nvSpPr>
-          <p:cNvPr id="7" name="Text 5"/>
-          <p:cNvSpPr/>
-          <p:nvPr/>
-        </p:nvSpPr>
-        <p:spPr>
-          <a:xfrm>
-            <a:off x="841248" y="2212848"/>
-            <a:ext cx="2103120" cy="731520"/>
-          </a:xfrm>
-          <a:prstGeom prst="rect">
-            <a:avLst/>
-          </a:prstGeom>
-          <a:noFill/>
-          <a:ln/>
-        </p:spPr>
-        <p:txBody>
-          <a:bodyPr wrap="square" lIns="0" tIns="0" rIns="0" bIns="0" rtlCol="0" anchor="t"/>
-          <a:lstStyle/>
-          <a:p>
-            <a:pPr indent="0" marL="0">
-              <a:lnSpc>
-                <a:spcPct val="112000"/>
-              </a:lnSpc>
-              <a:buNone/>
-            </a:pPr>
-            <a:r>
-              <a:rPr lang="en-US" sz="1000" dirty="0">
-                <a:solidFill>
-                  <a:srgbClr val="AEBDE0"/>
-                </a:solidFill>
-                <a:latin typeface="Arial" pitchFamily="34" charset="0"/>
-                <a:ea typeface="Arial" pitchFamily="34" charset="-122"/>
-                <a:cs typeface="Arial" pitchFamily="34" charset="-120"/>
-              </a:rPr>
-              <a:t>Un utente preciso, un bisogno reale, la funzione minima che lo risolve.</a:t>
-            </a:r>
-            <a:endParaRPr lang="en-US" sz="1000" dirty="0"/>
-          </a:p>
-        </p:txBody>
-      </p:sp>
-      <p:sp>
-        <p:nvSpPr>
-          <p:cNvPr id="8" name="Shape 6"/>
-          <p:cNvSpPr/>
-          <p:nvPr/>
-        </p:nvSpPr>
-        <p:spPr>
-          <a:xfrm>
-            <a:off x="3337560" y="1371600"/>
-            <a:ext cx="2496312" cy="1645920"/>
-          </a:xfrm>
-          <a:prstGeom prst="roundRect">
-            <a:avLst>
-              <a:gd name="adj" fmla="val 4444"/>
-            </a:avLst>
-          </a:prstGeom>
-          <a:solidFill>
-            <a:srgbClr val="16203F"/>
-          </a:solidFill>
+          <p:cNvPr id="10" name="Shape 8"/>
+          <p:cNvSpPr/>
+          <p:nvPr/>
+        </p:nvSpPr>
+        <p:spPr>
+          <a:xfrm>
+            <a:off x="1645920" y="2691384"/>
+            <a:ext cx="6583680" cy="0"/>
+          </a:xfrm>
+          <a:prstGeom prst="line">
+            <a:avLst/>
+          </a:prstGeom>
+          <a:noFill/>
           <a:ln w="9525">
             <a:solidFill>
               <a:srgbClr val="2A3A6B"/>
@@ -5015,30 +7810,30 @@
       </p:sp>
       <p:sp>
         <p:nvSpPr>
-          <p:cNvPr id="9" name="Text 7"/>
-          <p:cNvSpPr/>
-          <p:nvPr/>
-        </p:nvSpPr>
-        <p:spPr>
-          <a:xfrm>
-            <a:off x="3538728" y="1499616"/>
-            <a:ext cx="731520" cy="384048"/>
-          </a:xfrm>
-          <a:prstGeom prst="rect">
-            <a:avLst/>
-          </a:prstGeom>
-          <a:noFill/>
-          <a:ln/>
-        </p:spPr>
-        <p:txBody>
-          <a:bodyPr wrap="square" lIns="0" tIns="0" rIns="0" bIns="0" rtlCol="0" anchor="ctr"/>
-          <a:lstStyle/>
-          <a:p>
-            <a:pPr indent="0" marL="0">
-              <a:buNone/>
-            </a:pPr>
-            <a:r>
-              <a:rPr lang="en-US" sz="1900" dirty="0">
+          <p:cNvPr id="11" name="Text 9"/>
+          <p:cNvSpPr/>
+          <p:nvPr/>
+        </p:nvSpPr>
+        <p:spPr>
+          <a:xfrm>
+            <a:off x="868680" y="2727960"/>
+            <a:ext cx="685800" cy="463296"/>
+          </a:xfrm>
+          <a:prstGeom prst="rect">
+            <a:avLst/>
+          </a:prstGeom>
+          <a:noFill/>
+          <a:ln/>
+        </p:spPr>
+        <p:txBody>
+          <a:bodyPr wrap="square" lIns="0" tIns="0" rIns="0" bIns="0" rtlCol="0" anchor="ctr"/>
+          <a:lstStyle/>
+          <a:p>
+            <a:pPr indent="0" marL="0">
+              <a:buNone/>
+            </a:pPr>
+            <a:r>
+              <a:rPr lang="en-US" sz="2200" dirty="0">
                 <a:solidFill>
                   <a:srgbClr val="2BD9E5"/>
                 </a:solidFill>
@@ -5046,7 +7841,46 @@
                 <a:ea typeface="Arial Black" pitchFamily="34" charset="-122"/>
                 <a:cs typeface="Arial Black" pitchFamily="34" charset="-120"/>
               </a:rPr>
-              <a:t>02</a:t>
+              <a:t>03</a:t>
+            </a:r>
+            <a:endParaRPr lang="en-US" sz="2200" dirty="0"/>
+          </a:p>
+        </p:txBody>
+      </p:sp>
+      <p:sp>
+        <p:nvSpPr>
+          <p:cNvPr id="12" name="Text 10"/>
+          <p:cNvSpPr/>
+          <p:nvPr/>
+        </p:nvSpPr>
+        <p:spPr>
+          <a:xfrm>
+            <a:off x="1645920" y="2727960"/>
+            <a:ext cx="6675120" cy="463296"/>
+          </a:xfrm>
+          <a:prstGeom prst="rect">
+            <a:avLst/>
+          </a:prstGeom>
+          <a:noFill/>
+          <a:ln/>
+        </p:spPr>
+        <p:txBody>
+          <a:bodyPr wrap="square" lIns="0" tIns="0" rIns="0" bIns="0" rtlCol="0" anchor="ctr"/>
+          <a:lstStyle/>
+          <a:p>
+            <a:pPr indent="0" marL="0">
+              <a:buNone/>
+            </a:pPr>
+            <a:r>
+              <a:rPr lang="en-US" sz="1900" dirty="0">
+                <a:solidFill>
+                  <a:srgbClr val="F4F7FF"/>
+                </a:solidFill>
+                <a:latin typeface="Arial" pitchFamily="34" charset="0"/>
+                <a:ea typeface="Arial" pitchFamily="34" charset="-122"/>
+                <a:cs typeface="Arial" pitchFamily="34" charset="-120"/>
+              </a:rPr>
+              <a:t>Ottieni un prototipo</a:t>
             </a:r>
             <a:endParaRPr lang="en-US" sz="1900" dirty="0"/>
           </a:p>
@@ -5054,104 +7888,19 @@
       </p:sp>
       <p:sp>
         <p:nvSpPr>
-          <p:cNvPr id="10" name="Text 8"/>
-          <p:cNvSpPr/>
-          <p:nvPr/>
-        </p:nvSpPr>
-        <p:spPr>
-          <a:xfrm>
-            <a:off x="3538728" y="1901952"/>
-            <a:ext cx="2103120" cy="292608"/>
-          </a:xfrm>
-          <a:prstGeom prst="rect">
-            <a:avLst/>
-          </a:prstGeom>
-          <a:noFill/>
-          <a:ln/>
-        </p:spPr>
-        <p:txBody>
-          <a:bodyPr wrap="square" lIns="0" tIns="0" rIns="0" bIns="0" rtlCol="0" anchor="ctr"/>
-          <a:lstStyle/>
-          <a:p>
-            <a:pPr indent="0" marL="0">
-              <a:buNone/>
-            </a:pPr>
-            <a:r>
-              <a:rPr lang="en-US" sz="1300" b="1" dirty="0">
-                <a:solidFill>
-                  <a:srgbClr val="F4F7FF"/>
-                </a:solidFill>
-                <a:latin typeface="Arial" pitchFamily="34" charset="0"/>
-                <a:ea typeface="Arial" pitchFamily="34" charset="-122"/>
-                <a:cs typeface="Arial" pitchFamily="34" charset="-120"/>
-              </a:rPr>
-              <a:t>Descrivi all'AI</a:t>
-            </a:r>
-            <a:endParaRPr lang="en-US" sz="1300" dirty="0"/>
-          </a:p>
-        </p:txBody>
-      </p:sp>
-      <p:sp>
-        <p:nvSpPr>
-          <p:cNvPr id="11" name="Text 9"/>
-          <p:cNvSpPr/>
-          <p:nvPr/>
-        </p:nvSpPr>
-        <p:spPr>
-          <a:xfrm>
-            <a:off x="3538728" y="2212848"/>
-            <a:ext cx="2103120" cy="731520"/>
-          </a:xfrm>
-          <a:prstGeom prst="rect">
-            <a:avLst/>
-          </a:prstGeom>
-          <a:noFill/>
-          <a:ln/>
-        </p:spPr>
-        <p:txBody>
-          <a:bodyPr wrap="square" lIns="0" tIns="0" rIns="0" bIns="0" rtlCol="0" anchor="t"/>
-          <a:lstStyle/>
-          <a:p>
-            <a:pPr indent="0" marL="0">
-              <a:lnSpc>
-                <a:spcPct val="112000"/>
-              </a:lnSpc>
-              <a:buNone/>
-            </a:pPr>
-            <a:r>
-              <a:rPr lang="en-US" sz="1000" dirty="0">
-                <a:solidFill>
-                  <a:srgbClr val="AEBDE0"/>
-                </a:solidFill>
-                <a:latin typeface="Arial" pitchFamily="34" charset="0"/>
-                <a:ea typeface="Arial" pitchFamily="34" charset="-122"/>
-                <a:cs typeface="Arial" pitchFamily="34" charset="-120"/>
-              </a:rPr>
-              <a:t>Brief in linguaggio naturale: cosa deve fare, non come. Le tecnologie le sceglie lei.</a:t>
-            </a:r>
-            <a:endParaRPr lang="en-US" sz="1000" dirty="0"/>
-          </a:p>
-        </p:txBody>
-      </p:sp>
-      <p:sp>
-        <p:nvSpPr>
-          <p:cNvPr id="12" name="Shape 10"/>
-          <p:cNvSpPr/>
-          <p:nvPr/>
-        </p:nvSpPr>
-        <p:spPr>
-          <a:xfrm>
-            <a:off x="6035040" y="1371600"/>
-            <a:ext cx="2496312" cy="1645920"/>
-          </a:xfrm>
-          <a:prstGeom prst="roundRect">
-            <a:avLst>
-              <a:gd name="adj" fmla="val 4444"/>
-            </a:avLst>
-          </a:prstGeom>
-          <a:solidFill>
-            <a:srgbClr val="16203F"/>
-          </a:solidFill>
+          <p:cNvPr id="13" name="Shape 11"/>
+          <p:cNvSpPr/>
+          <p:nvPr/>
+        </p:nvSpPr>
+        <p:spPr>
+          <a:xfrm>
+            <a:off x="1645920" y="3209544"/>
+            <a:ext cx="6583680" cy="0"/>
+          </a:xfrm>
+          <a:prstGeom prst="line">
+            <a:avLst/>
+          </a:prstGeom>
+          <a:noFill/>
           <a:ln w="9525">
             <a:solidFill>
               <a:srgbClr val="2A3A6B"/>
@@ -5162,30 +7911,30 @@
       </p:sp>
       <p:sp>
         <p:nvSpPr>
-          <p:cNvPr id="13" name="Text 11"/>
-          <p:cNvSpPr/>
-          <p:nvPr/>
-        </p:nvSpPr>
-        <p:spPr>
-          <a:xfrm>
-            <a:off x="6236208" y="1499616"/>
-            <a:ext cx="731520" cy="384048"/>
-          </a:xfrm>
-          <a:prstGeom prst="rect">
-            <a:avLst/>
-          </a:prstGeom>
-          <a:noFill/>
-          <a:ln/>
-        </p:spPr>
-        <p:txBody>
-          <a:bodyPr wrap="square" lIns="0" tIns="0" rIns="0" bIns="0" rtlCol="0" anchor="ctr"/>
-          <a:lstStyle/>
-          <a:p>
-            <a:pPr indent="0" marL="0">
-              <a:buNone/>
-            </a:pPr>
-            <a:r>
-              <a:rPr lang="en-US" sz="1900" dirty="0">
+          <p:cNvPr id="14" name="Text 12"/>
+          <p:cNvSpPr/>
+          <p:nvPr/>
+        </p:nvSpPr>
+        <p:spPr>
+          <a:xfrm>
+            <a:off x="868680" y="3246120"/>
+            <a:ext cx="685800" cy="463296"/>
+          </a:xfrm>
+          <a:prstGeom prst="rect">
+            <a:avLst/>
+          </a:prstGeom>
+          <a:noFill/>
+          <a:ln/>
+        </p:spPr>
+        <p:txBody>
+          <a:bodyPr wrap="square" lIns="0" tIns="0" rIns="0" bIns="0" rtlCol="0" anchor="ctr"/>
+          <a:lstStyle/>
+          <a:p>
+            <a:pPr indent="0" marL="0">
+              <a:buNone/>
+            </a:pPr>
+            <a:r>
+              <a:rPr lang="en-US" sz="2200" dirty="0">
                 <a:solidFill>
                   <a:srgbClr val="2BD9E5"/>
                 </a:solidFill>
@@ -5193,7 +7942,46 @@
                 <a:ea typeface="Arial Black" pitchFamily="34" charset="-122"/>
                 <a:cs typeface="Arial Black" pitchFamily="34" charset="-120"/>
               </a:rPr>
-              <a:t>03</a:t>
+              <a:t>04</a:t>
+            </a:r>
+            <a:endParaRPr lang="en-US" sz="2200" dirty="0"/>
+          </a:p>
+        </p:txBody>
+      </p:sp>
+      <p:sp>
+        <p:nvSpPr>
+          <p:cNvPr id="15" name="Text 13"/>
+          <p:cNvSpPr/>
+          <p:nvPr/>
+        </p:nvSpPr>
+        <p:spPr>
+          <a:xfrm>
+            <a:off x="1645920" y="3246120"/>
+            <a:ext cx="6675120" cy="463296"/>
+          </a:xfrm>
+          <a:prstGeom prst="rect">
+            <a:avLst/>
+          </a:prstGeom>
+          <a:noFill/>
+          <a:ln/>
+        </p:spPr>
+        <p:txBody>
+          <a:bodyPr wrap="square" lIns="0" tIns="0" rIns="0" bIns="0" rtlCol="0" anchor="ctr"/>
+          <a:lstStyle/>
+          <a:p>
+            <a:pPr indent="0" marL="0">
+              <a:buNone/>
+            </a:pPr>
+            <a:r>
+              <a:rPr lang="en-US" sz="1900" dirty="0">
+                <a:solidFill>
+                  <a:srgbClr val="F4F7FF"/>
+                </a:solidFill>
+                <a:latin typeface="Arial" pitchFamily="34" charset="0"/>
+                <a:ea typeface="Arial" pitchFamily="34" charset="-122"/>
+                <a:cs typeface="Arial" pitchFamily="34" charset="-120"/>
+              </a:rPr>
+              <a:t>Itera a parole</a:t>
             </a:r>
             <a:endParaRPr lang="en-US" sz="1900" dirty="0"/>
           </a:p>
@@ -5201,104 +7989,19 @@
       </p:sp>
       <p:sp>
         <p:nvSpPr>
-          <p:cNvPr id="14" name="Text 12"/>
-          <p:cNvSpPr/>
-          <p:nvPr/>
-        </p:nvSpPr>
-        <p:spPr>
-          <a:xfrm>
-            <a:off x="6236208" y="1901952"/>
-            <a:ext cx="2103120" cy="292608"/>
-          </a:xfrm>
-          <a:prstGeom prst="rect">
-            <a:avLst/>
-          </a:prstGeom>
-          <a:noFill/>
-          <a:ln/>
-        </p:spPr>
-        <p:txBody>
-          <a:bodyPr wrap="square" lIns="0" tIns="0" rIns="0" bIns="0" rtlCol="0" anchor="ctr"/>
-          <a:lstStyle/>
-          <a:p>
-            <a:pPr indent="0" marL="0">
-              <a:buNone/>
-            </a:pPr>
-            <a:r>
-              <a:rPr lang="en-US" sz="1300" b="1" dirty="0">
-                <a:solidFill>
-                  <a:srgbClr val="F4F7FF"/>
-                </a:solidFill>
-                <a:latin typeface="Arial" pitchFamily="34" charset="0"/>
-                <a:ea typeface="Arial" pitchFamily="34" charset="-122"/>
-                <a:cs typeface="Arial" pitchFamily="34" charset="-120"/>
-              </a:rPr>
-              <a:t>Ottieni un prototipo</a:t>
-            </a:r>
-            <a:endParaRPr lang="en-US" sz="1300" dirty="0"/>
-          </a:p>
-        </p:txBody>
-      </p:sp>
-      <p:sp>
-        <p:nvSpPr>
-          <p:cNvPr id="15" name="Text 13"/>
-          <p:cNvSpPr/>
-          <p:nvPr/>
-        </p:nvSpPr>
-        <p:spPr>
-          <a:xfrm>
-            <a:off x="6236208" y="2212848"/>
-            <a:ext cx="2103120" cy="731520"/>
-          </a:xfrm>
-          <a:prstGeom prst="rect">
-            <a:avLst/>
-          </a:prstGeom>
-          <a:noFill/>
-          <a:ln/>
-        </p:spPr>
-        <p:txBody>
-          <a:bodyPr wrap="square" lIns="0" tIns="0" rIns="0" bIns="0" rtlCol="0" anchor="t"/>
-          <a:lstStyle/>
-          <a:p>
-            <a:pPr indent="0" marL="0">
-              <a:lnSpc>
-                <a:spcPct val="112000"/>
-              </a:lnSpc>
-              <a:buNone/>
-            </a:pPr>
-            <a:r>
-              <a:rPr lang="en-US" sz="1000" dirty="0">
-                <a:solidFill>
-                  <a:srgbClr val="AEBDE0"/>
-                </a:solidFill>
-                <a:latin typeface="Arial" pitchFamily="34" charset="0"/>
-                <a:ea typeface="Arial" pitchFamily="34" charset="-122"/>
-                <a:cs typeface="Arial" pitchFamily="34" charset="-120"/>
-              </a:rPr>
-              <a:t>Una versione da toccare subito, anche imperfetta. Prima web, poi mobile.</a:t>
-            </a:r>
-            <a:endParaRPr lang="en-US" sz="1000" dirty="0"/>
-          </a:p>
-        </p:txBody>
-      </p:sp>
-      <p:sp>
-        <p:nvSpPr>
           <p:cNvPr id="16" name="Shape 14"/>
           <p:cNvSpPr/>
           <p:nvPr/>
         </p:nvSpPr>
         <p:spPr>
           <a:xfrm>
-            <a:off x="640080" y="3154680"/>
-            <a:ext cx="2496312" cy="1645920"/>
-          </a:xfrm>
-          <a:prstGeom prst="roundRect">
-            <a:avLst>
-              <a:gd name="adj" fmla="val 4444"/>
-            </a:avLst>
-          </a:prstGeom>
-          <a:solidFill>
-            <a:srgbClr val="16203F"/>
-          </a:solidFill>
+            <a:off x="1645920" y="3727704"/>
+            <a:ext cx="6583680" cy="0"/>
+          </a:xfrm>
+          <a:prstGeom prst="line">
+            <a:avLst/>
+          </a:prstGeom>
+          <a:noFill/>
           <a:ln w="9525">
             <a:solidFill>
               <a:srgbClr val="2A3A6B"/>
@@ -5315,24 +8018,24 @@
         </p:nvSpPr>
         <p:spPr>
           <a:xfrm>
-            <a:off x="841248" y="3282696"/>
-            <a:ext cx="731520" cy="384048"/>
-          </a:xfrm>
-          <a:prstGeom prst="rect">
-            <a:avLst/>
-          </a:prstGeom>
-          <a:noFill/>
-          <a:ln/>
-        </p:spPr>
-        <p:txBody>
-          <a:bodyPr wrap="square" lIns="0" tIns="0" rIns="0" bIns="0" rtlCol="0" anchor="ctr"/>
-          <a:lstStyle/>
-          <a:p>
-            <a:pPr indent="0" marL="0">
-              <a:buNone/>
-            </a:pPr>
-            <a:r>
-              <a:rPr lang="en-US" sz="1900" dirty="0">
+            <a:off x="868680" y="3764280"/>
+            <a:ext cx="685800" cy="463296"/>
+          </a:xfrm>
+          <a:prstGeom prst="rect">
+            <a:avLst/>
+          </a:prstGeom>
+          <a:noFill/>
+          <a:ln/>
+        </p:spPr>
+        <p:txBody>
+          <a:bodyPr wrap="square" lIns="0" tIns="0" rIns="0" bIns="0" rtlCol="0" anchor="ctr"/>
+          <a:lstStyle/>
+          <a:p>
+            <a:pPr indent="0" marL="0">
+              <a:buNone/>
+            </a:pPr>
+            <a:r>
+              <a:rPr lang="en-US" sz="2200" dirty="0">
                 <a:solidFill>
                   <a:srgbClr val="2BD9E5"/>
                 </a:solidFill>
@@ -5340,7 +8043,46 @@
                 <a:ea typeface="Arial Black" pitchFamily="34" charset="-122"/>
                 <a:cs typeface="Arial Black" pitchFamily="34" charset="-120"/>
               </a:rPr>
-              <a:t>04</a:t>
+              <a:t>05</a:t>
+            </a:r>
+            <a:endParaRPr lang="en-US" sz="2200" dirty="0"/>
+          </a:p>
+        </p:txBody>
+      </p:sp>
+      <p:sp>
+        <p:nvSpPr>
+          <p:cNvPr id="18" name="Text 16"/>
+          <p:cNvSpPr/>
+          <p:nvPr/>
+        </p:nvSpPr>
+        <p:spPr>
+          <a:xfrm>
+            <a:off x="1645920" y="3764280"/>
+            <a:ext cx="6675120" cy="463296"/>
+          </a:xfrm>
+          <a:prstGeom prst="rect">
+            <a:avLst/>
+          </a:prstGeom>
+          <a:noFill/>
+          <a:ln/>
+        </p:spPr>
+        <p:txBody>
+          <a:bodyPr wrap="square" lIns="0" tIns="0" rIns="0" bIns="0" rtlCol="0" anchor="ctr"/>
+          <a:lstStyle/>
+          <a:p>
+            <a:pPr indent="0" marL="0">
+              <a:buNone/>
+            </a:pPr>
+            <a:r>
+              <a:rPr lang="en-US" sz="1900" dirty="0">
+                <a:solidFill>
+                  <a:srgbClr val="F4F7FF"/>
+                </a:solidFill>
+                <a:latin typeface="Arial" pitchFamily="34" charset="0"/>
+                <a:ea typeface="Arial" pitchFamily="34" charset="-122"/>
+                <a:cs typeface="Arial" pitchFamily="34" charset="-120"/>
+              </a:rPr>
+              <a:t>Prepara il lancio</a:t>
             </a:r>
             <a:endParaRPr lang="en-US" sz="1900" dirty="0"/>
           </a:p>
@@ -5348,104 +8090,19 @@
       </p:sp>
       <p:sp>
         <p:nvSpPr>
-          <p:cNvPr id="18" name="Text 16"/>
-          <p:cNvSpPr/>
-          <p:nvPr/>
-        </p:nvSpPr>
-        <p:spPr>
-          <a:xfrm>
-            <a:off x="841248" y="3685032"/>
-            <a:ext cx="2103120" cy="292608"/>
-          </a:xfrm>
-          <a:prstGeom prst="rect">
-            <a:avLst/>
-          </a:prstGeom>
-          <a:noFill/>
-          <a:ln/>
-        </p:spPr>
-        <p:txBody>
-          <a:bodyPr wrap="square" lIns="0" tIns="0" rIns="0" bIns="0" rtlCol="0" anchor="ctr"/>
-          <a:lstStyle/>
-          <a:p>
-            <a:pPr indent="0" marL="0">
-              <a:buNone/>
-            </a:pPr>
-            <a:r>
-              <a:rPr lang="en-US" sz="1300" b="1" dirty="0">
-                <a:solidFill>
-                  <a:srgbClr val="F4F7FF"/>
-                </a:solidFill>
-                <a:latin typeface="Arial" pitchFamily="34" charset="0"/>
-                <a:ea typeface="Arial" pitchFamily="34" charset="-122"/>
-                <a:cs typeface="Arial" pitchFamily="34" charset="-120"/>
-              </a:rPr>
-              <a:t>Itera a parole</a:t>
-            </a:r>
-            <a:endParaRPr lang="en-US" sz="1300" dirty="0"/>
-          </a:p>
-        </p:txBody>
-      </p:sp>
-      <p:sp>
-        <p:nvSpPr>
-          <p:cNvPr id="19" name="Text 17"/>
-          <p:cNvSpPr/>
-          <p:nvPr/>
-        </p:nvSpPr>
-        <p:spPr>
-          <a:xfrm>
-            <a:off x="841248" y="3995928"/>
-            <a:ext cx="2103120" cy="731520"/>
-          </a:xfrm>
-          <a:prstGeom prst="rect">
-            <a:avLst/>
-          </a:prstGeom>
-          <a:noFill/>
-          <a:ln/>
-        </p:spPr>
-        <p:txBody>
-          <a:bodyPr wrap="square" lIns="0" tIns="0" rIns="0" bIns="0" rtlCol="0" anchor="t"/>
-          <a:lstStyle/>
-          <a:p>
-            <a:pPr indent="0" marL="0">
-              <a:lnSpc>
-                <a:spcPct val="112000"/>
-              </a:lnSpc>
-              <a:buNone/>
-            </a:pPr>
-            <a:r>
-              <a:rPr lang="en-US" sz="1000" dirty="0">
-                <a:solidFill>
-                  <a:srgbClr val="AEBDE0"/>
-                </a:solidFill>
-                <a:latin typeface="Arial" pitchFamily="34" charset="0"/>
-                <a:ea typeface="Arial" pitchFamily="34" charset="-122"/>
-                <a:cs typeface="Arial" pitchFamily="34" charset="-120"/>
-              </a:rPr>
-              <a:t>Usa l'app, descrivi cosa non va, l'AI corregge. Ripeti finché ti convince.</a:t>
-            </a:r>
-            <a:endParaRPr lang="en-US" sz="1000" dirty="0"/>
-          </a:p>
-        </p:txBody>
-      </p:sp>
-      <p:sp>
-        <p:nvSpPr>
-          <p:cNvPr id="20" name="Shape 18"/>
-          <p:cNvSpPr/>
-          <p:nvPr/>
-        </p:nvSpPr>
-        <p:spPr>
-          <a:xfrm>
-            <a:off x="3337560" y="3154680"/>
-            <a:ext cx="2496312" cy="1645920"/>
-          </a:xfrm>
-          <a:prstGeom prst="roundRect">
-            <a:avLst>
-              <a:gd name="adj" fmla="val 4444"/>
-            </a:avLst>
-          </a:prstGeom>
-          <a:solidFill>
-            <a:srgbClr val="16203F"/>
-          </a:solidFill>
+          <p:cNvPr id="19" name="Shape 17"/>
+          <p:cNvSpPr/>
+          <p:nvPr/>
+        </p:nvSpPr>
+        <p:spPr>
+          <a:xfrm>
+            <a:off x="1645920" y="4245864"/>
+            <a:ext cx="6583680" cy="0"/>
+          </a:xfrm>
+          <a:prstGeom prst="line">
+            <a:avLst/>
+          </a:prstGeom>
+          <a:noFill/>
           <a:ln w="9525">
             <a:solidFill>
               <a:srgbClr val="2A3A6B"/>
@@ -5456,30 +8113,30 @@
       </p:sp>
       <p:sp>
         <p:nvSpPr>
-          <p:cNvPr id="21" name="Text 19"/>
-          <p:cNvSpPr/>
-          <p:nvPr/>
-        </p:nvSpPr>
-        <p:spPr>
-          <a:xfrm>
-            <a:off x="3538728" y="3282696"/>
-            <a:ext cx="731520" cy="384048"/>
-          </a:xfrm>
-          <a:prstGeom prst="rect">
-            <a:avLst/>
-          </a:prstGeom>
-          <a:noFill/>
-          <a:ln/>
-        </p:spPr>
-        <p:txBody>
-          <a:bodyPr wrap="square" lIns="0" tIns="0" rIns="0" bIns="0" rtlCol="0" anchor="ctr"/>
-          <a:lstStyle/>
-          <a:p>
-            <a:pPr indent="0" marL="0">
-              <a:buNone/>
-            </a:pPr>
-            <a:r>
-              <a:rPr lang="en-US" sz="1900" dirty="0">
+          <p:cNvPr id="20" name="Text 18"/>
+          <p:cNvSpPr/>
+          <p:nvPr/>
+        </p:nvSpPr>
+        <p:spPr>
+          <a:xfrm>
+            <a:off x="868680" y="4282440"/>
+            <a:ext cx="685800" cy="463296"/>
+          </a:xfrm>
+          <a:prstGeom prst="rect">
+            <a:avLst/>
+          </a:prstGeom>
+          <a:noFill/>
+          <a:ln/>
+        </p:spPr>
+        <p:txBody>
+          <a:bodyPr wrap="square" lIns="0" tIns="0" rIns="0" bIns="0" rtlCol="0" anchor="ctr"/>
+          <a:lstStyle/>
+          <a:p>
+            <a:pPr indent="0" marL="0">
+              <a:buNone/>
+            </a:pPr>
+            <a:r>
+              <a:rPr lang="en-US" sz="2200" dirty="0">
                 <a:solidFill>
                   <a:srgbClr val="2BD9E5"/>
                 </a:solidFill>
@@ -5487,237 +8144,48 @@
                 <a:ea typeface="Arial Black" pitchFamily="34" charset="-122"/>
                 <a:cs typeface="Arial Black" pitchFamily="34" charset="-120"/>
               </a:rPr>
-              <a:t>05</a:t>
+              <a:t>06</a:t>
+            </a:r>
+            <a:endParaRPr lang="en-US" sz="2200" dirty="0"/>
+          </a:p>
+        </p:txBody>
+      </p:sp>
+      <p:sp>
+        <p:nvSpPr>
+          <p:cNvPr id="21" name="Text 19"/>
+          <p:cNvSpPr/>
+          <p:nvPr/>
+        </p:nvSpPr>
+        <p:spPr>
+          <a:xfrm>
+            <a:off x="1645920" y="4282440"/>
+            <a:ext cx="6675120" cy="463296"/>
+          </a:xfrm>
+          <a:prstGeom prst="rect">
+            <a:avLst/>
+          </a:prstGeom>
+          <a:noFill/>
+          <a:ln/>
+        </p:spPr>
+        <p:txBody>
+          <a:bodyPr wrap="square" lIns="0" tIns="0" rIns="0" bIns="0" rtlCol="0" anchor="ctr"/>
+          <a:lstStyle/>
+          <a:p>
+            <a:pPr indent="0" marL="0">
+              <a:buNone/>
+            </a:pPr>
+            <a:r>
+              <a:rPr lang="en-US" sz="1900" dirty="0">
+                <a:solidFill>
+                  <a:srgbClr val="F4F7FF"/>
+                </a:solidFill>
+                <a:latin typeface="Arial" pitchFamily="34" charset="0"/>
+                <a:ea typeface="Arial" pitchFamily="34" charset="-122"/>
+                <a:cs typeface="Arial" pitchFamily="34" charset="-120"/>
+              </a:rPr>
+              <a:t>Pubblica</a:t>
             </a:r>
             <a:endParaRPr lang="en-US" sz="1900" dirty="0"/>
-          </a:p>
-        </p:txBody>
-      </p:sp>
-      <p:sp>
-        <p:nvSpPr>
-          <p:cNvPr id="22" name="Text 20"/>
-          <p:cNvSpPr/>
-          <p:nvPr/>
-        </p:nvSpPr>
-        <p:spPr>
-          <a:xfrm>
-            <a:off x="3538728" y="3685032"/>
-            <a:ext cx="2103120" cy="292608"/>
-          </a:xfrm>
-          <a:prstGeom prst="rect">
-            <a:avLst/>
-          </a:prstGeom>
-          <a:noFill/>
-          <a:ln/>
-        </p:spPr>
-        <p:txBody>
-          <a:bodyPr wrap="square" lIns="0" tIns="0" rIns="0" bIns="0" rtlCol="0" anchor="ctr"/>
-          <a:lstStyle/>
-          <a:p>
-            <a:pPr indent="0" marL="0">
-              <a:buNone/>
-            </a:pPr>
-            <a:r>
-              <a:rPr lang="en-US" sz="1300" b="1" dirty="0">
-                <a:solidFill>
-                  <a:srgbClr val="F4F7FF"/>
-                </a:solidFill>
-                <a:latin typeface="Arial" pitchFamily="34" charset="0"/>
-                <a:ea typeface="Arial" pitchFamily="34" charset="-122"/>
-                <a:cs typeface="Arial" pitchFamily="34" charset="-120"/>
-              </a:rPr>
-              <a:t>Prepara il lancio</a:t>
-            </a:r>
-            <a:endParaRPr lang="en-US" sz="1300" dirty="0"/>
-          </a:p>
-        </p:txBody>
-      </p:sp>
-      <p:sp>
-        <p:nvSpPr>
-          <p:cNvPr id="23" name="Text 21"/>
-          <p:cNvSpPr/>
-          <p:nvPr/>
-        </p:nvSpPr>
-        <p:spPr>
-          <a:xfrm>
-            <a:off x="3538728" y="3995928"/>
-            <a:ext cx="2103120" cy="731520"/>
-          </a:xfrm>
-          <a:prstGeom prst="rect">
-            <a:avLst/>
-          </a:prstGeom>
-          <a:noFill/>
-          <a:ln/>
-        </p:spPr>
-        <p:txBody>
-          <a:bodyPr wrap="square" lIns="0" tIns="0" rIns="0" bIns="0" rtlCol="0" anchor="t"/>
-          <a:lstStyle/>
-          <a:p>
-            <a:pPr indent="0" marL="0">
-              <a:lnSpc>
-                <a:spcPct val="112000"/>
-              </a:lnSpc>
-              <a:buNone/>
-            </a:pPr>
-            <a:r>
-              <a:rPr lang="en-US" sz="1000" dirty="0">
-                <a:solidFill>
-                  <a:srgbClr val="AEBDE0"/>
-                </a:solidFill>
-                <a:latin typeface="Arial" pitchFamily="34" charset="0"/>
-                <a:ea typeface="Arial" pitchFamily="34" charset="-122"/>
-                <a:cs typeface="Arial" pitchFamily="34" charset="-120"/>
-              </a:rPr>
-              <a:t>Nome, icona, privacy policy, scheda store: li scrive l'AI, li approvi tu.</a:t>
-            </a:r>
-            <a:endParaRPr lang="en-US" sz="1000" dirty="0"/>
-          </a:p>
-        </p:txBody>
-      </p:sp>
-      <p:sp>
-        <p:nvSpPr>
-          <p:cNvPr id="24" name="Shape 22"/>
-          <p:cNvSpPr/>
-          <p:nvPr/>
-        </p:nvSpPr>
-        <p:spPr>
-          <a:xfrm>
-            <a:off x="6035040" y="3154680"/>
-            <a:ext cx="2496312" cy="1645920"/>
-          </a:xfrm>
-          <a:prstGeom prst="roundRect">
-            <a:avLst>
-              <a:gd name="adj" fmla="val 4444"/>
-            </a:avLst>
-          </a:prstGeom>
-          <a:solidFill>
-            <a:srgbClr val="16203F"/>
-          </a:solidFill>
-          <a:ln w="9525">
-            <a:solidFill>
-              <a:srgbClr val="2A3A6B"/>
-            </a:solidFill>
-            <a:prstDash val="solid"/>
-          </a:ln>
-        </p:spPr>
-      </p:sp>
-      <p:sp>
-        <p:nvSpPr>
-          <p:cNvPr id="25" name="Text 23"/>
-          <p:cNvSpPr/>
-          <p:nvPr/>
-        </p:nvSpPr>
-        <p:spPr>
-          <a:xfrm>
-            <a:off x="6236208" y="3282696"/>
-            <a:ext cx="731520" cy="384048"/>
-          </a:xfrm>
-          <a:prstGeom prst="rect">
-            <a:avLst/>
-          </a:prstGeom>
-          <a:noFill/>
-          <a:ln/>
-        </p:spPr>
-        <p:txBody>
-          <a:bodyPr wrap="square" lIns="0" tIns="0" rIns="0" bIns="0" rtlCol="0" anchor="ctr"/>
-          <a:lstStyle/>
-          <a:p>
-            <a:pPr indent="0" marL="0">
-              <a:buNone/>
-            </a:pPr>
-            <a:r>
-              <a:rPr lang="en-US" sz="1900" dirty="0">
-                <a:solidFill>
-                  <a:srgbClr val="2BD9E5"/>
-                </a:solidFill>
-                <a:latin typeface="Arial Black" pitchFamily="34" charset="0"/>
-                <a:ea typeface="Arial Black" pitchFamily="34" charset="-122"/>
-                <a:cs typeface="Arial Black" pitchFamily="34" charset="-120"/>
-              </a:rPr>
-              <a:t>06</a:t>
-            </a:r>
-            <a:endParaRPr lang="en-US" sz="1900" dirty="0"/>
-          </a:p>
-        </p:txBody>
-      </p:sp>
-      <p:sp>
-        <p:nvSpPr>
-          <p:cNvPr id="26" name="Text 24"/>
-          <p:cNvSpPr/>
-          <p:nvPr/>
-        </p:nvSpPr>
-        <p:spPr>
-          <a:xfrm>
-            <a:off x="6236208" y="3685032"/>
-            <a:ext cx="2103120" cy="292608"/>
-          </a:xfrm>
-          <a:prstGeom prst="rect">
-            <a:avLst/>
-          </a:prstGeom>
-          <a:noFill/>
-          <a:ln/>
-        </p:spPr>
-        <p:txBody>
-          <a:bodyPr wrap="square" lIns="0" tIns="0" rIns="0" bIns="0" rtlCol="0" anchor="ctr"/>
-          <a:lstStyle/>
-          <a:p>
-            <a:pPr indent="0" marL="0">
-              <a:buNone/>
-            </a:pPr>
-            <a:r>
-              <a:rPr lang="en-US" sz="1300" b="1" dirty="0">
-                <a:solidFill>
-                  <a:srgbClr val="F4F7FF"/>
-                </a:solidFill>
-                <a:latin typeface="Arial" pitchFamily="34" charset="0"/>
-                <a:ea typeface="Arial" pitchFamily="34" charset="-122"/>
-                <a:cs typeface="Arial" pitchFamily="34" charset="-120"/>
-              </a:rPr>
-              <a:t>Pubblica</a:t>
-            </a:r>
-            <a:endParaRPr lang="en-US" sz="1300" dirty="0"/>
-          </a:p>
-        </p:txBody>
-      </p:sp>
-      <p:sp>
-        <p:nvSpPr>
-          <p:cNvPr id="27" name="Text 25"/>
-          <p:cNvSpPr/>
-          <p:nvPr/>
-        </p:nvSpPr>
-        <p:spPr>
-          <a:xfrm>
-            <a:off x="6236208" y="3995928"/>
-            <a:ext cx="2103120" cy="731520"/>
-          </a:xfrm>
-          <a:prstGeom prst="rect">
-            <a:avLst/>
-          </a:prstGeom>
-          <a:noFill/>
-          <a:ln/>
-        </p:spPr>
-        <p:txBody>
-          <a:bodyPr wrap="square" lIns="0" tIns="0" rIns="0" bIns="0" rtlCol="0" anchor="t"/>
-          <a:lstStyle/>
-          <a:p>
-            <a:pPr indent="0" marL="0">
-              <a:lnSpc>
-                <a:spcPct val="112000"/>
-              </a:lnSpc>
-              <a:buNone/>
-            </a:pPr>
-            <a:r>
-              <a:rPr lang="en-US" sz="1000" dirty="0">
-                <a:solidFill>
-                  <a:srgbClr val="AEBDE0"/>
-                </a:solidFill>
-                <a:latin typeface="Arial" pitchFamily="34" charset="0"/>
-                <a:ea typeface="Arial" pitchFamily="34" charset="-122"/>
-                <a:cs typeface="Arial" pitchFamily="34" charset="-120"/>
-              </a:rPr>
-              <a:t>Firma digitale, caricamento, revisione di Google. Poi sei online nel mondo.</a:t>
-            </a:r>
-            <a:endParaRPr lang="en-US" sz="1000" dirty="0"/>
           </a:p>
         </p:txBody>
       </p:sp>
@@ -5761,24 +8229,24 @@
         </p:nvSpPr>
         <p:spPr>
           <a:xfrm>
-            <a:off x="640080" y="347472"/>
-            <a:ext cx="7863840" cy="274320"/>
-          </a:xfrm>
-          <a:prstGeom prst="rect">
-            <a:avLst/>
-          </a:prstGeom>
-          <a:noFill/>
-          <a:ln/>
-        </p:spPr>
-        <p:txBody>
-          <a:bodyPr wrap="square" lIns="0" tIns="0" rIns="0" bIns="0" rtlCol="0" anchor="ctr"/>
-          <a:lstStyle/>
-          <a:p>
-            <a:pPr indent="0" marL="0">
-              <a:buNone/>
-            </a:pPr>
-            <a:r>
-              <a:rPr lang="en-US" sz="1100" b="1" spc="300" kern="0" dirty="0">
+            <a:off x="640080" y="365760"/>
+            <a:ext cx="8229600" cy="274320"/>
+          </a:xfrm>
+          <a:prstGeom prst="rect">
+            <a:avLst/>
+          </a:prstGeom>
+          <a:noFill/>
+          <a:ln/>
+        </p:spPr>
+        <p:txBody>
+          <a:bodyPr wrap="square" lIns="0" tIns="0" rIns="0" bIns="0" rtlCol="0" anchor="ctr"/>
+          <a:lstStyle/>
+          <a:p>
+            <a:pPr indent="0" marL="0">
+              <a:buNone/>
+            </a:pPr>
+            <a:r>
+              <a:rPr lang="en-US" sz="1100" b="1" spc="200" kern="0" dirty="0">
                 <a:solidFill>
                   <a:srgbClr val="2BD9E5"/>
                 </a:solidFill>
@@ -5786,7 +8254,7 @@
                 <a:ea typeface="Arial" pitchFamily="34" charset="-122"/>
                 <a:cs typeface="Arial" pitchFamily="34" charset="-120"/>
               </a:rPr>
-              <a:t>IL METODO · DOPO IL LANCIO</a:t>
+              <a:t>IL METODO · DALL'IDEA AL LANCIO</a:t>
             </a:r>
             <a:endParaRPr lang="en-US" sz="1100" dirty="0"/>
           </a:p>
@@ -5800,7 +8268,7 @@
         </p:nvSpPr>
         <p:spPr>
           <a:xfrm>
-            <a:off x="640080" y="621792"/>
+            <a:off x="640080" y="640080"/>
             <a:ext cx="7863840" cy="566928"/>
           </a:xfrm>
           <a:prstGeom prst="rect">
@@ -5825,7 +8293,7 @@
                 <a:ea typeface="Arial Black" pitchFamily="34" charset="-122"/>
                 <a:cs typeface="Arial Black" pitchFamily="34" charset="-120"/>
               </a:rPr>
-              <a:t>Gli aggiornamenti</a:t>
+              <a:t>La prima release, passo per passo</a:t>
             </a:r>
             <a:endParaRPr lang="en-US" sz="3000" dirty="0"/>
           </a:p>
@@ -5839,12 +8307,12 @@
         </p:nvSpPr>
         <p:spPr>
           <a:xfrm>
-            <a:off x="640080" y="1417320"/>
-            <a:ext cx="1856232" cy="2331720"/>
+            <a:off x="640080" y="1371600"/>
+            <a:ext cx="2496312" cy="1645920"/>
           </a:xfrm>
           <a:prstGeom prst="roundRect">
             <a:avLst>
-              <a:gd name="adj" fmla="val 3941"/>
+              <a:gd name="adj" fmla="val 4444"/>
             </a:avLst>
           </a:prstGeom>
           <a:solidFill>
@@ -5866,8 +8334,8 @@
         </p:nvSpPr>
         <p:spPr>
           <a:xfrm>
-            <a:off x="822960" y="1627632"/>
-            <a:ext cx="420624" cy="420624"/>
+            <a:off x="841248" y="1554480"/>
+            <a:ext cx="457200" cy="457200"/>
           </a:xfrm>
           <a:prstGeom prst="ellipse">
             <a:avLst/>
@@ -5875,40 +8343,64 @@
           <a:solidFill>
             <a:srgbClr val="0E3A44"/>
           </a:solidFill>
-          <a:ln w="9525">
+          <a:ln w="12700">
             <a:solidFill>
-              <a:srgbClr val="2BD9E5"/>
+              <a:srgbClr val="0E3A44"/>
             </a:solidFill>
             <a:prstDash val="solid"/>
           </a:ln>
         </p:spPr>
       </p:sp>
-      <p:sp>
-        <p:nvSpPr>
-          <p:cNvPr id="6" name="Text 4"/>
-          <p:cNvSpPr/>
-          <p:nvPr/>
-        </p:nvSpPr>
-        <p:spPr>
-          <a:xfrm>
-            <a:off x="822960" y="1627632"/>
-            <a:ext cx="420624" cy="420624"/>
-          </a:xfrm>
-          <a:prstGeom prst="rect">
-            <a:avLst/>
-          </a:prstGeom>
-          <a:noFill/>
-          <a:ln/>
-        </p:spPr>
-        <p:txBody>
-          <a:bodyPr wrap="square" lIns="0" tIns="0" rIns="0" bIns="0" rtlCol="0" anchor="ctr"/>
-          <a:lstStyle/>
-          <a:p>
-            <a:pPr algn="ctr" indent="0" marL="0">
-              <a:buNone/>
-            </a:pPr>
-            <a:r>
-              <a:rPr lang="en-US" sz="1400" dirty="0">
+      <p:pic>
+        <p:nvPicPr>
+          <p:cNvPr id="6" name="Image 0" descr="preencoded.png">    </p:cNvPr>
+          <p:cNvPicPr>
+            <a:picLocks noChangeAspect="1"/>
+          </p:cNvPicPr>
+          <p:nvPr/>
+        </p:nvPicPr>
+        <p:blipFill>
+          <a:blip r:embed="rId1"/>
+          <a:stretch>
+            <a:fillRect/>
+          </a:stretch>
+        </p:blipFill>
+        <p:spPr>
+          <a:xfrm>
+            <a:off x="964692" y="1677924"/>
+            <a:ext cx="210312" cy="210312"/>
+          </a:xfrm>
+          <a:prstGeom prst="rect">
+            <a:avLst/>
+          </a:prstGeom>
+        </p:spPr>
+      </p:pic>
+      <p:sp>
+        <p:nvSpPr>
+          <p:cNvPr id="7" name="Text 4"/>
+          <p:cNvSpPr/>
+          <p:nvPr/>
+        </p:nvSpPr>
+        <p:spPr>
+          <a:xfrm>
+            <a:off x="2478024" y="1591056"/>
+            <a:ext cx="457200" cy="310896"/>
+          </a:xfrm>
+          <a:prstGeom prst="rect">
+            <a:avLst/>
+          </a:prstGeom>
+          <a:noFill/>
+          <a:ln/>
+        </p:spPr>
+        <p:txBody>
+          <a:bodyPr wrap="square" lIns="0" tIns="0" rIns="0" bIns="0" rtlCol="0" anchor="ctr"/>
+          <a:lstStyle/>
+          <a:p>
+            <a:pPr algn="r" indent="0" marL="0">
+              <a:buNone/>
+            </a:pPr>
+            <a:r>
+              <a:rPr lang="en-US" sz="1300" dirty="0">
                 <a:solidFill>
                   <a:srgbClr val="2BD9E5"/>
                 </a:solidFill>
@@ -5916,41 +8408,38 @@
                 <a:ea typeface="Arial Black" pitchFamily="34" charset="-122"/>
                 <a:cs typeface="Arial Black" pitchFamily="34" charset="-120"/>
               </a:rPr>
-              <a:t>1</a:t>
-            </a:r>
-            <a:endParaRPr lang="en-US" sz="1400" dirty="0"/>
-          </a:p>
-        </p:txBody>
-      </p:sp>
-      <p:sp>
-        <p:nvSpPr>
-          <p:cNvPr id="7" name="Text 5"/>
-          <p:cNvSpPr/>
-          <p:nvPr/>
-        </p:nvSpPr>
-        <p:spPr>
-          <a:xfrm>
-            <a:off x="822960" y="2176272"/>
-            <a:ext cx="1517904" cy="566928"/>
-          </a:xfrm>
-          <a:prstGeom prst="rect">
-            <a:avLst/>
-          </a:prstGeom>
-          <a:noFill/>
-          <a:ln/>
-        </p:spPr>
-        <p:txBody>
-          <a:bodyPr wrap="square" lIns="0" tIns="0" rIns="0" bIns="0" rtlCol="0" anchor="t"/>
-          <a:lstStyle/>
-          <a:p>
-            <a:pPr indent="0" marL="0">
-              <a:lnSpc>
-                <a:spcPct val="105000"/>
-              </a:lnSpc>
-              <a:buNone/>
-            </a:pPr>
-            <a:r>
-              <a:rPr lang="en-US" sz="1250" b="1" dirty="0">
+              <a:t>01</a:t>
+            </a:r>
+            <a:endParaRPr lang="en-US" sz="1300" dirty="0"/>
+          </a:p>
+        </p:txBody>
+      </p:sp>
+      <p:sp>
+        <p:nvSpPr>
+          <p:cNvPr id="8" name="Text 5"/>
+          <p:cNvSpPr/>
+          <p:nvPr/>
+        </p:nvSpPr>
+        <p:spPr>
+          <a:xfrm>
+            <a:off x="841248" y="2084832"/>
+            <a:ext cx="2093976" cy="310896"/>
+          </a:xfrm>
+          <a:prstGeom prst="rect">
+            <a:avLst/>
+          </a:prstGeom>
+          <a:noFill/>
+          <a:ln/>
+        </p:spPr>
+        <p:txBody>
+          <a:bodyPr wrap="square" lIns="0" tIns="0" rIns="0" bIns="0" rtlCol="0" anchor="ctr"/>
+          <a:lstStyle/>
+          <a:p>
+            <a:pPr indent="0" marL="0">
+              <a:buNone/>
+            </a:pPr>
+            <a:r>
+              <a:rPr lang="en-US" sz="1300" b="1" dirty="0">
                 <a:solidFill>
                   <a:srgbClr val="F4F7FF"/>
                 </a:solidFill>
@@ -5958,22 +8447,22 @@
                 <a:ea typeface="Arial" pitchFamily="34" charset="-122"/>
                 <a:cs typeface="Arial" pitchFamily="34" charset="-120"/>
               </a:rPr>
-              <a:t>Ascolta</a:t>
-            </a:r>
-            <a:endParaRPr lang="en-US" sz="1250" dirty="0"/>
-          </a:p>
-        </p:txBody>
-      </p:sp>
-      <p:sp>
-        <p:nvSpPr>
-          <p:cNvPr id="8" name="Text 6"/>
-          <p:cNvSpPr/>
-          <p:nvPr/>
-        </p:nvSpPr>
-        <p:spPr>
-          <a:xfrm>
-            <a:off x="822960" y="2743200"/>
-            <a:ext cx="1517904" cy="914400"/>
+              <a:t>Parti dal problema</a:t>
+            </a:r>
+            <a:endParaRPr lang="en-US" sz="1300" dirty="0"/>
+          </a:p>
+        </p:txBody>
+      </p:sp>
+      <p:sp>
+        <p:nvSpPr>
+          <p:cNvPr id="9" name="Text 6"/>
+          <p:cNvSpPr/>
+          <p:nvPr/>
+        </p:nvSpPr>
+        <p:spPr>
+          <a:xfrm>
+            <a:off x="841248" y="2395728"/>
+            <a:ext cx="2093976" cy="512064"/>
           </a:xfrm>
           <a:prstGeom prst="rect">
             <a:avLst/>
@@ -5992,7 +8481,7 @@
               <a:buNone/>
             </a:pPr>
             <a:r>
-              <a:rPr lang="en-US" sz="950" dirty="0">
+              <a:rPr lang="en-US" sz="1000" dirty="0">
                 <a:solidFill>
                   <a:srgbClr val="AEBDE0"/>
                 </a:solidFill>
@@ -6000,65 +8489,26 @@
                 <a:ea typeface="Arial" pitchFamily="34" charset="-122"/>
                 <a:cs typeface="Arial" pitchFamily="34" charset="-120"/>
               </a:rPr>
-              <a:t>Recensioni, statistiche, uso reale: decidono i dati, non le supposizioni.</a:t>
-            </a:r>
-            <a:endParaRPr lang="en-US" sz="950" dirty="0"/>
-          </a:p>
-        </p:txBody>
-      </p:sp>
-      <p:sp>
-        <p:nvSpPr>
-          <p:cNvPr id="9" name="Text 7"/>
-          <p:cNvSpPr/>
-          <p:nvPr/>
-        </p:nvSpPr>
-        <p:spPr>
-          <a:xfrm>
-            <a:off x="2496312" y="2377440"/>
-            <a:ext cx="182880" cy="365760"/>
-          </a:xfrm>
-          <a:prstGeom prst="rect">
-            <a:avLst/>
-          </a:prstGeom>
-          <a:noFill/>
-          <a:ln/>
-        </p:spPr>
-        <p:txBody>
-          <a:bodyPr wrap="square" lIns="0" tIns="0" rIns="0" bIns="0" rtlCol="0" anchor="ctr"/>
-          <a:lstStyle/>
-          <a:p>
-            <a:pPr algn="ctr" indent="0" marL="0">
-              <a:buNone/>
-            </a:pPr>
-            <a:r>
-              <a:rPr lang="en-US" sz="1200" dirty="0">
-                <a:solidFill>
-                  <a:srgbClr val="2BD9E5"/>
-                </a:solidFill>
-                <a:latin typeface="Arial" pitchFamily="34" charset="0"/>
-                <a:ea typeface="Arial" pitchFamily="34" charset="-122"/>
-                <a:cs typeface="Arial" pitchFamily="34" charset="-120"/>
-              </a:rPr>
-              <a:t>→</a:t>
-            </a:r>
-            <a:endParaRPr lang="en-US" sz="1200" dirty="0"/>
-          </a:p>
-        </p:txBody>
-      </p:sp>
-      <p:sp>
-        <p:nvSpPr>
-          <p:cNvPr id="10" name="Shape 8"/>
-          <p:cNvSpPr/>
-          <p:nvPr/>
-        </p:nvSpPr>
-        <p:spPr>
-          <a:xfrm>
-            <a:off x="2679192" y="1417320"/>
-            <a:ext cx="1856232" cy="2331720"/>
+              <a:t>Un utente preciso, un bisogno reale, la funzione minima che lo risolve.</a:t>
+            </a:r>
+            <a:endParaRPr lang="en-US" sz="1000" dirty="0"/>
+          </a:p>
+        </p:txBody>
+      </p:sp>
+      <p:sp>
+        <p:nvSpPr>
+          <p:cNvPr id="10" name="Shape 7"/>
+          <p:cNvSpPr/>
+          <p:nvPr/>
+        </p:nvSpPr>
+        <p:spPr>
+          <a:xfrm>
+            <a:off x="3337560" y="1371600"/>
+            <a:ext cx="2496312" cy="1645920"/>
           </a:xfrm>
           <a:prstGeom prst="roundRect">
             <a:avLst>
-              <a:gd name="adj" fmla="val 3941"/>
+              <a:gd name="adj" fmla="val 4444"/>
             </a:avLst>
           </a:prstGeom>
           <a:solidFill>
@@ -6074,14 +8524,14 @@
       </p:sp>
       <p:sp>
         <p:nvSpPr>
-          <p:cNvPr id="11" name="Shape 9"/>
-          <p:cNvSpPr/>
-          <p:nvPr/>
-        </p:nvSpPr>
-        <p:spPr>
-          <a:xfrm>
-            <a:off x="2862072" y="1627632"/>
-            <a:ext cx="420624" cy="420624"/>
+          <p:cNvPr id="11" name="Shape 8"/>
+          <p:cNvSpPr/>
+          <p:nvPr/>
+        </p:nvSpPr>
+        <p:spPr>
+          <a:xfrm>
+            <a:off x="3538728" y="1554480"/>
+            <a:ext cx="457200" cy="457200"/>
           </a:xfrm>
           <a:prstGeom prst="ellipse">
             <a:avLst/>
@@ -6089,40 +8539,64 @@
           <a:solidFill>
             <a:srgbClr val="0E3A44"/>
           </a:solidFill>
-          <a:ln w="9525">
+          <a:ln w="12700">
             <a:solidFill>
-              <a:srgbClr val="2BD9E5"/>
+              <a:srgbClr val="0E3A44"/>
             </a:solidFill>
             <a:prstDash val="solid"/>
           </a:ln>
         </p:spPr>
       </p:sp>
-      <p:sp>
-        <p:nvSpPr>
-          <p:cNvPr id="12" name="Text 10"/>
-          <p:cNvSpPr/>
-          <p:nvPr/>
-        </p:nvSpPr>
-        <p:spPr>
-          <a:xfrm>
-            <a:off x="2862072" y="1627632"/>
-            <a:ext cx="420624" cy="420624"/>
-          </a:xfrm>
-          <a:prstGeom prst="rect">
-            <a:avLst/>
-          </a:prstGeom>
-          <a:noFill/>
-          <a:ln/>
-        </p:spPr>
-        <p:txBody>
-          <a:bodyPr wrap="square" lIns="0" tIns="0" rIns="0" bIns="0" rtlCol="0" anchor="ctr"/>
-          <a:lstStyle/>
-          <a:p>
-            <a:pPr algn="ctr" indent="0" marL="0">
-              <a:buNone/>
-            </a:pPr>
-            <a:r>
-              <a:rPr lang="en-US" sz="1400" dirty="0">
+      <p:pic>
+        <p:nvPicPr>
+          <p:cNvPr id="12" name="Image 1" descr="preencoded.png">    </p:cNvPr>
+          <p:cNvPicPr>
+            <a:picLocks noChangeAspect="1"/>
+          </p:cNvPicPr>
+          <p:nvPr/>
+        </p:nvPicPr>
+        <p:blipFill>
+          <a:blip r:embed="rId2"/>
+          <a:stretch>
+            <a:fillRect/>
+          </a:stretch>
+        </p:blipFill>
+        <p:spPr>
+          <a:xfrm>
+            <a:off x="3662172" y="1677924"/>
+            <a:ext cx="210312" cy="210312"/>
+          </a:xfrm>
+          <a:prstGeom prst="rect">
+            <a:avLst/>
+          </a:prstGeom>
+        </p:spPr>
+      </p:pic>
+      <p:sp>
+        <p:nvSpPr>
+          <p:cNvPr id="13" name="Text 9"/>
+          <p:cNvSpPr/>
+          <p:nvPr/>
+        </p:nvSpPr>
+        <p:spPr>
+          <a:xfrm>
+            <a:off x="5175504" y="1591056"/>
+            <a:ext cx="457200" cy="310896"/>
+          </a:xfrm>
+          <a:prstGeom prst="rect">
+            <a:avLst/>
+          </a:prstGeom>
+          <a:noFill/>
+          <a:ln/>
+        </p:spPr>
+        <p:txBody>
+          <a:bodyPr wrap="square" lIns="0" tIns="0" rIns="0" bIns="0" rtlCol="0" anchor="ctr"/>
+          <a:lstStyle/>
+          <a:p>
+            <a:pPr algn="r" indent="0" marL="0">
+              <a:buNone/>
+            </a:pPr>
+            <a:r>
+              <a:rPr lang="en-US" sz="1300" dirty="0">
                 <a:solidFill>
                   <a:srgbClr val="2BD9E5"/>
                 </a:solidFill>
@@ -6130,41 +8604,38 @@
                 <a:ea typeface="Arial Black" pitchFamily="34" charset="-122"/>
                 <a:cs typeface="Arial Black" pitchFamily="34" charset="-120"/>
               </a:rPr>
-              <a:t>2</a:t>
-            </a:r>
-            <a:endParaRPr lang="en-US" sz="1400" dirty="0"/>
-          </a:p>
-        </p:txBody>
-      </p:sp>
-      <p:sp>
-        <p:nvSpPr>
-          <p:cNvPr id="13" name="Text 11"/>
-          <p:cNvSpPr/>
-          <p:nvPr/>
-        </p:nvSpPr>
-        <p:spPr>
-          <a:xfrm>
-            <a:off x="2862072" y="2176272"/>
-            <a:ext cx="1517904" cy="566928"/>
-          </a:xfrm>
-          <a:prstGeom prst="rect">
-            <a:avLst/>
-          </a:prstGeom>
-          <a:noFill/>
-          <a:ln/>
-        </p:spPr>
-        <p:txBody>
-          <a:bodyPr wrap="square" lIns="0" tIns="0" rIns="0" bIns="0" rtlCol="0" anchor="t"/>
-          <a:lstStyle/>
-          <a:p>
-            <a:pPr indent="0" marL="0">
-              <a:lnSpc>
-                <a:spcPct val="105000"/>
-              </a:lnSpc>
-              <a:buNone/>
-            </a:pPr>
-            <a:r>
-              <a:rPr lang="en-US" sz="1250" b="1" dirty="0">
+              <a:t>02</a:t>
+            </a:r>
+            <a:endParaRPr lang="en-US" sz="1300" dirty="0"/>
+          </a:p>
+        </p:txBody>
+      </p:sp>
+      <p:sp>
+        <p:nvSpPr>
+          <p:cNvPr id="14" name="Text 10"/>
+          <p:cNvSpPr/>
+          <p:nvPr/>
+        </p:nvSpPr>
+        <p:spPr>
+          <a:xfrm>
+            <a:off x="3538728" y="2084832"/>
+            <a:ext cx="2093976" cy="310896"/>
+          </a:xfrm>
+          <a:prstGeom prst="rect">
+            <a:avLst/>
+          </a:prstGeom>
+          <a:noFill/>
+          <a:ln/>
+        </p:spPr>
+        <p:txBody>
+          <a:bodyPr wrap="square" lIns="0" tIns="0" rIns="0" bIns="0" rtlCol="0" anchor="ctr"/>
+          <a:lstStyle/>
+          <a:p>
+            <a:pPr indent="0" marL="0">
+              <a:buNone/>
+            </a:pPr>
+            <a:r>
+              <a:rPr lang="en-US" sz="1300" b="1" dirty="0">
                 <a:solidFill>
                   <a:srgbClr val="F4F7FF"/>
                 </a:solidFill>
@@ -6172,22 +8643,22 @@
                 <a:ea typeface="Arial" pitchFamily="34" charset="-122"/>
                 <a:cs typeface="Arial" pitchFamily="34" charset="-120"/>
               </a:rPr>
-              <a:t>Scegli una cosa</a:t>
-            </a:r>
-            <a:endParaRPr lang="en-US" sz="1250" dirty="0"/>
-          </a:p>
-        </p:txBody>
-      </p:sp>
-      <p:sp>
-        <p:nvSpPr>
-          <p:cNvPr id="14" name="Text 12"/>
-          <p:cNvSpPr/>
-          <p:nvPr/>
-        </p:nvSpPr>
-        <p:spPr>
-          <a:xfrm>
-            <a:off x="2862072" y="2743200"/>
-            <a:ext cx="1517904" cy="914400"/>
+              <a:t>Descrivi all'AI</a:t>
+            </a:r>
+            <a:endParaRPr lang="en-US" sz="1300" dirty="0"/>
+          </a:p>
+        </p:txBody>
+      </p:sp>
+      <p:sp>
+        <p:nvSpPr>
+          <p:cNvPr id="15" name="Text 11"/>
+          <p:cNvSpPr/>
+          <p:nvPr/>
+        </p:nvSpPr>
+        <p:spPr>
+          <a:xfrm>
+            <a:off x="3538728" y="2395728"/>
+            <a:ext cx="2093976" cy="512064"/>
           </a:xfrm>
           <a:prstGeom prst="rect">
             <a:avLst/>
@@ -6206,7 +8677,7 @@
               <a:buNone/>
             </a:pPr>
             <a:r>
-              <a:rPr lang="en-US" sz="950" dirty="0">
+              <a:rPr lang="en-US" sz="1000" dirty="0">
                 <a:solidFill>
                   <a:srgbClr val="AEBDE0"/>
                 </a:solidFill>
@@ -6214,65 +8685,26 @@
                 <a:ea typeface="Arial" pitchFamily="34" charset="-122"/>
                 <a:cs typeface="Arial" pitchFamily="34" charset="-120"/>
               </a:rPr>
-              <a:t>Una sola modifica per versione: piccola, chiara, verificabile.</a:t>
-            </a:r>
-            <a:endParaRPr lang="en-US" sz="950" dirty="0"/>
-          </a:p>
-        </p:txBody>
-      </p:sp>
-      <p:sp>
-        <p:nvSpPr>
-          <p:cNvPr id="15" name="Text 13"/>
-          <p:cNvSpPr/>
-          <p:nvPr/>
-        </p:nvSpPr>
-        <p:spPr>
-          <a:xfrm>
-            <a:off x="4535424" y="2377440"/>
-            <a:ext cx="182880" cy="365760"/>
-          </a:xfrm>
-          <a:prstGeom prst="rect">
-            <a:avLst/>
-          </a:prstGeom>
-          <a:noFill/>
-          <a:ln/>
-        </p:spPr>
-        <p:txBody>
-          <a:bodyPr wrap="square" lIns="0" tIns="0" rIns="0" bIns="0" rtlCol="0" anchor="ctr"/>
-          <a:lstStyle/>
-          <a:p>
-            <a:pPr algn="ctr" indent="0" marL="0">
-              <a:buNone/>
-            </a:pPr>
-            <a:r>
-              <a:rPr lang="en-US" sz="1200" dirty="0">
-                <a:solidFill>
-                  <a:srgbClr val="2BD9E5"/>
-                </a:solidFill>
-                <a:latin typeface="Arial" pitchFamily="34" charset="0"/>
-                <a:ea typeface="Arial" pitchFamily="34" charset="-122"/>
-                <a:cs typeface="Arial" pitchFamily="34" charset="-120"/>
-              </a:rPr>
-              <a:t>→</a:t>
-            </a:r>
-            <a:endParaRPr lang="en-US" sz="1200" dirty="0"/>
-          </a:p>
-        </p:txBody>
-      </p:sp>
-      <p:sp>
-        <p:nvSpPr>
-          <p:cNvPr id="16" name="Shape 14"/>
-          <p:cNvSpPr/>
-          <p:nvPr/>
-        </p:nvSpPr>
-        <p:spPr>
-          <a:xfrm>
-            <a:off x="4718304" y="1417320"/>
-            <a:ext cx="1856232" cy="2331720"/>
+              <a:t>Brief in linguaggio naturale: cosa deve fare, non come. Le tecnologie le sceglie lei.</a:t>
+            </a:r>
+            <a:endParaRPr lang="en-US" sz="1000" dirty="0"/>
+          </a:p>
+        </p:txBody>
+      </p:sp>
+      <p:sp>
+        <p:nvSpPr>
+          <p:cNvPr id="16" name="Shape 12"/>
+          <p:cNvSpPr/>
+          <p:nvPr/>
+        </p:nvSpPr>
+        <p:spPr>
+          <a:xfrm>
+            <a:off x="6035040" y="1371600"/>
+            <a:ext cx="2496312" cy="1645920"/>
           </a:xfrm>
           <a:prstGeom prst="roundRect">
             <a:avLst>
-              <a:gd name="adj" fmla="val 3941"/>
+              <a:gd name="adj" fmla="val 4444"/>
             </a:avLst>
           </a:prstGeom>
           <a:solidFill>
@@ -6288,14 +8720,14 @@
       </p:sp>
       <p:sp>
         <p:nvSpPr>
-          <p:cNvPr id="17" name="Shape 15"/>
-          <p:cNvSpPr/>
-          <p:nvPr/>
-        </p:nvSpPr>
-        <p:spPr>
-          <a:xfrm>
-            <a:off x="4901184" y="1627632"/>
-            <a:ext cx="420624" cy="420624"/>
+          <p:cNvPr id="17" name="Shape 13"/>
+          <p:cNvSpPr/>
+          <p:nvPr/>
+        </p:nvSpPr>
+        <p:spPr>
+          <a:xfrm>
+            <a:off x="6236208" y="1554480"/>
+            <a:ext cx="457200" cy="457200"/>
           </a:xfrm>
           <a:prstGeom prst="ellipse">
             <a:avLst/>
@@ -6303,40 +8735,64 @@
           <a:solidFill>
             <a:srgbClr val="0E3A44"/>
           </a:solidFill>
-          <a:ln w="9525">
+          <a:ln w="12700">
             <a:solidFill>
-              <a:srgbClr val="2BD9E5"/>
+              <a:srgbClr val="0E3A44"/>
             </a:solidFill>
             <a:prstDash val="solid"/>
           </a:ln>
         </p:spPr>
       </p:sp>
-      <p:sp>
-        <p:nvSpPr>
-          <p:cNvPr id="18" name="Text 16"/>
-          <p:cNvSpPr/>
-          <p:nvPr/>
-        </p:nvSpPr>
-        <p:spPr>
-          <a:xfrm>
-            <a:off x="4901184" y="1627632"/>
-            <a:ext cx="420624" cy="420624"/>
-          </a:xfrm>
-          <a:prstGeom prst="rect">
-            <a:avLst/>
-          </a:prstGeom>
-          <a:noFill/>
-          <a:ln/>
-        </p:spPr>
-        <p:txBody>
-          <a:bodyPr wrap="square" lIns="0" tIns="0" rIns="0" bIns="0" rtlCol="0" anchor="ctr"/>
-          <a:lstStyle/>
-          <a:p>
-            <a:pPr algn="ctr" indent="0" marL="0">
-              <a:buNone/>
-            </a:pPr>
-            <a:r>
-              <a:rPr lang="en-US" sz="1400" dirty="0">
+      <p:pic>
+        <p:nvPicPr>
+          <p:cNvPr id="18" name="Image 2" descr="preencoded.png">    </p:cNvPr>
+          <p:cNvPicPr>
+            <a:picLocks noChangeAspect="1"/>
+          </p:cNvPicPr>
+          <p:nvPr/>
+        </p:nvPicPr>
+        <p:blipFill>
+          <a:blip r:embed="rId3"/>
+          <a:stretch>
+            <a:fillRect/>
+          </a:stretch>
+        </p:blipFill>
+        <p:spPr>
+          <a:xfrm>
+            <a:off x="6359652" y="1677924"/>
+            <a:ext cx="210312" cy="210312"/>
+          </a:xfrm>
+          <a:prstGeom prst="rect">
+            <a:avLst/>
+          </a:prstGeom>
+        </p:spPr>
+      </p:pic>
+      <p:sp>
+        <p:nvSpPr>
+          <p:cNvPr id="19" name="Text 14"/>
+          <p:cNvSpPr/>
+          <p:nvPr/>
+        </p:nvSpPr>
+        <p:spPr>
+          <a:xfrm>
+            <a:off x="7872984" y="1591056"/>
+            <a:ext cx="457200" cy="310896"/>
+          </a:xfrm>
+          <a:prstGeom prst="rect">
+            <a:avLst/>
+          </a:prstGeom>
+          <a:noFill/>
+          <a:ln/>
+        </p:spPr>
+        <p:txBody>
+          <a:bodyPr wrap="square" lIns="0" tIns="0" rIns="0" bIns="0" rtlCol="0" anchor="ctr"/>
+          <a:lstStyle/>
+          <a:p>
+            <a:pPr algn="r" indent="0" marL="0">
+              <a:buNone/>
+            </a:pPr>
+            <a:r>
+              <a:rPr lang="en-US" sz="1300" dirty="0">
                 <a:solidFill>
                   <a:srgbClr val="2BD9E5"/>
                 </a:solidFill>
@@ -6344,41 +8800,38 @@
                 <a:ea typeface="Arial Black" pitchFamily="34" charset="-122"/>
                 <a:cs typeface="Arial Black" pitchFamily="34" charset="-120"/>
               </a:rPr>
-              <a:t>3</a:t>
-            </a:r>
-            <a:endParaRPr lang="en-US" sz="1400" dirty="0"/>
-          </a:p>
-        </p:txBody>
-      </p:sp>
-      <p:sp>
-        <p:nvSpPr>
-          <p:cNvPr id="19" name="Text 17"/>
-          <p:cNvSpPr/>
-          <p:nvPr/>
-        </p:nvSpPr>
-        <p:spPr>
-          <a:xfrm>
-            <a:off x="4901184" y="2176272"/>
-            <a:ext cx="1517904" cy="566928"/>
-          </a:xfrm>
-          <a:prstGeom prst="rect">
-            <a:avLst/>
-          </a:prstGeom>
-          <a:noFill/>
-          <a:ln/>
-        </p:spPr>
-        <p:txBody>
-          <a:bodyPr wrap="square" lIns="0" tIns="0" rIns="0" bIns="0" rtlCol="0" anchor="t"/>
-          <a:lstStyle/>
-          <a:p>
-            <a:pPr indent="0" marL="0">
-              <a:lnSpc>
-                <a:spcPct val="105000"/>
-              </a:lnSpc>
-              <a:buNone/>
-            </a:pPr>
-            <a:r>
-              <a:rPr lang="en-US" sz="1250" b="1" dirty="0">
+              <a:t>03</a:t>
+            </a:r>
+            <a:endParaRPr lang="en-US" sz="1300" dirty="0"/>
+          </a:p>
+        </p:txBody>
+      </p:sp>
+      <p:sp>
+        <p:nvSpPr>
+          <p:cNvPr id="20" name="Text 15"/>
+          <p:cNvSpPr/>
+          <p:nvPr/>
+        </p:nvSpPr>
+        <p:spPr>
+          <a:xfrm>
+            <a:off x="6236208" y="2084832"/>
+            <a:ext cx="2093976" cy="310896"/>
+          </a:xfrm>
+          <a:prstGeom prst="rect">
+            <a:avLst/>
+          </a:prstGeom>
+          <a:noFill/>
+          <a:ln/>
+        </p:spPr>
+        <p:txBody>
+          <a:bodyPr wrap="square" lIns="0" tIns="0" rIns="0" bIns="0" rtlCol="0" anchor="ctr"/>
+          <a:lstStyle/>
+          <a:p>
+            <a:pPr indent="0" marL="0">
+              <a:buNone/>
+            </a:pPr>
+            <a:r>
+              <a:rPr lang="en-US" sz="1300" b="1" dirty="0">
                 <a:solidFill>
                   <a:srgbClr val="F4F7FF"/>
                 </a:solidFill>
@@ -6386,22 +8839,22 @@
                 <a:ea typeface="Arial" pitchFamily="34" charset="-122"/>
                 <a:cs typeface="Arial" pitchFamily="34" charset="-120"/>
               </a:rPr>
-              <a:t>Implementa e prova</a:t>
-            </a:r>
-            <a:endParaRPr lang="en-US" sz="1250" dirty="0"/>
-          </a:p>
-        </p:txBody>
-      </p:sp>
-      <p:sp>
-        <p:nvSpPr>
-          <p:cNvPr id="20" name="Text 18"/>
-          <p:cNvSpPr/>
-          <p:nvPr/>
-        </p:nvSpPr>
-        <p:spPr>
-          <a:xfrm>
-            <a:off x="4901184" y="2743200"/>
-            <a:ext cx="1517904" cy="914400"/>
+              <a:t>Ottieni un prototipo</a:t>
+            </a:r>
+            <a:endParaRPr lang="en-US" sz="1300" dirty="0"/>
+          </a:p>
+        </p:txBody>
+      </p:sp>
+      <p:sp>
+        <p:nvSpPr>
+          <p:cNvPr id="21" name="Text 16"/>
+          <p:cNvSpPr/>
+          <p:nvPr/>
+        </p:nvSpPr>
+        <p:spPr>
+          <a:xfrm>
+            <a:off x="6236208" y="2395728"/>
+            <a:ext cx="2093976" cy="512064"/>
           </a:xfrm>
           <a:prstGeom prst="rect">
             <a:avLst/>
@@ -6420,7 +8873,7 @@
               <a:buNone/>
             </a:pPr>
             <a:r>
-              <a:rPr lang="en-US" sz="950" dirty="0">
+              <a:rPr lang="en-US" sz="1000" dirty="0">
                 <a:solidFill>
                   <a:srgbClr val="AEBDE0"/>
                 </a:solidFill>
@@ -6428,65 +8881,26 @@
                 <a:ea typeface="Arial" pitchFamily="34" charset="-122"/>
                 <a:cs typeface="Arial" pitchFamily="34" charset="-120"/>
               </a:rPr>
-              <a:t>L'AI sviluppa e testa sull'emulatore; tu validi sul telefono vero.</a:t>
-            </a:r>
-            <a:endParaRPr lang="en-US" sz="950" dirty="0"/>
-          </a:p>
-        </p:txBody>
-      </p:sp>
-      <p:sp>
-        <p:nvSpPr>
-          <p:cNvPr id="21" name="Text 19"/>
-          <p:cNvSpPr/>
-          <p:nvPr/>
-        </p:nvSpPr>
-        <p:spPr>
-          <a:xfrm>
-            <a:off x="6574536" y="2377440"/>
-            <a:ext cx="182880" cy="365760"/>
-          </a:xfrm>
-          <a:prstGeom prst="rect">
-            <a:avLst/>
-          </a:prstGeom>
-          <a:noFill/>
-          <a:ln/>
-        </p:spPr>
-        <p:txBody>
-          <a:bodyPr wrap="square" lIns="0" tIns="0" rIns="0" bIns="0" rtlCol="0" anchor="ctr"/>
-          <a:lstStyle/>
-          <a:p>
-            <a:pPr algn="ctr" indent="0" marL="0">
-              <a:buNone/>
-            </a:pPr>
-            <a:r>
-              <a:rPr lang="en-US" sz="1200" dirty="0">
-                <a:solidFill>
-                  <a:srgbClr val="2BD9E5"/>
-                </a:solidFill>
-                <a:latin typeface="Arial" pitchFamily="34" charset="0"/>
-                <a:ea typeface="Arial" pitchFamily="34" charset="-122"/>
-                <a:cs typeface="Arial" pitchFamily="34" charset="-120"/>
-              </a:rPr>
-              <a:t>→</a:t>
-            </a:r>
-            <a:endParaRPr lang="en-US" sz="1200" dirty="0"/>
-          </a:p>
-        </p:txBody>
-      </p:sp>
-      <p:sp>
-        <p:nvSpPr>
-          <p:cNvPr id="22" name="Shape 20"/>
-          <p:cNvSpPr/>
-          <p:nvPr/>
-        </p:nvSpPr>
-        <p:spPr>
-          <a:xfrm>
-            <a:off x="6757416" y="1417320"/>
-            <a:ext cx="1856232" cy="2331720"/>
+              <a:t>Una versione da toccare subito, anche imperfetta. Prima web, poi mobile.</a:t>
+            </a:r>
+            <a:endParaRPr lang="en-US" sz="1000" dirty="0"/>
+          </a:p>
+        </p:txBody>
+      </p:sp>
+      <p:sp>
+        <p:nvSpPr>
+          <p:cNvPr id="22" name="Shape 17"/>
+          <p:cNvSpPr/>
+          <p:nvPr/>
+        </p:nvSpPr>
+        <p:spPr>
+          <a:xfrm>
+            <a:off x="640080" y="3154680"/>
+            <a:ext cx="2496312" cy="1645920"/>
           </a:xfrm>
           <a:prstGeom prst="roundRect">
             <a:avLst>
-              <a:gd name="adj" fmla="val 3941"/>
+              <a:gd name="adj" fmla="val 4444"/>
             </a:avLst>
           </a:prstGeom>
           <a:solidFill>
@@ -6502,14 +8916,14 @@
       </p:sp>
       <p:sp>
         <p:nvSpPr>
-          <p:cNvPr id="23" name="Shape 21"/>
-          <p:cNvSpPr/>
-          <p:nvPr/>
-        </p:nvSpPr>
-        <p:spPr>
-          <a:xfrm>
-            <a:off x="6940296" y="1627632"/>
-            <a:ext cx="420624" cy="420624"/>
+          <p:cNvPr id="23" name="Shape 18"/>
+          <p:cNvSpPr/>
+          <p:nvPr/>
+        </p:nvSpPr>
+        <p:spPr>
+          <a:xfrm>
+            <a:off x="841248" y="3337560"/>
+            <a:ext cx="457200" cy="457200"/>
           </a:xfrm>
           <a:prstGeom prst="ellipse">
             <a:avLst/>
@@ -6517,40 +8931,64 @@
           <a:solidFill>
             <a:srgbClr val="0E3A44"/>
           </a:solidFill>
-          <a:ln w="9525">
+          <a:ln w="12700">
             <a:solidFill>
-              <a:srgbClr val="2BD9E5"/>
+              <a:srgbClr val="0E3A44"/>
             </a:solidFill>
             <a:prstDash val="solid"/>
           </a:ln>
         </p:spPr>
       </p:sp>
-      <p:sp>
-        <p:nvSpPr>
-          <p:cNvPr id="24" name="Text 22"/>
-          <p:cNvSpPr/>
-          <p:nvPr/>
-        </p:nvSpPr>
-        <p:spPr>
-          <a:xfrm>
-            <a:off x="6940296" y="1627632"/>
-            <a:ext cx="420624" cy="420624"/>
-          </a:xfrm>
-          <a:prstGeom prst="rect">
-            <a:avLst/>
-          </a:prstGeom>
-          <a:noFill/>
-          <a:ln/>
-        </p:spPr>
-        <p:txBody>
-          <a:bodyPr wrap="square" lIns="0" tIns="0" rIns="0" bIns="0" rtlCol="0" anchor="ctr"/>
-          <a:lstStyle/>
-          <a:p>
-            <a:pPr algn="ctr" indent="0" marL="0">
-              <a:buNone/>
-            </a:pPr>
-            <a:r>
-              <a:rPr lang="en-US" sz="1400" dirty="0">
+      <p:pic>
+        <p:nvPicPr>
+          <p:cNvPr id="24" name="Image 3" descr="preencoded.png">    </p:cNvPr>
+          <p:cNvPicPr>
+            <a:picLocks noChangeAspect="1"/>
+          </p:cNvPicPr>
+          <p:nvPr/>
+        </p:nvPicPr>
+        <p:blipFill>
+          <a:blip r:embed="rId4"/>
+          <a:stretch>
+            <a:fillRect/>
+          </a:stretch>
+        </p:blipFill>
+        <p:spPr>
+          <a:xfrm>
+            <a:off x="964692" y="3461004"/>
+            <a:ext cx="210312" cy="210312"/>
+          </a:xfrm>
+          <a:prstGeom prst="rect">
+            <a:avLst/>
+          </a:prstGeom>
+        </p:spPr>
+      </p:pic>
+      <p:sp>
+        <p:nvSpPr>
+          <p:cNvPr id="25" name="Text 19"/>
+          <p:cNvSpPr/>
+          <p:nvPr/>
+        </p:nvSpPr>
+        <p:spPr>
+          <a:xfrm>
+            <a:off x="2478024" y="3374136"/>
+            <a:ext cx="457200" cy="310896"/>
+          </a:xfrm>
+          <a:prstGeom prst="rect">
+            <a:avLst/>
+          </a:prstGeom>
+          <a:noFill/>
+          <a:ln/>
+        </p:spPr>
+        <p:txBody>
+          <a:bodyPr wrap="square" lIns="0" tIns="0" rIns="0" bIns="0" rtlCol="0" anchor="ctr"/>
+          <a:lstStyle/>
+          <a:p>
+            <a:pPr algn="r" indent="0" marL="0">
+              <a:buNone/>
+            </a:pPr>
+            <a:r>
+              <a:rPr lang="en-US" sz="1300" dirty="0">
                 <a:solidFill>
                   <a:srgbClr val="2BD9E5"/>
                 </a:solidFill>
@@ -6558,41 +8996,38 @@
                 <a:ea typeface="Arial Black" pitchFamily="34" charset="-122"/>
                 <a:cs typeface="Arial Black" pitchFamily="34" charset="-120"/>
               </a:rPr>
-              <a:t>4</a:t>
-            </a:r>
-            <a:endParaRPr lang="en-US" sz="1400" dirty="0"/>
-          </a:p>
-        </p:txBody>
-      </p:sp>
-      <p:sp>
-        <p:nvSpPr>
-          <p:cNvPr id="25" name="Text 23"/>
-          <p:cNvSpPr/>
-          <p:nvPr/>
-        </p:nvSpPr>
-        <p:spPr>
-          <a:xfrm>
-            <a:off x="6940296" y="2176272"/>
-            <a:ext cx="1517904" cy="566928"/>
-          </a:xfrm>
-          <a:prstGeom prst="rect">
-            <a:avLst/>
-          </a:prstGeom>
-          <a:noFill/>
-          <a:ln/>
-        </p:spPr>
-        <p:txBody>
-          <a:bodyPr wrap="square" lIns="0" tIns="0" rIns="0" bIns="0" rtlCol="0" anchor="t"/>
-          <a:lstStyle/>
-          <a:p>
-            <a:pPr indent="0" marL="0">
-              <a:lnSpc>
-                <a:spcPct val="105000"/>
-              </a:lnSpc>
-              <a:buNone/>
-            </a:pPr>
-            <a:r>
-              <a:rPr lang="en-US" sz="1250" b="1" dirty="0">
+              <a:t>04</a:t>
+            </a:r>
+            <a:endParaRPr lang="en-US" sz="1300" dirty="0"/>
+          </a:p>
+        </p:txBody>
+      </p:sp>
+      <p:sp>
+        <p:nvSpPr>
+          <p:cNvPr id="26" name="Text 20"/>
+          <p:cNvSpPr/>
+          <p:nvPr/>
+        </p:nvSpPr>
+        <p:spPr>
+          <a:xfrm>
+            <a:off x="841248" y="3867912"/>
+            <a:ext cx="2093976" cy="310896"/>
+          </a:xfrm>
+          <a:prstGeom prst="rect">
+            <a:avLst/>
+          </a:prstGeom>
+          <a:noFill/>
+          <a:ln/>
+        </p:spPr>
+        <p:txBody>
+          <a:bodyPr wrap="square" lIns="0" tIns="0" rIns="0" bIns="0" rtlCol="0" anchor="ctr"/>
+          <a:lstStyle/>
+          <a:p>
+            <a:pPr indent="0" marL="0">
+              <a:buNone/>
+            </a:pPr>
+            <a:r>
+              <a:rPr lang="en-US" sz="1300" b="1" dirty="0">
                 <a:solidFill>
                   <a:srgbClr val="F4F7FF"/>
                 </a:solidFill>
@@ -6600,22 +9035,22 @@
                 <a:ea typeface="Arial" pitchFamily="34" charset="-122"/>
                 <a:cs typeface="Arial" pitchFamily="34" charset="-120"/>
               </a:rPr>
-              <a:t>Rilascia spesso</a:t>
-            </a:r>
-            <a:endParaRPr lang="en-US" sz="1250" dirty="0"/>
-          </a:p>
-        </p:txBody>
-      </p:sp>
-      <p:sp>
-        <p:nvSpPr>
-          <p:cNvPr id="26" name="Text 24"/>
-          <p:cNvSpPr/>
-          <p:nvPr/>
-        </p:nvSpPr>
-        <p:spPr>
-          <a:xfrm>
-            <a:off x="6940296" y="2743200"/>
-            <a:ext cx="1517904" cy="914400"/>
+              <a:t>Itera a parole</a:t>
+            </a:r>
+            <a:endParaRPr lang="en-US" sz="1300" dirty="0"/>
+          </a:p>
+        </p:txBody>
+      </p:sp>
+      <p:sp>
+        <p:nvSpPr>
+          <p:cNvPr id="27" name="Text 21"/>
+          <p:cNvSpPr/>
+          <p:nvPr/>
+        </p:nvSpPr>
+        <p:spPr>
+          <a:xfrm>
+            <a:off x="841248" y="4178808"/>
+            <a:ext cx="2093976" cy="512064"/>
           </a:xfrm>
           <a:prstGeom prst="rect">
             <a:avLst/>
@@ -6634,7 +9069,7 @@
               <a:buNone/>
             </a:pPr>
             <a:r>
-              <a:rPr lang="en-US" sz="950" dirty="0">
+              <a:rPr lang="en-US" sz="1000" dirty="0">
                 <a:solidFill>
                   <a:srgbClr val="AEBDE0"/>
                 </a:solidFill>
@@ -6642,65 +9077,153 @@
                 <a:ea typeface="Arial" pitchFamily="34" charset="-122"/>
                 <a:cs typeface="Arial" pitchFamily="34" charset="-120"/>
               </a:rPr>
-              <a:t>Versioni frequenti: 17 in quattro mesi. Ogni release è un esperimento.</a:t>
-            </a:r>
-            <a:endParaRPr lang="en-US" sz="950" dirty="0"/>
-          </a:p>
-        </p:txBody>
-      </p:sp>
-      <p:sp>
-        <p:nvSpPr>
-          <p:cNvPr id="27" name="Shape 25"/>
-          <p:cNvSpPr/>
-          <p:nvPr/>
-        </p:nvSpPr>
-        <p:spPr>
-          <a:xfrm>
-            <a:off x="640080" y="4069080"/>
-            <a:ext cx="7863840" cy="658368"/>
+              <a:t>Usa l'app, descrivi cosa non va, l'AI corregge. Ripeti finché ti convince.</a:t>
+            </a:r>
+            <a:endParaRPr lang="en-US" sz="1000" dirty="0"/>
+          </a:p>
+        </p:txBody>
+      </p:sp>
+      <p:sp>
+        <p:nvSpPr>
+          <p:cNvPr id="28" name="Shape 22"/>
+          <p:cNvSpPr/>
+          <p:nvPr/>
+        </p:nvSpPr>
+        <p:spPr>
+          <a:xfrm>
+            <a:off x="3337560" y="3154680"/>
+            <a:ext cx="2496312" cy="1645920"/>
           </a:xfrm>
           <a:prstGeom prst="roundRect">
             <a:avLst>
-              <a:gd name="adj" fmla="val 8333"/>
+              <a:gd name="adj" fmla="val 4444"/>
             </a:avLst>
+          </a:prstGeom>
+          <a:solidFill>
+            <a:srgbClr val="16203F"/>
+          </a:solidFill>
+          <a:ln w="9525">
+            <a:solidFill>
+              <a:srgbClr val="2A3A6B"/>
+            </a:solidFill>
+            <a:prstDash val="solid"/>
+          </a:ln>
+        </p:spPr>
+      </p:sp>
+      <p:sp>
+        <p:nvSpPr>
+          <p:cNvPr id="29" name="Shape 23"/>
+          <p:cNvSpPr/>
+          <p:nvPr/>
+        </p:nvSpPr>
+        <p:spPr>
+          <a:xfrm>
+            <a:off x="3538728" y="3337560"/>
+            <a:ext cx="457200" cy="457200"/>
+          </a:xfrm>
+          <a:prstGeom prst="ellipse">
+            <a:avLst/>
           </a:prstGeom>
           <a:solidFill>
             <a:srgbClr val="0E3A44"/>
           </a:solidFill>
-          <a:ln w="6350">
+          <a:ln w="12700">
             <a:solidFill>
-              <a:srgbClr val="2BD9E5"/>
+              <a:srgbClr val="0E3A44"/>
             </a:solidFill>
             <a:prstDash val="solid"/>
           </a:ln>
         </p:spPr>
       </p:sp>
-      <p:sp>
-        <p:nvSpPr>
-          <p:cNvPr id="28" name="Text 26"/>
-          <p:cNvSpPr/>
-          <p:nvPr/>
-        </p:nvSpPr>
-        <p:spPr>
-          <a:xfrm>
-            <a:off x="914400" y="4069080"/>
-            <a:ext cx="7315200" cy="658368"/>
-          </a:xfrm>
-          <a:prstGeom prst="rect">
-            <a:avLst/>
-          </a:prstGeom>
-          <a:noFill/>
-          <a:ln/>
-        </p:spPr>
-        <p:txBody>
-          <a:bodyPr wrap="square" lIns="0" tIns="0" rIns="0" bIns="0" rtlCol="0" anchor="ctr"/>
-          <a:lstStyle/>
-          <a:p>
-            <a:pPr indent="0" marL="0">
-              <a:buNone/>
-            </a:pPr>
-            <a:r>
-              <a:rPr lang="en-US" sz="1200" b="1" dirty="0">
+      <p:pic>
+        <p:nvPicPr>
+          <p:cNvPr id="30" name="Image 4" descr="preencoded.png">    </p:cNvPr>
+          <p:cNvPicPr>
+            <a:picLocks noChangeAspect="1"/>
+          </p:cNvPicPr>
+          <p:nvPr/>
+        </p:nvPicPr>
+        <p:blipFill>
+          <a:blip r:embed="rId5"/>
+          <a:stretch>
+            <a:fillRect/>
+          </a:stretch>
+        </p:blipFill>
+        <p:spPr>
+          <a:xfrm>
+            <a:off x="3662172" y="3461004"/>
+            <a:ext cx="210312" cy="210312"/>
+          </a:xfrm>
+          <a:prstGeom prst="rect">
+            <a:avLst/>
+          </a:prstGeom>
+        </p:spPr>
+      </p:pic>
+      <p:sp>
+        <p:nvSpPr>
+          <p:cNvPr id="31" name="Text 24"/>
+          <p:cNvSpPr/>
+          <p:nvPr/>
+        </p:nvSpPr>
+        <p:spPr>
+          <a:xfrm>
+            <a:off x="5175504" y="3374136"/>
+            <a:ext cx="457200" cy="310896"/>
+          </a:xfrm>
+          <a:prstGeom prst="rect">
+            <a:avLst/>
+          </a:prstGeom>
+          <a:noFill/>
+          <a:ln/>
+        </p:spPr>
+        <p:txBody>
+          <a:bodyPr wrap="square" lIns="0" tIns="0" rIns="0" bIns="0" rtlCol="0" anchor="ctr"/>
+          <a:lstStyle/>
+          <a:p>
+            <a:pPr algn="r" indent="0" marL="0">
+              <a:buNone/>
+            </a:pPr>
+            <a:r>
+              <a:rPr lang="en-US" sz="1300" dirty="0">
+                <a:solidFill>
+                  <a:srgbClr val="2BD9E5"/>
+                </a:solidFill>
+                <a:latin typeface="Arial Black" pitchFamily="34" charset="0"/>
+                <a:ea typeface="Arial Black" pitchFamily="34" charset="-122"/>
+                <a:cs typeface="Arial Black" pitchFamily="34" charset="-120"/>
+              </a:rPr>
+              <a:t>05</a:t>
+            </a:r>
+            <a:endParaRPr lang="en-US" sz="1300" dirty="0"/>
+          </a:p>
+        </p:txBody>
+      </p:sp>
+      <p:sp>
+        <p:nvSpPr>
+          <p:cNvPr id="32" name="Text 25"/>
+          <p:cNvSpPr/>
+          <p:nvPr/>
+        </p:nvSpPr>
+        <p:spPr>
+          <a:xfrm>
+            <a:off x="3538728" y="3867912"/>
+            <a:ext cx="2093976" cy="310896"/>
+          </a:xfrm>
+          <a:prstGeom prst="rect">
+            <a:avLst/>
+          </a:prstGeom>
+          <a:noFill/>
+          <a:ln/>
+        </p:spPr>
+        <p:txBody>
+          <a:bodyPr wrap="square" lIns="0" tIns="0" rIns="0" bIns="0" rtlCol="0" anchor="ctr"/>
+          <a:lstStyle/>
+          <a:p>
+            <a:pPr indent="0" marL="0">
+              <a:buNone/>
+            </a:pPr>
+            <a:r>
+              <a:rPr lang="en-US" sz="1300" b="1" dirty="0">
                 <a:solidFill>
                   <a:srgbClr val="F4F7FF"/>
                 </a:solidFill>
@@ -6708,13 +9231,41 @@
                 <a:ea typeface="Arial" pitchFamily="34" charset="-122"/>
                 <a:cs typeface="Arial" pitchFamily="34" charset="-120"/>
               </a:rPr>
-              <a:t>↻  Si ricomincia da «Ascolta». </a:t>
-            </a:r>
-            <a:pPr indent="0" marL="0">
-              <a:buNone/>
-            </a:pPr>
-            <a:r>
-              <a:rPr lang="en-US" sz="1200" dirty="0">
+              <a:t>Prepara il lancio</a:t>
+            </a:r>
+            <a:endParaRPr lang="en-US" sz="1300" dirty="0"/>
+          </a:p>
+        </p:txBody>
+      </p:sp>
+      <p:sp>
+        <p:nvSpPr>
+          <p:cNvPr id="33" name="Text 26"/>
+          <p:cNvSpPr/>
+          <p:nvPr/>
+        </p:nvSpPr>
+        <p:spPr>
+          <a:xfrm>
+            <a:off x="3538728" y="4178808"/>
+            <a:ext cx="2093976" cy="512064"/>
+          </a:xfrm>
+          <a:prstGeom prst="rect">
+            <a:avLst/>
+          </a:prstGeom>
+          <a:noFill/>
+          <a:ln/>
+        </p:spPr>
+        <p:txBody>
+          <a:bodyPr wrap="square" lIns="0" tIns="0" rIns="0" bIns="0" rtlCol="0" anchor="t"/>
+          <a:lstStyle/>
+          <a:p>
+            <a:pPr indent="0" marL="0">
+              <a:lnSpc>
+                <a:spcPct val="112000"/>
+              </a:lnSpc>
+              <a:buNone/>
+            </a:pPr>
+            <a:r>
+              <a:rPr lang="en-US" sz="1000" dirty="0">
                 <a:solidFill>
                   <a:srgbClr val="AEBDE0"/>
                 </a:solidFill>
@@ -6722,9 +9273,1926 @@
                 <a:ea typeface="Arial" pitchFamily="34" charset="-122"/>
                 <a:cs typeface="Arial" pitchFamily="34" charset="-120"/>
               </a:rPr>
-              <a:t>E la routine si automatizza: build, test e pubblicazione diventano script che l'AI scrive una volta sola.</a:t>
-            </a:r>
-            <a:endParaRPr lang="en-US" sz="1200" dirty="0"/>
+              <a:t>Nome, icona, privacy policy, scheda store: li scrive l'AI, li approvi tu.</a:t>
+            </a:r>
+            <a:endParaRPr lang="en-US" sz="1000" dirty="0"/>
+          </a:p>
+        </p:txBody>
+      </p:sp>
+      <p:sp>
+        <p:nvSpPr>
+          <p:cNvPr id="34" name="Shape 27"/>
+          <p:cNvSpPr/>
+          <p:nvPr/>
+        </p:nvSpPr>
+        <p:spPr>
+          <a:xfrm>
+            <a:off x="6035040" y="3154680"/>
+            <a:ext cx="2496312" cy="1645920"/>
+          </a:xfrm>
+          <a:prstGeom prst="roundRect">
+            <a:avLst>
+              <a:gd name="adj" fmla="val 4444"/>
+            </a:avLst>
+          </a:prstGeom>
+          <a:solidFill>
+            <a:srgbClr val="16203F"/>
+          </a:solidFill>
+          <a:ln w="9525">
+            <a:solidFill>
+              <a:srgbClr val="2A3A6B"/>
+            </a:solidFill>
+            <a:prstDash val="solid"/>
+          </a:ln>
+        </p:spPr>
+      </p:sp>
+      <p:sp>
+        <p:nvSpPr>
+          <p:cNvPr id="35" name="Shape 28"/>
+          <p:cNvSpPr/>
+          <p:nvPr/>
+        </p:nvSpPr>
+        <p:spPr>
+          <a:xfrm>
+            <a:off x="6236208" y="3337560"/>
+            <a:ext cx="457200" cy="457200"/>
+          </a:xfrm>
+          <a:prstGeom prst="ellipse">
+            <a:avLst/>
+          </a:prstGeom>
+          <a:solidFill>
+            <a:srgbClr val="0E3A44"/>
+          </a:solidFill>
+          <a:ln w="12700">
+            <a:solidFill>
+              <a:srgbClr val="0E3A44"/>
+            </a:solidFill>
+            <a:prstDash val="solid"/>
+          </a:ln>
+        </p:spPr>
+      </p:sp>
+      <p:pic>
+        <p:nvPicPr>
+          <p:cNvPr id="36" name="Image 5" descr="preencoded.png">    </p:cNvPr>
+          <p:cNvPicPr>
+            <a:picLocks noChangeAspect="1"/>
+          </p:cNvPicPr>
+          <p:nvPr/>
+        </p:nvPicPr>
+        <p:blipFill>
+          <a:blip r:embed="rId6"/>
+          <a:stretch>
+            <a:fillRect/>
+          </a:stretch>
+        </p:blipFill>
+        <p:spPr>
+          <a:xfrm>
+            <a:off x="6359652" y="3461004"/>
+            <a:ext cx="210312" cy="210312"/>
+          </a:xfrm>
+          <a:prstGeom prst="rect">
+            <a:avLst/>
+          </a:prstGeom>
+        </p:spPr>
+      </p:pic>
+      <p:sp>
+        <p:nvSpPr>
+          <p:cNvPr id="37" name="Text 29"/>
+          <p:cNvSpPr/>
+          <p:nvPr/>
+        </p:nvSpPr>
+        <p:spPr>
+          <a:xfrm>
+            <a:off x="7872984" y="3374136"/>
+            <a:ext cx="457200" cy="310896"/>
+          </a:xfrm>
+          <a:prstGeom prst="rect">
+            <a:avLst/>
+          </a:prstGeom>
+          <a:noFill/>
+          <a:ln/>
+        </p:spPr>
+        <p:txBody>
+          <a:bodyPr wrap="square" lIns="0" tIns="0" rIns="0" bIns="0" rtlCol="0" anchor="ctr"/>
+          <a:lstStyle/>
+          <a:p>
+            <a:pPr algn="r" indent="0" marL="0">
+              <a:buNone/>
+            </a:pPr>
+            <a:r>
+              <a:rPr lang="en-US" sz="1300" dirty="0">
+                <a:solidFill>
+                  <a:srgbClr val="2BD9E5"/>
+                </a:solidFill>
+                <a:latin typeface="Arial Black" pitchFamily="34" charset="0"/>
+                <a:ea typeface="Arial Black" pitchFamily="34" charset="-122"/>
+                <a:cs typeface="Arial Black" pitchFamily="34" charset="-120"/>
+              </a:rPr>
+              <a:t>06</a:t>
+            </a:r>
+            <a:endParaRPr lang="en-US" sz="1300" dirty="0"/>
+          </a:p>
+        </p:txBody>
+      </p:sp>
+      <p:sp>
+        <p:nvSpPr>
+          <p:cNvPr id="38" name="Text 30"/>
+          <p:cNvSpPr/>
+          <p:nvPr/>
+        </p:nvSpPr>
+        <p:spPr>
+          <a:xfrm>
+            <a:off x="6236208" y="3867912"/>
+            <a:ext cx="2093976" cy="310896"/>
+          </a:xfrm>
+          <a:prstGeom prst="rect">
+            <a:avLst/>
+          </a:prstGeom>
+          <a:noFill/>
+          <a:ln/>
+        </p:spPr>
+        <p:txBody>
+          <a:bodyPr wrap="square" lIns="0" tIns="0" rIns="0" bIns="0" rtlCol="0" anchor="ctr"/>
+          <a:lstStyle/>
+          <a:p>
+            <a:pPr indent="0" marL="0">
+              <a:buNone/>
+            </a:pPr>
+            <a:r>
+              <a:rPr lang="en-US" sz="1300" b="1" dirty="0">
+                <a:solidFill>
+                  <a:srgbClr val="F4F7FF"/>
+                </a:solidFill>
+                <a:latin typeface="Arial" pitchFamily="34" charset="0"/>
+                <a:ea typeface="Arial" pitchFamily="34" charset="-122"/>
+                <a:cs typeface="Arial" pitchFamily="34" charset="-120"/>
+              </a:rPr>
+              <a:t>Pubblica</a:t>
+            </a:r>
+            <a:endParaRPr lang="en-US" sz="1300" dirty="0"/>
+          </a:p>
+        </p:txBody>
+      </p:sp>
+      <p:sp>
+        <p:nvSpPr>
+          <p:cNvPr id="39" name="Text 31"/>
+          <p:cNvSpPr/>
+          <p:nvPr/>
+        </p:nvSpPr>
+        <p:spPr>
+          <a:xfrm>
+            <a:off x="6236208" y="4178808"/>
+            <a:ext cx="2093976" cy="512064"/>
+          </a:xfrm>
+          <a:prstGeom prst="rect">
+            <a:avLst/>
+          </a:prstGeom>
+          <a:noFill/>
+          <a:ln/>
+        </p:spPr>
+        <p:txBody>
+          <a:bodyPr wrap="square" lIns="0" tIns="0" rIns="0" bIns="0" rtlCol="0" anchor="t"/>
+          <a:lstStyle/>
+          <a:p>
+            <a:pPr indent="0" marL="0">
+              <a:lnSpc>
+                <a:spcPct val="112000"/>
+              </a:lnSpc>
+              <a:buNone/>
+            </a:pPr>
+            <a:r>
+              <a:rPr lang="en-US" sz="1000" dirty="0">
+                <a:solidFill>
+                  <a:srgbClr val="AEBDE0"/>
+                </a:solidFill>
+                <a:latin typeface="Arial" pitchFamily="34" charset="0"/>
+                <a:ea typeface="Arial" pitchFamily="34" charset="-122"/>
+                <a:cs typeface="Arial" pitchFamily="34" charset="-120"/>
+              </a:rPr>
+              <a:t>Firma digitale, caricamento, revisione di Google. Poi sei online nel mondo.</a:t>
+            </a:r>
+            <a:endParaRPr lang="en-US" sz="1000" dirty="0"/>
+          </a:p>
+        </p:txBody>
+      </p:sp>
+    </p:spTree>
+  </p:cSld>
+  <p:clrMapOvr>
+    <a:masterClrMapping/>
+  </p:clrMapOvr>
+</p:sld>
+</file>
+
+<file path=ppt/slides/slide8.xml><?xml version="1.0" encoding="utf-8"?>
+<p:sld xmlns:a="http://schemas.openxmlformats.org/drawingml/2006/main" xmlns:r="http://schemas.openxmlformats.org/officeDocument/2006/relationships" xmlns:p="http://schemas.openxmlformats.org/presentationml/2006/main">
+  <p:cSld name="Slide 8">
+    <p:bg>
+      <p:bgPr>
+        <a:solidFill>
+          <a:srgbClr val="0B1226"/>
+        </a:solidFill>
+      </p:bgPr>
+    </p:bg>
+    <p:spTree>
+      <p:nvGrpSpPr>
+        <p:cNvPr id="1" name=""/>
+        <p:cNvGrpSpPr/>
+        <p:nvPr/>
+      </p:nvGrpSpPr>
+      <p:grpSpPr>
+        <a:xfrm>
+          <a:off x="0" y="0"/>
+          <a:ext cx="0" cy="0"/>
+          <a:chOff x="0" y="0"/>
+          <a:chExt cx="0" cy="0"/>
+        </a:xfrm>
+      </p:grpSpPr>
+      <p:sp>
+        <p:nvSpPr>
+          <p:cNvPr id="2" name="Text 0"/>
+          <p:cNvSpPr/>
+          <p:nvPr/>
+        </p:nvSpPr>
+        <p:spPr>
+          <a:xfrm>
+            <a:off x="640080" y="365760"/>
+            <a:ext cx="8229600" cy="274320"/>
+          </a:xfrm>
+          <a:prstGeom prst="rect">
+            <a:avLst/>
+          </a:prstGeom>
+          <a:noFill/>
+          <a:ln/>
+        </p:spPr>
+        <p:txBody>
+          <a:bodyPr wrap="square" lIns="0" tIns="0" rIns="0" bIns="0" rtlCol="0" anchor="ctr"/>
+          <a:lstStyle/>
+          <a:p>
+            <a:pPr indent="0" marL="0">
+              <a:buNone/>
+            </a:pPr>
+            <a:r>
+              <a:rPr lang="en-US" sz="1100" b="1" spc="200" kern="0" dirty="0">
+                <a:solidFill>
+                  <a:srgbClr val="2BD9E5"/>
+                </a:solidFill>
+                <a:latin typeface="Arial" pitchFamily="34" charset="0"/>
+                <a:ea typeface="Arial" pitchFamily="34" charset="-122"/>
+                <a:cs typeface="Arial" pitchFamily="34" charset="-120"/>
+              </a:rPr>
+              <a:t>IL METODO · DOPO IL LANCIO</a:t>
+            </a:r>
+            <a:endParaRPr lang="en-US" sz="1100" dirty="0"/>
+          </a:p>
+        </p:txBody>
+      </p:sp>
+      <p:sp>
+        <p:nvSpPr>
+          <p:cNvPr id="3" name="Text 1"/>
+          <p:cNvSpPr/>
+          <p:nvPr/>
+        </p:nvSpPr>
+        <p:spPr>
+          <a:xfrm>
+            <a:off x="640080" y="640080"/>
+            <a:ext cx="7863840" cy="566928"/>
+          </a:xfrm>
+          <a:prstGeom prst="rect">
+            <a:avLst/>
+          </a:prstGeom>
+          <a:noFill/>
+          <a:ln/>
+        </p:spPr>
+        <p:txBody>
+          <a:bodyPr wrap="square" lIns="0" tIns="0" rIns="0" bIns="0" rtlCol="0" anchor="ctr"/>
+          <a:lstStyle/>
+          <a:p>
+            <a:pPr indent="0" marL="0">
+              <a:buNone/>
+            </a:pPr>
+            <a:r>
+              <a:rPr lang="en-US" sz="3000" dirty="0">
+                <a:solidFill>
+                  <a:srgbClr val="F4F7FF"/>
+                </a:solidFill>
+                <a:latin typeface="Arial Black" pitchFamily="34" charset="0"/>
+                <a:ea typeface="Arial Black" pitchFamily="34" charset="-122"/>
+                <a:cs typeface="Arial Black" pitchFamily="34" charset="-120"/>
+              </a:rPr>
+              <a:t>Gli aggiornamenti</a:t>
+            </a:r>
+            <a:endParaRPr lang="en-US" sz="3000" dirty="0"/>
+          </a:p>
+        </p:txBody>
+      </p:sp>
+      <p:sp>
+        <p:nvSpPr>
+          <p:cNvPr id="4" name="Text 2"/>
+          <p:cNvSpPr/>
+          <p:nvPr/>
+        </p:nvSpPr>
+        <p:spPr>
+          <a:xfrm>
+            <a:off x="658368" y="1188720"/>
+            <a:ext cx="7772400" cy="274320"/>
+          </a:xfrm>
+          <a:prstGeom prst="rect">
+            <a:avLst/>
+          </a:prstGeom>
+          <a:noFill/>
+          <a:ln/>
+        </p:spPr>
+        <p:txBody>
+          <a:bodyPr wrap="square" lIns="0" tIns="0" rIns="0" bIns="0" rtlCol="0" anchor="ctr"/>
+          <a:lstStyle/>
+          <a:p>
+            <a:pPr indent="0" marL="0">
+              <a:buNone/>
+            </a:pPr>
+            <a:r>
+              <a:rPr lang="en-US" sz="1300" i="1" dirty="0">
+                <a:solidFill>
+                  <a:srgbClr val="AEBDE0"/>
+                </a:solidFill>
+                <a:latin typeface="Arial" pitchFamily="34" charset="0"/>
+                <a:ea typeface="Arial" pitchFamily="34" charset="-122"/>
+                <a:cs typeface="Arial" pitchFamily="34" charset="-120"/>
+              </a:rPr>
+              <a:t>I passi, in breve</a:t>
+            </a:r>
+            <a:endParaRPr lang="en-US" sz="1300" dirty="0"/>
+          </a:p>
+        </p:txBody>
+      </p:sp>
+      <p:sp>
+        <p:nvSpPr>
+          <p:cNvPr id="5" name="Text 3"/>
+          <p:cNvSpPr/>
+          <p:nvPr/>
+        </p:nvSpPr>
+        <p:spPr>
+          <a:xfrm>
+            <a:off x="868680" y="1691640"/>
+            <a:ext cx="685800" cy="566928"/>
+          </a:xfrm>
+          <a:prstGeom prst="rect">
+            <a:avLst/>
+          </a:prstGeom>
+          <a:noFill/>
+          <a:ln/>
+        </p:spPr>
+        <p:txBody>
+          <a:bodyPr wrap="square" lIns="0" tIns="0" rIns="0" bIns="0" rtlCol="0" anchor="ctr"/>
+          <a:lstStyle/>
+          <a:p>
+            <a:pPr indent="0" marL="0">
+              <a:buNone/>
+            </a:pPr>
+            <a:r>
+              <a:rPr lang="en-US" sz="2200" dirty="0">
+                <a:solidFill>
+                  <a:srgbClr val="2BD9E5"/>
+                </a:solidFill>
+                <a:latin typeface="Arial Black" pitchFamily="34" charset="0"/>
+                <a:ea typeface="Arial Black" pitchFamily="34" charset="-122"/>
+                <a:cs typeface="Arial Black" pitchFamily="34" charset="-120"/>
+              </a:rPr>
+              <a:t>01</a:t>
+            </a:r>
+            <a:endParaRPr lang="en-US" sz="2200" dirty="0"/>
+          </a:p>
+        </p:txBody>
+      </p:sp>
+      <p:sp>
+        <p:nvSpPr>
+          <p:cNvPr id="6" name="Text 4"/>
+          <p:cNvSpPr/>
+          <p:nvPr/>
+        </p:nvSpPr>
+        <p:spPr>
+          <a:xfrm>
+            <a:off x="1645920" y="1691640"/>
+            <a:ext cx="6675120" cy="566928"/>
+          </a:xfrm>
+          <a:prstGeom prst="rect">
+            <a:avLst/>
+          </a:prstGeom>
+          <a:noFill/>
+          <a:ln/>
+        </p:spPr>
+        <p:txBody>
+          <a:bodyPr wrap="square" lIns="0" tIns="0" rIns="0" bIns="0" rtlCol="0" anchor="ctr"/>
+          <a:lstStyle/>
+          <a:p>
+            <a:pPr indent="0" marL="0">
+              <a:buNone/>
+            </a:pPr>
+            <a:r>
+              <a:rPr lang="en-US" sz="1900" dirty="0">
+                <a:solidFill>
+                  <a:srgbClr val="F4F7FF"/>
+                </a:solidFill>
+                <a:latin typeface="Arial" pitchFamily="34" charset="0"/>
+                <a:ea typeface="Arial" pitchFamily="34" charset="-122"/>
+                <a:cs typeface="Arial" pitchFamily="34" charset="-120"/>
+              </a:rPr>
+              <a:t>Ascolta</a:t>
+            </a:r>
+            <a:endParaRPr lang="en-US" sz="1900" dirty="0"/>
+          </a:p>
+        </p:txBody>
+      </p:sp>
+      <p:sp>
+        <p:nvSpPr>
+          <p:cNvPr id="7" name="Shape 5"/>
+          <p:cNvSpPr/>
+          <p:nvPr/>
+        </p:nvSpPr>
+        <p:spPr>
+          <a:xfrm>
+            <a:off x="1645920" y="2276856"/>
+            <a:ext cx="6583680" cy="0"/>
+          </a:xfrm>
+          <a:prstGeom prst="line">
+            <a:avLst/>
+          </a:prstGeom>
+          <a:noFill/>
+          <a:ln w="9525">
+            <a:solidFill>
+              <a:srgbClr val="2A3A6B"/>
+            </a:solidFill>
+            <a:prstDash val="solid"/>
+          </a:ln>
+        </p:spPr>
+      </p:sp>
+      <p:sp>
+        <p:nvSpPr>
+          <p:cNvPr id="8" name="Text 6"/>
+          <p:cNvSpPr/>
+          <p:nvPr/>
+        </p:nvSpPr>
+        <p:spPr>
+          <a:xfrm>
+            <a:off x="868680" y="2313432"/>
+            <a:ext cx="685800" cy="566928"/>
+          </a:xfrm>
+          <a:prstGeom prst="rect">
+            <a:avLst/>
+          </a:prstGeom>
+          <a:noFill/>
+          <a:ln/>
+        </p:spPr>
+        <p:txBody>
+          <a:bodyPr wrap="square" lIns="0" tIns="0" rIns="0" bIns="0" rtlCol="0" anchor="ctr"/>
+          <a:lstStyle/>
+          <a:p>
+            <a:pPr indent="0" marL="0">
+              <a:buNone/>
+            </a:pPr>
+            <a:r>
+              <a:rPr lang="en-US" sz="2200" dirty="0">
+                <a:solidFill>
+                  <a:srgbClr val="2BD9E5"/>
+                </a:solidFill>
+                <a:latin typeface="Arial Black" pitchFamily="34" charset="0"/>
+                <a:ea typeface="Arial Black" pitchFamily="34" charset="-122"/>
+                <a:cs typeface="Arial Black" pitchFamily="34" charset="-120"/>
+              </a:rPr>
+              <a:t>02</a:t>
+            </a:r>
+            <a:endParaRPr lang="en-US" sz="2200" dirty="0"/>
+          </a:p>
+        </p:txBody>
+      </p:sp>
+      <p:sp>
+        <p:nvSpPr>
+          <p:cNvPr id="9" name="Text 7"/>
+          <p:cNvSpPr/>
+          <p:nvPr/>
+        </p:nvSpPr>
+        <p:spPr>
+          <a:xfrm>
+            <a:off x="1645920" y="2313432"/>
+            <a:ext cx="6675120" cy="566928"/>
+          </a:xfrm>
+          <a:prstGeom prst="rect">
+            <a:avLst/>
+          </a:prstGeom>
+          <a:noFill/>
+          <a:ln/>
+        </p:spPr>
+        <p:txBody>
+          <a:bodyPr wrap="square" lIns="0" tIns="0" rIns="0" bIns="0" rtlCol="0" anchor="ctr"/>
+          <a:lstStyle/>
+          <a:p>
+            <a:pPr indent="0" marL="0">
+              <a:buNone/>
+            </a:pPr>
+            <a:r>
+              <a:rPr lang="en-US" sz="1900" dirty="0">
+                <a:solidFill>
+                  <a:srgbClr val="F4F7FF"/>
+                </a:solidFill>
+                <a:latin typeface="Arial" pitchFamily="34" charset="0"/>
+                <a:ea typeface="Arial" pitchFamily="34" charset="-122"/>
+                <a:cs typeface="Arial" pitchFamily="34" charset="-120"/>
+              </a:rPr>
+              <a:t>Scegli una cosa</a:t>
+            </a:r>
+            <a:endParaRPr lang="en-US" sz="1900" dirty="0"/>
+          </a:p>
+        </p:txBody>
+      </p:sp>
+      <p:sp>
+        <p:nvSpPr>
+          <p:cNvPr id="10" name="Shape 8"/>
+          <p:cNvSpPr/>
+          <p:nvPr/>
+        </p:nvSpPr>
+        <p:spPr>
+          <a:xfrm>
+            <a:off x="1645920" y="2898648"/>
+            <a:ext cx="6583680" cy="0"/>
+          </a:xfrm>
+          <a:prstGeom prst="line">
+            <a:avLst/>
+          </a:prstGeom>
+          <a:noFill/>
+          <a:ln w="9525">
+            <a:solidFill>
+              <a:srgbClr val="2A3A6B"/>
+            </a:solidFill>
+            <a:prstDash val="solid"/>
+          </a:ln>
+        </p:spPr>
+      </p:sp>
+      <p:sp>
+        <p:nvSpPr>
+          <p:cNvPr id="11" name="Text 9"/>
+          <p:cNvSpPr/>
+          <p:nvPr/>
+        </p:nvSpPr>
+        <p:spPr>
+          <a:xfrm>
+            <a:off x="868680" y="2935224"/>
+            <a:ext cx="685800" cy="566928"/>
+          </a:xfrm>
+          <a:prstGeom prst="rect">
+            <a:avLst/>
+          </a:prstGeom>
+          <a:noFill/>
+          <a:ln/>
+        </p:spPr>
+        <p:txBody>
+          <a:bodyPr wrap="square" lIns="0" tIns="0" rIns="0" bIns="0" rtlCol="0" anchor="ctr"/>
+          <a:lstStyle/>
+          <a:p>
+            <a:pPr indent="0" marL="0">
+              <a:buNone/>
+            </a:pPr>
+            <a:r>
+              <a:rPr lang="en-US" sz="2200" dirty="0">
+                <a:solidFill>
+                  <a:srgbClr val="2BD9E5"/>
+                </a:solidFill>
+                <a:latin typeface="Arial Black" pitchFamily="34" charset="0"/>
+                <a:ea typeface="Arial Black" pitchFamily="34" charset="-122"/>
+                <a:cs typeface="Arial Black" pitchFamily="34" charset="-120"/>
+              </a:rPr>
+              <a:t>03</a:t>
+            </a:r>
+            <a:endParaRPr lang="en-US" sz="2200" dirty="0"/>
+          </a:p>
+        </p:txBody>
+      </p:sp>
+      <p:sp>
+        <p:nvSpPr>
+          <p:cNvPr id="12" name="Text 10"/>
+          <p:cNvSpPr/>
+          <p:nvPr/>
+        </p:nvSpPr>
+        <p:spPr>
+          <a:xfrm>
+            <a:off x="1645920" y="2935224"/>
+            <a:ext cx="6675120" cy="566928"/>
+          </a:xfrm>
+          <a:prstGeom prst="rect">
+            <a:avLst/>
+          </a:prstGeom>
+          <a:noFill/>
+          <a:ln/>
+        </p:spPr>
+        <p:txBody>
+          <a:bodyPr wrap="square" lIns="0" tIns="0" rIns="0" bIns="0" rtlCol="0" anchor="ctr"/>
+          <a:lstStyle/>
+          <a:p>
+            <a:pPr indent="0" marL="0">
+              <a:buNone/>
+            </a:pPr>
+            <a:r>
+              <a:rPr lang="en-US" sz="1900" dirty="0">
+                <a:solidFill>
+                  <a:srgbClr val="F4F7FF"/>
+                </a:solidFill>
+                <a:latin typeface="Arial" pitchFamily="34" charset="0"/>
+                <a:ea typeface="Arial" pitchFamily="34" charset="-122"/>
+                <a:cs typeface="Arial" pitchFamily="34" charset="-120"/>
+              </a:rPr>
+              <a:t>Pianifica</a:t>
+            </a:r>
+            <a:endParaRPr lang="en-US" sz="1900" dirty="0"/>
+          </a:p>
+        </p:txBody>
+      </p:sp>
+      <p:sp>
+        <p:nvSpPr>
+          <p:cNvPr id="13" name="Shape 11"/>
+          <p:cNvSpPr/>
+          <p:nvPr/>
+        </p:nvSpPr>
+        <p:spPr>
+          <a:xfrm>
+            <a:off x="1645920" y="3520440"/>
+            <a:ext cx="6583680" cy="0"/>
+          </a:xfrm>
+          <a:prstGeom prst="line">
+            <a:avLst/>
+          </a:prstGeom>
+          <a:noFill/>
+          <a:ln w="9525">
+            <a:solidFill>
+              <a:srgbClr val="2A3A6B"/>
+            </a:solidFill>
+            <a:prstDash val="solid"/>
+          </a:ln>
+        </p:spPr>
+      </p:sp>
+      <p:sp>
+        <p:nvSpPr>
+          <p:cNvPr id="14" name="Text 12"/>
+          <p:cNvSpPr/>
+          <p:nvPr/>
+        </p:nvSpPr>
+        <p:spPr>
+          <a:xfrm>
+            <a:off x="868680" y="3557016"/>
+            <a:ext cx="685800" cy="566928"/>
+          </a:xfrm>
+          <a:prstGeom prst="rect">
+            <a:avLst/>
+          </a:prstGeom>
+          <a:noFill/>
+          <a:ln/>
+        </p:spPr>
+        <p:txBody>
+          <a:bodyPr wrap="square" lIns="0" tIns="0" rIns="0" bIns="0" rtlCol="0" anchor="ctr"/>
+          <a:lstStyle/>
+          <a:p>
+            <a:pPr indent="0" marL="0">
+              <a:buNone/>
+            </a:pPr>
+            <a:r>
+              <a:rPr lang="en-US" sz="2200" dirty="0">
+                <a:solidFill>
+                  <a:srgbClr val="2BD9E5"/>
+                </a:solidFill>
+                <a:latin typeface="Arial Black" pitchFamily="34" charset="0"/>
+                <a:ea typeface="Arial Black" pitchFamily="34" charset="-122"/>
+                <a:cs typeface="Arial Black" pitchFamily="34" charset="-120"/>
+              </a:rPr>
+              <a:t>04</a:t>
+            </a:r>
+            <a:endParaRPr lang="en-US" sz="2200" dirty="0"/>
+          </a:p>
+        </p:txBody>
+      </p:sp>
+      <p:sp>
+        <p:nvSpPr>
+          <p:cNvPr id="15" name="Text 13"/>
+          <p:cNvSpPr/>
+          <p:nvPr/>
+        </p:nvSpPr>
+        <p:spPr>
+          <a:xfrm>
+            <a:off x="1645920" y="3557016"/>
+            <a:ext cx="6675120" cy="566928"/>
+          </a:xfrm>
+          <a:prstGeom prst="rect">
+            <a:avLst/>
+          </a:prstGeom>
+          <a:noFill/>
+          <a:ln/>
+        </p:spPr>
+        <p:txBody>
+          <a:bodyPr wrap="square" lIns="0" tIns="0" rIns="0" bIns="0" rtlCol="0" anchor="ctr"/>
+          <a:lstStyle/>
+          <a:p>
+            <a:pPr indent="0" marL="0">
+              <a:buNone/>
+            </a:pPr>
+            <a:r>
+              <a:rPr lang="en-US" sz="1900" dirty="0">
+                <a:solidFill>
+                  <a:srgbClr val="F4F7FF"/>
+                </a:solidFill>
+                <a:latin typeface="Arial" pitchFamily="34" charset="0"/>
+                <a:ea typeface="Arial" pitchFamily="34" charset="-122"/>
+                <a:cs typeface="Arial" pitchFamily="34" charset="-120"/>
+              </a:rPr>
+              <a:t>Implementa e prova</a:t>
+            </a:r>
+            <a:endParaRPr lang="en-US" sz="1900" dirty="0"/>
+          </a:p>
+        </p:txBody>
+      </p:sp>
+      <p:sp>
+        <p:nvSpPr>
+          <p:cNvPr id="16" name="Shape 14"/>
+          <p:cNvSpPr/>
+          <p:nvPr/>
+        </p:nvSpPr>
+        <p:spPr>
+          <a:xfrm>
+            <a:off x="1645920" y="4142232"/>
+            <a:ext cx="6583680" cy="0"/>
+          </a:xfrm>
+          <a:prstGeom prst="line">
+            <a:avLst/>
+          </a:prstGeom>
+          <a:noFill/>
+          <a:ln w="9525">
+            <a:solidFill>
+              <a:srgbClr val="2A3A6B"/>
+            </a:solidFill>
+            <a:prstDash val="solid"/>
+          </a:ln>
+        </p:spPr>
+      </p:sp>
+      <p:sp>
+        <p:nvSpPr>
+          <p:cNvPr id="17" name="Text 15"/>
+          <p:cNvSpPr/>
+          <p:nvPr/>
+        </p:nvSpPr>
+        <p:spPr>
+          <a:xfrm>
+            <a:off x="868680" y="4178808"/>
+            <a:ext cx="685800" cy="566928"/>
+          </a:xfrm>
+          <a:prstGeom prst="rect">
+            <a:avLst/>
+          </a:prstGeom>
+          <a:noFill/>
+          <a:ln/>
+        </p:spPr>
+        <p:txBody>
+          <a:bodyPr wrap="square" lIns="0" tIns="0" rIns="0" bIns="0" rtlCol="0" anchor="ctr"/>
+          <a:lstStyle/>
+          <a:p>
+            <a:pPr indent="0" marL="0">
+              <a:buNone/>
+            </a:pPr>
+            <a:r>
+              <a:rPr lang="en-US" sz="2200" dirty="0">
+                <a:solidFill>
+                  <a:srgbClr val="2BD9E5"/>
+                </a:solidFill>
+                <a:latin typeface="Arial Black" pitchFamily="34" charset="0"/>
+                <a:ea typeface="Arial Black" pitchFamily="34" charset="-122"/>
+                <a:cs typeface="Arial Black" pitchFamily="34" charset="-120"/>
+              </a:rPr>
+              <a:t>05</a:t>
+            </a:r>
+            <a:endParaRPr lang="en-US" sz="2200" dirty="0"/>
+          </a:p>
+        </p:txBody>
+      </p:sp>
+      <p:sp>
+        <p:nvSpPr>
+          <p:cNvPr id="18" name="Text 16"/>
+          <p:cNvSpPr/>
+          <p:nvPr/>
+        </p:nvSpPr>
+        <p:spPr>
+          <a:xfrm>
+            <a:off x="1645920" y="4178808"/>
+            <a:ext cx="6675120" cy="566928"/>
+          </a:xfrm>
+          <a:prstGeom prst="rect">
+            <a:avLst/>
+          </a:prstGeom>
+          <a:noFill/>
+          <a:ln/>
+        </p:spPr>
+        <p:txBody>
+          <a:bodyPr wrap="square" lIns="0" tIns="0" rIns="0" bIns="0" rtlCol="0" anchor="ctr"/>
+          <a:lstStyle/>
+          <a:p>
+            <a:pPr indent="0" marL="0">
+              <a:buNone/>
+            </a:pPr>
+            <a:r>
+              <a:rPr lang="en-US" sz="1900" dirty="0">
+                <a:solidFill>
+                  <a:srgbClr val="F4F7FF"/>
+                </a:solidFill>
+                <a:latin typeface="Arial" pitchFamily="34" charset="0"/>
+                <a:ea typeface="Arial" pitchFamily="34" charset="-122"/>
+                <a:cs typeface="Arial" pitchFamily="34" charset="-120"/>
+              </a:rPr>
+              <a:t>Rilascia spesso</a:t>
+            </a:r>
+            <a:endParaRPr lang="en-US" sz="1900" dirty="0"/>
+          </a:p>
+        </p:txBody>
+      </p:sp>
+    </p:spTree>
+  </p:cSld>
+  <p:clrMapOvr>
+    <a:masterClrMapping/>
+  </p:clrMapOvr>
+</p:sld>
+</file>
+
+<file path=ppt/slides/slide9.xml><?xml version="1.0" encoding="utf-8"?>
+<p:sld xmlns:a="http://schemas.openxmlformats.org/drawingml/2006/main" xmlns:r="http://schemas.openxmlformats.org/officeDocument/2006/relationships" xmlns:p="http://schemas.openxmlformats.org/presentationml/2006/main">
+  <p:cSld name="Slide 9">
+    <p:bg>
+      <p:bgPr>
+        <a:solidFill>
+          <a:srgbClr val="0B1226"/>
+        </a:solidFill>
+      </p:bgPr>
+    </p:bg>
+    <p:spTree>
+      <p:nvGrpSpPr>
+        <p:cNvPr id="1" name=""/>
+        <p:cNvGrpSpPr/>
+        <p:nvPr/>
+      </p:nvGrpSpPr>
+      <p:grpSpPr>
+        <a:xfrm>
+          <a:off x="0" y="0"/>
+          <a:ext cx="0" cy="0"/>
+          <a:chOff x="0" y="0"/>
+          <a:chExt cx="0" cy="0"/>
+        </a:xfrm>
+      </p:grpSpPr>
+      <p:sp>
+        <p:nvSpPr>
+          <p:cNvPr id="2" name="Text 0"/>
+          <p:cNvSpPr/>
+          <p:nvPr/>
+        </p:nvSpPr>
+        <p:spPr>
+          <a:xfrm>
+            <a:off x="640080" y="365760"/>
+            <a:ext cx="8229600" cy="274320"/>
+          </a:xfrm>
+          <a:prstGeom prst="rect">
+            <a:avLst/>
+          </a:prstGeom>
+          <a:noFill/>
+          <a:ln/>
+        </p:spPr>
+        <p:txBody>
+          <a:bodyPr wrap="square" lIns="0" tIns="0" rIns="0" bIns="0" rtlCol="0" anchor="ctr"/>
+          <a:lstStyle/>
+          <a:p>
+            <a:pPr indent="0" marL="0">
+              <a:buNone/>
+            </a:pPr>
+            <a:r>
+              <a:rPr lang="en-US" sz="1100" b="1" spc="200" kern="0" dirty="0">
+                <a:solidFill>
+                  <a:srgbClr val="2BD9E5"/>
+                </a:solidFill>
+                <a:latin typeface="Arial" pitchFamily="34" charset="0"/>
+                <a:ea typeface="Arial" pitchFamily="34" charset="-122"/>
+                <a:cs typeface="Arial" pitchFamily="34" charset="-120"/>
+              </a:rPr>
+              <a:t>IL METODO · DOPO IL LANCIO</a:t>
+            </a:r>
+            <a:endParaRPr lang="en-US" sz="1100" dirty="0"/>
+          </a:p>
+        </p:txBody>
+      </p:sp>
+      <p:sp>
+        <p:nvSpPr>
+          <p:cNvPr id="3" name="Text 1"/>
+          <p:cNvSpPr/>
+          <p:nvPr/>
+        </p:nvSpPr>
+        <p:spPr>
+          <a:xfrm>
+            <a:off x="640080" y="640080"/>
+            <a:ext cx="7863840" cy="566928"/>
+          </a:xfrm>
+          <a:prstGeom prst="rect">
+            <a:avLst/>
+          </a:prstGeom>
+          <a:noFill/>
+          <a:ln/>
+        </p:spPr>
+        <p:txBody>
+          <a:bodyPr wrap="square" lIns="0" tIns="0" rIns="0" bIns="0" rtlCol="0" anchor="ctr"/>
+          <a:lstStyle/>
+          <a:p>
+            <a:pPr indent="0" marL="0">
+              <a:buNone/>
+            </a:pPr>
+            <a:r>
+              <a:rPr lang="en-US" sz="3000" dirty="0">
+                <a:solidFill>
+                  <a:srgbClr val="F4F7FF"/>
+                </a:solidFill>
+                <a:latin typeface="Arial Black" pitchFamily="34" charset="0"/>
+                <a:ea typeface="Arial Black" pitchFamily="34" charset="-122"/>
+                <a:cs typeface="Arial Black" pitchFamily="34" charset="-120"/>
+              </a:rPr>
+              <a:t>Gli aggiornamenti, passo per passo</a:t>
+            </a:r>
+            <a:endParaRPr lang="en-US" sz="3000" dirty="0"/>
+          </a:p>
+        </p:txBody>
+      </p:sp>
+      <p:sp>
+        <p:nvSpPr>
+          <p:cNvPr id="4" name="Shape 2"/>
+          <p:cNvSpPr/>
+          <p:nvPr/>
+        </p:nvSpPr>
+        <p:spPr>
+          <a:xfrm>
+            <a:off x="640080" y="1371600"/>
+            <a:ext cx="2496312" cy="1645920"/>
+          </a:xfrm>
+          <a:prstGeom prst="roundRect">
+            <a:avLst>
+              <a:gd name="adj" fmla="val 4444"/>
+            </a:avLst>
+          </a:prstGeom>
+          <a:solidFill>
+            <a:srgbClr val="16203F"/>
+          </a:solidFill>
+          <a:ln w="9525">
+            <a:solidFill>
+              <a:srgbClr val="2A3A6B"/>
+            </a:solidFill>
+            <a:prstDash val="solid"/>
+          </a:ln>
+        </p:spPr>
+      </p:sp>
+      <p:sp>
+        <p:nvSpPr>
+          <p:cNvPr id="5" name="Shape 3"/>
+          <p:cNvSpPr/>
+          <p:nvPr/>
+        </p:nvSpPr>
+        <p:spPr>
+          <a:xfrm>
+            <a:off x="841248" y="1554480"/>
+            <a:ext cx="457200" cy="457200"/>
+          </a:xfrm>
+          <a:prstGeom prst="ellipse">
+            <a:avLst/>
+          </a:prstGeom>
+          <a:solidFill>
+            <a:srgbClr val="0E3A44"/>
+          </a:solidFill>
+          <a:ln w="12700">
+            <a:solidFill>
+              <a:srgbClr val="0E3A44"/>
+            </a:solidFill>
+            <a:prstDash val="solid"/>
+          </a:ln>
+        </p:spPr>
+      </p:sp>
+      <p:pic>
+        <p:nvPicPr>
+          <p:cNvPr id="6" name="Image 0" descr="preencoded.png">    </p:cNvPr>
+          <p:cNvPicPr>
+            <a:picLocks noChangeAspect="1"/>
+          </p:cNvPicPr>
+          <p:nvPr/>
+        </p:nvPicPr>
+        <p:blipFill>
+          <a:blip r:embed="rId1"/>
+          <a:stretch>
+            <a:fillRect/>
+          </a:stretch>
+        </p:blipFill>
+        <p:spPr>
+          <a:xfrm>
+            <a:off x="964692" y="1677924"/>
+            <a:ext cx="210312" cy="210312"/>
+          </a:xfrm>
+          <a:prstGeom prst="rect">
+            <a:avLst/>
+          </a:prstGeom>
+        </p:spPr>
+      </p:pic>
+      <p:sp>
+        <p:nvSpPr>
+          <p:cNvPr id="7" name="Text 4"/>
+          <p:cNvSpPr/>
+          <p:nvPr/>
+        </p:nvSpPr>
+        <p:spPr>
+          <a:xfrm>
+            <a:off x="2478024" y="1591056"/>
+            <a:ext cx="457200" cy="310896"/>
+          </a:xfrm>
+          <a:prstGeom prst="rect">
+            <a:avLst/>
+          </a:prstGeom>
+          <a:noFill/>
+          <a:ln/>
+        </p:spPr>
+        <p:txBody>
+          <a:bodyPr wrap="square" lIns="0" tIns="0" rIns="0" bIns="0" rtlCol="0" anchor="ctr"/>
+          <a:lstStyle/>
+          <a:p>
+            <a:pPr algn="r" indent="0" marL="0">
+              <a:buNone/>
+            </a:pPr>
+            <a:r>
+              <a:rPr lang="en-US" sz="1300" dirty="0">
+                <a:solidFill>
+                  <a:srgbClr val="2BD9E5"/>
+                </a:solidFill>
+                <a:latin typeface="Arial Black" pitchFamily="34" charset="0"/>
+                <a:ea typeface="Arial Black" pitchFamily="34" charset="-122"/>
+                <a:cs typeface="Arial Black" pitchFamily="34" charset="-120"/>
+              </a:rPr>
+              <a:t>01</a:t>
+            </a:r>
+            <a:endParaRPr lang="en-US" sz="1300" dirty="0"/>
+          </a:p>
+        </p:txBody>
+      </p:sp>
+      <p:sp>
+        <p:nvSpPr>
+          <p:cNvPr id="8" name="Text 5"/>
+          <p:cNvSpPr/>
+          <p:nvPr/>
+        </p:nvSpPr>
+        <p:spPr>
+          <a:xfrm>
+            <a:off x="841248" y="2084832"/>
+            <a:ext cx="2093976" cy="310896"/>
+          </a:xfrm>
+          <a:prstGeom prst="rect">
+            <a:avLst/>
+          </a:prstGeom>
+          <a:noFill/>
+          <a:ln/>
+        </p:spPr>
+        <p:txBody>
+          <a:bodyPr wrap="square" lIns="0" tIns="0" rIns="0" bIns="0" rtlCol="0" anchor="ctr"/>
+          <a:lstStyle/>
+          <a:p>
+            <a:pPr indent="0" marL="0">
+              <a:buNone/>
+            </a:pPr>
+            <a:r>
+              <a:rPr lang="en-US" sz="1300" b="1" dirty="0">
+                <a:solidFill>
+                  <a:srgbClr val="F4F7FF"/>
+                </a:solidFill>
+                <a:latin typeface="Arial" pitchFamily="34" charset="0"/>
+                <a:ea typeface="Arial" pitchFamily="34" charset="-122"/>
+                <a:cs typeface="Arial" pitchFamily="34" charset="-120"/>
+              </a:rPr>
+              <a:t>Ascolta</a:t>
+            </a:r>
+            <a:endParaRPr lang="en-US" sz="1300" dirty="0"/>
+          </a:p>
+        </p:txBody>
+      </p:sp>
+      <p:sp>
+        <p:nvSpPr>
+          <p:cNvPr id="9" name="Text 6"/>
+          <p:cNvSpPr/>
+          <p:nvPr/>
+        </p:nvSpPr>
+        <p:spPr>
+          <a:xfrm>
+            <a:off x="841248" y="2395728"/>
+            <a:ext cx="2093976" cy="512064"/>
+          </a:xfrm>
+          <a:prstGeom prst="rect">
+            <a:avLst/>
+          </a:prstGeom>
+          <a:noFill/>
+          <a:ln/>
+        </p:spPr>
+        <p:txBody>
+          <a:bodyPr wrap="square" lIns="0" tIns="0" rIns="0" bIns="0" rtlCol="0" anchor="t"/>
+          <a:lstStyle/>
+          <a:p>
+            <a:pPr indent="0" marL="0">
+              <a:lnSpc>
+                <a:spcPct val="112000"/>
+              </a:lnSpc>
+              <a:buNone/>
+            </a:pPr>
+            <a:r>
+              <a:rPr lang="en-US" sz="1000" dirty="0">
+                <a:solidFill>
+                  <a:srgbClr val="AEBDE0"/>
+                </a:solidFill>
+                <a:latin typeface="Arial" pitchFamily="34" charset="0"/>
+                <a:ea typeface="Arial" pitchFamily="34" charset="-122"/>
+                <a:cs typeface="Arial" pitchFamily="34" charset="-120"/>
+              </a:rPr>
+              <a:t>Recensioni, statistiche, uso reale: decidono i dati, non le supposizioni.</a:t>
+            </a:r>
+            <a:endParaRPr lang="en-US" sz="1000" dirty="0"/>
+          </a:p>
+        </p:txBody>
+      </p:sp>
+      <p:sp>
+        <p:nvSpPr>
+          <p:cNvPr id="10" name="Shape 7"/>
+          <p:cNvSpPr/>
+          <p:nvPr/>
+        </p:nvSpPr>
+        <p:spPr>
+          <a:xfrm>
+            <a:off x="3337560" y="1371600"/>
+            <a:ext cx="2496312" cy="1645920"/>
+          </a:xfrm>
+          <a:prstGeom prst="roundRect">
+            <a:avLst>
+              <a:gd name="adj" fmla="val 4444"/>
+            </a:avLst>
+          </a:prstGeom>
+          <a:solidFill>
+            <a:srgbClr val="16203F"/>
+          </a:solidFill>
+          <a:ln w="9525">
+            <a:solidFill>
+              <a:srgbClr val="2A3A6B"/>
+            </a:solidFill>
+            <a:prstDash val="solid"/>
+          </a:ln>
+        </p:spPr>
+      </p:sp>
+      <p:sp>
+        <p:nvSpPr>
+          <p:cNvPr id="11" name="Shape 8"/>
+          <p:cNvSpPr/>
+          <p:nvPr/>
+        </p:nvSpPr>
+        <p:spPr>
+          <a:xfrm>
+            <a:off x="3538728" y="1554480"/>
+            <a:ext cx="457200" cy="457200"/>
+          </a:xfrm>
+          <a:prstGeom prst="ellipse">
+            <a:avLst/>
+          </a:prstGeom>
+          <a:solidFill>
+            <a:srgbClr val="0E3A44"/>
+          </a:solidFill>
+          <a:ln w="12700">
+            <a:solidFill>
+              <a:srgbClr val="0E3A44"/>
+            </a:solidFill>
+            <a:prstDash val="solid"/>
+          </a:ln>
+        </p:spPr>
+      </p:sp>
+      <p:pic>
+        <p:nvPicPr>
+          <p:cNvPr id="12" name="Image 1" descr="preencoded.png">    </p:cNvPr>
+          <p:cNvPicPr>
+            <a:picLocks noChangeAspect="1"/>
+          </p:cNvPicPr>
+          <p:nvPr/>
+        </p:nvPicPr>
+        <p:blipFill>
+          <a:blip r:embed="rId2"/>
+          <a:stretch>
+            <a:fillRect/>
+          </a:stretch>
+        </p:blipFill>
+        <p:spPr>
+          <a:xfrm>
+            <a:off x="3662172" y="1677924"/>
+            <a:ext cx="210312" cy="210312"/>
+          </a:xfrm>
+          <a:prstGeom prst="rect">
+            <a:avLst/>
+          </a:prstGeom>
+        </p:spPr>
+      </p:pic>
+      <p:sp>
+        <p:nvSpPr>
+          <p:cNvPr id="13" name="Text 9"/>
+          <p:cNvSpPr/>
+          <p:nvPr/>
+        </p:nvSpPr>
+        <p:spPr>
+          <a:xfrm>
+            <a:off x="5175504" y="1591056"/>
+            <a:ext cx="457200" cy="310896"/>
+          </a:xfrm>
+          <a:prstGeom prst="rect">
+            <a:avLst/>
+          </a:prstGeom>
+          <a:noFill/>
+          <a:ln/>
+        </p:spPr>
+        <p:txBody>
+          <a:bodyPr wrap="square" lIns="0" tIns="0" rIns="0" bIns="0" rtlCol="0" anchor="ctr"/>
+          <a:lstStyle/>
+          <a:p>
+            <a:pPr algn="r" indent="0" marL="0">
+              <a:buNone/>
+            </a:pPr>
+            <a:r>
+              <a:rPr lang="en-US" sz="1300" dirty="0">
+                <a:solidFill>
+                  <a:srgbClr val="2BD9E5"/>
+                </a:solidFill>
+                <a:latin typeface="Arial Black" pitchFamily="34" charset="0"/>
+                <a:ea typeface="Arial Black" pitchFamily="34" charset="-122"/>
+                <a:cs typeface="Arial Black" pitchFamily="34" charset="-120"/>
+              </a:rPr>
+              <a:t>02</a:t>
+            </a:r>
+            <a:endParaRPr lang="en-US" sz="1300" dirty="0"/>
+          </a:p>
+        </p:txBody>
+      </p:sp>
+      <p:sp>
+        <p:nvSpPr>
+          <p:cNvPr id="14" name="Text 10"/>
+          <p:cNvSpPr/>
+          <p:nvPr/>
+        </p:nvSpPr>
+        <p:spPr>
+          <a:xfrm>
+            <a:off x="3538728" y="2084832"/>
+            <a:ext cx="2093976" cy="310896"/>
+          </a:xfrm>
+          <a:prstGeom prst="rect">
+            <a:avLst/>
+          </a:prstGeom>
+          <a:noFill/>
+          <a:ln/>
+        </p:spPr>
+        <p:txBody>
+          <a:bodyPr wrap="square" lIns="0" tIns="0" rIns="0" bIns="0" rtlCol="0" anchor="ctr"/>
+          <a:lstStyle/>
+          <a:p>
+            <a:pPr indent="0" marL="0">
+              <a:buNone/>
+            </a:pPr>
+            <a:r>
+              <a:rPr lang="en-US" sz="1300" b="1" dirty="0">
+                <a:solidFill>
+                  <a:srgbClr val="F4F7FF"/>
+                </a:solidFill>
+                <a:latin typeface="Arial" pitchFamily="34" charset="0"/>
+                <a:ea typeface="Arial" pitchFamily="34" charset="-122"/>
+                <a:cs typeface="Arial" pitchFamily="34" charset="-120"/>
+              </a:rPr>
+              <a:t>Scegli una cosa</a:t>
+            </a:r>
+            <a:endParaRPr lang="en-US" sz="1300" dirty="0"/>
+          </a:p>
+        </p:txBody>
+      </p:sp>
+      <p:sp>
+        <p:nvSpPr>
+          <p:cNvPr id="15" name="Text 11"/>
+          <p:cNvSpPr/>
+          <p:nvPr/>
+        </p:nvSpPr>
+        <p:spPr>
+          <a:xfrm>
+            <a:off x="3538728" y="2395728"/>
+            <a:ext cx="2093976" cy="512064"/>
+          </a:xfrm>
+          <a:prstGeom prst="rect">
+            <a:avLst/>
+          </a:prstGeom>
+          <a:noFill/>
+          <a:ln/>
+        </p:spPr>
+        <p:txBody>
+          <a:bodyPr wrap="square" lIns="0" tIns="0" rIns="0" bIns="0" rtlCol="0" anchor="t"/>
+          <a:lstStyle/>
+          <a:p>
+            <a:pPr indent="0" marL="0">
+              <a:lnSpc>
+                <a:spcPct val="112000"/>
+              </a:lnSpc>
+              <a:buNone/>
+            </a:pPr>
+            <a:r>
+              <a:rPr lang="en-US" sz="1000" dirty="0">
+                <a:solidFill>
+                  <a:srgbClr val="AEBDE0"/>
+                </a:solidFill>
+                <a:latin typeface="Arial" pitchFamily="34" charset="0"/>
+                <a:ea typeface="Arial" pitchFamily="34" charset="-122"/>
+                <a:cs typeface="Arial" pitchFamily="34" charset="-120"/>
+              </a:rPr>
+              <a:t>Una sola modifica per versione: piccola, chiara, verificabile.</a:t>
+            </a:r>
+            <a:endParaRPr lang="en-US" sz="1000" dirty="0"/>
+          </a:p>
+        </p:txBody>
+      </p:sp>
+      <p:sp>
+        <p:nvSpPr>
+          <p:cNvPr id="16" name="Shape 12"/>
+          <p:cNvSpPr/>
+          <p:nvPr/>
+        </p:nvSpPr>
+        <p:spPr>
+          <a:xfrm>
+            <a:off x="6035040" y="1371600"/>
+            <a:ext cx="2496312" cy="1645920"/>
+          </a:xfrm>
+          <a:prstGeom prst="roundRect">
+            <a:avLst>
+              <a:gd name="adj" fmla="val 4444"/>
+            </a:avLst>
+          </a:prstGeom>
+          <a:solidFill>
+            <a:srgbClr val="16203F"/>
+          </a:solidFill>
+          <a:ln w="9525">
+            <a:solidFill>
+              <a:srgbClr val="2A3A6B"/>
+            </a:solidFill>
+            <a:prstDash val="solid"/>
+          </a:ln>
+        </p:spPr>
+      </p:sp>
+      <p:sp>
+        <p:nvSpPr>
+          <p:cNvPr id="17" name="Shape 13"/>
+          <p:cNvSpPr/>
+          <p:nvPr/>
+        </p:nvSpPr>
+        <p:spPr>
+          <a:xfrm>
+            <a:off x="6236208" y="1554480"/>
+            <a:ext cx="457200" cy="457200"/>
+          </a:xfrm>
+          <a:prstGeom prst="ellipse">
+            <a:avLst/>
+          </a:prstGeom>
+          <a:solidFill>
+            <a:srgbClr val="0E3A44"/>
+          </a:solidFill>
+          <a:ln w="12700">
+            <a:solidFill>
+              <a:srgbClr val="0E3A44"/>
+            </a:solidFill>
+            <a:prstDash val="solid"/>
+          </a:ln>
+        </p:spPr>
+      </p:sp>
+      <p:pic>
+        <p:nvPicPr>
+          <p:cNvPr id="18" name="Image 2" descr="preencoded.png">    </p:cNvPr>
+          <p:cNvPicPr>
+            <a:picLocks noChangeAspect="1"/>
+          </p:cNvPicPr>
+          <p:nvPr/>
+        </p:nvPicPr>
+        <p:blipFill>
+          <a:blip r:embed="rId3"/>
+          <a:stretch>
+            <a:fillRect/>
+          </a:stretch>
+        </p:blipFill>
+        <p:spPr>
+          <a:xfrm>
+            <a:off x="6359652" y="1677924"/>
+            <a:ext cx="210312" cy="210312"/>
+          </a:xfrm>
+          <a:prstGeom prst="rect">
+            <a:avLst/>
+          </a:prstGeom>
+        </p:spPr>
+      </p:pic>
+      <p:sp>
+        <p:nvSpPr>
+          <p:cNvPr id="19" name="Text 14"/>
+          <p:cNvSpPr/>
+          <p:nvPr/>
+        </p:nvSpPr>
+        <p:spPr>
+          <a:xfrm>
+            <a:off x="7872984" y="1591056"/>
+            <a:ext cx="457200" cy="310896"/>
+          </a:xfrm>
+          <a:prstGeom prst="rect">
+            <a:avLst/>
+          </a:prstGeom>
+          <a:noFill/>
+          <a:ln/>
+        </p:spPr>
+        <p:txBody>
+          <a:bodyPr wrap="square" lIns="0" tIns="0" rIns="0" bIns="0" rtlCol="0" anchor="ctr"/>
+          <a:lstStyle/>
+          <a:p>
+            <a:pPr algn="r" indent="0" marL="0">
+              <a:buNone/>
+            </a:pPr>
+            <a:r>
+              <a:rPr lang="en-US" sz="1300" dirty="0">
+                <a:solidFill>
+                  <a:srgbClr val="2BD9E5"/>
+                </a:solidFill>
+                <a:latin typeface="Arial Black" pitchFamily="34" charset="0"/>
+                <a:ea typeface="Arial Black" pitchFamily="34" charset="-122"/>
+                <a:cs typeface="Arial Black" pitchFamily="34" charset="-120"/>
+              </a:rPr>
+              <a:t>03</a:t>
+            </a:r>
+            <a:endParaRPr lang="en-US" sz="1300" dirty="0"/>
+          </a:p>
+        </p:txBody>
+      </p:sp>
+      <p:sp>
+        <p:nvSpPr>
+          <p:cNvPr id="20" name="Text 15"/>
+          <p:cNvSpPr/>
+          <p:nvPr/>
+        </p:nvSpPr>
+        <p:spPr>
+          <a:xfrm>
+            <a:off x="6236208" y="2084832"/>
+            <a:ext cx="2093976" cy="310896"/>
+          </a:xfrm>
+          <a:prstGeom prst="rect">
+            <a:avLst/>
+          </a:prstGeom>
+          <a:noFill/>
+          <a:ln/>
+        </p:spPr>
+        <p:txBody>
+          <a:bodyPr wrap="square" lIns="0" tIns="0" rIns="0" bIns="0" rtlCol="0" anchor="ctr"/>
+          <a:lstStyle/>
+          <a:p>
+            <a:pPr indent="0" marL="0">
+              <a:buNone/>
+            </a:pPr>
+            <a:r>
+              <a:rPr lang="en-US" sz="1300" b="1" dirty="0">
+                <a:solidFill>
+                  <a:srgbClr val="F4F7FF"/>
+                </a:solidFill>
+                <a:latin typeface="Arial" pitchFamily="34" charset="0"/>
+                <a:ea typeface="Arial" pitchFamily="34" charset="-122"/>
+                <a:cs typeface="Arial" pitchFamily="34" charset="-120"/>
+              </a:rPr>
+              <a:t>Pianifica</a:t>
+            </a:r>
+            <a:endParaRPr lang="en-US" sz="1300" dirty="0"/>
+          </a:p>
+        </p:txBody>
+      </p:sp>
+      <p:sp>
+        <p:nvSpPr>
+          <p:cNvPr id="21" name="Text 16"/>
+          <p:cNvSpPr/>
+          <p:nvPr/>
+        </p:nvSpPr>
+        <p:spPr>
+          <a:xfrm>
+            <a:off x="6236208" y="2395728"/>
+            <a:ext cx="2093976" cy="512064"/>
+          </a:xfrm>
+          <a:prstGeom prst="rect">
+            <a:avLst/>
+          </a:prstGeom>
+          <a:noFill/>
+          <a:ln/>
+        </p:spPr>
+        <p:txBody>
+          <a:bodyPr wrap="square" lIns="0" tIns="0" rIns="0" bIns="0" rtlCol="0" anchor="t"/>
+          <a:lstStyle/>
+          <a:p>
+            <a:pPr indent="0" marL="0">
+              <a:lnSpc>
+                <a:spcPct val="112000"/>
+              </a:lnSpc>
+              <a:buNone/>
+            </a:pPr>
+            <a:r>
+              <a:rPr lang="en-US" sz="1000" dirty="0">
+                <a:solidFill>
+                  <a:srgbClr val="AEBDE0"/>
+                </a:solidFill>
+                <a:latin typeface="Arial" pitchFamily="34" charset="0"/>
+                <a:ea typeface="Arial" pitchFamily="34" charset="-122"/>
+                <a:cs typeface="Arial" pitchFamily="34" charset="-120"/>
+              </a:rPr>
+              <a:t>Architettura, strumenti, costi: l'AI ti aiuta a decidere come farla.</a:t>
+            </a:r>
+            <a:endParaRPr lang="en-US" sz="1000" dirty="0"/>
+          </a:p>
+        </p:txBody>
+      </p:sp>
+      <p:sp>
+        <p:nvSpPr>
+          <p:cNvPr id="22" name="Shape 17"/>
+          <p:cNvSpPr/>
+          <p:nvPr/>
+        </p:nvSpPr>
+        <p:spPr>
+          <a:xfrm>
+            <a:off x="1975104" y="3154680"/>
+            <a:ext cx="2496312" cy="1645920"/>
+          </a:xfrm>
+          <a:prstGeom prst="roundRect">
+            <a:avLst>
+              <a:gd name="adj" fmla="val 4444"/>
+            </a:avLst>
+          </a:prstGeom>
+          <a:solidFill>
+            <a:srgbClr val="16203F"/>
+          </a:solidFill>
+          <a:ln w="9525">
+            <a:solidFill>
+              <a:srgbClr val="2A3A6B"/>
+            </a:solidFill>
+            <a:prstDash val="solid"/>
+          </a:ln>
+        </p:spPr>
+      </p:sp>
+      <p:sp>
+        <p:nvSpPr>
+          <p:cNvPr id="23" name="Shape 18"/>
+          <p:cNvSpPr/>
+          <p:nvPr/>
+        </p:nvSpPr>
+        <p:spPr>
+          <a:xfrm>
+            <a:off x="2176272" y="3337560"/>
+            <a:ext cx="457200" cy="457200"/>
+          </a:xfrm>
+          <a:prstGeom prst="ellipse">
+            <a:avLst/>
+          </a:prstGeom>
+          <a:solidFill>
+            <a:srgbClr val="0E3A44"/>
+          </a:solidFill>
+          <a:ln w="12700">
+            <a:solidFill>
+              <a:srgbClr val="0E3A44"/>
+            </a:solidFill>
+            <a:prstDash val="solid"/>
+          </a:ln>
+        </p:spPr>
+      </p:sp>
+      <p:pic>
+        <p:nvPicPr>
+          <p:cNvPr id="24" name="Image 3" descr="preencoded.png">    </p:cNvPr>
+          <p:cNvPicPr>
+            <a:picLocks noChangeAspect="1"/>
+          </p:cNvPicPr>
+          <p:nvPr/>
+        </p:nvPicPr>
+        <p:blipFill>
+          <a:blip r:embed="rId4"/>
+          <a:stretch>
+            <a:fillRect/>
+          </a:stretch>
+        </p:blipFill>
+        <p:spPr>
+          <a:xfrm>
+            <a:off x="2299716" y="3461004"/>
+            <a:ext cx="210312" cy="210312"/>
+          </a:xfrm>
+          <a:prstGeom prst="rect">
+            <a:avLst/>
+          </a:prstGeom>
+        </p:spPr>
+      </p:pic>
+      <p:sp>
+        <p:nvSpPr>
+          <p:cNvPr id="25" name="Text 19"/>
+          <p:cNvSpPr/>
+          <p:nvPr/>
+        </p:nvSpPr>
+        <p:spPr>
+          <a:xfrm>
+            <a:off x="3813048" y="3374136"/>
+            <a:ext cx="457200" cy="310896"/>
+          </a:xfrm>
+          <a:prstGeom prst="rect">
+            <a:avLst/>
+          </a:prstGeom>
+          <a:noFill/>
+          <a:ln/>
+        </p:spPr>
+        <p:txBody>
+          <a:bodyPr wrap="square" lIns="0" tIns="0" rIns="0" bIns="0" rtlCol="0" anchor="ctr"/>
+          <a:lstStyle/>
+          <a:p>
+            <a:pPr algn="r" indent="0" marL="0">
+              <a:buNone/>
+            </a:pPr>
+            <a:r>
+              <a:rPr lang="en-US" sz="1300" dirty="0">
+                <a:solidFill>
+                  <a:srgbClr val="2BD9E5"/>
+                </a:solidFill>
+                <a:latin typeface="Arial Black" pitchFamily="34" charset="0"/>
+                <a:ea typeface="Arial Black" pitchFamily="34" charset="-122"/>
+                <a:cs typeface="Arial Black" pitchFamily="34" charset="-120"/>
+              </a:rPr>
+              <a:t>04</a:t>
+            </a:r>
+            <a:endParaRPr lang="en-US" sz="1300" dirty="0"/>
+          </a:p>
+        </p:txBody>
+      </p:sp>
+      <p:sp>
+        <p:nvSpPr>
+          <p:cNvPr id="26" name="Text 20"/>
+          <p:cNvSpPr/>
+          <p:nvPr/>
+        </p:nvSpPr>
+        <p:spPr>
+          <a:xfrm>
+            <a:off x="2176272" y="3867912"/>
+            <a:ext cx="2093976" cy="310896"/>
+          </a:xfrm>
+          <a:prstGeom prst="rect">
+            <a:avLst/>
+          </a:prstGeom>
+          <a:noFill/>
+          <a:ln/>
+        </p:spPr>
+        <p:txBody>
+          <a:bodyPr wrap="square" lIns="0" tIns="0" rIns="0" bIns="0" rtlCol="0" anchor="ctr"/>
+          <a:lstStyle/>
+          <a:p>
+            <a:pPr indent="0" marL="0">
+              <a:buNone/>
+            </a:pPr>
+            <a:r>
+              <a:rPr lang="en-US" sz="1300" b="1" dirty="0">
+                <a:solidFill>
+                  <a:srgbClr val="F4F7FF"/>
+                </a:solidFill>
+                <a:latin typeface="Arial" pitchFamily="34" charset="0"/>
+                <a:ea typeface="Arial" pitchFamily="34" charset="-122"/>
+                <a:cs typeface="Arial" pitchFamily="34" charset="-120"/>
+              </a:rPr>
+              <a:t>Implementa e prova</a:t>
+            </a:r>
+            <a:endParaRPr lang="en-US" sz="1300" dirty="0"/>
+          </a:p>
+        </p:txBody>
+      </p:sp>
+      <p:sp>
+        <p:nvSpPr>
+          <p:cNvPr id="27" name="Text 21"/>
+          <p:cNvSpPr/>
+          <p:nvPr/>
+        </p:nvSpPr>
+        <p:spPr>
+          <a:xfrm>
+            <a:off x="2176272" y="4178808"/>
+            <a:ext cx="2093976" cy="512064"/>
+          </a:xfrm>
+          <a:prstGeom prst="rect">
+            <a:avLst/>
+          </a:prstGeom>
+          <a:noFill/>
+          <a:ln/>
+        </p:spPr>
+        <p:txBody>
+          <a:bodyPr wrap="square" lIns="0" tIns="0" rIns="0" bIns="0" rtlCol="0" anchor="t"/>
+          <a:lstStyle/>
+          <a:p>
+            <a:pPr indent="0" marL="0">
+              <a:lnSpc>
+                <a:spcPct val="112000"/>
+              </a:lnSpc>
+              <a:buNone/>
+            </a:pPr>
+            <a:r>
+              <a:rPr lang="en-US" sz="1000" dirty="0">
+                <a:solidFill>
+                  <a:srgbClr val="AEBDE0"/>
+                </a:solidFill>
+                <a:latin typeface="Arial" pitchFamily="34" charset="0"/>
+                <a:ea typeface="Arial" pitchFamily="34" charset="-122"/>
+                <a:cs typeface="Arial" pitchFamily="34" charset="-120"/>
+              </a:rPr>
+              <a:t>L'AI sviluppa e testa; tu validi sul telefono vero.</a:t>
+            </a:r>
+            <a:endParaRPr lang="en-US" sz="1000" dirty="0"/>
+          </a:p>
+        </p:txBody>
+      </p:sp>
+      <p:sp>
+        <p:nvSpPr>
+          <p:cNvPr id="28" name="Shape 22"/>
+          <p:cNvSpPr/>
+          <p:nvPr/>
+        </p:nvSpPr>
+        <p:spPr>
+          <a:xfrm>
+            <a:off x="4672584" y="3154680"/>
+            <a:ext cx="2496312" cy="1645920"/>
+          </a:xfrm>
+          <a:prstGeom prst="roundRect">
+            <a:avLst>
+              <a:gd name="adj" fmla="val 4444"/>
+            </a:avLst>
+          </a:prstGeom>
+          <a:solidFill>
+            <a:srgbClr val="16203F"/>
+          </a:solidFill>
+          <a:ln w="9525">
+            <a:solidFill>
+              <a:srgbClr val="2A3A6B"/>
+            </a:solidFill>
+            <a:prstDash val="solid"/>
+          </a:ln>
+        </p:spPr>
+      </p:sp>
+      <p:sp>
+        <p:nvSpPr>
+          <p:cNvPr id="29" name="Shape 23"/>
+          <p:cNvSpPr/>
+          <p:nvPr/>
+        </p:nvSpPr>
+        <p:spPr>
+          <a:xfrm>
+            <a:off x="4873752" y="3337560"/>
+            <a:ext cx="457200" cy="457200"/>
+          </a:xfrm>
+          <a:prstGeom prst="ellipse">
+            <a:avLst/>
+          </a:prstGeom>
+          <a:solidFill>
+            <a:srgbClr val="0E3A44"/>
+          </a:solidFill>
+          <a:ln w="12700">
+            <a:solidFill>
+              <a:srgbClr val="0E3A44"/>
+            </a:solidFill>
+            <a:prstDash val="solid"/>
+          </a:ln>
+        </p:spPr>
+      </p:sp>
+      <p:pic>
+        <p:nvPicPr>
+          <p:cNvPr id="30" name="Image 4" descr="preencoded.png">    </p:cNvPr>
+          <p:cNvPicPr>
+            <a:picLocks noChangeAspect="1"/>
+          </p:cNvPicPr>
+          <p:nvPr/>
+        </p:nvPicPr>
+        <p:blipFill>
+          <a:blip r:embed="rId5"/>
+          <a:stretch>
+            <a:fillRect/>
+          </a:stretch>
+        </p:blipFill>
+        <p:spPr>
+          <a:xfrm>
+            <a:off x="4997196" y="3461004"/>
+            <a:ext cx="210312" cy="210312"/>
+          </a:xfrm>
+          <a:prstGeom prst="rect">
+            <a:avLst/>
+          </a:prstGeom>
+        </p:spPr>
+      </p:pic>
+      <p:sp>
+        <p:nvSpPr>
+          <p:cNvPr id="31" name="Text 24"/>
+          <p:cNvSpPr/>
+          <p:nvPr/>
+        </p:nvSpPr>
+        <p:spPr>
+          <a:xfrm>
+            <a:off x="6510528" y="3374136"/>
+            <a:ext cx="457200" cy="310896"/>
+          </a:xfrm>
+          <a:prstGeom prst="rect">
+            <a:avLst/>
+          </a:prstGeom>
+          <a:noFill/>
+          <a:ln/>
+        </p:spPr>
+        <p:txBody>
+          <a:bodyPr wrap="square" lIns="0" tIns="0" rIns="0" bIns="0" rtlCol="0" anchor="ctr"/>
+          <a:lstStyle/>
+          <a:p>
+            <a:pPr algn="r" indent="0" marL="0">
+              <a:buNone/>
+            </a:pPr>
+            <a:r>
+              <a:rPr lang="en-US" sz="1300" dirty="0">
+                <a:solidFill>
+                  <a:srgbClr val="2BD9E5"/>
+                </a:solidFill>
+                <a:latin typeface="Arial Black" pitchFamily="34" charset="0"/>
+                <a:ea typeface="Arial Black" pitchFamily="34" charset="-122"/>
+                <a:cs typeface="Arial Black" pitchFamily="34" charset="-120"/>
+              </a:rPr>
+              <a:t>05</a:t>
+            </a:r>
+            <a:endParaRPr lang="en-US" sz="1300" dirty="0"/>
+          </a:p>
+        </p:txBody>
+      </p:sp>
+      <p:sp>
+        <p:nvSpPr>
+          <p:cNvPr id="32" name="Text 25"/>
+          <p:cNvSpPr/>
+          <p:nvPr/>
+        </p:nvSpPr>
+        <p:spPr>
+          <a:xfrm>
+            <a:off x="4873752" y="3867912"/>
+            <a:ext cx="2093976" cy="310896"/>
+          </a:xfrm>
+          <a:prstGeom prst="rect">
+            <a:avLst/>
+          </a:prstGeom>
+          <a:noFill/>
+          <a:ln/>
+        </p:spPr>
+        <p:txBody>
+          <a:bodyPr wrap="square" lIns="0" tIns="0" rIns="0" bIns="0" rtlCol="0" anchor="ctr"/>
+          <a:lstStyle/>
+          <a:p>
+            <a:pPr indent="0" marL="0">
+              <a:buNone/>
+            </a:pPr>
+            <a:r>
+              <a:rPr lang="en-US" sz="1300" b="1" dirty="0">
+                <a:solidFill>
+                  <a:srgbClr val="F4F7FF"/>
+                </a:solidFill>
+                <a:latin typeface="Arial" pitchFamily="34" charset="0"/>
+                <a:ea typeface="Arial" pitchFamily="34" charset="-122"/>
+                <a:cs typeface="Arial" pitchFamily="34" charset="-120"/>
+              </a:rPr>
+              <a:t>Rilascia spesso</a:t>
+            </a:r>
+            <a:endParaRPr lang="en-US" sz="1300" dirty="0"/>
+          </a:p>
+        </p:txBody>
+      </p:sp>
+      <p:sp>
+        <p:nvSpPr>
+          <p:cNvPr id="33" name="Text 26"/>
+          <p:cNvSpPr/>
+          <p:nvPr/>
+        </p:nvSpPr>
+        <p:spPr>
+          <a:xfrm>
+            <a:off x="4873752" y="4178808"/>
+            <a:ext cx="2093976" cy="512064"/>
+          </a:xfrm>
+          <a:prstGeom prst="rect">
+            <a:avLst/>
+          </a:prstGeom>
+          <a:noFill/>
+          <a:ln/>
+        </p:spPr>
+        <p:txBody>
+          <a:bodyPr wrap="square" lIns="0" tIns="0" rIns="0" bIns="0" rtlCol="0" anchor="t"/>
+          <a:lstStyle/>
+          <a:p>
+            <a:pPr indent="0" marL="0">
+              <a:lnSpc>
+                <a:spcPct val="112000"/>
+              </a:lnSpc>
+              <a:buNone/>
+            </a:pPr>
+            <a:r>
+              <a:rPr lang="en-US" sz="1000" dirty="0">
+                <a:solidFill>
+                  <a:srgbClr val="AEBDE0"/>
+                </a:solidFill>
+                <a:latin typeface="Arial" pitchFamily="34" charset="0"/>
+                <a:ea typeface="Arial" pitchFamily="34" charset="-122"/>
+                <a:cs typeface="Arial" pitchFamily="34" charset="-120"/>
+              </a:rPr>
+              <a:t>Versioni frequenti: 17 in quattro mesi. Ogni release è un esperimento.</a:t>
+            </a:r>
+            <a:endParaRPr lang="en-US" sz="1000" dirty="0"/>
           </a:p>
         </p:txBody>
       </p:sp>

--- a/video/slide-video-ai.pptx
+++ b/video/slide-video-ai.pptx
@@ -27,9 +27,13 @@
     <p:sldId id="275" r:id="rId21"/>
     <p:sldId id="276" r:id="rId22"/>
     <p:sldId id="277" r:id="rId23"/>
+    <p:sldId id="278" r:id="rId24"/>
+    <p:sldId id="279" r:id="rId25"/>
+    <p:sldId id="280" r:id="rId26"/>
+    <p:sldId id="281" r:id="rId27"/>
   </p:sldIdLst>
   <p:notesMasterIdLst>
-    <p:notesMasterId r:id="rId24"/>
+    <p:notesMasterId r:id="rId28"/>
   </p:notesMasterIdLst>
   <p:sldSz cx="9144000" cy="5143500"/>
   <p:notesSz cx="5143500" cy="9144000"/>
@@ -1779,6 +1783,358 @@
             <a:fld id="{F7021451-1387-4CA6-816F-3879F97B5CBC}" type="slidenum">
               <a:rPr lang="en-US"/>
               <a:t>22</a:t>
+            </a:fld>
+            <a:endParaRPr lang="en-US"/>
+          </a:p>
+        </p:txBody>
+      </p:sp>
+    </p:spTree>
+    <p:extLst>
+      <p:ext uri="{BB962C8B-B14F-4D97-AF65-F5344CB8AC3E}">
+        <p14:creationId xmlns:p14="http://schemas.microsoft.com/office/powerpoint/2010/main" val="1024086991"/>
+      </p:ext>
+    </p:extLst>
+  </p:cSld>
+  <p:clrMapOvr>
+    <a:masterClrMapping/>
+  </p:clrMapOvr>
+</p:notes>
+</file>
+
+<file path=ppt/notesSlides/notesSlide23.xml><?xml version="1.0" encoding="utf-8"?>
+<p:notes xmlns:a="http://schemas.openxmlformats.org/drawingml/2006/main" xmlns:r="http://schemas.openxmlformats.org/officeDocument/2006/relationships" xmlns:p="http://schemas.openxmlformats.org/presentationml/2006/main">
+  <p:cSld>
+    <p:spTree>
+      <p:nvGrpSpPr>
+        <p:cNvPr id="1" name=""/>
+        <p:cNvGrpSpPr/>
+        <p:nvPr/>
+      </p:nvGrpSpPr>
+      <p:grpSpPr>
+        <a:xfrm>
+          <a:off x="0" y="0"/>
+          <a:ext cx="0" cy="0"/>
+          <a:chOff x="0" y="0"/>
+          <a:chExt cx="0" cy="0"/>
+        </a:xfrm>
+      </p:grpSpPr>
+      <p:sp>
+        <p:nvSpPr>
+          <p:cNvPr id="2" name="Slide Image Placeholder 1"/>
+          <p:cNvSpPr>
+            <a:spLocks noGrp="1" noRot="1" noChangeAspect="1"/>
+          </p:cNvSpPr>
+          <p:nvPr>
+            <p:ph type="sldImg"/>
+          </p:nvPr>
+        </p:nvSpPr>
+        <p:spPr/>
+      </p:sp>
+      <p:sp>
+        <p:nvSpPr>
+          <p:cNvPr id="3" name="Notes Placeholder 2"/>
+          <p:cNvSpPr>
+            <a:spLocks noGrp="1"/>
+          </p:cNvSpPr>
+          <p:nvPr>
+            <p:ph type="body" idx="1"/>
+          </p:nvPr>
+        </p:nvSpPr>
+        <p:spPr/>
+        <p:txBody>
+          <a:bodyPr/>
+          <a:lstStyle/>
+          <a:p>
+            <a:r>
+              <a:rPr lang="en-US" dirty="0"/>
+              <a:t/>
+            </a:r>
+            <a:endParaRPr lang="en-US" dirty="0"/>
+          </a:p>
+        </p:txBody>
+      </p:sp>
+      <p:sp>
+        <p:nvSpPr>
+          <p:cNvPr id="4" name="Slide Number Placeholder 3"/>
+          <p:cNvSpPr>
+            <a:spLocks noGrp="1"/>
+          </p:cNvSpPr>
+          <p:nvPr>
+            <p:ph type="sldNum" sz="quarter" idx="10"/>
+          </p:nvPr>
+        </p:nvSpPr>
+        <p:spPr/>
+        <p:txBody>
+          <a:bodyPr/>
+          <a:lstStyle/>
+          <a:p>
+            <a:fld id="{F7021451-1387-4CA6-816F-3879F97B5CBC}" type="slidenum">
+              <a:rPr lang="en-US"/>
+              <a:t>23</a:t>
+            </a:fld>
+            <a:endParaRPr lang="en-US"/>
+          </a:p>
+        </p:txBody>
+      </p:sp>
+    </p:spTree>
+    <p:extLst>
+      <p:ext uri="{BB962C8B-B14F-4D97-AF65-F5344CB8AC3E}">
+        <p14:creationId xmlns:p14="http://schemas.microsoft.com/office/powerpoint/2010/main" val="1024086991"/>
+      </p:ext>
+    </p:extLst>
+  </p:cSld>
+  <p:clrMapOvr>
+    <a:masterClrMapping/>
+  </p:clrMapOvr>
+</p:notes>
+</file>
+
+<file path=ppt/notesSlides/notesSlide24.xml><?xml version="1.0" encoding="utf-8"?>
+<p:notes xmlns:a="http://schemas.openxmlformats.org/drawingml/2006/main" xmlns:r="http://schemas.openxmlformats.org/officeDocument/2006/relationships" xmlns:p="http://schemas.openxmlformats.org/presentationml/2006/main">
+  <p:cSld>
+    <p:spTree>
+      <p:nvGrpSpPr>
+        <p:cNvPr id="1" name=""/>
+        <p:cNvGrpSpPr/>
+        <p:nvPr/>
+      </p:nvGrpSpPr>
+      <p:grpSpPr>
+        <a:xfrm>
+          <a:off x="0" y="0"/>
+          <a:ext cx="0" cy="0"/>
+          <a:chOff x="0" y="0"/>
+          <a:chExt cx="0" cy="0"/>
+        </a:xfrm>
+      </p:grpSpPr>
+      <p:sp>
+        <p:nvSpPr>
+          <p:cNvPr id="2" name="Slide Image Placeholder 1"/>
+          <p:cNvSpPr>
+            <a:spLocks noGrp="1" noRot="1" noChangeAspect="1"/>
+          </p:cNvSpPr>
+          <p:nvPr>
+            <p:ph type="sldImg"/>
+          </p:nvPr>
+        </p:nvSpPr>
+        <p:spPr/>
+      </p:sp>
+      <p:sp>
+        <p:nvSpPr>
+          <p:cNvPr id="3" name="Notes Placeholder 2"/>
+          <p:cNvSpPr>
+            <a:spLocks noGrp="1"/>
+          </p:cNvSpPr>
+          <p:nvPr>
+            <p:ph type="body" idx="1"/>
+          </p:nvPr>
+        </p:nvSpPr>
+        <p:spPr/>
+        <p:txBody>
+          <a:bodyPr/>
+          <a:lstStyle/>
+          <a:p>
+            <a:r>
+              <a:rPr lang="en-US" dirty="0"/>
+              <a:t/>
+            </a:r>
+            <a:endParaRPr lang="en-US" dirty="0"/>
+          </a:p>
+        </p:txBody>
+      </p:sp>
+      <p:sp>
+        <p:nvSpPr>
+          <p:cNvPr id="4" name="Slide Number Placeholder 3"/>
+          <p:cNvSpPr>
+            <a:spLocks noGrp="1"/>
+          </p:cNvSpPr>
+          <p:nvPr>
+            <p:ph type="sldNum" sz="quarter" idx="10"/>
+          </p:nvPr>
+        </p:nvSpPr>
+        <p:spPr/>
+        <p:txBody>
+          <a:bodyPr/>
+          <a:lstStyle/>
+          <a:p>
+            <a:fld id="{F7021451-1387-4CA6-816F-3879F97B5CBC}" type="slidenum">
+              <a:rPr lang="en-US"/>
+              <a:t>24</a:t>
+            </a:fld>
+            <a:endParaRPr lang="en-US"/>
+          </a:p>
+        </p:txBody>
+      </p:sp>
+    </p:spTree>
+    <p:extLst>
+      <p:ext uri="{BB962C8B-B14F-4D97-AF65-F5344CB8AC3E}">
+        <p14:creationId xmlns:p14="http://schemas.microsoft.com/office/powerpoint/2010/main" val="1024086991"/>
+      </p:ext>
+    </p:extLst>
+  </p:cSld>
+  <p:clrMapOvr>
+    <a:masterClrMapping/>
+  </p:clrMapOvr>
+</p:notes>
+</file>
+
+<file path=ppt/notesSlides/notesSlide25.xml><?xml version="1.0" encoding="utf-8"?>
+<p:notes xmlns:a="http://schemas.openxmlformats.org/drawingml/2006/main" xmlns:r="http://schemas.openxmlformats.org/officeDocument/2006/relationships" xmlns:p="http://schemas.openxmlformats.org/presentationml/2006/main">
+  <p:cSld>
+    <p:spTree>
+      <p:nvGrpSpPr>
+        <p:cNvPr id="1" name=""/>
+        <p:cNvGrpSpPr/>
+        <p:nvPr/>
+      </p:nvGrpSpPr>
+      <p:grpSpPr>
+        <a:xfrm>
+          <a:off x="0" y="0"/>
+          <a:ext cx="0" cy="0"/>
+          <a:chOff x="0" y="0"/>
+          <a:chExt cx="0" cy="0"/>
+        </a:xfrm>
+      </p:grpSpPr>
+      <p:sp>
+        <p:nvSpPr>
+          <p:cNvPr id="2" name="Slide Image Placeholder 1"/>
+          <p:cNvSpPr>
+            <a:spLocks noGrp="1" noRot="1" noChangeAspect="1"/>
+          </p:cNvSpPr>
+          <p:nvPr>
+            <p:ph type="sldImg"/>
+          </p:nvPr>
+        </p:nvSpPr>
+        <p:spPr/>
+      </p:sp>
+      <p:sp>
+        <p:nvSpPr>
+          <p:cNvPr id="3" name="Notes Placeholder 2"/>
+          <p:cNvSpPr>
+            <a:spLocks noGrp="1"/>
+          </p:cNvSpPr>
+          <p:nvPr>
+            <p:ph type="body" idx="1"/>
+          </p:nvPr>
+        </p:nvSpPr>
+        <p:spPr/>
+        <p:txBody>
+          <a:bodyPr/>
+          <a:lstStyle/>
+          <a:p>
+            <a:r>
+              <a:rPr lang="en-US" dirty="0"/>
+              <a:t/>
+            </a:r>
+            <a:endParaRPr lang="en-US" dirty="0"/>
+          </a:p>
+        </p:txBody>
+      </p:sp>
+      <p:sp>
+        <p:nvSpPr>
+          <p:cNvPr id="4" name="Slide Number Placeholder 3"/>
+          <p:cNvSpPr>
+            <a:spLocks noGrp="1"/>
+          </p:cNvSpPr>
+          <p:nvPr>
+            <p:ph type="sldNum" sz="quarter" idx="10"/>
+          </p:nvPr>
+        </p:nvSpPr>
+        <p:spPr/>
+        <p:txBody>
+          <a:bodyPr/>
+          <a:lstStyle/>
+          <a:p>
+            <a:fld id="{F7021451-1387-4CA6-816F-3879F97B5CBC}" type="slidenum">
+              <a:rPr lang="en-US"/>
+              <a:t>25</a:t>
+            </a:fld>
+            <a:endParaRPr lang="en-US"/>
+          </a:p>
+        </p:txBody>
+      </p:sp>
+    </p:spTree>
+    <p:extLst>
+      <p:ext uri="{BB962C8B-B14F-4D97-AF65-F5344CB8AC3E}">
+        <p14:creationId xmlns:p14="http://schemas.microsoft.com/office/powerpoint/2010/main" val="1024086991"/>
+      </p:ext>
+    </p:extLst>
+  </p:cSld>
+  <p:clrMapOvr>
+    <a:masterClrMapping/>
+  </p:clrMapOvr>
+</p:notes>
+</file>
+
+<file path=ppt/notesSlides/notesSlide26.xml><?xml version="1.0" encoding="utf-8"?>
+<p:notes xmlns:a="http://schemas.openxmlformats.org/drawingml/2006/main" xmlns:r="http://schemas.openxmlformats.org/officeDocument/2006/relationships" xmlns:p="http://schemas.openxmlformats.org/presentationml/2006/main">
+  <p:cSld>
+    <p:spTree>
+      <p:nvGrpSpPr>
+        <p:cNvPr id="1" name=""/>
+        <p:cNvGrpSpPr/>
+        <p:nvPr/>
+      </p:nvGrpSpPr>
+      <p:grpSpPr>
+        <a:xfrm>
+          <a:off x="0" y="0"/>
+          <a:ext cx="0" cy="0"/>
+          <a:chOff x="0" y="0"/>
+          <a:chExt cx="0" cy="0"/>
+        </a:xfrm>
+      </p:grpSpPr>
+      <p:sp>
+        <p:nvSpPr>
+          <p:cNvPr id="2" name="Slide Image Placeholder 1"/>
+          <p:cNvSpPr>
+            <a:spLocks noGrp="1" noRot="1" noChangeAspect="1"/>
+          </p:cNvSpPr>
+          <p:nvPr>
+            <p:ph type="sldImg"/>
+          </p:nvPr>
+        </p:nvSpPr>
+        <p:spPr/>
+      </p:sp>
+      <p:sp>
+        <p:nvSpPr>
+          <p:cNvPr id="3" name="Notes Placeholder 2"/>
+          <p:cNvSpPr>
+            <a:spLocks noGrp="1"/>
+          </p:cNvSpPr>
+          <p:nvPr>
+            <p:ph type="body" idx="1"/>
+          </p:nvPr>
+        </p:nvSpPr>
+        <p:spPr/>
+        <p:txBody>
+          <a:bodyPr/>
+          <a:lstStyle/>
+          <a:p>
+            <a:r>
+              <a:rPr lang="en-US" dirty="0"/>
+              <a:t/>
+            </a:r>
+            <a:endParaRPr lang="en-US" dirty="0"/>
+          </a:p>
+        </p:txBody>
+      </p:sp>
+      <p:sp>
+        <p:nvSpPr>
+          <p:cNvPr id="4" name="Slide Number Placeholder 3"/>
+          <p:cNvSpPr>
+            <a:spLocks noGrp="1"/>
+          </p:cNvSpPr>
+          <p:nvPr>
+            <p:ph type="sldNum" sz="quarter" idx="10"/>
+          </p:nvPr>
+        </p:nvSpPr>
+        <p:spPr/>
+        <p:txBody>
+          <a:bodyPr/>
+          <a:lstStyle/>
+          <a:p>
+            <a:fld id="{F7021451-1387-4CA6-816F-3879F97B5CBC}" type="slidenum">
+              <a:rPr lang="en-US"/>
+              <a:t>26</a:t>
             </a:fld>
             <a:endParaRPr lang="en-US"/>
           </a:p>
@@ -11708,6 +12064,2241 @@
 </p:sld>
 </file>
 
+<file path=ppt/slides/slide23.xml><?xml version="1.0" encoding="utf-8"?>
+<p:sld xmlns:a="http://schemas.openxmlformats.org/drawingml/2006/main" xmlns:r="http://schemas.openxmlformats.org/officeDocument/2006/relationships" xmlns:p="http://schemas.openxmlformats.org/presentationml/2006/main">
+  <p:cSld name="Slide 23">
+    <p:bg>
+      <p:bgPr>
+        <a:solidFill>
+          <a:srgbClr val="0B1226"/>
+        </a:solidFill>
+      </p:bgPr>
+    </p:bg>
+    <p:spTree>
+      <p:nvGrpSpPr>
+        <p:cNvPr id="1" name=""/>
+        <p:cNvGrpSpPr/>
+        <p:nvPr/>
+      </p:nvGrpSpPr>
+      <p:grpSpPr>
+        <a:xfrm>
+          <a:off x="0" y="0"/>
+          <a:ext cx="0" cy="0"/>
+          <a:chOff x="0" y="0"/>
+          <a:chExt cx="0" cy="0"/>
+        </a:xfrm>
+      </p:grpSpPr>
+      <p:sp>
+        <p:nvSpPr>
+          <p:cNvPr id="2" name="Text 0"/>
+          <p:cNvSpPr/>
+          <p:nvPr/>
+        </p:nvSpPr>
+        <p:spPr>
+          <a:xfrm>
+            <a:off x="640080" y="365760"/>
+            <a:ext cx="8229600" cy="274320"/>
+          </a:xfrm>
+          <a:prstGeom prst="rect">
+            <a:avLst/>
+          </a:prstGeom>
+          <a:noFill/>
+          <a:ln/>
+        </p:spPr>
+        <p:txBody>
+          <a:bodyPr wrap="square" lIns="0" tIns="0" rIns="0" bIns="0" rtlCol="0" anchor="ctr"/>
+          <a:lstStyle/>
+          <a:p>
+            <a:pPr indent="0" marL="0">
+              <a:buNone/>
+            </a:pPr>
+            <a:r>
+              <a:rPr lang="en-US" sz="1100" b="1" spc="200" kern="0" dirty="0">
+                <a:solidFill>
+                  <a:srgbClr val="2BD9E5"/>
+                </a:solidFill>
+                <a:latin typeface="Arial" pitchFamily="34" charset="0"/>
+                <a:ea typeface="Arial" pitchFamily="34" charset="-122"/>
+                <a:cs typeface="Arial" pitchFamily="34" charset="-120"/>
+              </a:rPr>
+              <a:t>DA TENERE A MENTE</a:t>
+            </a:r>
+            <a:endParaRPr lang="en-US" sz="1100" dirty="0"/>
+          </a:p>
+        </p:txBody>
+      </p:sp>
+      <p:sp>
+        <p:nvSpPr>
+          <p:cNvPr id="3" name="Text 1"/>
+          <p:cNvSpPr/>
+          <p:nvPr/>
+        </p:nvSpPr>
+        <p:spPr>
+          <a:xfrm>
+            <a:off x="640080" y="640080"/>
+            <a:ext cx="7863840" cy="566928"/>
+          </a:xfrm>
+          <a:prstGeom prst="rect">
+            <a:avLst/>
+          </a:prstGeom>
+          <a:noFill/>
+          <a:ln/>
+        </p:spPr>
+        <p:txBody>
+          <a:bodyPr wrap="square" lIns="0" tIns="0" rIns="0" bIns="0" rtlCol="0" anchor="ctr"/>
+          <a:lstStyle/>
+          <a:p>
+            <a:pPr indent="0" marL="0">
+              <a:buNone/>
+            </a:pPr>
+            <a:r>
+              <a:rPr lang="en-US" sz="3000" dirty="0">
+                <a:solidFill>
+                  <a:srgbClr val="F4F7FF"/>
+                </a:solidFill>
+                <a:latin typeface="Arial Black" pitchFamily="34" charset="0"/>
+                <a:ea typeface="Arial Black" pitchFamily="34" charset="-122"/>
+                <a:cs typeface="Arial Black" pitchFamily="34" charset="-120"/>
+              </a:rPr>
+              <a:t>Tre accortezze trasversali</a:t>
+            </a:r>
+            <a:endParaRPr lang="en-US" sz="3000" dirty="0"/>
+          </a:p>
+        </p:txBody>
+      </p:sp>
+      <p:sp>
+        <p:nvSpPr>
+          <p:cNvPr id="4" name="Text 2"/>
+          <p:cNvSpPr/>
+          <p:nvPr/>
+        </p:nvSpPr>
+        <p:spPr>
+          <a:xfrm>
+            <a:off x="658368" y="1417320"/>
+            <a:ext cx="7772400" cy="914400"/>
+          </a:xfrm>
+          <a:prstGeom prst="rect">
+            <a:avLst/>
+          </a:prstGeom>
+          <a:noFill/>
+          <a:ln/>
+        </p:spPr>
+        <p:txBody>
+          <a:bodyPr wrap="square" lIns="0" tIns="0" rIns="0" bIns="0" rtlCol="0" anchor="ctr"/>
+          <a:lstStyle/>
+          <a:p>
+            <a:pPr indent="0" marL="0">
+              <a:lnSpc>
+                <a:spcPct val="130000"/>
+              </a:lnSpc>
+              <a:buNone/>
+            </a:pPr>
+            <a:r>
+              <a:rPr lang="en-US" sz="1800" dirty="0">
+                <a:solidFill>
+                  <a:srgbClr val="F4F7FF"/>
+                </a:solidFill>
+                <a:latin typeface="Arial" pitchFamily="34" charset="0"/>
+                <a:ea typeface="Arial" pitchFamily="34" charset="-122"/>
+                <a:cs typeface="Arial" pitchFamily="34" charset="-120"/>
+              </a:rPr>
+              <a:t>Non sono fasi in sequenza: sono </a:t>
+            </a:r>
+            <a:pPr indent="0" marL="0">
+              <a:lnSpc>
+                <a:spcPct val="130000"/>
+              </a:lnSpc>
+              <a:buNone/>
+            </a:pPr>
+            <a:r>
+              <a:rPr lang="en-US" sz="1800" b="1" dirty="0">
+                <a:solidFill>
+                  <a:srgbClr val="2BD9E5"/>
+                </a:solidFill>
+                <a:latin typeface="Arial" pitchFamily="34" charset="0"/>
+                <a:ea typeface="Arial" pitchFamily="34" charset="-122"/>
+                <a:cs typeface="Arial" pitchFamily="34" charset="-120"/>
+              </a:rPr>
+              <a:t>abitudini</a:t>
+            </a:r>
+            <a:pPr indent="0" marL="0">
+              <a:lnSpc>
+                <a:spcPct val="130000"/>
+              </a:lnSpc>
+              <a:buNone/>
+            </a:pPr>
+            <a:r>
+              <a:rPr lang="en-US" sz="1800" dirty="0">
+                <a:solidFill>
+                  <a:srgbClr val="F4F7FF"/>
+                </a:solidFill>
+                <a:latin typeface="Arial" pitchFamily="34" charset="0"/>
+                <a:ea typeface="Arial" pitchFamily="34" charset="-122"/>
+                <a:cs typeface="Arial" pitchFamily="34" charset="-120"/>
+              </a:rPr>
+              <a:t> valide a ogni modifica, che ti risparmiano tempo e brutte sorprese.</a:t>
+            </a:r>
+            <a:endParaRPr lang="en-US" sz="1800" dirty="0"/>
+          </a:p>
+        </p:txBody>
+      </p:sp>
+      <p:sp>
+        <p:nvSpPr>
+          <p:cNvPr id="5" name="Shape 3"/>
+          <p:cNvSpPr/>
+          <p:nvPr/>
+        </p:nvSpPr>
+        <p:spPr>
+          <a:xfrm>
+            <a:off x="640080" y="2834640"/>
+            <a:ext cx="2496312" cy="1691640"/>
+          </a:xfrm>
+          <a:prstGeom prst="roundRect">
+            <a:avLst>
+              <a:gd name="adj" fmla="val 4324"/>
+            </a:avLst>
+          </a:prstGeom>
+          <a:solidFill>
+            <a:srgbClr val="16203F"/>
+          </a:solidFill>
+          <a:ln w="13970">
+            <a:solidFill>
+              <a:srgbClr val="2BD9E5"/>
+            </a:solidFill>
+            <a:prstDash val="solid"/>
+          </a:ln>
+        </p:spPr>
+      </p:sp>
+      <p:sp>
+        <p:nvSpPr>
+          <p:cNvPr id="6" name="Shape 4"/>
+          <p:cNvSpPr/>
+          <p:nvPr/>
+        </p:nvSpPr>
+        <p:spPr>
+          <a:xfrm>
+            <a:off x="1645920" y="3063240"/>
+            <a:ext cx="502920" cy="502920"/>
+          </a:xfrm>
+          <a:prstGeom prst="ellipse">
+            <a:avLst/>
+          </a:prstGeom>
+          <a:solidFill>
+            <a:srgbClr val="0E3A44"/>
+          </a:solidFill>
+          <a:ln w="9525">
+            <a:solidFill>
+              <a:srgbClr val="2BD9E5"/>
+            </a:solidFill>
+            <a:prstDash val="solid"/>
+          </a:ln>
+        </p:spPr>
+      </p:sp>
+      <p:pic>
+        <p:nvPicPr>
+          <p:cNvPr id="7" name="Image 0" descr="preencoded.png">    </p:cNvPr>
+          <p:cNvPicPr>
+            <a:picLocks noChangeAspect="1"/>
+          </p:cNvPicPr>
+          <p:nvPr/>
+        </p:nvPicPr>
+        <p:blipFill>
+          <a:blip r:embed="rId1"/>
+          <a:stretch>
+            <a:fillRect/>
+          </a:stretch>
+        </p:blipFill>
+        <p:spPr>
+          <a:xfrm>
+            <a:off x="1781708" y="3199028"/>
+            <a:ext cx="231343" cy="231343"/>
+          </a:xfrm>
+          <a:prstGeom prst="rect">
+            <a:avLst/>
+          </a:prstGeom>
+        </p:spPr>
+      </p:pic>
+      <p:sp>
+        <p:nvSpPr>
+          <p:cNvPr id="8" name="Text 5"/>
+          <p:cNvSpPr/>
+          <p:nvPr/>
+        </p:nvSpPr>
+        <p:spPr>
+          <a:xfrm>
+            <a:off x="640080" y="3703320"/>
+            <a:ext cx="2496312" cy="365760"/>
+          </a:xfrm>
+          <a:prstGeom prst="rect">
+            <a:avLst/>
+          </a:prstGeom>
+          <a:noFill/>
+          <a:ln/>
+        </p:spPr>
+        <p:txBody>
+          <a:bodyPr wrap="square" lIns="0" tIns="0" rIns="0" bIns="0" rtlCol="0" anchor="ctr"/>
+          <a:lstStyle/>
+          <a:p>
+            <a:pPr algn="ctr" indent="0" marL="0">
+              <a:buNone/>
+            </a:pPr>
+            <a:r>
+              <a:rPr lang="en-US" sz="1600" b="1" dirty="0">
+                <a:solidFill>
+                  <a:srgbClr val="F4F7FF"/>
+                </a:solidFill>
+                <a:latin typeface="Arial" pitchFamily="34" charset="0"/>
+                <a:ea typeface="Arial" pitchFamily="34" charset="-122"/>
+                <a:cs typeface="Arial" pitchFamily="34" charset="-120"/>
+              </a:rPr>
+              <a:t>Testa sempre</a:t>
+            </a:r>
+            <a:endParaRPr lang="en-US" sz="1600" dirty="0"/>
+          </a:p>
+        </p:txBody>
+      </p:sp>
+      <p:sp>
+        <p:nvSpPr>
+          <p:cNvPr id="9" name="Text 6"/>
+          <p:cNvSpPr/>
+          <p:nvPr/>
+        </p:nvSpPr>
+        <p:spPr>
+          <a:xfrm>
+            <a:off x="640080" y="4069080"/>
+            <a:ext cx="2496312" cy="320040"/>
+          </a:xfrm>
+          <a:prstGeom prst="rect">
+            <a:avLst/>
+          </a:prstGeom>
+          <a:noFill/>
+          <a:ln/>
+        </p:spPr>
+        <p:txBody>
+          <a:bodyPr wrap="square" lIns="0" tIns="0" rIns="0" bIns="0" rtlCol="0" anchor="ctr"/>
+          <a:lstStyle/>
+          <a:p>
+            <a:pPr algn="ctr" indent="0" marL="0">
+              <a:buNone/>
+            </a:pPr>
+            <a:r>
+              <a:rPr lang="en-US" sz="1200" dirty="0">
+                <a:solidFill>
+                  <a:srgbClr val="AEBDE0"/>
+                </a:solidFill>
+                <a:latin typeface="Arial" pitchFamily="34" charset="0"/>
+                <a:ea typeface="Arial" pitchFamily="34" charset="-122"/>
+                <a:cs typeface="Arial" pitchFamily="34" charset="-120"/>
+              </a:rPr>
+              <a:t>doppia verifica</a:t>
+            </a:r>
+            <a:endParaRPr lang="en-US" sz="1200" dirty="0"/>
+          </a:p>
+        </p:txBody>
+      </p:sp>
+      <p:sp>
+        <p:nvSpPr>
+          <p:cNvPr id="10" name="Shape 7"/>
+          <p:cNvSpPr/>
+          <p:nvPr/>
+        </p:nvSpPr>
+        <p:spPr>
+          <a:xfrm>
+            <a:off x="3337560" y="2834640"/>
+            <a:ext cx="2496312" cy="1691640"/>
+          </a:xfrm>
+          <a:prstGeom prst="roundRect">
+            <a:avLst>
+              <a:gd name="adj" fmla="val 4324"/>
+            </a:avLst>
+          </a:prstGeom>
+          <a:solidFill>
+            <a:srgbClr val="16203F"/>
+          </a:solidFill>
+          <a:ln w="13970">
+            <a:solidFill>
+              <a:srgbClr val="2BD9E5"/>
+            </a:solidFill>
+            <a:prstDash val="solid"/>
+          </a:ln>
+        </p:spPr>
+      </p:sp>
+      <p:sp>
+        <p:nvSpPr>
+          <p:cNvPr id="11" name="Shape 8"/>
+          <p:cNvSpPr/>
+          <p:nvPr/>
+        </p:nvSpPr>
+        <p:spPr>
+          <a:xfrm>
+            <a:off x="4343400" y="3063240"/>
+            <a:ext cx="502920" cy="502920"/>
+          </a:xfrm>
+          <a:prstGeom prst="ellipse">
+            <a:avLst/>
+          </a:prstGeom>
+          <a:solidFill>
+            <a:srgbClr val="0E3A44"/>
+          </a:solidFill>
+          <a:ln w="9525">
+            <a:solidFill>
+              <a:srgbClr val="2BD9E5"/>
+            </a:solidFill>
+            <a:prstDash val="solid"/>
+          </a:ln>
+        </p:spPr>
+      </p:sp>
+      <p:pic>
+        <p:nvPicPr>
+          <p:cNvPr id="12" name="Image 1" descr="preencoded.png">    </p:cNvPr>
+          <p:cNvPicPr>
+            <a:picLocks noChangeAspect="1"/>
+          </p:cNvPicPr>
+          <p:nvPr/>
+        </p:nvPicPr>
+        <p:blipFill>
+          <a:blip r:embed="rId2"/>
+          <a:stretch>
+            <a:fillRect/>
+          </a:stretch>
+        </p:blipFill>
+        <p:spPr>
+          <a:xfrm>
+            <a:off x="4479188" y="3199028"/>
+            <a:ext cx="231343" cy="231343"/>
+          </a:xfrm>
+          <a:prstGeom prst="rect">
+            <a:avLst/>
+          </a:prstGeom>
+        </p:spPr>
+      </p:pic>
+      <p:sp>
+        <p:nvSpPr>
+          <p:cNvPr id="13" name="Text 9"/>
+          <p:cNvSpPr/>
+          <p:nvPr/>
+        </p:nvSpPr>
+        <p:spPr>
+          <a:xfrm>
+            <a:off x="3337560" y="3703320"/>
+            <a:ext cx="2496312" cy="365760"/>
+          </a:xfrm>
+          <a:prstGeom prst="rect">
+            <a:avLst/>
+          </a:prstGeom>
+          <a:noFill/>
+          <a:ln/>
+        </p:spPr>
+        <p:txBody>
+          <a:bodyPr wrap="square" lIns="0" tIns="0" rIns="0" bIns="0" rtlCol="0" anchor="ctr"/>
+          <a:lstStyle/>
+          <a:p>
+            <a:pPr algn="ctr" indent="0" marL="0">
+              <a:buNone/>
+            </a:pPr>
+            <a:r>
+              <a:rPr lang="en-US" sz="1600" b="1" dirty="0">
+                <a:solidFill>
+                  <a:srgbClr val="F4F7FF"/>
+                </a:solidFill>
+                <a:latin typeface="Arial" pitchFamily="34" charset="0"/>
+                <a:ea typeface="Arial" pitchFamily="34" charset="-122"/>
+                <a:cs typeface="Arial" pitchFamily="34" charset="-120"/>
+              </a:rPr>
+              <a:t>Occhio alla build</a:t>
+            </a:r>
+            <a:endParaRPr lang="en-US" sz="1600" dirty="0"/>
+          </a:p>
+        </p:txBody>
+      </p:sp>
+      <p:sp>
+        <p:nvSpPr>
+          <p:cNvPr id="14" name="Text 10"/>
+          <p:cNvSpPr/>
+          <p:nvPr/>
+        </p:nvSpPr>
+        <p:spPr>
+          <a:xfrm>
+            <a:off x="3337560" y="4069080"/>
+            <a:ext cx="2496312" cy="320040"/>
+          </a:xfrm>
+          <a:prstGeom prst="rect">
+            <a:avLst/>
+          </a:prstGeom>
+          <a:noFill/>
+          <a:ln/>
+        </p:spPr>
+        <p:txBody>
+          <a:bodyPr wrap="square" lIns="0" tIns="0" rIns="0" bIns="0" rtlCol="0" anchor="ctr"/>
+          <a:lstStyle/>
+          <a:p>
+            <a:pPr algn="ctr" indent="0" marL="0">
+              <a:buNone/>
+            </a:pPr>
+            <a:r>
+              <a:rPr lang="en-US" sz="1200" dirty="0">
+                <a:solidFill>
+                  <a:srgbClr val="AEBDE0"/>
+                </a:solidFill>
+                <a:latin typeface="Arial" pitchFamily="34" charset="0"/>
+                <a:ea typeface="Arial" pitchFamily="34" charset="-122"/>
+                <a:cs typeface="Arial" pitchFamily="34" charset="-120"/>
+              </a:rPr>
+              <a:t>tempo e CPU</a:t>
+            </a:r>
+            <a:endParaRPr lang="en-US" sz="1200" dirty="0"/>
+          </a:p>
+        </p:txBody>
+      </p:sp>
+      <p:sp>
+        <p:nvSpPr>
+          <p:cNvPr id="15" name="Shape 11"/>
+          <p:cNvSpPr/>
+          <p:nvPr/>
+        </p:nvSpPr>
+        <p:spPr>
+          <a:xfrm>
+            <a:off x="6035040" y="2834640"/>
+            <a:ext cx="2496312" cy="1691640"/>
+          </a:xfrm>
+          <a:prstGeom prst="roundRect">
+            <a:avLst>
+              <a:gd name="adj" fmla="val 4324"/>
+            </a:avLst>
+          </a:prstGeom>
+          <a:solidFill>
+            <a:srgbClr val="16203F"/>
+          </a:solidFill>
+          <a:ln w="13970">
+            <a:solidFill>
+              <a:srgbClr val="2BD9E5"/>
+            </a:solidFill>
+            <a:prstDash val="solid"/>
+          </a:ln>
+        </p:spPr>
+      </p:sp>
+      <p:sp>
+        <p:nvSpPr>
+          <p:cNvPr id="16" name="Shape 12"/>
+          <p:cNvSpPr/>
+          <p:nvPr/>
+        </p:nvSpPr>
+        <p:spPr>
+          <a:xfrm>
+            <a:off x="7040880" y="3063240"/>
+            <a:ext cx="502920" cy="502920"/>
+          </a:xfrm>
+          <a:prstGeom prst="ellipse">
+            <a:avLst/>
+          </a:prstGeom>
+          <a:solidFill>
+            <a:srgbClr val="0E3A44"/>
+          </a:solidFill>
+          <a:ln w="9525">
+            <a:solidFill>
+              <a:srgbClr val="2BD9E5"/>
+            </a:solidFill>
+            <a:prstDash val="solid"/>
+          </a:ln>
+        </p:spPr>
+      </p:sp>
+      <p:pic>
+        <p:nvPicPr>
+          <p:cNvPr id="17" name="Image 2" descr="preencoded.png">    </p:cNvPr>
+          <p:cNvPicPr>
+            <a:picLocks noChangeAspect="1"/>
+          </p:cNvPicPr>
+          <p:nvPr/>
+        </p:nvPicPr>
+        <p:blipFill>
+          <a:blip r:embed="rId3"/>
+          <a:stretch>
+            <a:fillRect/>
+          </a:stretch>
+        </p:blipFill>
+        <p:spPr>
+          <a:xfrm>
+            <a:off x="7176668" y="3199028"/>
+            <a:ext cx="231343" cy="231343"/>
+          </a:xfrm>
+          <a:prstGeom prst="rect">
+            <a:avLst/>
+          </a:prstGeom>
+        </p:spPr>
+      </p:pic>
+      <p:sp>
+        <p:nvSpPr>
+          <p:cNvPr id="18" name="Text 13"/>
+          <p:cNvSpPr/>
+          <p:nvPr/>
+        </p:nvSpPr>
+        <p:spPr>
+          <a:xfrm>
+            <a:off x="6035040" y="3703320"/>
+            <a:ext cx="2496312" cy="365760"/>
+          </a:xfrm>
+          <a:prstGeom prst="rect">
+            <a:avLst/>
+          </a:prstGeom>
+          <a:noFill/>
+          <a:ln/>
+        </p:spPr>
+        <p:txBody>
+          <a:bodyPr wrap="square" lIns="0" tIns="0" rIns="0" bIns="0" rtlCol="0" anchor="ctr"/>
+          <a:lstStyle/>
+          <a:p>
+            <a:pPr algn="ctr" indent="0" marL="0">
+              <a:buNone/>
+            </a:pPr>
+            <a:r>
+              <a:rPr lang="en-US" sz="1600" b="1" dirty="0">
+                <a:solidFill>
+                  <a:srgbClr val="F4F7FF"/>
+                </a:solidFill>
+                <a:latin typeface="Arial" pitchFamily="34" charset="0"/>
+                <a:ea typeface="Arial" pitchFamily="34" charset="-122"/>
+                <a:cs typeface="Arial" pitchFamily="34" charset="-120"/>
+              </a:rPr>
+              <a:t>Leggi le regole</a:t>
+            </a:r>
+            <a:endParaRPr lang="en-US" sz="1600" dirty="0"/>
+          </a:p>
+        </p:txBody>
+      </p:sp>
+      <p:sp>
+        <p:nvSpPr>
+          <p:cNvPr id="19" name="Text 14"/>
+          <p:cNvSpPr/>
+          <p:nvPr/>
+        </p:nvSpPr>
+        <p:spPr>
+          <a:xfrm>
+            <a:off x="6035040" y="4069080"/>
+            <a:ext cx="2496312" cy="320040"/>
+          </a:xfrm>
+          <a:prstGeom prst="rect">
+            <a:avLst/>
+          </a:prstGeom>
+          <a:noFill/>
+          <a:ln/>
+        </p:spPr>
+        <p:txBody>
+          <a:bodyPr wrap="square" lIns="0" tIns="0" rIns="0" bIns="0" rtlCol="0" anchor="ctr"/>
+          <a:lstStyle/>
+          <a:p>
+            <a:pPr algn="ctr" indent="0" marL="0">
+              <a:buNone/>
+            </a:pPr>
+            <a:r>
+              <a:rPr lang="en-US" sz="1200" dirty="0">
+                <a:solidFill>
+                  <a:srgbClr val="AEBDE0"/>
+                </a:solidFill>
+                <a:latin typeface="Arial" pitchFamily="34" charset="0"/>
+                <a:ea typeface="Arial" pitchFamily="34" charset="-122"/>
+                <a:cs typeface="Arial" pitchFamily="34" charset="-120"/>
+              </a:rPr>
+              <a:t>dello store</a:t>
+            </a:r>
+            <a:endParaRPr lang="en-US" sz="1200" dirty="0"/>
+          </a:p>
+        </p:txBody>
+      </p:sp>
+    </p:spTree>
+  </p:cSld>
+  <p:clrMapOvr>
+    <a:masterClrMapping/>
+  </p:clrMapOvr>
+</p:sld>
+</file>
+
+<file path=ppt/slides/slide24.xml><?xml version="1.0" encoding="utf-8"?>
+<p:sld xmlns:a="http://schemas.openxmlformats.org/drawingml/2006/main" xmlns:r="http://schemas.openxmlformats.org/officeDocument/2006/relationships" xmlns:p="http://schemas.openxmlformats.org/presentationml/2006/main">
+  <p:cSld name="Slide 24">
+    <p:bg>
+      <p:bgPr>
+        <a:solidFill>
+          <a:srgbClr val="0B1226"/>
+        </a:solidFill>
+      </p:bgPr>
+    </p:bg>
+    <p:spTree>
+      <p:nvGrpSpPr>
+        <p:cNvPr id="1" name=""/>
+        <p:cNvGrpSpPr/>
+        <p:nvPr/>
+      </p:nvGrpSpPr>
+      <p:grpSpPr>
+        <a:xfrm>
+          <a:off x="0" y="0"/>
+          <a:ext cx="0" cy="0"/>
+          <a:chOff x="0" y="0"/>
+          <a:chExt cx="0" cy="0"/>
+        </a:xfrm>
+      </p:grpSpPr>
+      <p:sp>
+        <p:nvSpPr>
+          <p:cNvPr id="2" name="Text 0"/>
+          <p:cNvSpPr/>
+          <p:nvPr/>
+        </p:nvSpPr>
+        <p:spPr>
+          <a:xfrm>
+            <a:off x="640080" y="365760"/>
+            <a:ext cx="8229600" cy="274320"/>
+          </a:xfrm>
+          <a:prstGeom prst="rect">
+            <a:avLst/>
+          </a:prstGeom>
+          <a:noFill/>
+          <a:ln/>
+        </p:spPr>
+        <p:txBody>
+          <a:bodyPr wrap="square" lIns="0" tIns="0" rIns="0" bIns="0" rtlCol="0" anchor="ctr"/>
+          <a:lstStyle/>
+          <a:p>
+            <a:pPr indent="0" marL="0">
+              <a:buNone/>
+            </a:pPr>
+            <a:r>
+              <a:rPr lang="en-US" sz="1100" b="1" spc="200" kern="0" dirty="0">
+                <a:solidFill>
+                  <a:srgbClr val="2BD9E5"/>
+                </a:solidFill>
+                <a:latin typeface="Arial" pitchFamily="34" charset="0"/>
+                <a:ea typeface="Arial" pitchFamily="34" charset="-122"/>
+                <a:cs typeface="Arial" pitchFamily="34" charset="-120"/>
+              </a:rPr>
+              <a:t>DA TENERE A MENTE · 1 · TESTA SEMPRE</a:t>
+            </a:r>
+            <a:endParaRPr lang="en-US" sz="1100" dirty="0"/>
+          </a:p>
+        </p:txBody>
+      </p:sp>
+      <p:sp>
+        <p:nvSpPr>
+          <p:cNvPr id="3" name="Text 1"/>
+          <p:cNvSpPr/>
+          <p:nvPr/>
+        </p:nvSpPr>
+        <p:spPr>
+          <a:xfrm>
+            <a:off x="640080" y="640080"/>
+            <a:ext cx="7863840" cy="566928"/>
+          </a:xfrm>
+          <a:prstGeom prst="rect">
+            <a:avLst/>
+          </a:prstGeom>
+          <a:noFill/>
+          <a:ln/>
+        </p:spPr>
+        <p:txBody>
+          <a:bodyPr wrap="square" lIns="0" tIns="0" rIns="0" bIns="0" rtlCol="0" anchor="ctr"/>
+          <a:lstStyle/>
+          <a:p>
+            <a:pPr indent="0" marL="0">
+              <a:buNone/>
+            </a:pPr>
+            <a:r>
+              <a:rPr lang="en-US" sz="3000" dirty="0">
+                <a:solidFill>
+                  <a:srgbClr val="F4F7FF"/>
+                </a:solidFill>
+                <a:latin typeface="Arial Black" pitchFamily="34" charset="0"/>
+                <a:ea typeface="Arial Black" pitchFamily="34" charset="-122"/>
+                <a:cs typeface="Arial Black" pitchFamily="34" charset="-120"/>
+              </a:rPr>
+              <a:t>Testa sempre</a:t>
+            </a:r>
+            <a:endParaRPr lang="en-US" sz="3000" dirty="0"/>
+          </a:p>
+        </p:txBody>
+      </p:sp>
+      <p:sp>
+        <p:nvSpPr>
+          <p:cNvPr id="4" name="Text 2"/>
+          <p:cNvSpPr/>
+          <p:nvPr/>
+        </p:nvSpPr>
+        <p:spPr>
+          <a:xfrm>
+            <a:off x="658368" y="1188720"/>
+            <a:ext cx="7772400" cy="310896"/>
+          </a:xfrm>
+          <a:prstGeom prst="rect">
+            <a:avLst/>
+          </a:prstGeom>
+          <a:noFill/>
+          <a:ln/>
+        </p:spPr>
+        <p:txBody>
+          <a:bodyPr wrap="square" lIns="0" tIns="0" rIns="0" bIns="0" rtlCol="0" anchor="ctr"/>
+          <a:lstStyle/>
+          <a:p>
+            <a:pPr indent="0" marL="0">
+              <a:buNone/>
+            </a:pPr>
+            <a:r>
+              <a:rPr lang="en-US" sz="1350" i="1" dirty="0">
+                <a:solidFill>
+                  <a:srgbClr val="AEBDE0"/>
+                </a:solidFill>
+                <a:latin typeface="Arial" pitchFamily="34" charset="0"/>
+                <a:ea typeface="Arial" pitchFamily="34" charset="-122"/>
+                <a:cs typeface="Arial" pitchFamily="34" charset="-120"/>
+              </a:rPr>
+              <a:t>Niente va online senza una verifica doppia.</a:t>
+            </a:r>
+            <a:endParaRPr lang="en-US" sz="1350" dirty="0"/>
+          </a:p>
+        </p:txBody>
+      </p:sp>
+      <p:sp>
+        <p:nvSpPr>
+          <p:cNvPr id="5" name="Shape 3"/>
+          <p:cNvSpPr/>
+          <p:nvPr/>
+        </p:nvSpPr>
+        <p:spPr>
+          <a:xfrm>
+            <a:off x="640080" y="1737360"/>
+            <a:ext cx="3794760" cy="2194560"/>
+          </a:xfrm>
+          <a:prstGeom prst="roundRect">
+            <a:avLst>
+              <a:gd name="adj" fmla="val 3333"/>
+            </a:avLst>
+          </a:prstGeom>
+          <a:solidFill>
+            <a:srgbClr val="16203F"/>
+          </a:solidFill>
+          <a:ln w="9525">
+            <a:solidFill>
+              <a:srgbClr val="2A3A6B"/>
+            </a:solidFill>
+            <a:prstDash val="solid"/>
+          </a:ln>
+        </p:spPr>
+      </p:sp>
+      <p:sp>
+        <p:nvSpPr>
+          <p:cNvPr id="6" name="Shape 4"/>
+          <p:cNvSpPr/>
+          <p:nvPr/>
+        </p:nvSpPr>
+        <p:spPr>
+          <a:xfrm>
+            <a:off x="868680" y="1965960"/>
+            <a:ext cx="502920" cy="502920"/>
+          </a:xfrm>
+          <a:prstGeom prst="ellipse">
+            <a:avLst/>
+          </a:prstGeom>
+          <a:solidFill>
+            <a:srgbClr val="0E3A44"/>
+          </a:solidFill>
+          <a:ln w="12700">
+            <a:solidFill>
+              <a:srgbClr val="0E3A44"/>
+            </a:solidFill>
+            <a:prstDash val="solid"/>
+          </a:ln>
+        </p:spPr>
+      </p:sp>
+      <p:pic>
+        <p:nvPicPr>
+          <p:cNvPr id="7" name="Image 0" descr="preencoded.png">    </p:cNvPr>
+          <p:cNvPicPr>
+            <a:picLocks noChangeAspect="1"/>
+          </p:cNvPicPr>
+          <p:nvPr/>
+        </p:nvPicPr>
+        <p:blipFill>
+          <a:blip r:embed="rId1"/>
+          <a:stretch>
+            <a:fillRect/>
+          </a:stretch>
+        </p:blipFill>
+        <p:spPr>
+          <a:xfrm>
+            <a:off x="1004468" y="2101748"/>
+            <a:ext cx="231343" cy="231343"/>
+          </a:xfrm>
+          <a:prstGeom prst="rect">
+            <a:avLst/>
+          </a:prstGeom>
+        </p:spPr>
+      </p:pic>
+      <p:sp>
+        <p:nvSpPr>
+          <p:cNvPr id="8" name="Text 5"/>
+          <p:cNvSpPr/>
+          <p:nvPr/>
+        </p:nvSpPr>
+        <p:spPr>
+          <a:xfrm>
+            <a:off x="1508760" y="1965960"/>
+            <a:ext cx="2743200" cy="502920"/>
+          </a:xfrm>
+          <a:prstGeom prst="rect">
+            <a:avLst/>
+          </a:prstGeom>
+          <a:noFill/>
+          <a:ln/>
+        </p:spPr>
+        <p:txBody>
+          <a:bodyPr wrap="square" lIns="0" tIns="0" rIns="0" bIns="0" rtlCol="0" anchor="ctr"/>
+          <a:lstStyle/>
+          <a:p>
+            <a:pPr indent="0" marL="0">
+              <a:buNone/>
+            </a:pPr>
+            <a:r>
+              <a:rPr lang="en-US" sz="1500" b="1" dirty="0">
+                <a:solidFill>
+                  <a:srgbClr val="F4F7FF"/>
+                </a:solidFill>
+                <a:latin typeface="Arial" pitchFamily="34" charset="0"/>
+                <a:ea typeface="Arial" pitchFamily="34" charset="-122"/>
+                <a:cs typeface="Arial" pitchFamily="34" charset="-120"/>
+              </a:rPr>
+              <a:t>Fallo provare a Claude</a:t>
+            </a:r>
+            <a:endParaRPr lang="en-US" sz="1500" dirty="0"/>
+          </a:p>
+        </p:txBody>
+      </p:sp>
+      <p:sp>
+        <p:nvSpPr>
+          <p:cNvPr id="9" name="Text 6"/>
+          <p:cNvSpPr/>
+          <p:nvPr/>
+        </p:nvSpPr>
+        <p:spPr>
+          <a:xfrm>
+            <a:off x="868680" y="2578608"/>
+            <a:ext cx="3337560" cy="1234440"/>
+          </a:xfrm>
+          <a:prstGeom prst="rect">
+            <a:avLst/>
+          </a:prstGeom>
+          <a:noFill/>
+          <a:ln/>
+        </p:spPr>
+        <p:txBody>
+          <a:bodyPr wrap="square" lIns="0" tIns="0" rIns="0" bIns="0" rtlCol="0" anchor="t"/>
+          <a:lstStyle/>
+          <a:p>
+            <a:pPr indent="0" marL="0">
+              <a:lnSpc>
+                <a:spcPct val="118000"/>
+              </a:lnSpc>
+              <a:buNone/>
+            </a:pPr>
+            <a:r>
+              <a:rPr lang="en-US" sz="1150" dirty="0">
+                <a:solidFill>
+                  <a:srgbClr val="AEBDE0"/>
+                </a:solidFill>
+                <a:latin typeface="Arial" pitchFamily="34" charset="0"/>
+                <a:ea typeface="Arial" pitchFamily="34" charset="-122"/>
+                <a:cs typeface="Arial" pitchFamily="34" charset="-120"/>
+              </a:rPr>
+              <a:t>Ogni volta che finalizzi una modifica, almeno un test automatico: Claude installa l'app, la prova e verifica che funzioni.</a:t>
+            </a:r>
+            <a:endParaRPr lang="en-US" sz="1150" dirty="0"/>
+          </a:p>
+        </p:txBody>
+      </p:sp>
+      <p:sp>
+        <p:nvSpPr>
+          <p:cNvPr id="10" name="Shape 7"/>
+          <p:cNvSpPr/>
+          <p:nvPr/>
+        </p:nvSpPr>
+        <p:spPr>
+          <a:xfrm>
+            <a:off x="4709160" y="1737360"/>
+            <a:ext cx="3794760" cy="2194560"/>
+          </a:xfrm>
+          <a:prstGeom prst="roundRect">
+            <a:avLst>
+              <a:gd name="adj" fmla="val 3333"/>
+            </a:avLst>
+          </a:prstGeom>
+          <a:solidFill>
+            <a:srgbClr val="16203F"/>
+          </a:solidFill>
+          <a:ln w="9525">
+            <a:solidFill>
+              <a:srgbClr val="2A3A6B"/>
+            </a:solidFill>
+            <a:prstDash val="solid"/>
+          </a:ln>
+        </p:spPr>
+      </p:sp>
+      <p:sp>
+        <p:nvSpPr>
+          <p:cNvPr id="11" name="Shape 8"/>
+          <p:cNvSpPr/>
+          <p:nvPr/>
+        </p:nvSpPr>
+        <p:spPr>
+          <a:xfrm>
+            <a:off x="4937760" y="1965960"/>
+            <a:ext cx="502920" cy="502920"/>
+          </a:xfrm>
+          <a:prstGeom prst="ellipse">
+            <a:avLst/>
+          </a:prstGeom>
+          <a:solidFill>
+            <a:srgbClr val="0E3A44"/>
+          </a:solidFill>
+          <a:ln w="12700">
+            <a:solidFill>
+              <a:srgbClr val="0E3A44"/>
+            </a:solidFill>
+            <a:prstDash val="solid"/>
+          </a:ln>
+        </p:spPr>
+      </p:sp>
+      <p:pic>
+        <p:nvPicPr>
+          <p:cNvPr id="12" name="Image 1" descr="preencoded.png">    </p:cNvPr>
+          <p:cNvPicPr>
+            <a:picLocks noChangeAspect="1"/>
+          </p:cNvPicPr>
+          <p:nvPr/>
+        </p:nvPicPr>
+        <p:blipFill>
+          <a:blip r:embed="rId2"/>
+          <a:stretch>
+            <a:fillRect/>
+          </a:stretch>
+        </p:blipFill>
+        <p:spPr>
+          <a:xfrm>
+            <a:off x="5073548" y="2101748"/>
+            <a:ext cx="231343" cy="231343"/>
+          </a:xfrm>
+          <a:prstGeom prst="rect">
+            <a:avLst/>
+          </a:prstGeom>
+        </p:spPr>
+      </p:pic>
+      <p:sp>
+        <p:nvSpPr>
+          <p:cNvPr id="13" name="Text 9"/>
+          <p:cNvSpPr/>
+          <p:nvPr/>
+        </p:nvSpPr>
+        <p:spPr>
+          <a:xfrm>
+            <a:off x="5577840" y="1965960"/>
+            <a:ext cx="2743200" cy="502920"/>
+          </a:xfrm>
+          <a:prstGeom prst="rect">
+            <a:avLst/>
+          </a:prstGeom>
+          <a:noFill/>
+          <a:ln/>
+        </p:spPr>
+        <p:txBody>
+          <a:bodyPr wrap="square" lIns="0" tIns="0" rIns="0" bIns="0" rtlCol="0" anchor="ctr"/>
+          <a:lstStyle/>
+          <a:p>
+            <a:pPr indent="0" marL="0">
+              <a:buNone/>
+            </a:pPr>
+            <a:r>
+              <a:rPr lang="en-US" sz="1500" b="1" dirty="0">
+                <a:solidFill>
+                  <a:srgbClr val="F4F7FF"/>
+                </a:solidFill>
+                <a:latin typeface="Arial" pitchFamily="34" charset="0"/>
+                <a:ea typeface="Arial" pitchFamily="34" charset="-122"/>
+                <a:cs typeface="Arial" pitchFamily="34" charset="-120"/>
+              </a:rPr>
+              <a:t>Dai l'occhiata finale</a:t>
+            </a:r>
+            <a:endParaRPr lang="en-US" sz="1500" dirty="0"/>
+          </a:p>
+        </p:txBody>
+      </p:sp>
+      <p:sp>
+        <p:nvSpPr>
+          <p:cNvPr id="14" name="Text 10"/>
+          <p:cNvSpPr/>
+          <p:nvPr/>
+        </p:nvSpPr>
+        <p:spPr>
+          <a:xfrm>
+            <a:off x="4937760" y="2578608"/>
+            <a:ext cx="3337560" cy="1234440"/>
+          </a:xfrm>
+          <a:prstGeom prst="rect">
+            <a:avLst/>
+          </a:prstGeom>
+          <a:noFill/>
+          <a:ln/>
+        </p:spPr>
+        <p:txBody>
+          <a:bodyPr wrap="square" lIns="0" tIns="0" rIns="0" bIns="0" rtlCol="0" anchor="t"/>
+          <a:lstStyle/>
+          <a:p>
+            <a:pPr indent="0" marL="0">
+              <a:lnSpc>
+                <a:spcPct val="118000"/>
+              </a:lnSpc>
+              <a:buNone/>
+            </a:pPr>
+            <a:r>
+              <a:rPr lang="en-US" sz="1150" dirty="0">
+                <a:solidFill>
+                  <a:srgbClr val="AEBDE0"/>
+                </a:solidFill>
+                <a:latin typeface="Arial" pitchFamily="34" charset="0"/>
+                <a:ea typeface="Arial" pitchFamily="34" charset="-122"/>
+                <a:cs typeface="Arial" pitchFamily="34" charset="-120"/>
+              </a:rPr>
+              <a:t>Poi sempre un controllo umano, tuo, prima di pubblicare. L'ultimo sguardo lo dai tu.</a:t>
+            </a:r>
+            <a:endParaRPr lang="en-US" sz="1150" dirty="0"/>
+          </a:p>
+        </p:txBody>
+      </p:sp>
+      <p:sp>
+        <p:nvSpPr>
+          <p:cNvPr id="15" name="Shape 11"/>
+          <p:cNvSpPr/>
+          <p:nvPr/>
+        </p:nvSpPr>
+        <p:spPr>
+          <a:xfrm>
+            <a:off x="640080" y="4160520"/>
+            <a:ext cx="7863840" cy="566928"/>
+          </a:xfrm>
+          <a:prstGeom prst="roundRect">
+            <a:avLst>
+              <a:gd name="adj" fmla="val 9677"/>
+            </a:avLst>
+          </a:prstGeom>
+          <a:solidFill>
+            <a:srgbClr val="0E3A44"/>
+          </a:solidFill>
+          <a:ln w="6350">
+            <a:solidFill>
+              <a:srgbClr val="2BD9E5"/>
+            </a:solidFill>
+            <a:prstDash val="solid"/>
+          </a:ln>
+        </p:spPr>
+      </p:sp>
+      <p:sp>
+        <p:nvSpPr>
+          <p:cNvPr id="16" name="Text 12"/>
+          <p:cNvSpPr/>
+          <p:nvPr/>
+        </p:nvSpPr>
+        <p:spPr>
+          <a:xfrm>
+            <a:off x="822960" y="4160520"/>
+            <a:ext cx="7498080" cy="566928"/>
+          </a:xfrm>
+          <a:prstGeom prst="rect">
+            <a:avLst/>
+          </a:prstGeom>
+          <a:noFill/>
+          <a:ln/>
+        </p:spPr>
+        <p:txBody>
+          <a:bodyPr wrap="square" lIns="0" tIns="0" rIns="0" bIns="0" rtlCol="0" anchor="ctr"/>
+          <a:lstStyle/>
+          <a:p>
+            <a:pPr algn="ctr" indent="0" marL="0">
+              <a:buNone/>
+            </a:pPr>
+            <a:r>
+              <a:rPr lang="en-US" sz="1250" dirty="0">
+                <a:solidFill>
+                  <a:srgbClr val="F4F7FF"/>
+                </a:solidFill>
+                <a:latin typeface="Arial" pitchFamily="34" charset="0"/>
+                <a:ea typeface="Arial" pitchFamily="34" charset="-122"/>
+                <a:cs typeface="Arial" pitchFamily="34" charset="-120"/>
+              </a:rPr>
+              <a:t>Una modifica finalizzata = un test di Claude + un'occhiata tua, ogni volta.</a:t>
+            </a:r>
+            <a:endParaRPr lang="en-US" sz="1250" dirty="0"/>
+          </a:p>
+        </p:txBody>
+      </p:sp>
+    </p:spTree>
+  </p:cSld>
+  <p:clrMapOvr>
+    <a:masterClrMapping/>
+  </p:clrMapOvr>
+</p:sld>
+</file>
+
+<file path=ppt/slides/slide25.xml><?xml version="1.0" encoding="utf-8"?>
+<p:sld xmlns:a="http://schemas.openxmlformats.org/drawingml/2006/main" xmlns:r="http://schemas.openxmlformats.org/officeDocument/2006/relationships" xmlns:p="http://schemas.openxmlformats.org/presentationml/2006/main">
+  <p:cSld name="Slide 25">
+    <p:bg>
+      <p:bgPr>
+        <a:solidFill>
+          <a:srgbClr val="0B1226"/>
+        </a:solidFill>
+      </p:bgPr>
+    </p:bg>
+    <p:spTree>
+      <p:nvGrpSpPr>
+        <p:cNvPr id="1" name=""/>
+        <p:cNvGrpSpPr/>
+        <p:nvPr/>
+      </p:nvGrpSpPr>
+      <p:grpSpPr>
+        <a:xfrm>
+          <a:off x="0" y="0"/>
+          <a:ext cx="0" cy="0"/>
+          <a:chOff x="0" y="0"/>
+          <a:chExt cx="0" cy="0"/>
+        </a:xfrm>
+      </p:grpSpPr>
+      <p:sp>
+        <p:nvSpPr>
+          <p:cNvPr id="2" name="Text 0"/>
+          <p:cNvSpPr/>
+          <p:nvPr/>
+        </p:nvSpPr>
+        <p:spPr>
+          <a:xfrm>
+            <a:off x="640080" y="365760"/>
+            <a:ext cx="8229600" cy="274320"/>
+          </a:xfrm>
+          <a:prstGeom prst="rect">
+            <a:avLst/>
+          </a:prstGeom>
+          <a:noFill/>
+          <a:ln/>
+        </p:spPr>
+        <p:txBody>
+          <a:bodyPr wrap="square" lIns="0" tIns="0" rIns="0" bIns="0" rtlCol="0" anchor="ctr"/>
+          <a:lstStyle/>
+          <a:p>
+            <a:pPr indent="0" marL="0">
+              <a:buNone/>
+            </a:pPr>
+            <a:r>
+              <a:rPr lang="en-US" sz="1100" b="1" spc="200" kern="0" dirty="0">
+                <a:solidFill>
+                  <a:srgbClr val="2BD9E5"/>
+                </a:solidFill>
+                <a:latin typeface="Arial" pitchFamily="34" charset="0"/>
+                <a:ea typeface="Arial" pitchFamily="34" charset="-122"/>
+                <a:cs typeface="Arial" pitchFamily="34" charset="-120"/>
+              </a:rPr>
+              <a:t>DA TENERE A MENTE · 2 · OCCHIO ALLA BUILD</a:t>
+            </a:r>
+            <a:endParaRPr lang="en-US" sz="1100" dirty="0"/>
+          </a:p>
+        </p:txBody>
+      </p:sp>
+      <p:sp>
+        <p:nvSpPr>
+          <p:cNvPr id="3" name="Text 1"/>
+          <p:cNvSpPr/>
+          <p:nvPr/>
+        </p:nvSpPr>
+        <p:spPr>
+          <a:xfrm>
+            <a:off x="640080" y="640080"/>
+            <a:ext cx="7863840" cy="566928"/>
+          </a:xfrm>
+          <a:prstGeom prst="rect">
+            <a:avLst/>
+          </a:prstGeom>
+          <a:noFill/>
+          <a:ln/>
+        </p:spPr>
+        <p:txBody>
+          <a:bodyPr wrap="square" lIns="0" tIns="0" rIns="0" bIns="0" rtlCol="0" anchor="ctr"/>
+          <a:lstStyle/>
+          <a:p>
+            <a:pPr indent="0" marL="0">
+              <a:buNone/>
+            </a:pPr>
+            <a:r>
+              <a:rPr lang="en-US" sz="3000" dirty="0">
+                <a:solidFill>
+                  <a:srgbClr val="F4F7FF"/>
+                </a:solidFill>
+                <a:latin typeface="Arial Black" pitchFamily="34" charset="0"/>
+                <a:ea typeface="Arial Black" pitchFamily="34" charset="-122"/>
+                <a:cs typeface="Arial Black" pitchFamily="34" charset="-120"/>
+              </a:rPr>
+              <a:t>Occhio alla compilazione</a:t>
+            </a:r>
+            <a:endParaRPr lang="en-US" sz="3000" dirty="0"/>
+          </a:p>
+        </p:txBody>
+      </p:sp>
+      <p:sp>
+        <p:nvSpPr>
+          <p:cNvPr id="4" name="Text 2"/>
+          <p:cNvSpPr/>
+          <p:nvPr/>
+        </p:nvSpPr>
+        <p:spPr>
+          <a:xfrm>
+            <a:off x="658368" y="1188720"/>
+            <a:ext cx="7772400" cy="310896"/>
+          </a:xfrm>
+          <a:prstGeom prst="rect">
+            <a:avLst/>
+          </a:prstGeom>
+          <a:noFill/>
+          <a:ln/>
+        </p:spPr>
+        <p:txBody>
+          <a:bodyPr wrap="square" lIns="0" tIns="0" rIns="0" bIns="0" rtlCol="0" anchor="ctr"/>
+          <a:lstStyle/>
+          <a:p>
+            <a:pPr indent="0" marL="0">
+              <a:buNone/>
+            </a:pPr>
+            <a:r>
+              <a:rPr lang="en-US" sz="1350" i="1" dirty="0">
+                <a:solidFill>
+                  <a:srgbClr val="AEBDE0"/>
+                </a:solidFill>
+                <a:latin typeface="Arial" pitchFamily="34" charset="0"/>
+                <a:ea typeface="Arial" pitchFamily="34" charset="-122"/>
+                <a:cs typeface="Arial" pitchFamily="34" charset="-120"/>
+              </a:rPr>
+              <a:t>Compilare l'app costa minuti e CPU: trattala come una risorsa preziosa.</a:t>
+            </a:r>
+            <a:endParaRPr lang="en-US" sz="1350" dirty="0"/>
+          </a:p>
+        </p:txBody>
+      </p:sp>
+      <p:sp>
+        <p:nvSpPr>
+          <p:cNvPr id="5" name="Shape 3"/>
+          <p:cNvSpPr/>
+          <p:nvPr/>
+        </p:nvSpPr>
+        <p:spPr>
+          <a:xfrm>
+            <a:off x="640080" y="1737360"/>
+            <a:ext cx="3794760" cy="2194560"/>
+          </a:xfrm>
+          <a:prstGeom prst="roundRect">
+            <a:avLst>
+              <a:gd name="adj" fmla="val 3333"/>
+            </a:avLst>
+          </a:prstGeom>
+          <a:solidFill>
+            <a:srgbClr val="16203F"/>
+          </a:solidFill>
+          <a:ln w="9525">
+            <a:solidFill>
+              <a:srgbClr val="2A3A6B"/>
+            </a:solidFill>
+            <a:prstDash val="solid"/>
+          </a:ln>
+        </p:spPr>
+      </p:sp>
+      <p:sp>
+        <p:nvSpPr>
+          <p:cNvPr id="6" name="Shape 4"/>
+          <p:cNvSpPr/>
+          <p:nvPr/>
+        </p:nvSpPr>
+        <p:spPr>
+          <a:xfrm>
+            <a:off x="868680" y="1965960"/>
+            <a:ext cx="502920" cy="502920"/>
+          </a:xfrm>
+          <a:prstGeom prst="ellipse">
+            <a:avLst/>
+          </a:prstGeom>
+          <a:solidFill>
+            <a:srgbClr val="0E3A44"/>
+          </a:solidFill>
+          <a:ln w="12700">
+            <a:solidFill>
+              <a:srgbClr val="0E3A44"/>
+            </a:solidFill>
+            <a:prstDash val="solid"/>
+          </a:ln>
+        </p:spPr>
+      </p:sp>
+      <p:pic>
+        <p:nvPicPr>
+          <p:cNvPr id="7" name="Image 0" descr="preencoded.png">    </p:cNvPr>
+          <p:cNvPicPr>
+            <a:picLocks noChangeAspect="1"/>
+          </p:cNvPicPr>
+          <p:nvPr/>
+        </p:nvPicPr>
+        <p:blipFill>
+          <a:blip r:embed="rId1"/>
+          <a:stretch>
+            <a:fillRect/>
+          </a:stretch>
+        </p:blipFill>
+        <p:spPr>
+          <a:xfrm>
+            <a:off x="1004468" y="2101748"/>
+            <a:ext cx="231343" cy="231343"/>
+          </a:xfrm>
+          <a:prstGeom prst="rect">
+            <a:avLst/>
+          </a:prstGeom>
+        </p:spPr>
+      </p:pic>
+      <p:sp>
+        <p:nvSpPr>
+          <p:cNvPr id="8" name="Text 5"/>
+          <p:cNvSpPr/>
+          <p:nvPr/>
+        </p:nvSpPr>
+        <p:spPr>
+          <a:xfrm>
+            <a:off x="1508760" y="1965960"/>
+            <a:ext cx="2743200" cy="502920"/>
+          </a:xfrm>
+          <a:prstGeom prst="rect">
+            <a:avLst/>
+          </a:prstGeom>
+          <a:noFill/>
+          <a:ln/>
+        </p:spPr>
+        <p:txBody>
+          <a:bodyPr wrap="square" lIns="0" tIns="0" rIns="0" bIns="0" rtlCol="0" anchor="ctr"/>
+          <a:lstStyle/>
+          <a:p>
+            <a:pPr indent="0" marL="0">
+              <a:buNone/>
+            </a:pPr>
+            <a:r>
+              <a:rPr lang="en-US" sz="1500" b="1" dirty="0">
+                <a:solidFill>
+                  <a:srgbClr val="F4F7FF"/>
+                </a:solidFill>
+                <a:latin typeface="Arial" pitchFamily="34" charset="0"/>
+                <a:ea typeface="Arial" pitchFamily="34" charset="-122"/>
+                <a:cs typeface="Arial" pitchFamily="34" charset="-120"/>
+              </a:rPr>
+              <a:t>Build ottimizzata</a:t>
+            </a:r>
+            <a:endParaRPr lang="en-US" sz="1500" dirty="0"/>
+          </a:p>
+        </p:txBody>
+      </p:sp>
+      <p:sp>
+        <p:nvSpPr>
+          <p:cNvPr id="9" name="Text 6"/>
+          <p:cNvSpPr/>
+          <p:nvPr/>
+        </p:nvSpPr>
+        <p:spPr>
+          <a:xfrm>
+            <a:off x="868680" y="2578608"/>
+            <a:ext cx="3337560" cy="1234440"/>
+          </a:xfrm>
+          <a:prstGeom prst="rect">
+            <a:avLst/>
+          </a:prstGeom>
+          <a:noFill/>
+          <a:ln/>
+        </p:spPr>
+        <p:txBody>
+          <a:bodyPr wrap="square" lIns="0" tIns="0" rIns="0" bIns="0" rtlCol="0" anchor="t"/>
+          <a:lstStyle/>
+          <a:p>
+            <a:pPr indent="0" marL="0">
+              <a:lnSpc>
+                <a:spcPct val="118000"/>
+              </a:lnSpc>
+              <a:buNone/>
+            </a:pPr>
+            <a:r>
+              <a:rPr lang="en-US" sz="1150" dirty="0">
+                <a:solidFill>
+                  <a:srgbClr val="AEBDE0"/>
+                </a:solidFill>
+                <a:latin typeface="Arial" pitchFamily="34" charset="0"/>
+                <a:ea typeface="Arial" pitchFamily="34" charset="-122"/>
+                <a:cs typeface="Arial" pitchFamily="34" charset="-120"/>
+              </a:rPr>
+              <a:t>Chiedi a Claude la compilazione più adatta all'uso: la versione di test si genera molto più in fretta di quella per lo store.</a:t>
+            </a:r>
+            <a:endParaRPr lang="en-US" sz="1150" dirty="0"/>
+          </a:p>
+        </p:txBody>
+      </p:sp>
+      <p:sp>
+        <p:nvSpPr>
+          <p:cNvPr id="10" name="Shape 7"/>
+          <p:cNvSpPr/>
+          <p:nvPr/>
+        </p:nvSpPr>
+        <p:spPr>
+          <a:xfrm>
+            <a:off x="4709160" y="1737360"/>
+            <a:ext cx="3794760" cy="2194560"/>
+          </a:xfrm>
+          <a:prstGeom prst="roundRect">
+            <a:avLst>
+              <a:gd name="adj" fmla="val 3333"/>
+            </a:avLst>
+          </a:prstGeom>
+          <a:solidFill>
+            <a:srgbClr val="16203F"/>
+          </a:solidFill>
+          <a:ln w="9525">
+            <a:solidFill>
+              <a:srgbClr val="2A3A6B"/>
+            </a:solidFill>
+            <a:prstDash val="solid"/>
+          </a:ln>
+        </p:spPr>
+      </p:sp>
+      <p:sp>
+        <p:nvSpPr>
+          <p:cNvPr id="11" name="Shape 8"/>
+          <p:cNvSpPr/>
+          <p:nvPr/>
+        </p:nvSpPr>
+        <p:spPr>
+          <a:xfrm>
+            <a:off x="4937760" y="1965960"/>
+            <a:ext cx="502920" cy="502920"/>
+          </a:xfrm>
+          <a:prstGeom prst="ellipse">
+            <a:avLst/>
+          </a:prstGeom>
+          <a:solidFill>
+            <a:srgbClr val="0E3A44"/>
+          </a:solidFill>
+          <a:ln w="12700">
+            <a:solidFill>
+              <a:srgbClr val="0E3A44"/>
+            </a:solidFill>
+            <a:prstDash val="solid"/>
+          </a:ln>
+        </p:spPr>
+      </p:sp>
+      <p:pic>
+        <p:nvPicPr>
+          <p:cNvPr id="12" name="Image 1" descr="preencoded.png">    </p:cNvPr>
+          <p:cNvPicPr>
+            <a:picLocks noChangeAspect="1"/>
+          </p:cNvPicPr>
+          <p:nvPr/>
+        </p:nvPicPr>
+        <p:blipFill>
+          <a:blip r:embed="rId2"/>
+          <a:stretch>
+            <a:fillRect/>
+          </a:stretch>
+        </p:blipFill>
+        <p:spPr>
+          <a:xfrm>
+            <a:off x="5073548" y="2101748"/>
+            <a:ext cx="231343" cy="231343"/>
+          </a:xfrm>
+          <a:prstGeom prst="rect">
+            <a:avLst/>
+          </a:prstGeom>
+        </p:spPr>
+      </p:pic>
+      <p:sp>
+        <p:nvSpPr>
+          <p:cNvPr id="13" name="Text 9"/>
+          <p:cNvSpPr/>
+          <p:nvPr/>
+        </p:nvSpPr>
+        <p:spPr>
+          <a:xfrm>
+            <a:off x="5577840" y="1965960"/>
+            <a:ext cx="2743200" cy="502920"/>
+          </a:xfrm>
+          <a:prstGeom prst="rect">
+            <a:avLst/>
+          </a:prstGeom>
+          <a:noFill/>
+          <a:ln/>
+        </p:spPr>
+        <p:txBody>
+          <a:bodyPr wrap="square" lIns="0" tIns="0" rIns="0" bIns="0" rtlCol="0" anchor="ctr"/>
+          <a:lstStyle/>
+          <a:p>
+            <a:pPr indent="0" marL="0">
+              <a:buNone/>
+            </a:pPr>
+            <a:r>
+              <a:rPr lang="en-US" sz="1500" b="1" dirty="0">
+                <a:solidFill>
+                  <a:srgbClr val="F4F7FF"/>
+                </a:solidFill>
+                <a:latin typeface="Arial" pitchFamily="34" charset="0"/>
+                <a:ea typeface="Arial" pitchFamily="34" charset="-122"/>
+                <a:cs typeface="Arial" pitchFamily="34" charset="-120"/>
+              </a:rPr>
+              <a:t>Solo quando serve</a:t>
+            </a:r>
+            <a:endParaRPr lang="en-US" sz="1500" dirty="0"/>
+          </a:p>
+        </p:txBody>
+      </p:sp>
+      <p:sp>
+        <p:nvSpPr>
+          <p:cNvPr id="14" name="Text 10"/>
+          <p:cNvSpPr/>
+          <p:nvPr/>
+        </p:nvSpPr>
+        <p:spPr>
+          <a:xfrm>
+            <a:off x="4937760" y="2578608"/>
+            <a:ext cx="3337560" cy="1234440"/>
+          </a:xfrm>
+          <a:prstGeom prst="rect">
+            <a:avLst/>
+          </a:prstGeom>
+          <a:noFill/>
+          <a:ln/>
+        </p:spPr>
+        <p:txBody>
+          <a:bodyPr wrap="square" lIns="0" tIns="0" rIns="0" bIns="0" rtlCol="0" anchor="t"/>
+          <a:lstStyle/>
+          <a:p>
+            <a:pPr indent="0" marL="0">
+              <a:lnSpc>
+                <a:spcPct val="118000"/>
+              </a:lnSpc>
+              <a:buNone/>
+            </a:pPr>
+            <a:r>
+              <a:rPr lang="en-US" sz="1150" dirty="0">
+                <a:solidFill>
+                  <a:srgbClr val="AEBDE0"/>
+                </a:solidFill>
+                <a:latin typeface="Arial" pitchFamily="34" charset="0"/>
+                <a:ea typeface="Arial" pitchFamily="34" charset="-122"/>
+                <a:cs typeface="Arial" pitchFamily="34" charset="-120"/>
+              </a:rPr>
+              <a:t>Accorpa le modifiche e compila una volta sola. Ricompilare per ogni micro-cambiamento è tempo buttato.</a:t>
+            </a:r>
+            <a:endParaRPr lang="en-US" sz="1150" dirty="0"/>
+          </a:p>
+        </p:txBody>
+      </p:sp>
+      <p:sp>
+        <p:nvSpPr>
+          <p:cNvPr id="15" name="Shape 11"/>
+          <p:cNvSpPr/>
+          <p:nvPr/>
+        </p:nvSpPr>
+        <p:spPr>
+          <a:xfrm>
+            <a:off x="640080" y="4160520"/>
+            <a:ext cx="7863840" cy="566928"/>
+          </a:xfrm>
+          <a:prstGeom prst="roundRect">
+            <a:avLst>
+              <a:gd name="adj" fmla="val 9677"/>
+            </a:avLst>
+          </a:prstGeom>
+          <a:solidFill>
+            <a:srgbClr val="0E3A44"/>
+          </a:solidFill>
+          <a:ln w="6350">
+            <a:solidFill>
+              <a:srgbClr val="2BD9E5"/>
+            </a:solidFill>
+            <a:prstDash val="solid"/>
+          </a:ln>
+        </p:spPr>
+      </p:sp>
+      <p:sp>
+        <p:nvSpPr>
+          <p:cNvPr id="16" name="Text 12"/>
+          <p:cNvSpPr/>
+          <p:nvPr/>
+        </p:nvSpPr>
+        <p:spPr>
+          <a:xfrm>
+            <a:off x="822960" y="4160520"/>
+            <a:ext cx="7498080" cy="566928"/>
+          </a:xfrm>
+          <a:prstGeom prst="rect">
+            <a:avLst/>
+          </a:prstGeom>
+          <a:noFill/>
+          <a:ln/>
+        </p:spPr>
+        <p:txBody>
+          <a:bodyPr wrap="square" lIns="0" tIns="0" rIns="0" bIns="0" rtlCol="0" anchor="ctr"/>
+          <a:lstStyle/>
+          <a:p>
+            <a:pPr algn="ctr" indent="0" marL="0">
+              <a:buNone/>
+            </a:pPr>
+            <a:r>
+              <a:rPr lang="en-US" sz="1250" dirty="0">
+                <a:solidFill>
+                  <a:srgbClr val="F4F7FF"/>
+                </a:solidFill>
+                <a:latin typeface="Arial" pitchFamily="34" charset="0"/>
+                <a:ea typeface="Arial" pitchFamily="34" charset="-122"/>
+                <a:cs typeface="Arial" pitchFamily="34" charset="-120"/>
+              </a:rPr>
+              <a:t>Su un computer normale una build può prendere 10 minuti e rallentare tutto.</a:t>
+            </a:r>
+            <a:endParaRPr lang="en-US" sz="1250" dirty="0"/>
+          </a:p>
+        </p:txBody>
+      </p:sp>
+    </p:spTree>
+  </p:cSld>
+  <p:clrMapOvr>
+    <a:masterClrMapping/>
+  </p:clrMapOvr>
+</p:sld>
+</file>
+
+<file path=ppt/slides/slide26.xml><?xml version="1.0" encoding="utf-8"?>
+<p:sld xmlns:a="http://schemas.openxmlformats.org/drawingml/2006/main" xmlns:r="http://schemas.openxmlformats.org/officeDocument/2006/relationships" xmlns:p="http://schemas.openxmlformats.org/presentationml/2006/main">
+  <p:cSld name="Slide 26">
+    <p:bg>
+      <p:bgPr>
+        <a:solidFill>
+          <a:srgbClr val="0B1226"/>
+        </a:solidFill>
+      </p:bgPr>
+    </p:bg>
+    <p:spTree>
+      <p:nvGrpSpPr>
+        <p:cNvPr id="1" name=""/>
+        <p:cNvGrpSpPr/>
+        <p:nvPr/>
+      </p:nvGrpSpPr>
+      <p:grpSpPr>
+        <a:xfrm>
+          <a:off x="0" y="0"/>
+          <a:ext cx="0" cy="0"/>
+          <a:chOff x="0" y="0"/>
+          <a:chExt cx="0" cy="0"/>
+        </a:xfrm>
+      </p:grpSpPr>
+      <p:sp>
+        <p:nvSpPr>
+          <p:cNvPr id="2" name="Text 0"/>
+          <p:cNvSpPr/>
+          <p:nvPr/>
+        </p:nvSpPr>
+        <p:spPr>
+          <a:xfrm>
+            <a:off x="640080" y="365760"/>
+            <a:ext cx="8229600" cy="274320"/>
+          </a:xfrm>
+          <a:prstGeom prst="rect">
+            <a:avLst/>
+          </a:prstGeom>
+          <a:noFill/>
+          <a:ln/>
+        </p:spPr>
+        <p:txBody>
+          <a:bodyPr wrap="square" lIns="0" tIns="0" rIns="0" bIns="0" rtlCol="0" anchor="ctr"/>
+          <a:lstStyle/>
+          <a:p>
+            <a:pPr indent="0" marL="0">
+              <a:buNone/>
+            </a:pPr>
+            <a:r>
+              <a:rPr lang="en-US" sz="1100" b="1" spc="200" kern="0" dirty="0">
+                <a:solidFill>
+                  <a:srgbClr val="2BD9E5"/>
+                </a:solidFill>
+                <a:latin typeface="Arial" pitchFamily="34" charset="0"/>
+                <a:ea typeface="Arial" pitchFamily="34" charset="-122"/>
+                <a:cs typeface="Arial" pitchFamily="34" charset="-120"/>
+              </a:rPr>
+              <a:t>DA TENERE A MENTE · 3 · LE REGOLE DELLO STORE</a:t>
+            </a:r>
+            <a:endParaRPr lang="en-US" sz="1100" dirty="0"/>
+          </a:p>
+        </p:txBody>
+      </p:sp>
+      <p:sp>
+        <p:nvSpPr>
+          <p:cNvPr id="3" name="Text 1"/>
+          <p:cNvSpPr/>
+          <p:nvPr/>
+        </p:nvSpPr>
+        <p:spPr>
+          <a:xfrm>
+            <a:off x="640080" y="640080"/>
+            <a:ext cx="7863840" cy="566928"/>
+          </a:xfrm>
+          <a:prstGeom prst="rect">
+            <a:avLst/>
+          </a:prstGeom>
+          <a:noFill/>
+          <a:ln/>
+        </p:spPr>
+        <p:txBody>
+          <a:bodyPr wrap="square" lIns="0" tIns="0" rIns="0" bIns="0" rtlCol="0" anchor="ctr"/>
+          <a:lstStyle/>
+          <a:p>
+            <a:pPr indent="0" marL="0">
+              <a:buNone/>
+            </a:pPr>
+            <a:r>
+              <a:rPr lang="en-US" sz="3000" dirty="0">
+                <a:solidFill>
+                  <a:srgbClr val="F4F7FF"/>
+                </a:solidFill>
+                <a:latin typeface="Arial Black" pitchFamily="34" charset="0"/>
+                <a:ea typeface="Arial Black" pitchFamily="34" charset="-122"/>
+                <a:cs typeface="Arial Black" pitchFamily="34" charset="-120"/>
+              </a:rPr>
+              <a:t>Leggi le regole dello store</a:t>
+            </a:r>
+            <a:endParaRPr lang="en-US" sz="3000" dirty="0"/>
+          </a:p>
+        </p:txBody>
+      </p:sp>
+      <p:sp>
+        <p:nvSpPr>
+          <p:cNvPr id="4" name="Text 2"/>
+          <p:cNvSpPr/>
+          <p:nvPr/>
+        </p:nvSpPr>
+        <p:spPr>
+          <a:xfrm>
+            <a:off x="658368" y="1188720"/>
+            <a:ext cx="7772400" cy="310896"/>
+          </a:xfrm>
+          <a:prstGeom prst="rect">
+            <a:avLst/>
+          </a:prstGeom>
+          <a:noFill/>
+          <a:ln/>
+        </p:spPr>
+        <p:txBody>
+          <a:bodyPr wrap="square" lIns="0" tIns="0" rIns="0" bIns="0" rtlCol="0" anchor="ctr"/>
+          <a:lstStyle/>
+          <a:p>
+            <a:pPr indent="0" marL="0">
+              <a:buNone/>
+            </a:pPr>
+            <a:r>
+              <a:rPr lang="en-US" sz="1350" i="1" dirty="0">
+                <a:solidFill>
+                  <a:srgbClr val="AEBDE0"/>
+                </a:solidFill>
+                <a:latin typeface="Arial" pitchFamily="34" charset="0"/>
+                <a:ea typeface="Arial" pitchFamily="34" charset="-122"/>
+                <a:cs typeface="Arial" pitchFamily="34" charset="-120"/>
+              </a:rPr>
+              <a:t>Gli store hanno regole che cambiano nel tempo — e non riguardano solo il codice.</a:t>
+            </a:r>
+            <a:endParaRPr lang="en-US" sz="1350" dirty="0"/>
+          </a:p>
+        </p:txBody>
+      </p:sp>
+      <p:sp>
+        <p:nvSpPr>
+          <p:cNvPr id="5" name="Shape 3"/>
+          <p:cNvSpPr/>
+          <p:nvPr/>
+        </p:nvSpPr>
+        <p:spPr>
+          <a:xfrm>
+            <a:off x="640080" y="1737360"/>
+            <a:ext cx="3794760" cy="2194560"/>
+          </a:xfrm>
+          <a:prstGeom prst="roundRect">
+            <a:avLst>
+              <a:gd name="adj" fmla="val 3333"/>
+            </a:avLst>
+          </a:prstGeom>
+          <a:solidFill>
+            <a:srgbClr val="16203F"/>
+          </a:solidFill>
+          <a:ln w="9525">
+            <a:solidFill>
+              <a:srgbClr val="2A3A6B"/>
+            </a:solidFill>
+            <a:prstDash val="solid"/>
+          </a:ln>
+        </p:spPr>
+      </p:sp>
+      <p:sp>
+        <p:nvSpPr>
+          <p:cNvPr id="6" name="Shape 4"/>
+          <p:cNvSpPr/>
+          <p:nvPr/>
+        </p:nvSpPr>
+        <p:spPr>
+          <a:xfrm>
+            <a:off x="868680" y="1965960"/>
+            <a:ext cx="502920" cy="502920"/>
+          </a:xfrm>
+          <a:prstGeom prst="ellipse">
+            <a:avLst/>
+          </a:prstGeom>
+          <a:solidFill>
+            <a:srgbClr val="0E3A44"/>
+          </a:solidFill>
+          <a:ln w="12700">
+            <a:solidFill>
+              <a:srgbClr val="0E3A44"/>
+            </a:solidFill>
+            <a:prstDash val="solid"/>
+          </a:ln>
+        </p:spPr>
+      </p:sp>
+      <p:pic>
+        <p:nvPicPr>
+          <p:cNvPr id="7" name="Image 0" descr="preencoded.png">    </p:cNvPr>
+          <p:cNvPicPr>
+            <a:picLocks noChangeAspect="1"/>
+          </p:cNvPicPr>
+          <p:nvPr/>
+        </p:nvPicPr>
+        <p:blipFill>
+          <a:blip r:embed="rId1"/>
+          <a:stretch>
+            <a:fillRect/>
+          </a:stretch>
+        </p:blipFill>
+        <p:spPr>
+          <a:xfrm>
+            <a:off x="1004468" y="2101748"/>
+            <a:ext cx="231343" cy="231343"/>
+          </a:xfrm>
+          <a:prstGeom prst="rect">
+            <a:avLst/>
+          </a:prstGeom>
+        </p:spPr>
+      </p:pic>
+      <p:sp>
+        <p:nvSpPr>
+          <p:cNvPr id="8" name="Text 5"/>
+          <p:cNvSpPr/>
+          <p:nvPr/>
+        </p:nvSpPr>
+        <p:spPr>
+          <a:xfrm>
+            <a:off x="1508760" y="1965960"/>
+            <a:ext cx="2743200" cy="502920"/>
+          </a:xfrm>
+          <a:prstGeom prst="rect">
+            <a:avLst/>
+          </a:prstGeom>
+          <a:noFill/>
+          <a:ln/>
+        </p:spPr>
+        <p:txBody>
+          <a:bodyPr wrap="square" lIns="0" tIns="0" rIns="0" bIns="0" rtlCol="0" anchor="ctr"/>
+          <a:lstStyle/>
+          <a:p>
+            <a:pPr indent="0" marL="0">
+              <a:buNone/>
+            </a:pPr>
+            <a:r>
+              <a:rPr lang="en-US" sz="1500" b="1" dirty="0">
+                <a:solidFill>
+                  <a:srgbClr val="F4F7FF"/>
+                </a:solidFill>
+                <a:latin typeface="Arial" pitchFamily="34" charset="0"/>
+                <a:ea typeface="Arial" pitchFamily="34" charset="-122"/>
+                <a:cs typeface="Arial" pitchFamily="34" charset="-120"/>
+              </a:rPr>
+              <a:t>Falle leggere a Claude</a:t>
+            </a:r>
+            <a:endParaRPr lang="en-US" sz="1500" dirty="0"/>
+          </a:p>
+        </p:txBody>
+      </p:sp>
+      <p:sp>
+        <p:nvSpPr>
+          <p:cNvPr id="9" name="Text 6"/>
+          <p:cNvSpPr/>
+          <p:nvPr/>
+        </p:nvSpPr>
+        <p:spPr>
+          <a:xfrm>
+            <a:off x="868680" y="2578608"/>
+            <a:ext cx="3337560" cy="1234440"/>
+          </a:xfrm>
+          <a:prstGeom prst="rect">
+            <a:avLst/>
+          </a:prstGeom>
+          <a:noFill/>
+          <a:ln/>
+        </p:spPr>
+        <p:txBody>
+          <a:bodyPr wrap="square" lIns="0" tIns="0" rIns="0" bIns="0" rtlCol="0" anchor="t"/>
+          <a:lstStyle/>
+          <a:p>
+            <a:pPr indent="0" marL="0">
+              <a:lnSpc>
+                <a:spcPct val="118000"/>
+              </a:lnSpc>
+              <a:buNone/>
+            </a:pPr>
+            <a:r>
+              <a:rPr lang="en-US" sz="1150" dirty="0">
+                <a:solidFill>
+                  <a:srgbClr val="AEBDE0"/>
+                </a:solidFill>
+                <a:latin typeface="Arial" pitchFamily="34" charset="0"/>
+                <a:ea typeface="Arial" pitchFamily="34" charset="-122"/>
+                <a:cs typeface="Arial" pitchFamily="34" charset="-120"/>
+              </a:rPr>
+              <a:t>Requisiti su come scrivere il codice, come compilare, su icona, testi, permessi e privacy: falle leggere bene prima di iniziare.</a:t>
+            </a:r>
+            <a:endParaRPr lang="en-US" sz="1150" dirty="0"/>
+          </a:p>
+        </p:txBody>
+      </p:sp>
+      <p:sp>
+        <p:nvSpPr>
+          <p:cNvPr id="10" name="Shape 7"/>
+          <p:cNvSpPr/>
+          <p:nvPr/>
+        </p:nvSpPr>
+        <p:spPr>
+          <a:xfrm>
+            <a:off x="4709160" y="1737360"/>
+            <a:ext cx="3794760" cy="2194560"/>
+          </a:xfrm>
+          <a:prstGeom prst="roundRect">
+            <a:avLst>
+              <a:gd name="adj" fmla="val 3333"/>
+            </a:avLst>
+          </a:prstGeom>
+          <a:solidFill>
+            <a:srgbClr val="16203F"/>
+          </a:solidFill>
+          <a:ln w="9525">
+            <a:solidFill>
+              <a:srgbClr val="2A3A6B"/>
+            </a:solidFill>
+            <a:prstDash val="solid"/>
+          </a:ln>
+        </p:spPr>
+      </p:sp>
+      <p:sp>
+        <p:nvSpPr>
+          <p:cNvPr id="11" name="Shape 8"/>
+          <p:cNvSpPr/>
+          <p:nvPr/>
+        </p:nvSpPr>
+        <p:spPr>
+          <a:xfrm>
+            <a:off x="4937760" y="1965960"/>
+            <a:ext cx="502920" cy="502920"/>
+          </a:xfrm>
+          <a:prstGeom prst="ellipse">
+            <a:avLst/>
+          </a:prstGeom>
+          <a:solidFill>
+            <a:srgbClr val="0E3A44"/>
+          </a:solidFill>
+          <a:ln w="12700">
+            <a:solidFill>
+              <a:srgbClr val="0E3A44"/>
+            </a:solidFill>
+            <a:prstDash val="solid"/>
+          </a:ln>
+        </p:spPr>
+      </p:sp>
+      <p:pic>
+        <p:nvPicPr>
+          <p:cNvPr id="12" name="Image 1" descr="preencoded.png">    </p:cNvPr>
+          <p:cNvPicPr>
+            <a:picLocks noChangeAspect="1"/>
+          </p:cNvPicPr>
+          <p:nvPr/>
+        </p:nvPicPr>
+        <p:blipFill>
+          <a:blip r:embed="rId2"/>
+          <a:stretch>
+            <a:fillRect/>
+          </a:stretch>
+        </p:blipFill>
+        <p:spPr>
+          <a:xfrm>
+            <a:off x="5073548" y="2101748"/>
+            <a:ext cx="231343" cy="231343"/>
+          </a:xfrm>
+          <a:prstGeom prst="rect">
+            <a:avLst/>
+          </a:prstGeom>
+        </p:spPr>
+      </p:pic>
+      <p:sp>
+        <p:nvSpPr>
+          <p:cNvPr id="13" name="Text 9"/>
+          <p:cNvSpPr/>
+          <p:nvPr/>
+        </p:nvSpPr>
+        <p:spPr>
+          <a:xfrm>
+            <a:off x="5577840" y="1965960"/>
+            <a:ext cx="2743200" cy="502920"/>
+          </a:xfrm>
+          <a:prstGeom prst="rect">
+            <a:avLst/>
+          </a:prstGeom>
+          <a:noFill/>
+          <a:ln/>
+        </p:spPr>
+        <p:txBody>
+          <a:bodyPr wrap="square" lIns="0" tIns="0" rIns="0" bIns="0" rtlCol="0" anchor="ctr"/>
+          <a:lstStyle/>
+          <a:p>
+            <a:pPr indent="0" marL="0">
+              <a:buNone/>
+            </a:pPr>
+            <a:r>
+              <a:rPr lang="en-US" sz="1500" b="1" dirty="0">
+                <a:solidFill>
+                  <a:srgbClr val="F4F7FF"/>
+                </a:solidFill>
+                <a:latin typeface="Arial" pitchFamily="34" charset="0"/>
+                <a:ea typeface="Arial" pitchFamily="34" charset="-122"/>
+                <a:cs typeface="Arial" pitchFamily="34" charset="-120"/>
+              </a:rPr>
+              <a:t>Un dettaglio può bloccarti</a:t>
+            </a:r>
+            <a:endParaRPr lang="en-US" sz="1500" dirty="0"/>
+          </a:p>
+        </p:txBody>
+      </p:sp>
+      <p:sp>
+        <p:nvSpPr>
+          <p:cNvPr id="14" name="Text 10"/>
+          <p:cNvSpPr/>
+          <p:nvPr/>
+        </p:nvSpPr>
+        <p:spPr>
+          <a:xfrm>
+            <a:off x="4937760" y="2578608"/>
+            <a:ext cx="3337560" cy="1234440"/>
+          </a:xfrm>
+          <a:prstGeom prst="rect">
+            <a:avLst/>
+          </a:prstGeom>
+          <a:noFill/>
+          <a:ln/>
+        </p:spPr>
+        <p:txBody>
+          <a:bodyPr wrap="square" lIns="0" tIns="0" rIns="0" bIns="0" rtlCol="0" anchor="t"/>
+          <a:lstStyle/>
+          <a:p>
+            <a:pPr indent="0" marL="0">
+              <a:lnSpc>
+                <a:spcPct val="118000"/>
+              </a:lnSpc>
+              <a:buNone/>
+            </a:pPr>
+            <a:r>
+              <a:rPr lang="en-US" sz="1150" dirty="0">
+                <a:solidFill>
+                  <a:srgbClr val="AEBDE0"/>
+                </a:solidFill>
+                <a:latin typeface="Arial" pitchFamily="34" charset="0"/>
+                <a:ea typeface="Arial" pitchFamily="34" charset="-122"/>
+                <a:cs typeface="Arial" pitchFamily="34" charset="-120"/>
+              </a:rPr>
+              <a:t>A volte basta un'icona o un testo fuori regola per dover ricompilare e ricaricare tutto, anche col codice perfetto.</a:t>
+            </a:r>
+            <a:endParaRPr lang="en-US" sz="1150" dirty="0"/>
+          </a:p>
+        </p:txBody>
+      </p:sp>
+      <p:sp>
+        <p:nvSpPr>
+          <p:cNvPr id="15" name="Shape 11"/>
+          <p:cNvSpPr/>
+          <p:nvPr/>
+        </p:nvSpPr>
+        <p:spPr>
+          <a:xfrm>
+            <a:off x="640080" y="4160520"/>
+            <a:ext cx="7863840" cy="566928"/>
+          </a:xfrm>
+          <a:prstGeom prst="roundRect">
+            <a:avLst>
+              <a:gd name="adj" fmla="val 9677"/>
+            </a:avLst>
+          </a:prstGeom>
+          <a:solidFill>
+            <a:srgbClr val="0E3A44"/>
+          </a:solidFill>
+          <a:ln w="6350">
+            <a:solidFill>
+              <a:srgbClr val="2BD9E5"/>
+            </a:solidFill>
+            <a:prstDash val="solid"/>
+          </a:ln>
+        </p:spPr>
+      </p:sp>
+      <p:sp>
+        <p:nvSpPr>
+          <p:cNvPr id="16" name="Text 12"/>
+          <p:cNvSpPr/>
+          <p:nvPr/>
+        </p:nvSpPr>
+        <p:spPr>
+          <a:xfrm>
+            <a:off x="822960" y="4160520"/>
+            <a:ext cx="7498080" cy="566928"/>
+          </a:xfrm>
+          <a:prstGeom prst="rect">
+            <a:avLst/>
+          </a:prstGeom>
+          <a:noFill/>
+          <a:ln/>
+        </p:spPr>
+        <p:txBody>
+          <a:bodyPr wrap="square" lIns="0" tIns="0" rIns="0" bIns="0" rtlCol="0" anchor="ctr"/>
+          <a:lstStyle/>
+          <a:p>
+            <a:pPr algn="ctr" indent="0" marL="0">
+              <a:buNone/>
+            </a:pPr>
+            <a:r>
+              <a:rPr lang="en-US" sz="1250" dirty="0">
+                <a:solidFill>
+                  <a:srgbClr val="F4F7FF"/>
+                </a:solidFill>
+                <a:latin typeface="Arial" pitchFamily="34" charset="0"/>
+                <a:ea typeface="Arial" pitchFamily="34" charset="-122"/>
+                <a:cs typeface="Arial" pitchFamily="34" charset="-120"/>
+              </a:rPr>
+              <a:t>Le regole di pubblicazione cambiano: ricontrollale a ogni release importante.</a:t>
+            </a:r>
+            <a:endParaRPr lang="en-US" sz="1250" dirty="0"/>
+          </a:p>
+        </p:txBody>
+      </p:sp>
+    </p:spTree>
+  </p:cSld>
+  <p:clrMapOvr>
+    <a:masterClrMapping/>
+  </p:clrMapOvr>
+</p:sld>
+</file>
+
 <file path=ppt/slides/slide3.xml><?xml version="1.0" encoding="utf-8"?>
 <p:sld xmlns:a="http://schemas.openxmlformats.org/drawingml/2006/main" xmlns:r="http://schemas.openxmlformats.org/officeDocument/2006/relationships" xmlns:p="http://schemas.openxmlformats.org/presentationml/2006/main">
   <p:cSld name="Slide 3">

--- a/video/slide-video-ai.pptx
+++ b/video/slide-video-ai.pptx
@@ -3108,8 +3108,89 @@
         </p:nvSpPr>
         <p:spPr>
           <a:xfrm>
-            <a:off x="5852160" y="822960"/>
-            <a:ext cx="3108960" cy="3108960"/>
+            <a:off x="6629400" y="868680"/>
+            <a:ext cx="1783080" cy="2880360"/>
+          </a:xfrm>
+          <a:prstGeom prst="roundRect">
+            <a:avLst>
+              <a:gd name="adj" fmla="val 11282"/>
+            </a:avLst>
+          </a:prstGeom>
+          <a:solidFill>
+            <a:srgbClr val="0B1226">
+              <a:alpha val="0"/>
+            </a:srgbClr>
+          </a:solidFill>
+          <a:ln w="25400">
+            <a:solidFill>
+              <a:srgbClr val="2BD9E5"/>
+            </a:solidFill>
+            <a:prstDash val="solid"/>
+          </a:ln>
+        </p:spPr>
+      </p:sp>
+      <p:sp>
+        <p:nvSpPr>
+          <p:cNvPr id="3" name="Shape 1"/>
+          <p:cNvSpPr/>
+          <p:nvPr/>
+        </p:nvSpPr>
+        <p:spPr>
+          <a:xfrm>
+            <a:off x="7269480" y="1161288"/>
+            <a:ext cx="502920" cy="0"/>
+          </a:xfrm>
+          <a:prstGeom prst="line">
+            <a:avLst/>
+          </a:prstGeom>
+          <a:noFill/>
+          <a:ln w="25400">
+            <a:solidFill>
+              <a:srgbClr val="2BD9E5"/>
+            </a:solidFill>
+            <a:prstDash val="solid"/>
+          </a:ln>
+        </p:spPr>
+      </p:sp>
+      <p:sp>
+        <p:nvSpPr>
+          <p:cNvPr id="4" name="Shape 2"/>
+          <p:cNvSpPr/>
+          <p:nvPr/>
+        </p:nvSpPr>
+        <p:spPr>
+          <a:xfrm>
+            <a:off x="6858000" y="1463040"/>
+            <a:ext cx="1325880" cy="146304"/>
+          </a:xfrm>
+          <a:prstGeom prst="rect">
+            <a:avLst/>
+          </a:prstGeom>
+          <a:solidFill>
+            <a:srgbClr val="2BD9E5">
+              <a:alpha val="35000"/>
+            </a:srgbClr>
+          </a:solidFill>
+          <a:ln w="12700">
+            <a:solidFill>
+              <a:srgbClr val="2BD9E5">
+                <a:alpha val="0"/>
+              </a:srgbClr>
+            </a:solidFill>
+            <a:prstDash val="solid"/>
+          </a:ln>
+        </p:spPr>
+      </p:sp>
+      <p:sp>
+        <p:nvSpPr>
+          <p:cNvPr id="5" name="Shape 3"/>
+          <p:cNvSpPr/>
+          <p:nvPr/>
+        </p:nvSpPr>
+        <p:spPr>
+          <a:xfrm>
+            <a:off x="7132320" y="1874520"/>
+            <a:ext cx="777240" cy="777240"/>
           </a:xfrm>
           <a:prstGeom prst="ellipse">
             <a:avLst/>
@@ -3121,8 +3202,55 @@
           </a:solidFill>
           <a:ln w="19050">
             <a:solidFill>
+              <a:srgbClr val="2BD9E5"/>
+            </a:solidFill>
+            <a:prstDash val="solid"/>
+          </a:ln>
+        </p:spPr>
+      </p:sp>
+      <p:sp>
+        <p:nvSpPr>
+          <p:cNvPr id="6" name="Shape 4"/>
+          <p:cNvSpPr/>
+          <p:nvPr/>
+        </p:nvSpPr>
+        <p:spPr>
+          <a:xfrm>
+            <a:off x="7360920" y="2103120"/>
+            <a:ext cx="320040" cy="320040"/>
+          </a:xfrm>
+          <a:prstGeom prst="ellipse">
+            <a:avLst/>
+          </a:prstGeom>
+          <a:solidFill>
+            <a:srgbClr val="2BD9E5"/>
+          </a:solidFill>
+          <a:ln/>
+        </p:spPr>
+      </p:sp>
+      <p:sp>
+        <p:nvSpPr>
+          <p:cNvPr id="7" name="Shape 5"/>
+          <p:cNvSpPr/>
+          <p:nvPr/>
+        </p:nvSpPr>
+        <p:spPr>
+          <a:xfrm>
+            <a:off x="6858000" y="2926080"/>
+            <a:ext cx="1325880" cy="137160"/>
+          </a:xfrm>
+          <a:prstGeom prst="rect">
+            <a:avLst/>
+          </a:prstGeom>
+          <a:solidFill>
+            <a:srgbClr val="2BD9E5">
+              <a:alpha val="35000"/>
+            </a:srgbClr>
+          </a:solidFill>
+          <a:ln w="12700">
+            <a:solidFill>
               <a:srgbClr val="2BD9E5">
-                <a:alpha val="30000"/>
+                <a:alpha val="0"/>
               </a:srgbClr>
             </a:solidFill>
             <a:prstDash val="solid"/>
@@ -3131,27 +3259,27 @@
       </p:sp>
       <p:sp>
         <p:nvSpPr>
-          <p:cNvPr id="3" name="Shape 1"/>
-          <p:cNvSpPr/>
-          <p:nvPr/>
-        </p:nvSpPr>
-        <p:spPr>
-          <a:xfrm>
-            <a:off x="6217920" y="1188720"/>
-            <a:ext cx="2377440" cy="2377440"/>
-          </a:xfrm>
-          <a:prstGeom prst="ellipse">
+          <p:cNvPr id="8" name="Shape 6"/>
+          <p:cNvSpPr/>
+          <p:nvPr/>
+        </p:nvSpPr>
+        <p:spPr>
+          <a:xfrm>
+            <a:off x="6858000" y="3200400"/>
+            <a:ext cx="868680" cy="137160"/>
+          </a:xfrm>
+          <a:prstGeom prst="rect">
             <a:avLst/>
           </a:prstGeom>
           <a:solidFill>
-            <a:srgbClr val="0B1226">
-              <a:alpha val="0"/>
+            <a:srgbClr val="2BD9E5">
+              <a:alpha val="22000"/>
             </a:srgbClr>
           </a:solidFill>
-          <a:ln w="19050">
+          <a:ln w="12700">
             <a:solidFill>
               <a:srgbClr val="2BD9E5">
-                <a:alpha val="55000"/>
+                <a:alpha val="0"/>
               </a:srgbClr>
             </a:solidFill>
             <a:prstDash val="solid"/>
@@ -3160,28 +3288,22 @@
       </p:sp>
       <p:sp>
         <p:nvSpPr>
-          <p:cNvPr id="4" name="Shape 2"/>
-          <p:cNvSpPr/>
-          <p:nvPr/>
-        </p:nvSpPr>
-        <p:spPr>
-          <a:xfrm>
-            <a:off x="6583680" y="1554480"/>
-            <a:ext cx="1645920" cy="1645920"/>
-          </a:xfrm>
-          <a:prstGeom prst="ellipse">
-            <a:avLst/>
-          </a:prstGeom>
-          <a:solidFill>
-            <a:srgbClr val="0B1226">
-              <a:alpha val="0"/>
-            </a:srgbClr>
-          </a:solidFill>
+          <p:cNvPr id="9" name="Shape 7"/>
+          <p:cNvSpPr/>
+          <p:nvPr/>
+        </p:nvSpPr>
+        <p:spPr>
+          <a:xfrm>
+            <a:off x="7269480" y="3547872"/>
+            <a:ext cx="502920" cy="0"/>
+          </a:xfrm>
+          <a:prstGeom prst="line">
+            <a:avLst/>
+          </a:prstGeom>
+          <a:noFill/>
           <a:ln w="25400">
             <a:solidFill>
-              <a:srgbClr val="2BD9E5">
-                <a:alpha val="85000"/>
-              </a:srgbClr>
+              <a:srgbClr val="2BD9E5"/>
             </a:solidFill>
             <a:prstDash val="solid"/>
           </a:ln>
@@ -3189,27 +3311,7 @@
       </p:sp>
       <p:sp>
         <p:nvSpPr>
-          <p:cNvPr id="5" name="Shape 3"/>
-          <p:cNvSpPr/>
-          <p:nvPr/>
-        </p:nvSpPr>
-        <p:spPr>
-          <a:xfrm>
-            <a:off x="7269480" y="2240280"/>
-            <a:ext cx="274320" cy="274320"/>
-          </a:xfrm>
-          <a:prstGeom prst="ellipse">
-            <a:avLst/>
-          </a:prstGeom>
-          <a:solidFill>
-            <a:srgbClr val="2BD9E5"/>
-          </a:solidFill>
-          <a:ln/>
-        </p:spPr>
-      </p:sp>
-      <p:sp>
-        <p:nvSpPr>
-          <p:cNvPr id="6" name="Text 4"/>
+          <p:cNvPr id="10" name="Text 8"/>
           <p:cNvSpPr/>
           <p:nvPr/>
         </p:nvSpPr>
@@ -3248,7 +3350,7 @@
       </p:sp>
       <p:sp>
         <p:nvSpPr>
-          <p:cNvPr id="7" name="Text 5"/>
+          <p:cNvPr id="11" name="Text 9"/>
           <p:cNvSpPr/>
           <p:nvPr/>
         </p:nvSpPr>
@@ -3310,7 +3412,7 @@
       </p:sp>
       <p:sp>
         <p:nvSpPr>
-          <p:cNvPr id="8" name="Text 6"/>
+          <p:cNvPr id="12" name="Text 10"/>
           <p:cNvSpPr/>
           <p:nvPr/>
         </p:nvSpPr>
@@ -3349,7 +3451,7 @@
       </p:sp>
       <p:sp>
         <p:nvSpPr>
-          <p:cNvPr id="9" name="Text 7"/>
+          <p:cNvPr id="13" name="Text 11"/>
           <p:cNvSpPr/>
           <p:nvPr/>
         </p:nvSpPr>
@@ -3388,7 +3490,7 @@
       </p:sp>
       <p:sp>
         <p:nvSpPr>
-          <p:cNvPr id="10" name="Text 8"/>
+          <p:cNvPr id="14" name="Text 12"/>
           <p:cNvSpPr/>
           <p:nvPr/>
         </p:nvSpPr>
@@ -3427,7 +3529,7 @@
       </p:sp>
       <p:sp>
         <p:nvSpPr>
-          <p:cNvPr id="11" name="Text 9"/>
+          <p:cNvPr id="15" name="Text 13"/>
           <p:cNvSpPr/>
           <p:nvPr/>
         </p:nvSpPr>
@@ -3466,7 +3568,7 @@
       </p:sp>
       <p:sp>
         <p:nvSpPr>
-          <p:cNvPr id="12" name="Text 10"/>
+          <p:cNvPr id="16" name="Text 14"/>
           <p:cNvSpPr/>
           <p:nvPr/>
         </p:nvSpPr>
@@ -3505,7 +3607,7 @@
       </p:sp>
       <p:sp>
         <p:nvSpPr>
-          <p:cNvPr id="13" name="Text 11"/>
+          <p:cNvPr id="17" name="Text 15"/>
           <p:cNvSpPr/>
           <p:nvPr/>
         </p:nvSpPr>
@@ -3544,7 +3646,7 @@
       </p:sp>
       <p:sp>
         <p:nvSpPr>
-          <p:cNvPr id="14" name="Text 12"/>
+          <p:cNvPr id="18" name="Text 16"/>
           <p:cNvSpPr/>
           <p:nvPr/>
         </p:nvSpPr>
